--- a/LabBook_30.pptx
+++ b/LabBook_30.pptx
@@ -5,23 +5,31 @@
     <p:sldMasterId id="2147483648" r:id="rId1"/>
   </p:sldMasterIdLst>
   <p:notesMasterIdLst>
-    <p:notesMasterId r:id="rId13"/>
+    <p:notesMasterId r:id="rId21"/>
   </p:notesMasterIdLst>
   <p:handoutMasterIdLst>
-    <p:handoutMasterId r:id="rId14"/>
+    <p:handoutMasterId r:id="rId22"/>
   </p:handoutMasterIdLst>
   <p:sldIdLst>
     <p:sldId id="256" r:id="rId2"/>
     <p:sldId id="289" r:id="rId3"/>
     <p:sldId id="290" r:id="rId4"/>
-    <p:sldId id="296" r:id="rId5"/>
-    <p:sldId id="375" r:id="rId6"/>
-    <p:sldId id="376" r:id="rId7"/>
-    <p:sldId id="377" r:id="rId8"/>
-    <p:sldId id="388" r:id="rId9"/>
-    <p:sldId id="380" r:id="rId10"/>
-    <p:sldId id="381" r:id="rId11"/>
-    <p:sldId id="288" r:id="rId12"/>
+    <p:sldId id="389" r:id="rId5"/>
+    <p:sldId id="296" r:id="rId6"/>
+    <p:sldId id="390" r:id="rId7"/>
+    <p:sldId id="375" r:id="rId8"/>
+    <p:sldId id="391" r:id="rId9"/>
+    <p:sldId id="376" r:id="rId10"/>
+    <p:sldId id="392" r:id="rId11"/>
+    <p:sldId id="377" r:id="rId12"/>
+    <p:sldId id="393" r:id="rId13"/>
+    <p:sldId id="388" r:id="rId14"/>
+    <p:sldId id="394" r:id="rId15"/>
+    <p:sldId id="380" r:id="rId16"/>
+    <p:sldId id="395" r:id="rId17"/>
+    <p:sldId id="381" r:id="rId18"/>
+    <p:sldId id="396" r:id="rId19"/>
+    <p:sldId id="288" r:id="rId20"/>
   </p:sldIdLst>
   <p:sldSz cx="12192000" cy="6858000"/>
   <p:notesSz cx="12192000" cy="6858000"/>
@@ -236,7 +244,7 @@
           <a:p>
             <a:fld id="{8438F8DC-35B0-48E6-A86E-42F1F08DD00F}" type="datetimeFigureOut">
               <a:rPr lang="es-ES" smtClean="0"/>
-              <a:t>03/05/2026</a:t>
+              <a:t>28/05/2026</a:t>
             </a:fld>
             <a:endParaRPr lang="es-ES"/>
           </a:p>
@@ -413,7 +421,7 @@
           <a:p>
             <a:fld id="{FACBDC12-F39B-4B97-8F4D-6734F9D366FF}" type="datetimeFigureOut">
               <a:rPr lang="es-ES" smtClean="0"/>
-              <a:t>03/05/2026</a:t>
+              <a:t>28/05/2026</a:t>
             </a:fld>
             <a:endParaRPr lang="es-ES"/>
           </a:p>
@@ -764,7 +772,223 @@
 </p:notes>
 </file>
 
+<file path=ppt/notesSlides/notesSlide10.xml><?xml version="1.0" encoding="utf-8"?>
+<p:notes xmlns:a="http://schemas.openxmlformats.org/drawingml/2006/main" xmlns:r="http://schemas.openxmlformats.org/officeDocument/2006/relationships" xmlns:p="http://schemas.openxmlformats.org/presentationml/2006/main">
+  <p:cSld>
+    <p:spTree>
+      <p:nvGrpSpPr>
+        <p:cNvPr id="1" name="">
+          <a:extLst>
+            <a:ext uri="{FF2B5EF4-FFF2-40B4-BE49-F238E27FC236}">
+              <a16:creationId xmlns:a16="http://schemas.microsoft.com/office/drawing/2014/main" id="{A26AF9FF-262F-0146-D683-87C56771870D}"/>
+            </a:ext>
+          </a:extLst>
+        </p:cNvPr>
+        <p:cNvGrpSpPr/>
+        <p:nvPr/>
+      </p:nvGrpSpPr>
+      <p:grpSpPr>
+        <a:xfrm>
+          <a:off x="0" y="0"/>
+          <a:ext cx="0" cy="0"/>
+          <a:chOff x="0" y="0"/>
+          <a:chExt cx="0" cy="0"/>
+        </a:xfrm>
+      </p:grpSpPr>
+      <p:sp>
+        <p:nvSpPr>
+          <p:cNvPr id="2" name="Marcador de imagen de diapositiva 1">
+            <a:extLst>
+              <a:ext uri="{FF2B5EF4-FFF2-40B4-BE49-F238E27FC236}">
+                <a16:creationId xmlns:a16="http://schemas.microsoft.com/office/drawing/2014/main" id="{5FAEED02-2B12-89BB-B69A-63FAB96D971D}"/>
+              </a:ext>
+            </a:extLst>
+          </p:cNvPr>
+          <p:cNvSpPr>
+            <a:spLocks noGrp="1" noRot="1" noChangeAspect="1"/>
+          </p:cNvSpPr>
+          <p:nvPr>
+            <p:ph type="sldImg"/>
+          </p:nvPr>
+        </p:nvSpPr>
+        <p:spPr/>
+      </p:sp>
+      <p:sp>
+        <p:nvSpPr>
+          <p:cNvPr id="3" name="Marcador de notas 2">
+            <a:extLst>
+              <a:ext uri="{FF2B5EF4-FFF2-40B4-BE49-F238E27FC236}">
+                <a16:creationId xmlns:a16="http://schemas.microsoft.com/office/drawing/2014/main" id="{6DCC7B0C-ECA6-C9A6-1379-40ECC25EB2C0}"/>
+              </a:ext>
+            </a:extLst>
+          </p:cNvPr>
+          <p:cNvSpPr>
+            <a:spLocks noGrp="1"/>
+          </p:cNvSpPr>
+          <p:nvPr>
+            <p:ph type="body" idx="1"/>
+          </p:nvPr>
+        </p:nvSpPr>
+        <p:spPr/>
+        <p:txBody>
+          <a:bodyPr/>
+          <a:lstStyle/>
+          <a:p>
+            <a:endParaRPr lang="es-ES" dirty="0"/>
+          </a:p>
+        </p:txBody>
+      </p:sp>
+      <p:sp>
+        <p:nvSpPr>
+          <p:cNvPr id="4" name="Marcador de número de diapositiva 3">
+            <a:extLst>
+              <a:ext uri="{FF2B5EF4-FFF2-40B4-BE49-F238E27FC236}">
+                <a16:creationId xmlns:a16="http://schemas.microsoft.com/office/drawing/2014/main" id="{E5D5B52B-94D2-87B8-9E9B-159E96727C23}"/>
+              </a:ext>
+            </a:extLst>
+          </p:cNvPr>
+          <p:cNvSpPr>
+            <a:spLocks noGrp="1"/>
+          </p:cNvSpPr>
+          <p:nvPr>
+            <p:ph type="sldNum" sz="quarter" idx="5"/>
+          </p:nvPr>
+        </p:nvSpPr>
+        <p:spPr/>
+        <p:txBody>
+          <a:bodyPr/>
+          <a:lstStyle/>
+          <a:p>
+            <a:fld id="{676223B9-C868-4436-87D9-1A3152E1157A}" type="slidenum">
+              <a:rPr lang="es-ES" smtClean="0"/>
+              <a:t>18</a:t>
+            </a:fld>
+            <a:endParaRPr lang="es-ES"/>
+          </a:p>
+        </p:txBody>
+      </p:sp>
+    </p:spTree>
+    <p:extLst>
+      <p:ext uri="{BB962C8B-B14F-4D97-AF65-F5344CB8AC3E}">
+        <p14:creationId xmlns:p14="http://schemas.microsoft.com/office/powerpoint/2010/main" val="1195351304"/>
+      </p:ext>
+    </p:extLst>
+  </p:cSld>
+  <p:clrMapOvr>
+    <a:masterClrMapping/>
+  </p:clrMapOvr>
+</p:notes>
+</file>
+
 <file path=ppt/notesSlides/notesSlide2.xml><?xml version="1.0" encoding="utf-8"?>
+<p:notes xmlns:a="http://schemas.openxmlformats.org/drawingml/2006/main" xmlns:r="http://schemas.openxmlformats.org/officeDocument/2006/relationships" xmlns:p="http://schemas.openxmlformats.org/presentationml/2006/main">
+  <p:cSld>
+    <p:spTree>
+      <p:nvGrpSpPr>
+        <p:cNvPr id="1" name="">
+          <a:extLst>
+            <a:ext uri="{FF2B5EF4-FFF2-40B4-BE49-F238E27FC236}">
+              <a16:creationId xmlns:a16="http://schemas.microsoft.com/office/drawing/2014/main" id="{560D248F-07DE-DE63-D0BD-B536B6BFC475}"/>
+            </a:ext>
+          </a:extLst>
+        </p:cNvPr>
+        <p:cNvGrpSpPr/>
+        <p:nvPr/>
+      </p:nvGrpSpPr>
+      <p:grpSpPr>
+        <a:xfrm>
+          <a:off x="0" y="0"/>
+          <a:ext cx="0" cy="0"/>
+          <a:chOff x="0" y="0"/>
+          <a:chExt cx="0" cy="0"/>
+        </a:xfrm>
+      </p:grpSpPr>
+      <p:sp>
+        <p:nvSpPr>
+          <p:cNvPr id="2" name="Marcador de imagen de diapositiva 1">
+            <a:extLst>
+              <a:ext uri="{FF2B5EF4-FFF2-40B4-BE49-F238E27FC236}">
+                <a16:creationId xmlns:a16="http://schemas.microsoft.com/office/drawing/2014/main" id="{0C09537F-9EAF-7B67-FDDC-5EAF56075FB8}"/>
+              </a:ext>
+            </a:extLst>
+          </p:cNvPr>
+          <p:cNvSpPr>
+            <a:spLocks noGrp="1" noRot="1" noChangeAspect="1"/>
+          </p:cNvSpPr>
+          <p:nvPr>
+            <p:ph type="sldImg"/>
+          </p:nvPr>
+        </p:nvSpPr>
+        <p:spPr/>
+      </p:sp>
+      <p:sp>
+        <p:nvSpPr>
+          <p:cNvPr id="3" name="Marcador de notas 2">
+            <a:extLst>
+              <a:ext uri="{FF2B5EF4-FFF2-40B4-BE49-F238E27FC236}">
+                <a16:creationId xmlns:a16="http://schemas.microsoft.com/office/drawing/2014/main" id="{278362E5-37D4-7435-CF48-160B8A6B32BD}"/>
+              </a:ext>
+            </a:extLst>
+          </p:cNvPr>
+          <p:cNvSpPr>
+            <a:spLocks noGrp="1"/>
+          </p:cNvSpPr>
+          <p:nvPr>
+            <p:ph type="body" idx="1"/>
+          </p:nvPr>
+        </p:nvSpPr>
+        <p:spPr/>
+        <p:txBody>
+          <a:bodyPr/>
+          <a:lstStyle/>
+          <a:p>
+            <a:endParaRPr lang="es-ES" dirty="0"/>
+          </a:p>
+        </p:txBody>
+      </p:sp>
+      <p:sp>
+        <p:nvSpPr>
+          <p:cNvPr id="4" name="Marcador de número de diapositiva 3">
+            <a:extLst>
+              <a:ext uri="{FF2B5EF4-FFF2-40B4-BE49-F238E27FC236}">
+                <a16:creationId xmlns:a16="http://schemas.microsoft.com/office/drawing/2014/main" id="{022C0B9D-7047-3827-1489-5B48F2C7ADC8}"/>
+              </a:ext>
+            </a:extLst>
+          </p:cNvPr>
+          <p:cNvSpPr>
+            <a:spLocks noGrp="1"/>
+          </p:cNvSpPr>
+          <p:nvPr>
+            <p:ph type="sldNum" sz="quarter" idx="5"/>
+          </p:nvPr>
+        </p:nvSpPr>
+        <p:spPr/>
+        <p:txBody>
+          <a:bodyPr/>
+          <a:lstStyle/>
+          <a:p>
+            <a:fld id="{676223B9-C868-4436-87D9-1A3152E1157A}" type="slidenum">
+              <a:rPr lang="es-ES" smtClean="0"/>
+              <a:t>4</a:t>
+            </a:fld>
+            <a:endParaRPr lang="es-ES"/>
+          </a:p>
+        </p:txBody>
+      </p:sp>
+    </p:spTree>
+    <p:extLst>
+      <p:ext uri="{BB962C8B-B14F-4D97-AF65-F5344CB8AC3E}">
+        <p14:creationId xmlns:p14="http://schemas.microsoft.com/office/powerpoint/2010/main" val="4019206005"/>
+      </p:ext>
+    </p:extLst>
+  </p:cSld>
+  <p:clrMapOvr>
+    <a:masterClrMapping/>
+  </p:clrMapOvr>
+</p:notes>
+</file>
+
+<file path=ppt/notesSlides/notesSlide3.xml><?xml version="1.0" encoding="utf-8"?>
 <p:notes xmlns:a="http://schemas.openxmlformats.org/drawingml/2006/main" xmlns:r="http://schemas.openxmlformats.org/officeDocument/2006/relationships" xmlns:p="http://schemas.openxmlformats.org/presentationml/2006/main">
   <p:cSld>
     <p:spTree>
@@ -853,7 +1077,7 @@
           <a:p>
             <a:fld id="{676223B9-C868-4436-87D9-1A3152E1157A}" type="slidenum">
               <a:rPr lang="es-ES" smtClean="0"/>
-              <a:t>4</a:t>
+              <a:t>5</a:t>
             </a:fld>
             <a:endParaRPr lang="es-ES"/>
           </a:p>
@@ -863,6 +1087,654 @@
     <p:extLst>
       <p:ext uri="{BB962C8B-B14F-4D97-AF65-F5344CB8AC3E}">
         <p14:creationId xmlns:p14="http://schemas.microsoft.com/office/powerpoint/2010/main" val="3574884117"/>
+      </p:ext>
+    </p:extLst>
+  </p:cSld>
+  <p:clrMapOvr>
+    <a:masterClrMapping/>
+  </p:clrMapOvr>
+</p:notes>
+</file>
+
+<file path=ppt/notesSlides/notesSlide4.xml><?xml version="1.0" encoding="utf-8"?>
+<p:notes xmlns:a="http://schemas.openxmlformats.org/drawingml/2006/main" xmlns:r="http://schemas.openxmlformats.org/officeDocument/2006/relationships" xmlns:p="http://schemas.openxmlformats.org/presentationml/2006/main">
+  <p:cSld>
+    <p:spTree>
+      <p:nvGrpSpPr>
+        <p:cNvPr id="1" name="">
+          <a:extLst>
+            <a:ext uri="{FF2B5EF4-FFF2-40B4-BE49-F238E27FC236}">
+              <a16:creationId xmlns:a16="http://schemas.microsoft.com/office/drawing/2014/main" id="{748EF9EA-945A-3399-2541-DBC060BB0DA1}"/>
+            </a:ext>
+          </a:extLst>
+        </p:cNvPr>
+        <p:cNvGrpSpPr/>
+        <p:nvPr/>
+      </p:nvGrpSpPr>
+      <p:grpSpPr>
+        <a:xfrm>
+          <a:off x="0" y="0"/>
+          <a:ext cx="0" cy="0"/>
+          <a:chOff x="0" y="0"/>
+          <a:chExt cx="0" cy="0"/>
+        </a:xfrm>
+      </p:grpSpPr>
+      <p:sp>
+        <p:nvSpPr>
+          <p:cNvPr id="2" name="Marcador de imagen de diapositiva 1">
+            <a:extLst>
+              <a:ext uri="{FF2B5EF4-FFF2-40B4-BE49-F238E27FC236}">
+                <a16:creationId xmlns:a16="http://schemas.microsoft.com/office/drawing/2014/main" id="{4477FDF7-3245-485E-EFFA-8ABD41C5157D}"/>
+              </a:ext>
+            </a:extLst>
+          </p:cNvPr>
+          <p:cNvSpPr>
+            <a:spLocks noGrp="1" noRot="1" noChangeAspect="1"/>
+          </p:cNvSpPr>
+          <p:nvPr>
+            <p:ph type="sldImg"/>
+          </p:nvPr>
+        </p:nvSpPr>
+        <p:spPr/>
+      </p:sp>
+      <p:sp>
+        <p:nvSpPr>
+          <p:cNvPr id="3" name="Marcador de notas 2">
+            <a:extLst>
+              <a:ext uri="{FF2B5EF4-FFF2-40B4-BE49-F238E27FC236}">
+                <a16:creationId xmlns:a16="http://schemas.microsoft.com/office/drawing/2014/main" id="{AD3DD487-BBC2-8081-23D7-F1A2B5223429}"/>
+              </a:ext>
+            </a:extLst>
+          </p:cNvPr>
+          <p:cNvSpPr>
+            <a:spLocks noGrp="1"/>
+          </p:cNvSpPr>
+          <p:nvPr>
+            <p:ph type="body" idx="1"/>
+          </p:nvPr>
+        </p:nvSpPr>
+        <p:spPr/>
+        <p:txBody>
+          <a:bodyPr/>
+          <a:lstStyle/>
+          <a:p>
+            <a:endParaRPr lang="es-ES" dirty="0"/>
+          </a:p>
+        </p:txBody>
+      </p:sp>
+      <p:sp>
+        <p:nvSpPr>
+          <p:cNvPr id="4" name="Marcador de número de diapositiva 3">
+            <a:extLst>
+              <a:ext uri="{FF2B5EF4-FFF2-40B4-BE49-F238E27FC236}">
+                <a16:creationId xmlns:a16="http://schemas.microsoft.com/office/drawing/2014/main" id="{2B519295-FDDE-6BDD-C35D-47F08865167D}"/>
+              </a:ext>
+            </a:extLst>
+          </p:cNvPr>
+          <p:cNvSpPr>
+            <a:spLocks noGrp="1"/>
+          </p:cNvSpPr>
+          <p:nvPr>
+            <p:ph type="sldNum" sz="quarter" idx="5"/>
+          </p:nvPr>
+        </p:nvSpPr>
+        <p:spPr/>
+        <p:txBody>
+          <a:bodyPr/>
+          <a:lstStyle/>
+          <a:p>
+            <a:fld id="{676223B9-C868-4436-87D9-1A3152E1157A}" type="slidenum">
+              <a:rPr lang="es-ES" smtClean="0"/>
+              <a:t>6</a:t>
+            </a:fld>
+            <a:endParaRPr lang="es-ES"/>
+          </a:p>
+        </p:txBody>
+      </p:sp>
+    </p:spTree>
+    <p:extLst>
+      <p:ext uri="{BB962C8B-B14F-4D97-AF65-F5344CB8AC3E}">
+        <p14:creationId xmlns:p14="http://schemas.microsoft.com/office/powerpoint/2010/main" val="1790567254"/>
+      </p:ext>
+    </p:extLst>
+  </p:cSld>
+  <p:clrMapOvr>
+    <a:masterClrMapping/>
+  </p:clrMapOvr>
+</p:notes>
+</file>
+
+<file path=ppt/notesSlides/notesSlide5.xml><?xml version="1.0" encoding="utf-8"?>
+<p:notes xmlns:a="http://schemas.openxmlformats.org/drawingml/2006/main" xmlns:r="http://schemas.openxmlformats.org/officeDocument/2006/relationships" xmlns:p="http://schemas.openxmlformats.org/presentationml/2006/main">
+  <p:cSld>
+    <p:spTree>
+      <p:nvGrpSpPr>
+        <p:cNvPr id="1" name="">
+          <a:extLst>
+            <a:ext uri="{FF2B5EF4-FFF2-40B4-BE49-F238E27FC236}">
+              <a16:creationId xmlns:a16="http://schemas.microsoft.com/office/drawing/2014/main" id="{E2C577BE-1695-027A-0680-18145B0A8E21}"/>
+            </a:ext>
+          </a:extLst>
+        </p:cNvPr>
+        <p:cNvGrpSpPr/>
+        <p:nvPr/>
+      </p:nvGrpSpPr>
+      <p:grpSpPr>
+        <a:xfrm>
+          <a:off x="0" y="0"/>
+          <a:ext cx="0" cy="0"/>
+          <a:chOff x="0" y="0"/>
+          <a:chExt cx="0" cy="0"/>
+        </a:xfrm>
+      </p:grpSpPr>
+      <p:sp>
+        <p:nvSpPr>
+          <p:cNvPr id="2" name="Marcador de imagen de diapositiva 1">
+            <a:extLst>
+              <a:ext uri="{FF2B5EF4-FFF2-40B4-BE49-F238E27FC236}">
+                <a16:creationId xmlns:a16="http://schemas.microsoft.com/office/drawing/2014/main" id="{614B8F9D-CB6C-361C-11EC-0CB503D60D00}"/>
+              </a:ext>
+            </a:extLst>
+          </p:cNvPr>
+          <p:cNvSpPr>
+            <a:spLocks noGrp="1" noRot="1" noChangeAspect="1"/>
+          </p:cNvSpPr>
+          <p:nvPr>
+            <p:ph type="sldImg"/>
+          </p:nvPr>
+        </p:nvSpPr>
+        <p:spPr/>
+      </p:sp>
+      <p:sp>
+        <p:nvSpPr>
+          <p:cNvPr id="3" name="Marcador de notas 2">
+            <a:extLst>
+              <a:ext uri="{FF2B5EF4-FFF2-40B4-BE49-F238E27FC236}">
+                <a16:creationId xmlns:a16="http://schemas.microsoft.com/office/drawing/2014/main" id="{DAE21B70-BFAD-F627-7BD1-539E7DAFCC24}"/>
+              </a:ext>
+            </a:extLst>
+          </p:cNvPr>
+          <p:cNvSpPr>
+            <a:spLocks noGrp="1"/>
+          </p:cNvSpPr>
+          <p:nvPr>
+            <p:ph type="body" idx="1"/>
+          </p:nvPr>
+        </p:nvSpPr>
+        <p:spPr/>
+        <p:txBody>
+          <a:bodyPr/>
+          <a:lstStyle/>
+          <a:p>
+            <a:endParaRPr lang="es-ES" dirty="0"/>
+          </a:p>
+        </p:txBody>
+      </p:sp>
+      <p:sp>
+        <p:nvSpPr>
+          <p:cNvPr id="4" name="Marcador de número de diapositiva 3">
+            <a:extLst>
+              <a:ext uri="{FF2B5EF4-FFF2-40B4-BE49-F238E27FC236}">
+                <a16:creationId xmlns:a16="http://schemas.microsoft.com/office/drawing/2014/main" id="{276061FB-AD84-65BF-AA59-7F2511DDE2E8}"/>
+              </a:ext>
+            </a:extLst>
+          </p:cNvPr>
+          <p:cNvSpPr>
+            <a:spLocks noGrp="1"/>
+          </p:cNvSpPr>
+          <p:nvPr>
+            <p:ph type="sldNum" sz="quarter" idx="5"/>
+          </p:nvPr>
+        </p:nvSpPr>
+        <p:spPr/>
+        <p:txBody>
+          <a:bodyPr/>
+          <a:lstStyle/>
+          <a:p>
+            <a:fld id="{676223B9-C868-4436-87D9-1A3152E1157A}" type="slidenum">
+              <a:rPr lang="es-ES" smtClean="0"/>
+              <a:t>8</a:t>
+            </a:fld>
+            <a:endParaRPr lang="es-ES"/>
+          </a:p>
+        </p:txBody>
+      </p:sp>
+    </p:spTree>
+    <p:extLst>
+      <p:ext uri="{BB962C8B-B14F-4D97-AF65-F5344CB8AC3E}">
+        <p14:creationId xmlns:p14="http://schemas.microsoft.com/office/powerpoint/2010/main" val="3691100248"/>
+      </p:ext>
+    </p:extLst>
+  </p:cSld>
+  <p:clrMapOvr>
+    <a:masterClrMapping/>
+  </p:clrMapOvr>
+</p:notes>
+</file>
+
+<file path=ppt/notesSlides/notesSlide6.xml><?xml version="1.0" encoding="utf-8"?>
+<p:notes xmlns:a="http://schemas.openxmlformats.org/drawingml/2006/main" xmlns:r="http://schemas.openxmlformats.org/officeDocument/2006/relationships" xmlns:p="http://schemas.openxmlformats.org/presentationml/2006/main">
+  <p:cSld>
+    <p:spTree>
+      <p:nvGrpSpPr>
+        <p:cNvPr id="1" name="">
+          <a:extLst>
+            <a:ext uri="{FF2B5EF4-FFF2-40B4-BE49-F238E27FC236}">
+              <a16:creationId xmlns:a16="http://schemas.microsoft.com/office/drawing/2014/main" id="{B457D391-086D-538D-6A1A-EA7C35844EAA}"/>
+            </a:ext>
+          </a:extLst>
+        </p:cNvPr>
+        <p:cNvGrpSpPr/>
+        <p:nvPr/>
+      </p:nvGrpSpPr>
+      <p:grpSpPr>
+        <a:xfrm>
+          <a:off x="0" y="0"/>
+          <a:ext cx="0" cy="0"/>
+          <a:chOff x="0" y="0"/>
+          <a:chExt cx="0" cy="0"/>
+        </a:xfrm>
+      </p:grpSpPr>
+      <p:sp>
+        <p:nvSpPr>
+          <p:cNvPr id="2" name="Marcador de imagen de diapositiva 1">
+            <a:extLst>
+              <a:ext uri="{FF2B5EF4-FFF2-40B4-BE49-F238E27FC236}">
+                <a16:creationId xmlns:a16="http://schemas.microsoft.com/office/drawing/2014/main" id="{8755B7AC-0439-04CC-FC21-810D666CBEDC}"/>
+              </a:ext>
+            </a:extLst>
+          </p:cNvPr>
+          <p:cNvSpPr>
+            <a:spLocks noGrp="1" noRot="1" noChangeAspect="1"/>
+          </p:cNvSpPr>
+          <p:nvPr>
+            <p:ph type="sldImg"/>
+          </p:nvPr>
+        </p:nvSpPr>
+        <p:spPr/>
+      </p:sp>
+      <p:sp>
+        <p:nvSpPr>
+          <p:cNvPr id="3" name="Marcador de notas 2">
+            <a:extLst>
+              <a:ext uri="{FF2B5EF4-FFF2-40B4-BE49-F238E27FC236}">
+                <a16:creationId xmlns:a16="http://schemas.microsoft.com/office/drawing/2014/main" id="{C3F9F4CE-400A-BB00-E59C-5FD8263FD558}"/>
+              </a:ext>
+            </a:extLst>
+          </p:cNvPr>
+          <p:cNvSpPr>
+            <a:spLocks noGrp="1"/>
+          </p:cNvSpPr>
+          <p:nvPr>
+            <p:ph type="body" idx="1"/>
+          </p:nvPr>
+        </p:nvSpPr>
+        <p:spPr/>
+        <p:txBody>
+          <a:bodyPr/>
+          <a:lstStyle/>
+          <a:p>
+            <a:endParaRPr lang="es-ES" dirty="0"/>
+          </a:p>
+        </p:txBody>
+      </p:sp>
+      <p:sp>
+        <p:nvSpPr>
+          <p:cNvPr id="4" name="Marcador de número de diapositiva 3">
+            <a:extLst>
+              <a:ext uri="{FF2B5EF4-FFF2-40B4-BE49-F238E27FC236}">
+                <a16:creationId xmlns:a16="http://schemas.microsoft.com/office/drawing/2014/main" id="{0A72EA52-A271-6E2F-909B-D4D01DC5B5E2}"/>
+              </a:ext>
+            </a:extLst>
+          </p:cNvPr>
+          <p:cNvSpPr>
+            <a:spLocks noGrp="1"/>
+          </p:cNvSpPr>
+          <p:nvPr>
+            <p:ph type="sldNum" sz="quarter" idx="5"/>
+          </p:nvPr>
+        </p:nvSpPr>
+        <p:spPr/>
+        <p:txBody>
+          <a:bodyPr/>
+          <a:lstStyle/>
+          <a:p>
+            <a:fld id="{676223B9-C868-4436-87D9-1A3152E1157A}" type="slidenum">
+              <a:rPr lang="es-ES" smtClean="0"/>
+              <a:t>10</a:t>
+            </a:fld>
+            <a:endParaRPr lang="es-ES"/>
+          </a:p>
+        </p:txBody>
+      </p:sp>
+    </p:spTree>
+    <p:extLst>
+      <p:ext uri="{BB962C8B-B14F-4D97-AF65-F5344CB8AC3E}">
+        <p14:creationId xmlns:p14="http://schemas.microsoft.com/office/powerpoint/2010/main" val="1267555967"/>
+      </p:ext>
+    </p:extLst>
+  </p:cSld>
+  <p:clrMapOvr>
+    <a:masterClrMapping/>
+  </p:clrMapOvr>
+</p:notes>
+</file>
+
+<file path=ppt/notesSlides/notesSlide7.xml><?xml version="1.0" encoding="utf-8"?>
+<p:notes xmlns:a="http://schemas.openxmlformats.org/drawingml/2006/main" xmlns:r="http://schemas.openxmlformats.org/officeDocument/2006/relationships" xmlns:p="http://schemas.openxmlformats.org/presentationml/2006/main">
+  <p:cSld>
+    <p:spTree>
+      <p:nvGrpSpPr>
+        <p:cNvPr id="1" name="">
+          <a:extLst>
+            <a:ext uri="{FF2B5EF4-FFF2-40B4-BE49-F238E27FC236}">
+              <a16:creationId xmlns:a16="http://schemas.microsoft.com/office/drawing/2014/main" id="{6BB09CD2-49A4-AD5A-890F-55020303FFA7}"/>
+            </a:ext>
+          </a:extLst>
+        </p:cNvPr>
+        <p:cNvGrpSpPr/>
+        <p:nvPr/>
+      </p:nvGrpSpPr>
+      <p:grpSpPr>
+        <a:xfrm>
+          <a:off x="0" y="0"/>
+          <a:ext cx="0" cy="0"/>
+          <a:chOff x="0" y="0"/>
+          <a:chExt cx="0" cy="0"/>
+        </a:xfrm>
+      </p:grpSpPr>
+      <p:sp>
+        <p:nvSpPr>
+          <p:cNvPr id="2" name="Marcador de imagen de diapositiva 1">
+            <a:extLst>
+              <a:ext uri="{FF2B5EF4-FFF2-40B4-BE49-F238E27FC236}">
+                <a16:creationId xmlns:a16="http://schemas.microsoft.com/office/drawing/2014/main" id="{7071810A-8B84-6A58-9DFE-9E26A8BE19EE}"/>
+              </a:ext>
+            </a:extLst>
+          </p:cNvPr>
+          <p:cNvSpPr>
+            <a:spLocks noGrp="1" noRot="1" noChangeAspect="1"/>
+          </p:cNvSpPr>
+          <p:nvPr>
+            <p:ph type="sldImg"/>
+          </p:nvPr>
+        </p:nvSpPr>
+        <p:spPr/>
+      </p:sp>
+      <p:sp>
+        <p:nvSpPr>
+          <p:cNvPr id="3" name="Marcador de notas 2">
+            <a:extLst>
+              <a:ext uri="{FF2B5EF4-FFF2-40B4-BE49-F238E27FC236}">
+                <a16:creationId xmlns:a16="http://schemas.microsoft.com/office/drawing/2014/main" id="{F84D02CB-5166-1191-8F1E-1903A891DDE7}"/>
+              </a:ext>
+            </a:extLst>
+          </p:cNvPr>
+          <p:cNvSpPr>
+            <a:spLocks noGrp="1"/>
+          </p:cNvSpPr>
+          <p:nvPr>
+            <p:ph type="body" idx="1"/>
+          </p:nvPr>
+        </p:nvSpPr>
+        <p:spPr/>
+        <p:txBody>
+          <a:bodyPr/>
+          <a:lstStyle/>
+          <a:p>
+            <a:endParaRPr lang="es-ES" dirty="0"/>
+          </a:p>
+        </p:txBody>
+      </p:sp>
+      <p:sp>
+        <p:nvSpPr>
+          <p:cNvPr id="4" name="Marcador de número de diapositiva 3">
+            <a:extLst>
+              <a:ext uri="{FF2B5EF4-FFF2-40B4-BE49-F238E27FC236}">
+                <a16:creationId xmlns:a16="http://schemas.microsoft.com/office/drawing/2014/main" id="{285683E1-926E-C677-A690-D4E4B251FBB8}"/>
+              </a:ext>
+            </a:extLst>
+          </p:cNvPr>
+          <p:cNvSpPr>
+            <a:spLocks noGrp="1"/>
+          </p:cNvSpPr>
+          <p:nvPr>
+            <p:ph type="sldNum" sz="quarter" idx="5"/>
+          </p:nvPr>
+        </p:nvSpPr>
+        <p:spPr/>
+        <p:txBody>
+          <a:bodyPr/>
+          <a:lstStyle/>
+          <a:p>
+            <a:fld id="{676223B9-C868-4436-87D9-1A3152E1157A}" type="slidenum">
+              <a:rPr lang="es-ES" smtClean="0"/>
+              <a:t>12</a:t>
+            </a:fld>
+            <a:endParaRPr lang="es-ES"/>
+          </a:p>
+        </p:txBody>
+      </p:sp>
+    </p:spTree>
+    <p:extLst>
+      <p:ext uri="{BB962C8B-B14F-4D97-AF65-F5344CB8AC3E}">
+        <p14:creationId xmlns:p14="http://schemas.microsoft.com/office/powerpoint/2010/main" val="1379737951"/>
+      </p:ext>
+    </p:extLst>
+  </p:cSld>
+  <p:clrMapOvr>
+    <a:masterClrMapping/>
+  </p:clrMapOvr>
+</p:notes>
+</file>
+
+<file path=ppt/notesSlides/notesSlide8.xml><?xml version="1.0" encoding="utf-8"?>
+<p:notes xmlns:a="http://schemas.openxmlformats.org/drawingml/2006/main" xmlns:r="http://schemas.openxmlformats.org/officeDocument/2006/relationships" xmlns:p="http://schemas.openxmlformats.org/presentationml/2006/main">
+  <p:cSld>
+    <p:spTree>
+      <p:nvGrpSpPr>
+        <p:cNvPr id="1" name="">
+          <a:extLst>
+            <a:ext uri="{FF2B5EF4-FFF2-40B4-BE49-F238E27FC236}">
+              <a16:creationId xmlns:a16="http://schemas.microsoft.com/office/drawing/2014/main" id="{B5D6E495-85F4-C9FA-B75E-9A9F0F23A7A2}"/>
+            </a:ext>
+          </a:extLst>
+        </p:cNvPr>
+        <p:cNvGrpSpPr/>
+        <p:nvPr/>
+      </p:nvGrpSpPr>
+      <p:grpSpPr>
+        <a:xfrm>
+          <a:off x="0" y="0"/>
+          <a:ext cx="0" cy="0"/>
+          <a:chOff x="0" y="0"/>
+          <a:chExt cx="0" cy="0"/>
+        </a:xfrm>
+      </p:grpSpPr>
+      <p:sp>
+        <p:nvSpPr>
+          <p:cNvPr id="2" name="Marcador de imagen de diapositiva 1">
+            <a:extLst>
+              <a:ext uri="{FF2B5EF4-FFF2-40B4-BE49-F238E27FC236}">
+                <a16:creationId xmlns:a16="http://schemas.microsoft.com/office/drawing/2014/main" id="{E51949C3-FDE9-5978-474A-D13CCE00D793}"/>
+              </a:ext>
+            </a:extLst>
+          </p:cNvPr>
+          <p:cNvSpPr>
+            <a:spLocks noGrp="1" noRot="1" noChangeAspect="1"/>
+          </p:cNvSpPr>
+          <p:nvPr>
+            <p:ph type="sldImg"/>
+          </p:nvPr>
+        </p:nvSpPr>
+        <p:spPr/>
+      </p:sp>
+      <p:sp>
+        <p:nvSpPr>
+          <p:cNvPr id="3" name="Marcador de notas 2">
+            <a:extLst>
+              <a:ext uri="{FF2B5EF4-FFF2-40B4-BE49-F238E27FC236}">
+                <a16:creationId xmlns:a16="http://schemas.microsoft.com/office/drawing/2014/main" id="{F7BD8C3A-476B-B19A-6070-82303EE36C70}"/>
+              </a:ext>
+            </a:extLst>
+          </p:cNvPr>
+          <p:cNvSpPr>
+            <a:spLocks noGrp="1"/>
+          </p:cNvSpPr>
+          <p:nvPr>
+            <p:ph type="body" idx="1"/>
+          </p:nvPr>
+        </p:nvSpPr>
+        <p:spPr/>
+        <p:txBody>
+          <a:bodyPr/>
+          <a:lstStyle/>
+          <a:p>
+            <a:endParaRPr lang="es-ES" dirty="0"/>
+          </a:p>
+        </p:txBody>
+      </p:sp>
+      <p:sp>
+        <p:nvSpPr>
+          <p:cNvPr id="4" name="Marcador de número de diapositiva 3">
+            <a:extLst>
+              <a:ext uri="{FF2B5EF4-FFF2-40B4-BE49-F238E27FC236}">
+                <a16:creationId xmlns:a16="http://schemas.microsoft.com/office/drawing/2014/main" id="{FE4CA1FA-EB4E-162C-0981-DA39BE292ECC}"/>
+              </a:ext>
+            </a:extLst>
+          </p:cNvPr>
+          <p:cNvSpPr>
+            <a:spLocks noGrp="1"/>
+          </p:cNvSpPr>
+          <p:nvPr>
+            <p:ph type="sldNum" sz="quarter" idx="5"/>
+          </p:nvPr>
+        </p:nvSpPr>
+        <p:spPr/>
+        <p:txBody>
+          <a:bodyPr/>
+          <a:lstStyle/>
+          <a:p>
+            <a:fld id="{676223B9-C868-4436-87D9-1A3152E1157A}" type="slidenum">
+              <a:rPr lang="es-ES" smtClean="0"/>
+              <a:t>14</a:t>
+            </a:fld>
+            <a:endParaRPr lang="es-ES"/>
+          </a:p>
+        </p:txBody>
+      </p:sp>
+    </p:spTree>
+    <p:extLst>
+      <p:ext uri="{BB962C8B-B14F-4D97-AF65-F5344CB8AC3E}">
+        <p14:creationId xmlns:p14="http://schemas.microsoft.com/office/powerpoint/2010/main" val="3034937850"/>
+      </p:ext>
+    </p:extLst>
+  </p:cSld>
+  <p:clrMapOvr>
+    <a:masterClrMapping/>
+  </p:clrMapOvr>
+</p:notes>
+</file>
+
+<file path=ppt/notesSlides/notesSlide9.xml><?xml version="1.0" encoding="utf-8"?>
+<p:notes xmlns:a="http://schemas.openxmlformats.org/drawingml/2006/main" xmlns:r="http://schemas.openxmlformats.org/officeDocument/2006/relationships" xmlns:p="http://schemas.openxmlformats.org/presentationml/2006/main">
+  <p:cSld>
+    <p:spTree>
+      <p:nvGrpSpPr>
+        <p:cNvPr id="1" name="">
+          <a:extLst>
+            <a:ext uri="{FF2B5EF4-FFF2-40B4-BE49-F238E27FC236}">
+              <a16:creationId xmlns:a16="http://schemas.microsoft.com/office/drawing/2014/main" id="{6E597C12-672B-9D48-1305-F730F2289DA2}"/>
+            </a:ext>
+          </a:extLst>
+        </p:cNvPr>
+        <p:cNvGrpSpPr/>
+        <p:nvPr/>
+      </p:nvGrpSpPr>
+      <p:grpSpPr>
+        <a:xfrm>
+          <a:off x="0" y="0"/>
+          <a:ext cx="0" cy="0"/>
+          <a:chOff x="0" y="0"/>
+          <a:chExt cx="0" cy="0"/>
+        </a:xfrm>
+      </p:grpSpPr>
+      <p:sp>
+        <p:nvSpPr>
+          <p:cNvPr id="2" name="Marcador de imagen de diapositiva 1">
+            <a:extLst>
+              <a:ext uri="{FF2B5EF4-FFF2-40B4-BE49-F238E27FC236}">
+                <a16:creationId xmlns:a16="http://schemas.microsoft.com/office/drawing/2014/main" id="{6C00B724-6FFD-8055-A778-D2E6DF35776B}"/>
+              </a:ext>
+            </a:extLst>
+          </p:cNvPr>
+          <p:cNvSpPr>
+            <a:spLocks noGrp="1" noRot="1" noChangeAspect="1"/>
+          </p:cNvSpPr>
+          <p:nvPr>
+            <p:ph type="sldImg"/>
+          </p:nvPr>
+        </p:nvSpPr>
+        <p:spPr/>
+      </p:sp>
+      <p:sp>
+        <p:nvSpPr>
+          <p:cNvPr id="3" name="Marcador de notas 2">
+            <a:extLst>
+              <a:ext uri="{FF2B5EF4-FFF2-40B4-BE49-F238E27FC236}">
+                <a16:creationId xmlns:a16="http://schemas.microsoft.com/office/drawing/2014/main" id="{66BD90A0-84C8-7E96-C68C-BDF64D87F27A}"/>
+              </a:ext>
+            </a:extLst>
+          </p:cNvPr>
+          <p:cNvSpPr>
+            <a:spLocks noGrp="1"/>
+          </p:cNvSpPr>
+          <p:nvPr>
+            <p:ph type="body" idx="1"/>
+          </p:nvPr>
+        </p:nvSpPr>
+        <p:spPr/>
+        <p:txBody>
+          <a:bodyPr/>
+          <a:lstStyle/>
+          <a:p>
+            <a:endParaRPr lang="es-ES" dirty="0"/>
+          </a:p>
+        </p:txBody>
+      </p:sp>
+      <p:sp>
+        <p:nvSpPr>
+          <p:cNvPr id="4" name="Marcador de número de diapositiva 3">
+            <a:extLst>
+              <a:ext uri="{FF2B5EF4-FFF2-40B4-BE49-F238E27FC236}">
+                <a16:creationId xmlns:a16="http://schemas.microsoft.com/office/drawing/2014/main" id="{651D9BBE-705C-3C0E-CAA7-5969FE2645CF}"/>
+              </a:ext>
+            </a:extLst>
+          </p:cNvPr>
+          <p:cNvSpPr>
+            <a:spLocks noGrp="1"/>
+          </p:cNvSpPr>
+          <p:nvPr>
+            <p:ph type="sldNum" sz="quarter" idx="5"/>
+          </p:nvPr>
+        </p:nvSpPr>
+        <p:spPr/>
+        <p:txBody>
+          <a:bodyPr/>
+          <a:lstStyle/>
+          <a:p>
+            <a:fld id="{676223B9-C868-4436-87D9-1A3152E1157A}" type="slidenum">
+              <a:rPr lang="es-ES" smtClean="0"/>
+              <a:t>16</a:t>
+            </a:fld>
+            <a:endParaRPr lang="es-ES"/>
+          </a:p>
+        </p:txBody>
+      </p:sp>
+    </p:spTree>
+    <p:extLst>
+      <p:ext uri="{BB962C8B-B14F-4D97-AF65-F5344CB8AC3E}">
+        <p14:creationId xmlns:p14="http://schemas.microsoft.com/office/powerpoint/2010/main" val="411675719"/>
       </p:ext>
     </p:extLst>
   </p:cSld>
@@ -2851,6 +3723,432 @@
   <p:cSld>
     <p:spTree>
       <p:nvGrpSpPr>
+        <p:cNvPr id="1" name="">
+          <a:extLst>
+            <a:ext uri="{FF2B5EF4-FFF2-40B4-BE49-F238E27FC236}">
+              <a16:creationId xmlns:a16="http://schemas.microsoft.com/office/drawing/2014/main" id="{463D3E4D-25D9-3E36-B36A-4F92097E75C9}"/>
+            </a:ext>
+          </a:extLst>
+        </p:cNvPr>
+        <p:cNvGrpSpPr/>
+        <p:nvPr/>
+      </p:nvGrpSpPr>
+      <p:grpSpPr>
+        <a:xfrm>
+          <a:off x="0" y="0"/>
+          <a:ext cx="0" cy="0"/>
+          <a:chOff x="0" y="0"/>
+          <a:chExt cx="0" cy="0"/>
+        </a:xfrm>
+      </p:grpSpPr>
+      <p:sp>
+        <p:nvSpPr>
+          <p:cNvPr id="16" name="object 16">
+            <a:extLst>
+              <a:ext uri="{FF2B5EF4-FFF2-40B4-BE49-F238E27FC236}">
+                <a16:creationId xmlns:a16="http://schemas.microsoft.com/office/drawing/2014/main" id="{216275E7-52BA-1AC4-B020-628FFAEBDB1E}"/>
+              </a:ext>
+            </a:extLst>
+          </p:cNvPr>
+          <p:cNvSpPr txBox="1">
+            <a:spLocks noGrp="1"/>
+          </p:cNvSpPr>
+          <p:nvPr>
+            <p:ph type="title"/>
+          </p:nvPr>
+        </p:nvSpPr>
+        <p:spPr>
+          <a:xfrm>
+            <a:off x="685800" y="408883"/>
+            <a:ext cx="10994410" cy="397545"/>
+          </a:xfrm>
+          <a:prstGeom prst="rect">
+            <a:avLst/>
+          </a:prstGeom>
+        </p:spPr>
+        <p:txBody>
+          <a:bodyPr vert="horz" wrap="square" lIns="0" tIns="12700" rIns="0" bIns="0" rtlCol="0">
+            <a:spAutoFit/>
+          </a:bodyPr>
+          <a:lstStyle/>
+          <a:p>
+            <a:pPr marL="12700">
+              <a:spcBef>
+                <a:spcPts val="100"/>
+              </a:spcBef>
+            </a:pPr>
+            <a:r>
+              <a:rPr lang="en-US" sz="2500" dirty="0"/>
+              <a:t>Learning outcome #3 – Delay imbalance with loss</a:t>
+            </a:r>
+          </a:p>
+        </p:txBody>
+      </p:sp>
+      <p:pic>
+        <p:nvPicPr>
+          <p:cNvPr id="83" name="Gráfico 82">
+            <a:extLst>
+              <a:ext uri="{FF2B5EF4-FFF2-40B4-BE49-F238E27FC236}">
+                <a16:creationId xmlns:a16="http://schemas.microsoft.com/office/drawing/2014/main" id="{A6DACDB8-F593-501D-DEF4-9102CA64B94F}"/>
+              </a:ext>
+            </a:extLst>
+          </p:cNvPr>
+          <p:cNvPicPr>
+            <a:picLocks noChangeAspect="1"/>
+          </p:cNvPicPr>
+          <p:nvPr/>
+        </p:nvPicPr>
+        <p:blipFill>
+          <a:blip>
+            <a:extLst>
+              <a:ext uri="{96DAC541-7B7A-43D3-8B79-37D633B846F1}">
+                <asvg:svgBlip xmlns:asvg="http://schemas.microsoft.com/office/drawing/2016/SVG/main" r:embed="rId3"/>
+              </a:ext>
+            </a:extLst>
+          </a:blip>
+          <a:stretch>
+            <a:fillRect/>
+          </a:stretch>
+        </p:blipFill>
+        <p:spPr>
+          <a:xfrm>
+            <a:off x="5045006" y="6356057"/>
+            <a:ext cx="6409575" cy="363174"/>
+          </a:xfrm>
+          <a:prstGeom prst="rect">
+            <a:avLst/>
+          </a:prstGeom>
+        </p:spPr>
+      </p:pic>
+      <p:sp>
+        <p:nvSpPr>
+          <p:cNvPr id="84" name="Marcador de número de diapositiva 83">
+            <a:extLst>
+              <a:ext uri="{FF2B5EF4-FFF2-40B4-BE49-F238E27FC236}">
+                <a16:creationId xmlns:a16="http://schemas.microsoft.com/office/drawing/2014/main" id="{04943695-E26B-6AB6-328C-CC014377DCE2}"/>
+              </a:ext>
+            </a:extLst>
+          </p:cNvPr>
+          <p:cNvSpPr>
+            <a:spLocks noGrp="1"/>
+          </p:cNvSpPr>
+          <p:nvPr>
+            <p:ph type="sldNum" sz="quarter" idx="7"/>
+          </p:nvPr>
+        </p:nvSpPr>
+        <p:spPr/>
+        <p:txBody>
+          <a:bodyPr/>
+          <a:lstStyle/>
+          <a:p>
+            <a:fld id="{B6F15528-21DE-4FAA-801E-634DDDAF4B2B}" type="slidenum">
+              <a:rPr lang="es-ES" smtClean="0"/>
+              <a:t>10</a:t>
+            </a:fld>
+            <a:endParaRPr lang="es-ES"/>
+          </a:p>
+        </p:txBody>
+      </p:sp>
+      <p:sp>
+        <p:nvSpPr>
+          <p:cNvPr id="3" name="Marcador de pie de página 2">
+            <a:extLst>
+              <a:ext uri="{FF2B5EF4-FFF2-40B4-BE49-F238E27FC236}">
+                <a16:creationId xmlns:a16="http://schemas.microsoft.com/office/drawing/2014/main" id="{1B33AAB4-58E3-F792-1F45-9B7F5728EB27}"/>
+              </a:ext>
+            </a:extLst>
+          </p:cNvPr>
+          <p:cNvSpPr>
+            <a:spLocks noGrp="1"/>
+          </p:cNvSpPr>
+          <p:nvPr>
+            <p:ph type="ftr" sz="quarter" idx="5"/>
+          </p:nvPr>
+        </p:nvSpPr>
+        <p:spPr/>
+        <p:txBody>
+          <a:bodyPr/>
+          <a:lstStyle/>
+          <a:p>
+            <a:pPr marL="12700">
+              <a:spcBef>
+                <a:spcPts val="15"/>
+              </a:spcBef>
+            </a:pPr>
+            <a:r>
+              <a:rPr lang="es-ES" spc="-5"/>
+              <a:t>LAB 3.0. CIRCUITS &amp; COMPACT MODELS</a:t>
+            </a:r>
+            <a:endParaRPr lang="es-ES" spc="-5" dirty="0"/>
+          </a:p>
+        </p:txBody>
+      </p:sp>
+      <p:pic>
+        <p:nvPicPr>
+          <p:cNvPr id="4" name="Imagen 3">
+            <a:extLst>
+              <a:ext uri="{FF2B5EF4-FFF2-40B4-BE49-F238E27FC236}">
+                <a16:creationId xmlns:a16="http://schemas.microsoft.com/office/drawing/2014/main" id="{C8BCFD00-C14B-DF29-B180-AC955E35A9AF}"/>
+              </a:ext>
+            </a:extLst>
+          </p:cNvPr>
+          <p:cNvPicPr>
+            <a:picLocks noChangeAspect="1"/>
+          </p:cNvPicPr>
+          <p:nvPr/>
+        </p:nvPicPr>
+        <p:blipFill>
+          <a:blip r:embed="rId4"/>
+          <a:stretch>
+            <a:fillRect/>
+          </a:stretch>
+        </p:blipFill>
+        <p:spPr>
+          <a:xfrm>
+            <a:off x="5791200" y="1213031"/>
+            <a:ext cx="5987425" cy="4782759"/>
+          </a:xfrm>
+          <a:prstGeom prst="rect">
+            <a:avLst/>
+          </a:prstGeom>
+        </p:spPr>
+      </p:pic>
+      <mc:AlternateContent xmlns:mc="http://schemas.openxmlformats.org/markup-compatibility/2006">
+        <mc:Choice xmlns:a14="http://schemas.microsoft.com/office/drawing/2010/main" Requires="a14">
+          <p:sp>
+            <p:nvSpPr>
+              <p:cNvPr id="8" name="CuadroTexto 7">
+                <a:extLst>
+                  <a:ext uri="{FF2B5EF4-FFF2-40B4-BE49-F238E27FC236}">
+                    <a16:creationId xmlns:a16="http://schemas.microsoft.com/office/drawing/2014/main" id="{44B58534-54A6-9E43-8205-5457D4504CCA}"/>
+                  </a:ext>
+                </a:extLst>
+              </p:cNvPr>
+              <p:cNvSpPr txBox="1"/>
+              <p:nvPr/>
+            </p:nvSpPr>
+            <p:spPr>
+              <a:xfrm>
+                <a:off x="228600" y="1371600"/>
+                <a:ext cx="5410201" cy="3977243"/>
+              </a:xfrm>
+              <a:prstGeom prst="rect">
+                <a:avLst/>
+              </a:prstGeom>
+              <a:noFill/>
+            </p:spPr>
+            <p:txBody>
+              <a:bodyPr wrap="square">
+                <a:spAutoFit/>
+              </a:bodyPr>
+              <a:lstStyle/>
+              <a:p>
+                <a:pPr algn="just"/>
+                <a:r>
+                  <a:rPr lang="es-ES" sz="1200" dirty="0">
+                    <a:latin typeface="Arial" panose="020B0604020202020204" pitchFamily="34" charset="0"/>
+                    <a:cs typeface="Arial" panose="020B0604020202020204" pitchFamily="34" charset="0"/>
+                  </a:rPr>
+                  <a:t>En este caso, la función de transferencia presenta un patrón de interferencia oscilatorio de muy alta frecuencia, ya que el desbalance de longitud entre los brazos es muy grande (56960 </a:t>
+                </a:r>
+                <a:r>
+                  <a:rPr lang="es-ES" sz="1200" dirty="0" err="1">
+                    <a:latin typeface="Arial" panose="020B0604020202020204" pitchFamily="34" charset="0"/>
+                    <a:cs typeface="Arial" panose="020B0604020202020204" pitchFamily="34" charset="0"/>
+                  </a:rPr>
+                  <a:t>um</a:t>
+                </a:r>
+                <a:r>
+                  <a:rPr lang="es-ES" sz="1200" dirty="0">
+                    <a:latin typeface="Arial" panose="020B0604020202020204" pitchFamily="34" charset="0"/>
+                    <a:cs typeface="Arial" panose="020B0604020202020204" pitchFamily="34" charset="0"/>
+                  </a:rPr>
+                  <a:t>), reduciendo drásticamente el FSR. También se observa que las curvas ya no alcanzan el máximo de 1.0 en la escala lineal debido a la atenuación de 4 dB/cm.</a:t>
+                </a:r>
+              </a:p>
+              <a:p>
+                <a:pPr algn="just"/>
+                <a:r>
+                  <a:rPr lang="es-ES" sz="1200" dirty="0">
+                    <a:latin typeface="Arial" panose="020B0604020202020204" pitchFamily="34" charset="0"/>
+                    <a:cs typeface="Arial" panose="020B0604020202020204" pitchFamily="34" charset="0"/>
+                  </a:rPr>
+                  <a:t>En el caso 1 se observa patrón de interferencia, ya que la vibración oscila visiblemente entre 0.19 y 0.26. Al principio viaja la misma potencia inicial por ambos brazos (Ka = 0.5), pero como hay un brazo mucho m-as largo que otro, al llegar al acoplador de salida las amplitudes están muy desbalanceadas, por lo que la interferencia destructiva no es perfecta</a:t>
+                </a:r>
+              </a:p>
+              <a:p>
+                <a:pPr algn="just"/>
+                <a:r>
+                  <a:rPr lang="es-ES" sz="1200" dirty="0">
+                    <a:latin typeface="Arial" panose="020B0604020202020204" pitchFamily="34" charset="0"/>
+                    <a:cs typeface="Arial" panose="020B0604020202020204" pitchFamily="34" charset="0"/>
+                  </a:rPr>
+                  <a:t>En el caso 2, hay interferencia pero muy atenuada. Al principio el 90% de la luz viaja por el brazo corto (Ka = 0.1), provocando un desbalance de salida mucho mayor, por lo que el brazo corto domina por completo. Al haber tan poca luz en el brazo largo, la curva se vuelve más plana.</a:t>
+                </a:r>
+              </a:p>
+              <a:p>
+                <a:pPr algn="just"/>
+                <a:r>
+                  <a:rPr lang="es-ES" sz="1200" dirty="0">
+                    <a:latin typeface="Arial" panose="020B0604020202020204" pitchFamily="34" charset="0"/>
+                    <a:cs typeface="Arial" panose="020B0604020202020204" pitchFamily="34" charset="0"/>
+                  </a:rPr>
+                  <a:t>El ER es la diferencia entre el pico y el mínimo de una misma curva en dB, obteniendo aproximadamente 1.3 dB en el caso 1, y 0.5 dB en el caso 2, quedando bastante alejado de los 70 dB de un MZI ideal.</a:t>
+                </a:r>
+              </a:p>
+              <a:p>
+                <a:pPr algn="just"/>
+                <a:r>
+                  <a:rPr lang="es-ES" sz="1200" dirty="0">
+                    <a:latin typeface="Arial" panose="020B0604020202020204" pitchFamily="34" charset="0"/>
+                    <a:cs typeface="Arial" panose="020B0604020202020204" pitchFamily="34" charset="0"/>
+                  </a:rPr>
+                  <a:t>Para obtener el </a:t>
+                </a:r>
+                <a:r>
+                  <a:rPr lang="es-ES" sz="1200" dirty="0" err="1">
+                    <a:latin typeface="Arial" panose="020B0604020202020204" pitchFamily="34" charset="0"/>
+                    <a:cs typeface="Arial" panose="020B0604020202020204" pitchFamily="34" charset="0"/>
+                  </a:rPr>
+                  <a:t>ka</a:t>
+                </a:r>
+                <a:r>
+                  <a:rPr lang="es-ES" sz="1200" dirty="0">
+                    <a:latin typeface="Arial" panose="020B0604020202020204" pitchFamily="34" charset="0"/>
+                    <a:cs typeface="Arial" panose="020B0604020202020204" pitchFamily="34" charset="0"/>
+                  </a:rPr>
+                  <a:t> necesario para contrarrestar las pérdidas se calculan las pérdidas totales: 4 dB/cm * 5.596 cm = 22.384 dB.</a:t>
+                </a:r>
+              </a:p>
+              <a:p>
+                <a:pPr algn="just"/>
+                <a:r>
+                  <a:rPr lang="es-ES" sz="1200" dirty="0">
+                    <a:latin typeface="Arial" panose="020B0604020202020204" pitchFamily="34" charset="0"/>
+                    <a:cs typeface="Arial" panose="020B0604020202020204" pitchFamily="34" charset="0"/>
+                  </a:rPr>
+                  <a:t>Posteriormente se calcula </a:t>
+                </a:r>
+                <a14:m>
+                  <m:oMath xmlns:m="http://schemas.openxmlformats.org/officeDocument/2006/math">
+                    <m:sSup>
+                      <m:sSupPr>
+                        <m:ctrlPr>
+                          <a:rPr lang="es-ES" sz="1200" i="1" smtClean="0">
+                            <a:latin typeface="Cambria Math" panose="02040503050406030204" pitchFamily="18" charset="0"/>
+                            <a:cs typeface="Arial" panose="020B0604020202020204" pitchFamily="34" charset="0"/>
+                          </a:rPr>
+                        </m:ctrlPr>
+                      </m:sSupPr>
+                      <m:e>
+                        <m:r>
+                          <a:rPr lang="es-ES" sz="1200" i="1">
+                            <a:latin typeface="Cambria Math" panose="02040503050406030204" pitchFamily="18" charset="0"/>
+                            <a:cs typeface="Arial" panose="020B0604020202020204" pitchFamily="34" charset="0"/>
+                          </a:rPr>
+                          <m:t>𝛼</m:t>
+                        </m:r>
+                      </m:e>
+                      <m:sup>
+                        <m:r>
+                          <a:rPr lang="es-ES" sz="1200" b="0" i="1" smtClean="0">
+                            <a:latin typeface="Cambria Math" panose="02040503050406030204" pitchFamily="18" charset="0"/>
+                            <a:cs typeface="Arial" panose="020B0604020202020204" pitchFamily="34" charset="0"/>
+                          </a:rPr>
+                          <m:t>−22.384/10</m:t>
+                        </m:r>
+                      </m:sup>
+                    </m:sSup>
+                    <m:r>
+                      <a:rPr lang="es-ES" sz="1200" b="0" i="1" smtClean="0">
+                        <a:latin typeface="Cambria Math" panose="02040503050406030204" pitchFamily="18" charset="0"/>
+                        <a:cs typeface="Arial" panose="020B0604020202020204" pitchFamily="34" charset="0"/>
+                      </a:rPr>
+                      <m:t>=0.00577</m:t>
+                    </m:r>
+                  </m:oMath>
+                </a14:m>
+                <a:endParaRPr lang="es-ES" sz="1200" dirty="0">
+                  <a:latin typeface="Arial" panose="020B0604020202020204" pitchFamily="34" charset="0"/>
+                  <a:cs typeface="Arial" panose="020B0604020202020204" pitchFamily="34" charset="0"/>
+                </a:endParaRPr>
+              </a:p>
+              <a:p>
+                <a:pPr algn="just"/>
+                <a:r>
+                  <a:rPr lang="es-ES" sz="1200" dirty="0">
+                    <a:latin typeface="Arial" panose="020B0604020202020204" pitchFamily="34" charset="0"/>
+                    <a:cs typeface="Arial" panose="020B0604020202020204" pitchFamily="34" charset="0"/>
+                  </a:rPr>
+                  <a:t>Finalmente se calcula Ka = 1/1+𝜶 = 0.0042</a:t>
+                </a:r>
+              </a:p>
+            </p:txBody>
+          </p:sp>
+        </mc:Choice>
+        <mc:Fallback>
+          <p:sp>
+            <p:nvSpPr>
+              <p:cNvPr id="8" name="CuadroTexto 7">
+                <a:extLst>
+                  <a:ext uri="{FF2B5EF4-FFF2-40B4-BE49-F238E27FC236}">
+                    <a16:creationId xmlns:a16="http://schemas.microsoft.com/office/drawing/2014/main" id="{44B58534-54A6-9E43-8205-5457D4504CCA}"/>
+                  </a:ext>
+                </a:extLst>
+              </p:cNvPr>
+              <p:cNvSpPr txBox="1">
+                <a:spLocks noRot="1" noChangeAspect="1" noMove="1" noResize="1" noEditPoints="1" noAdjustHandles="1" noChangeArrowheads="1" noChangeShapeType="1" noTextEdit="1"/>
+              </p:cNvSpPr>
+              <p:nvPr/>
+            </p:nvSpPr>
+            <p:spPr>
+              <a:xfrm>
+                <a:off x="228600" y="1371600"/>
+                <a:ext cx="5410201" cy="3977243"/>
+              </a:xfrm>
+              <a:prstGeom prst="rect">
+                <a:avLst/>
+              </a:prstGeom>
+              <a:blipFill>
+                <a:blip r:embed="rId5"/>
+                <a:stretch>
+                  <a:fillRect l="-113" t="-153" b="-307"/>
+                </a:stretch>
+              </a:blipFill>
+            </p:spPr>
+            <p:txBody>
+              <a:bodyPr/>
+              <a:lstStyle/>
+              <a:p>
+                <a:r>
+                  <a:rPr lang="es-ES">
+                    <a:noFill/>
+                  </a:rPr>
+                  <a:t> </a:t>
+                </a:r>
+              </a:p>
+            </p:txBody>
+          </p:sp>
+        </mc:Fallback>
+      </mc:AlternateContent>
+    </p:spTree>
+    <p:extLst>
+      <p:ext uri="{BB962C8B-B14F-4D97-AF65-F5344CB8AC3E}">
+        <p14:creationId xmlns:p14="http://schemas.microsoft.com/office/powerpoint/2010/main" val="2980378229"/>
+      </p:ext>
+    </p:extLst>
+  </p:cSld>
+  <p:clrMapOvr>
+    <a:masterClrMapping/>
+  </p:clrMapOvr>
+</p:sld>
+</file>
+
+<file path=ppt/slides/slide11.xml><?xml version="1.0" encoding="utf-8"?>
+<p:sld xmlns:a="http://schemas.openxmlformats.org/drawingml/2006/main" xmlns:r="http://schemas.openxmlformats.org/officeDocument/2006/relationships" xmlns:p="http://schemas.openxmlformats.org/presentationml/2006/main">
+  <p:cSld>
+    <p:spTree>
+      <p:nvGrpSpPr>
         <p:cNvPr id="1" name=""/>
         <p:cNvGrpSpPr/>
         <p:nvPr/>
@@ -2915,7 +4213,7 @@
             <a:fld id="{C2F52289-4012-4053-9770-FE82CEB9514F}" type="slidenum">
               <a:rPr lang="en-US" smtClean="0"/>
               <a:pPr/>
-              <a:t>10</a:t>
+              <a:t>11</a:t>
             </a:fld>
             <a:endParaRPr lang="en-US" dirty="0"/>
           </a:p>
@@ -2936,7 +4234,7 @@
         <p:spPr>
           <a:xfrm>
             <a:off x="611029" y="4860335"/>
-            <a:ext cx="11199530" cy="830997"/>
+            <a:ext cx="11199530" cy="1200329"/>
           </a:xfrm>
           <a:prstGeom prst="rect">
             <a:avLst/>
@@ -2964,7 +4262,7 @@
                 <a:latin typeface="Arial" panose="020B0604020202020204" pitchFamily="34" charset="0"/>
                 <a:cs typeface="Arial" panose="020B0604020202020204" pitchFamily="34" charset="0"/>
               </a:rPr>
-              <a:t>Comment results. Try to classify the resonances, in which case are you close to critical coupling? Why?</a:t>
+              <a:t>Comment results: describer the transfer functions. which is the FSR? How is it related to the ring perimeter? </a:t>
             </a:r>
           </a:p>
           <a:p>
@@ -2973,6 +4271,2239 @@
               <a:latin typeface="Arial" panose="020B0604020202020204" pitchFamily="34" charset="0"/>
               <a:cs typeface="Arial" panose="020B0604020202020204" pitchFamily="34" charset="0"/>
             </a:endParaRPr>
+          </a:p>
+          <a:p>
+            <a:pPr algn="just"/>
+            <a:endParaRPr lang="en-US" sz="1200" dirty="0">
+              <a:latin typeface="Arial" panose="020B0604020202020204" pitchFamily="34" charset="0"/>
+              <a:cs typeface="Arial" panose="020B0604020202020204" pitchFamily="34" charset="0"/>
+            </a:endParaRPr>
+          </a:p>
+          <a:p>
+            <a:pPr algn="just"/>
+            <a:r>
+              <a:rPr lang="en-US" sz="1200" dirty="0">
+                <a:latin typeface="Arial" panose="020B0604020202020204" pitchFamily="34" charset="0"/>
+                <a:cs typeface="Arial" panose="020B0604020202020204" pitchFamily="34" charset="0"/>
+              </a:rPr>
+              <a:t>Show a numeric calculation of the FSR and length difference matching the results in the graph,</a:t>
+            </a:r>
+          </a:p>
+          <a:p>
+            <a:pPr algn="just"/>
+            <a:endParaRPr lang="en-US" sz="1200" dirty="0">
+              <a:latin typeface="Arial" panose="020B0604020202020204" pitchFamily="34" charset="0"/>
+              <a:cs typeface="Arial" panose="020B0604020202020204" pitchFamily="34" charset="0"/>
+            </a:endParaRPr>
+          </a:p>
+          <a:p>
+            <a:pPr algn="just"/>
+            <a:endParaRPr lang="en-US" sz="1200" dirty="0">
+              <a:latin typeface="Arial" panose="020B0604020202020204" pitchFamily="34" charset="0"/>
+              <a:cs typeface="Arial" panose="020B0604020202020204" pitchFamily="34" charset="0"/>
+            </a:endParaRPr>
+          </a:p>
+        </p:txBody>
+      </p:sp>
+      <p:sp>
+        <p:nvSpPr>
+          <p:cNvPr id="11" name="Rectángulo 10">
+            <a:extLst>
+              <a:ext uri="{FF2B5EF4-FFF2-40B4-BE49-F238E27FC236}">
+                <a16:creationId xmlns:a16="http://schemas.microsoft.com/office/drawing/2014/main" id="{B811A5F9-C0B5-716C-70FB-9472E1BC2CD3}"/>
+              </a:ext>
+            </a:extLst>
+          </p:cNvPr>
+          <p:cNvSpPr/>
+          <p:nvPr/>
+        </p:nvSpPr>
+        <p:spPr>
+          <a:xfrm>
+            <a:off x="611030" y="1418373"/>
+            <a:ext cx="3810000" cy="3306028"/>
+          </a:xfrm>
+          <a:prstGeom prst="rect">
+            <a:avLst/>
+          </a:prstGeom>
+          <a:noFill/>
+          <a:ln w="28575">
+            <a:solidFill>
+              <a:srgbClr val="E0700D"/>
+            </a:solidFill>
+          </a:ln>
+        </p:spPr>
+        <p:style>
+          <a:lnRef idx="2">
+            <a:schemeClr val="accent1">
+              <a:shade val="15000"/>
+            </a:schemeClr>
+          </a:lnRef>
+          <a:fillRef idx="1">
+            <a:schemeClr val="accent1"/>
+          </a:fillRef>
+          <a:effectRef idx="0">
+            <a:schemeClr val="accent1"/>
+          </a:effectRef>
+          <a:fontRef idx="minor">
+            <a:schemeClr val="lt1"/>
+          </a:fontRef>
+        </p:style>
+        <p:txBody>
+          <a:bodyPr rtlCol="0" anchor="ctr"/>
+          <a:lstStyle/>
+          <a:p>
+            <a:pPr algn="ctr"/>
+            <a:endParaRPr lang="en-US"/>
+          </a:p>
+        </p:txBody>
+      </p:sp>
+      <p:sp>
+        <p:nvSpPr>
+          <p:cNvPr id="12" name="CuadroTexto 11">
+            <a:extLst>
+              <a:ext uri="{FF2B5EF4-FFF2-40B4-BE49-F238E27FC236}">
+                <a16:creationId xmlns:a16="http://schemas.microsoft.com/office/drawing/2014/main" id="{1D17C364-5A66-F740-B152-8B41A2A4EF26}"/>
+              </a:ext>
+            </a:extLst>
+          </p:cNvPr>
+          <p:cNvSpPr txBox="1"/>
+          <p:nvPr/>
+        </p:nvSpPr>
+        <p:spPr>
+          <a:xfrm>
+            <a:off x="5536543" y="2494307"/>
+            <a:ext cx="2033313" cy="1323439"/>
+          </a:xfrm>
+          <a:prstGeom prst="rect">
+            <a:avLst/>
+          </a:prstGeom>
+          <a:noFill/>
+        </p:spPr>
+        <p:txBody>
+          <a:bodyPr wrap="none" rtlCol="0">
+            <a:spAutoFit/>
+          </a:bodyPr>
+          <a:lstStyle/>
+          <a:p>
+            <a:pPr algn="ctr"/>
+            <a:r>
+              <a:rPr lang="es-ES" sz="2000" dirty="0"/>
+              <a:t>Single ring</a:t>
+            </a:r>
+          </a:p>
+          <a:p>
+            <a:pPr algn="ctr"/>
+            <a:r>
+              <a:rPr lang="es-ES" sz="2000" dirty="0"/>
+              <a:t>transfer </a:t>
+            </a:r>
+            <a:r>
+              <a:rPr lang="es-ES" sz="2000" dirty="0" err="1"/>
+              <a:t>functions</a:t>
+            </a:r>
+            <a:endParaRPr lang="es-ES" sz="2000" dirty="0"/>
+          </a:p>
+          <a:p>
+            <a:pPr algn="ctr"/>
+            <a:endParaRPr lang="es-ES" sz="2000" dirty="0"/>
+          </a:p>
+          <a:p>
+            <a:pPr algn="ctr"/>
+            <a:r>
+              <a:rPr lang="es-ES" sz="2000" dirty="0" err="1"/>
+              <a:t>Logaritmic</a:t>
+            </a:r>
+            <a:r>
+              <a:rPr lang="es-ES" sz="2000" dirty="0"/>
+              <a:t> </a:t>
+            </a:r>
+            <a:r>
+              <a:rPr lang="es-ES" sz="2000" dirty="0" err="1"/>
+              <a:t>units</a:t>
+            </a:r>
+            <a:endParaRPr lang="en-US" sz="2000" dirty="0"/>
+          </a:p>
+        </p:txBody>
+      </p:sp>
+      <p:sp>
+        <p:nvSpPr>
+          <p:cNvPr id="3" name="Rectángulo 2">
+            <a:extLst>
+              <a:ext uri="{FF2B5EF4-FFF2-40B4-BE49-F238E27FC236}">
+                <a16:creationId xmlns:a16="http://schemas.microsoft.com/office/drawing/2014/main" id="{5FB43DF1-4048-35BF-BD58-4BF2A341D2EF}"/>
+              </a:ext>
+            </a:extLst>
+          </p:cNvPr>
+          <p:cNvSpPr/>
+          <p:nvPr/>
+        </p:nvSpPr>
+        <p:spPr>
+          <a:xfrm>
+            <a:off x="8610601" y="1418373"/>
+            <a:ext cx="3199959" cy="3306028"/>
+          </a:xfrm>
+          <a:prstGeom prst="rect">
+            <a:avLst/>
+          </a:prstGeom>
+          <a:solidFill>
+            <a:schemeClr val="bg1">
+              <a:lumMod val="95000"/>
+            </a:schemeClr>
+          </a:solidFill>
+          <a:ln w="28575">
+            <a:solidFill>
+              <a:srgbClr val="E0700D"/>
+            </a:solidFill>
+          </a:ln>
+        </p:spPr>
+        <p:style>
+          <a:lnRef idx="2">
+            <a:schemeClr val="accent1">
+              <a:shade val="15000"/>
+            </a:schemeClr>
+          </a:lnRef>
+          <a:fillRef idx="1">
+            <a:schemeClr val="accent1"/>
+          </a:fillRef>
+          <a:effectRef idx="0">
+            <a:schemeClr val="accent1"/>
+          </a:effectRef>
+          <a:fontRef idx="minor">
+            <a:schemeClr val="lt1"/>
+          </a:fontRef>
+        </p:style>
+        <p:txBody>
+          <a:bodyPr rtlCol="0" anchor="t" anchorCtr="0"/>
+          <a:lstStyle/>
+          <a:p>
+            <a:pPr algn="just"/>
+            <a:r>
+              <a:rPr lang="en-US" sz="1200" b="1" dirty="0">
+                <a:solidFill>
+                  <a:schemeClr val="tx1"/>
+                </a:solidFill>
+                <a:latin typeface="Arial" panose="020B0604020202020204" pitchFamily="34" charset="0"/>
+                <a:cs typeface="Arial" panose="020B0604020202020204" pitchFamily="34" charset="0"/>
+              </a:rPr>
+              <a:t>Hints:</a:t>
+            </a:r>
+          </a:p>
+          <a:p>
+            <a:pPr algn="just"/>
+            <a:endParaRPr lang="en-US" sz="1200" b="1" dirty="0">
+              <a:solidFill>
+                <a:schemeClr val="tx1"/>
+              </a:solidFill>
+              <a:latin typeface="Arial" panose="020B0604020202020204" pitchFamily="34" charset="0"/>
+              <a:cs typeface="Arial" panose="020B0604020202020204" pitchFamily="34" charset="0"/>
+            </a:endParaRPr>
+          </a:p>
+          <a:p>
+            <a:pPr algn="just"/>
+            <a:r>
+              <a:rPr lang="en-US" sz="1200" dirty="0">
+                <a:solidFill>
+                  <a:schemeClr val="tx1"/>
+                </a:solidFill>
+                <a:latin typeface="Arial" panose="020B0604020202020204" pitchFamily="34" charset="0"/>
+                <a:cs typeface="Arial" panose="020B0604020202020204" pitchFamily="34" charset="0"/>
+              </a:rPr>
+              <a:t>None </a:t>
+            </a:r>
+            <a:r>
+              <a:rPr lang="en-US" sz="1200" dirty="0">
+                <a:solidFill>
+                  <a:schemeClr val="tx1"/>
+                </a:solidFill>
+                <a:latin typeface="Arial" panose="020B0604020202020204" pitchFamily="34" charset="0"/>
+                <a:cs typeface="Arial" panose="020B0604020202020204" pitchFamily="34" charset="0"/>
+                <a:sym typeface="Wingdings" pitchFamily="2" charset="2"/>
+              </a:rPr>
+              <a:t> </a:t>
+            </a:r>
+            <a:endParaRPr lang="en-US" sz="1200" dirty="0">
+              <a:solidFill>
+                <a:schemeClr val="tx1"/>
+              </a:solidFill>
+              <a:latin typeface="Arial" panose="020B0604020202020204" pitchFamily="34" charset="0"/>
+              <a:cs typeface="Arial" panose="020B0604020202020204" pitchFamily="34" charset="0"/>
+            </a:endParaRPr>
+          </a:p>
+          <a:p>
+            <a:pPr algn="just"/>
+            <a:endParaRPr lang="en-US" sz="1200" dirty="0">
+              <a:solidFill>
+                <a:schemeClr val="tx1"/>
+              </a:solidFill>
+              <a:latin typeface="Arial" panose="020B0604020202020204" pitchFamily="34" charset="0"/>
+              <a:cs typeface="Arial" panose="020B0604020202020204" pitchFamily="34" charset="0"/>
+            </a:endParaRPr>
+          </a:p>
+          <a:p>
+            <a:pPr algn="just"/>
+            <a:endParaRPr lang="en-US" sz="1200" dirty="0">
+              <a:solidFill>
+                <a:schemeClr val="tx1"/>
+              </a:solidFill>
+              <a:latin typeface="Arial" panose="020B0604020202020204" pitchFamily="34" charset="0"/>
+              <a:cs typeface="Arial" panose="020B0604020202020204" pitchFamily="34" charset="0"/>
+            </a:endParaRPr>
+          </a:p>
+        </p:txBody>
+      </p:sp>
+      <p:sp>
+        <p:nvSpPr>
+          <p:cNvPr id="14" name="Rectángulo 13">
+            <a:extLst>
+              <a:ext uri="{FF2B5EF4-FFF2-40B4-BE49-F238E27FC236}">
+                <a16:creationId xmlns:a16="http://schemas.microsoft.com/office/drawing/2014/main" id="{6AA857E7-5C39-DCE1-10B5-40300FCF4B26}"/>
+              </a:ext>
+            </a:extLst>
+          </p:cNvPr>
+          <p:cNvSpPr/>
+          <p:nvPr/>
+        </p:nvSpPr>
+        <p:spPr>
+          <a:xfrm>
+            <a:off x="4648200" y="1418373"/>
+            <a:ext cx="3810000" cy="3306028"/>
+          </a:xfrm>
+          <a:prstGeom prst="rect">
+            <a:avLst/>
+          </a:prstGeom>
+          <a:noFill/>
+          <a:ln w="28575">
+            <a:solidFill>
+              <a:srgbClr val="E0700D"/>
+            </a:solidFill>
+          </a:ln>
+        </p:spPr>
+        <p:style>
+          <a:lnRef idx="2">
+            <a:schemeClr val="accent1">
+              <a:shade val="15000"/>
+            </a:schemeClr>
+          </a:lnRef>
+          <a:fillRef idx="1">
+            <a:schemeClr val="accent1"/>
+          </a:fillRef>
+          <a:effectRef idx="0">
+            <a:schemeClr val="accent1"/>
+          </a:effectRef>
+          <a:fontRef idx="minor">
+            <a:schemeClr val="lt1"/>
+          </a:fontRef>
+        </p:style>
+        <p:txBody>
+          <a:bodyPr rtlCol="0" anchor="ctr"/>
+          <a:lstStyle/>
+          <a:p>
+            <a:pPr algn="ctr"/>
+            <a:endParaRPr lang="en-US"/>
+          </a:p>
+        </p:txBody>
+      </p:sp>
+      <p:sp>
+        <p:nvSpPr>
+          <p:cNvPr id="15" name="CuadroTexto 14">
+            <a:extLst>
+              <a:ext uri="{FF2B5EF4-FFF2-40B4-BE49-F238E27FC236}">
+                <a16:creationId xmlns:a16="http://schemas.microsoft.com/office/drawing/2014/main" id="{54CF28B4-1346-F41D-2CD8-EA104ABBFB98}"/>
+              </a:ext>
+            </a:extLst>
+          </p:cNvPr>
+          <p:cNvSpPr txBox="1"/>
+          <p:nvPr/>
+        </p:nvSpPr>
+        <p:spPr>
+          <a:xfrm>
+            <a:off x="1499379" y="2478160"/>
+            <a:ext cx="2033313" cy="1323439"/>
+          </a:xfrm>
+          <a:prstGeom prst="rect">
+            <a:avLst/>
+          </a:prstGeom>
+          <a:noFill/>
+        </p:spPr>
+        <p:txBody>
+          <a:bodyPr wrap="none" rtlCol="0">
+            <a:spAutoFit/>
+          </a:bodyPr>
+          <a:lstStyle/>
+          <a:p>
+            <a:pPr algn="ctr"/>
+            <a:r>
+              <a:rPr lang="es-ES" sz="2000" dirty="0"/>
+              <a:t>Single ring</a:t>
+            </a:r>
+          </a:p>
+          <a:p>
+            <a:pPr algn="ctr"/>
+            <a:r>
+              <a:rPr lang="es-ES" sz="2000" dirty="0"/>
+              <a:t>transfer </a:t>
+            </a:r>
+            <a:r>
+              <a:rPr lang="es-ES" sz="2000" dirty="0" err="1"/>
+              <a:t>functions</a:t>
+            </a:r>
+            <a:endParaRPr lang="es-ES" sz="2000" dirty="0"/>
+          </a:p>
+          <a:p>
+            <a:pPr algn="ctr"/>
+            <a:endParaRPr lang="es-ES" sz="2000" dirty="0"/>
+          </a:p>
+          <a:p>
+            <a:pPr algn="ctr"/>
+            <a:r>
+              <a:rPr lang="es-ES" sz="2000" dirty="0"/>
+              <a:t>Linear </a:t>
+            </a:r>
+            <a:r>
+              <a:rPr lang="es-ES" sz="2000" dirty="0" err="1"/>
+              <a:t>units</a:t>
+            </a:r>
+            <a:endParaRPr lang="en-US" sz="2000" dirty="0"/>
+          </a:p>
+        </p:txBody>
+      </p:sp>
+      <p:pic>
+        <p:nvPicPr>
+          <p:cNvPr id="9" name="Gráfico 8">
+            <a:extLst>
+              <a:ext uri="{FF2B5EF4-FFF2-40B4-BE49-F238E27FC236}">
+                <a16:creationId xmlns:a16="http://schemas.microsoft.com/office/drawing/2014/main" id="{83C716FC-7070-6DA5-E116-195D4CD9BDB4}"/>
+              </a:ext>
+            </a:extLst>
+          </p:cNvPr>
+          <p:cNvPicPr>
+            <a:picLocks noChangeAspect="1"/>
+          </p:cNvPicPr>
+          <p:nvPr/>
+        </p:nvPicPr>
+        <p:blipFill>
+          <a:blip>
+            <a:extLst>
+              <a:ext uri="{96DAC541-7B7A-43D3-8B79-37D633B846F1}">
+                <asvg:svgBlip xmlns:asvg="http://schemas.microsoft.com/office/drawing/2016/SVG/main" r:embed="rId2"/>
+              </a:ext>
+            </a:extLst>
+          </a:blip>
+          <a:stretch>
+            <a:fillRect/>
+          </a:stretch>
+        </p:blipFill>
+        <p:spPr>
+          <a:xfrm>
+            <a:off x="5045006" y="6356057"/>
+            <a:ext cx="6409575" cy="363174"/>
+          </a:xfrm>
+          <a:prstGeom prst="rect">
+            <a:avLst/>
+          </a:prstGeom>
+        </p:spPr>
+      </p:pic>
+      <p:sp>
+        <p:nvSpPr>
+          <p:cNvPr id="10" name="object 16">
+            <a:extLst>
+              <a:ext uri="{FF2B5EF4-FFF2-40B4-BE49-F238E27FC236}">
+                <a16:creationId xmlns:a16="http://schemas.microsoft.com/office/drawing/2014/main" id="{C319E249-48A9-70AD-7ACE-23CF9ABF6137}"/>
+              </a:ext>
+            </a:extLst>
+          </p:cNvPr>
+          <p:cNvSpPr txBox="1">
+            <a:spLocks/>
+          </p:cNvSpPr>
+          <p:nvPr/>
+        </p:nvSpPr>
+        <p:spPr>
+          <a:xfrm>
+            <a:off x="685800" y="408883"/>
+            <a:ext cx="10994410" cy="718145"/>
+          </a:xfrm>
+          <a:prstGeom prst="rect">
+            <a:avLst/>
+          </a:prstGeom>
+        </p:spPr>
+        <p:txBody>
+          <a:bodyPr vert="horz" wrap="square" lIns="0" tIns="12700" rIns="0" bIns="0" rtlCol="0">
+            <a:spAutoFit/>
+          </a:bodyPr>
+          <a:lstStyle>
+            <a:lvl1pPr>
+              <a:defRPr sz="2000" b="1" i="0">
+                <a:solidFill>
+                  <a:schemeClr val="tx1"/>
+                </a:solidFill>
+                <a:latin typeface="Calibri"/>
+                <a:ea typeface="+mj-ea"/>
+                <a:cs typeface="Calibri"/>
+              </a:defRPr>
+            </a:lvl1pPr>
+          </a:lstStyle>
+          <a:p>
+            <a:pPr marL="12700">
+              <a:spcBef>
+                <a:spcPts val="100"/>
+              </a:spcBef>
+            </a:pPr>
+            <a:r>
+              <a:rPr lang="en-US" sz="2500" kern="0" dirty="0"/>
+              <a:t>Learning outcome #4 – Ring Resonator</a:t>
+            </a:r>
+          </a:p>
+          <a:p>
+            <a:pPr marL="12700">
+              <a:spcBef>
+                <a:spcPts val="100"/>
+              </a:spcBef>
+            </a:pPr>
+            <a:r>
+              <a:rPr lang="en-US" b="0" kern="0" spc="-5" dirty="0">
+                <a:latin typeface="+mj-lt"/>
+                <a:cs typeface="Lucida Sans"/>
+              </a:rPr>
+              <a:t>Single ring resonator – most simple case Constant coupler K (no wavelength variation)</a:t>
+            </a:r>
+          </a:p>
+        </p:txBody>
+      </p:sp>
+    </p:spTree>
+    <p:extLst>
+      <p:ext uri="{BB962C8B-B14F-4D97-AF65-F5344CB8AC3E}">
+        <p14:creationId xmlns:p14="http://schemas.microsoft.com/office/powerpoint/2010/main" val="543184549"/>
+      </p:ext>
+    </p:extLst>
+  </p:cSld>
+  <p:clrMapOvr>
+    <a:masterClrMapping/>
+  </p:clrMapOvr>
+</p:sld>
+</file>
+
+<file path=ppt/slides/slide12.xml><?xml version="1.0" encoding="utf-8"?>
+<p:sld xmlns:a="http://schemas.openxmlformats.org/drawingml/2006/main" xmlns:r="http://schemas.openxmlformats.org/officeDocument/2006/relationships" xmlns:p="http://schemas.openxmlformats.org/presentationml/2006/main">
+  <p:cSld>
+    <p:spTree>
+      <p:nvGrpSpPr>
+        <p:cNvPr id="1" name="">
+          <a:extLst>
+            <a:ext uri="{FF2B5EF4-FFF2-40B4-BE49-F238E27FC236}">
+              <a16:creationId xmlns:a16="http://schemas.microsoft.com/office/drawing/2014/main" id="{BDE7CD3A-378A-4949-D81A-D94C0873486F}"/>
+            </a:ext>
+          </a:extLst>
+        </p:cNvPr>
+        <p:cNvGrpSpPr/>
+        <p:nvPr/>
+      </p:nvGrpSpPr>
+      <p:grpSpPr>
+        <a:xfrm>
+          <a:off x="0" y="0"/>
+          <a:ext cx="0" cy="0"/>
+          <a:chOff x="0" y="0"/>
+          <a:chExt cx="0" cy="0"/>
+        </a:xfrm>
+      </p:grpSpPr>
+      <p:sp>
+        <p:nvSpPr>
+          <p:cNvPr id="16" name="object 16">
+            <a:extLst>
+              <a:ext uri="{FF2B5EF4-FFF2-40B4-BE49-F238E27FC236}">
+                <a16:creationId xmlns:a16="http://schemas.microsoft.com/office/drawing/2014/main" id="{1599EBDC-53DF-1D9E-98CC-B7B61ABF5EC3}"/>
+              </a:ext>
+            </a:extLst>
+          </p:cNvPr>
+          <p:cNvSpPr txBox="1">
+            <a:spLocks noGrp="1"/>
+          </p:cNvSpPr>
+          <p:nvPr>
+            <p:ph type="title"/>
+          </p:nvPr>
+        </p:nvSpPr>
+        <p:spPr>
+          <a:xfrm>
+            <a:off x="685800" y="408883"/>
+            <a:ext cx="10994410" cy="397545"/>
+          </a:xfrm>
+          <a:prstGeom prst="rect">
+            <a:avLst/>
+          </a:prstGeom>
+        </p:spPr>
+        <p:txBody>
+          <a:bodyPr vert="horz" wrap="square" lIns="0" tIns="12700" rIns="0" bIns="0" rtlCol="0">
+            <a:spAutoFit/>
+          </a:bodyPr>
+          <a:lstStyle/>
+          <a:p>
+            <a:pPr marL="12700">
+              <a:spcBef>
+                <a:spcPts val="100"/>
+              </a:spcBef>
+            </a:pPr>
+            <a:r>
+              <a:rPr lang="en-US" sz="2500" dirty="0"/>
+              <a:t>Learning outcome #4 – Ring Resonator</a:t>
+            </a:r>
+          </a:p>
+        </p:txBody>
+      </p:sp>
+      <p:pic>
+        <p:nvPicPr>
+          <p:cNvPr id="83" name="Gráfico 82">
+            <a:extLst>
+              <a:ext uri="{FF2B5EF4-FFF2-40B4-BE49-F238E27FC236}">
+                <a16:creationId xmlns:a16="http://schemas.microsoft.com/office/drawing/2014/main" id="{20DB9D6A-983E-5B05-908C-DB90C86B4D8D}"/>
+              </a:ext>
+            </a:extLst>
+          </p:cNvPr>
+          <p:cNvPicPr>
+            <a:picLocks noChangeAspect="1"/>
+          </p:cNvPicPr>
+          <p:nvPr/>
+        </p:nvPicPr>
+        <p:blipFill>
+          <a:blip>
+            <a:extLst>
+              <a:ext uri="{96DAC541-7B7A-43D3-8B79-37D633B846F1}">
+                <asvg:svgBlip xmlns:asvg="http://schemas.microsoft.com/office/drawing/2016/SVG/main" r:embed="rId3"/>
+              </a:ext>
+            </a:extLst>
+          </a:blip>
+          <a:stretch>
+            <a:fillRect/>
+          </a:stretch>
+        </p:blipFill>
+        <p:spPr>
+          <a:xfrm>
+            <a:off x="5045006" y="6356057"/>
+            <a:ext cx="6409575" cy="363174"/>
+          </a:xfrm>
+          <a:prstGeom prst="rect">
+            <a:avLst/>
+          </a:prstGeom>
+        </p:spPr>
+      </p:pic>
+      <p:sp>
+        <p:nvSpPr>
+          <p:cNvPr id="84" name="Marcador de número de diapositiva 83">
+            <a:extLst>
+              <a:ext uri="{FF2B5EF4-FFF2-40B4-BE49-F238E27FC236}">
+                <a16:creationId xmlns:a16="http://schemas.microsoft.com/office/drawing/2014/main" id="{E4B08E71-D6FF-FC2B-030B-1F5761A8FA5A}"/>
+              </a:ext>
+            </a:extLst>
+          </p:cNvPr>
+          <p:cNvSpPr>
+            <a:spLocks noGrp="1"/>
+          </p:cNvSpPr>
+          <p:nvPr>
+            <p:ph type="sldNum" sz="quarter" idx="7"/>
+          </p:nvPr>
+        </p:nvSpPr>
+        <p:spPr/>
+        <p:txBody>
+          <a:bodyPr/>
+          <a:lstStyle/>
+          <a:p>
+            <a:fld id="{B6F15528-21DE-4FAA-801E-634DDDAF4B2B}" type="slidenum">
+              <a:rPr lang="es-ES" smtClean="0"/>
+              <a:t>12</a:t>
+            </a:fld>
+            <a:endParaRPr lang="es-ES"/>
+          </a:p>
+        </p:txBody>
+      </p:sp>
+      <p:sp>
+        <p:nvSpPr>
+          <p:cNvPr id="3" name="Marcador de pie de página 2">
+            <a:extLst>
+              <a:ext uri="{FF2B5EF4-FFF2-40B4-BE49-F238E27FC236}">
+                <a16:creationId xmlns:a16="http://schemas.microsoft.com/office/drawing/2014/main" id="{C190C0DE-1624-89A4-91C1-EEA3AD098109}"/>
+              </a:ext>
+            </a:extLst>
+          </p:cNvPr>
+          <p:cNvSpPr>
+            <a:spLocks noGrp="1"/>
+          </p:cNvSpPr>
+          <p:nvPr>
+            <p:ph type="ftr" sz="quarter" idx="5"/>
+          </p:nvPr>
+        </p:nvSpPr>
+        <p:spPr/>
+        <p:txBody>
+          <a:bodyPr/>
+          <a:lstStyle/>
+          <a:p>
+            <a:pPr marL="12700">
+              <a:spcBef>
+                <a:spcPts val="15"/>
+              </a:spcBef>
+            </a:pPr>
+            <a:r>
+              <a:rPr lang="es-ES" spc="-5"/>
+              <a:t>LAB 3.0. CIRCUITS &amp; COMPACT MODELS</a:t>
+            </a:r>
+            <a:endParaRPr lang="es-ES" spc="-5" dirty="0"/>
+          </a:p>
+        </p:txBody>
+      </p:sp>
+      <p:sp>
+        <p:nvSpPr>
+          <p:cNvPr id="5" name="CuadroTexto 4">
+            <a:extLst>
+              <a:ext uri="{FF2B5EF4-FFF2-40B4-BE49-F238E27FC236}">
+                <a16:creationId xmlns:a16="http://schemas.microsoft.com/office/drawing/2014/main" id="{8AB34D49-C3C7-0F45-DA5C-25D2D75FE9FB}"/>
+              </a:ext>
+            </a:extLst>
+          </p:cNvPr>
+          <p:cNvSpPr txBox="1"/>
+          <p:nvPr/>
+        </p:nvSpPr>
+        <p:spPr>
+          <a:xfrm>
+            <a:off x="1402080" y="4602060"/>
+            <a:ext cx="9281160" cy="1015663"/>
+          </a:xfrm>
+          <a:prstGeom prst="rect">
+            <a:avLst/>
+          </a:prstGeom>
+          <a:noFill/>
+        </p:spPr>
+        <p:txBody>
+          <a:bodyPr wrap="square">
+            <a:spAutoFit/>
+          </a:bodyPr>
+          <a:lstStyle/>
+          <a:p>
+            <a:pPr algn="just"/>
+            <a:r>
+              <a:rPr lang="es-ES" sz="1200" dirty="0">
+                <a:latin typeface="Arial" panose="020B0604020202020204" pitchFamily="34" charset="0"/>
+                <a:cs typeface="Arial" panose="020B0604020202020204" pitchFamily="34" charset="0"/>
+              </a:rPr>
+              <a:t>La función de transferencia se mantiene constante en la mayor parte de la curva, obteniendo valles estrechos de forma periódica cada FSR. Esto provoca el efecto de que le luz pasa de lago por la guía en la mayoría de longitudes de onda.</a:t>
+            </a:r>
+          </a:p>
+          <a:p>
+            <a:pPr algn="just"/>
+            <a:r>
+              <a:rPr lang="es-ES" sz="1200" dirty="0">
+                <a:latin typeface="Arial" panose="020B0604020202020204" pitchFamily="34" charset="0"/>
+                <a:cs typeface="Arial" panose="020B0604020202020204" pitchFamily="34" charset="0"/>
+              </a:rPr>
+              <a:t>Como puede observarse en la gráfica, la distancia entre valles es de aproximadamente 24 nm, que coincide con el valor teórico que debería tener la FSR para un perímetro de anillo de 50 </a:t>
+            </a:r>
+            <a:r>
+              <a:rPr lang="es-ES" sz="1200" dirty="0" err="1">
+                <a:latin typeface="Arial" panose="020B0604020202020204" pitchFamily="34" charset="0"/>
+                <a:cs typeface="Arial" panose="020B0604020202020204" pitchFamily="34" charset="0"/>
+              </a:rPr>
+              <a:t>um</a:t>
+            </a:r>
+            <a:r>
+              <a:rPr lang="es-ES" sz="1200" dirty="0">
+                <a:latin typeface="Arial" panose="020B0604020202020204" pitchFamily="34" charset="0"/>
+                <a:cs typeface="Arial" panose="020B0604020202020204" pitchFamily="34" charset="0"/>
+              </a:rPr>
+              <a:t>, con valores de ng = 2 y </a:t>
+            </a:r>
+            <a:r>
+              <a:rPr lang="el-GR" sz="1200" dirty="0">
+                <a:latin typeface="Arial" panose="020B0604020202020204" pitchFamily="34" charset="0"/>
+                <a:cs typeface="Arial" panose="020B0604020202020204" pitchFamily="34" charset="0"/>
+              </a:rPr>
+              <a:t>λ</a:t>
+            </a:r>
+            <a:r>
+              <a:rPr lang="es-ES" sz="1200" dirty="0">
+                <a:latin typeface="Arial" panose="020B0604020202020204" pitchFamily="34" charset="0"/>
+                <a:cs typeface="Arial" panose="020B0604020202020204" pitchFamily="34" charset="0"/>
+              </a:rPr>
+              <a:t> = 1.55 </a:t>
+            </a:r>
+            <a:r>
+              <a:rPr lang="es-ES" sz="1200" dirty="0" err="1">
+                <a:latin typeface="Arial" panose="020B0604020202020204" pitchFamily="34" charset="0"/>
+                <a:cs typeface="Arial" panose="020B0604020202020204" pitchFamily="34" charset="0"/>
+              </a:rPr>
+              <a:t>um</a:t>
+            </a:r>
+            <a:endParaRPr lang="es-ES" sz="1200" dirty="0">
+              <a:latin typeface="Arial" panose="020B0604020202020204" pitchFamily="34" charset="0"/>
+              <a:cs typeface="Arial" panose="020B0604020202020204" pitchFamily="34" charset="0"/>
+            </a:endParaRPr>
+          </a:p>
+          <a:p>
+            <a:pPr algn="just"/>
+            <a:endParaRPr lang="es-ES" sz="1200" dirty="0">
+              <a:latin typeface="Arial" panose="020B0604020202020204" pitchFamily="34" charset="0"/>
+              <a:cs typeface="Arial" panose="020B0604020202020204" pitchFamily="34" charset="0"/>
+            </a:endParaRPr>
+          </a:p>
+        </p:txBody>
+      </p:sp>
+      <mc:AlternateContent xmlns:mc="http://schemas.openxmlformats.org/markup-compatibility/2006">
+        <mc:Choice xmlns:a14="http://schemas.microsoft.com/office/drawing/2010/main" Requires="a14">
+          <p:sp>
+            <p:nvSpPr>
+              <p:cNvPr id="7" name="CuadroTexto 6">
+                <a:extLst>
+                  <a:ext uri="{FF2B5EF4-FFF2-40B4-BE49-F238E27FC236}">
+                    <a16:creationId xmlns:a16="http://schemas.microsoft.com/office/drawing/2014/main" id="{B2F36F08-6F75-2335-9F24-9B180FD04EB9}"/>
+                  </a:ext>
+                </a:extLst>
+              </p:cNvPr>
+              <p:cNvSpPr txBox="1"/>
+              <p:nvPr/>
+            </p:nvSpPr>
+            <p:spPr>
+              <a:xfrm>
+                <a:off x="2885440" y="5441126"/>
+                <a:ext cx="6126480" cy="495264"/>
+              </a:xfrm>
+              <a:prstGeom prst="rect">
+                <a:avLst/>
+              </a:prstGeom>
+              <a:noFill/>
+            </p:spPr>
+            <p:txBody>
+              <a:bodyPr wrap="square">
+                <a:spAutoFit/>
+              </a:bodyPr>
+              <a:lstStyle/>
+              <a:p>
+                <a:pPr algn="just"/>
+                <a14:m>
+                  <m:oMathPara xmlns:m="http://schemas.openxmlformats.org/officeDocument/2006/math">
+                    <m:oMathParaPr>
+                      <m:jc m:val="centerGroup"/>
+                    </m:oMathParaPr>
+                    <m:oMath xmlns:m="http://schemas.openxmlformats.org/officeDocument/2006/math">
+                      <m:r>
+                        <a:rPr lang="es-ES" sz="1200" b="0" i="1" smtClean="0">
+                          <a:latin typeface="Cambria Math" panose="02040503050406030204" pitchFamily="18" charset="0"/>
+                          <a:cs typeface="Arial" panose="020B0604020202020204" pitchFamily="34" charset="0"/>
+                        </a:rPr>
+                        <m:t>𝐹𝑆𝑅</m:t>
+                      </m:r>
+                      <m:r>
+                        <a:rPr lang="es-ES" sz="1200" b="0" i="1" smtClean="0">
+                          <a:latin typeface="Cambria Math" panose="02040503050406030204" pitchFamily="18" charset="0"/>
+                          <a:cs typeface="Arial" panose="020B0604020202020204" pitchFamily="34" charset="0"/>
+                        </a:rPr>
+                        <m:t>=</m:t>
+                      </m:r>
+                      <m:f>
+                        <m:fPr>
+                          <m:ctrlPr>
+                            <a:rPr lang="es-ES" sz="1200" b="0" i="1" smtClean="0">
+                              <a:latin typeface="Cambria Math" panose="02040503050406030204" pitchFamily="18" charset="0"/>
+                              <a:cs typeface="Arial" panose="020B0604020202020204" pitchFamily="34" charset="0"/>
+                            </a:rPr>
+                          </m:ctrlPr>
+                        </m:fPr>
+                        <m:num>
+                          <m:sSup>
+                            <m:sSupPr>
+                              <m:ctrlPr>
+                                <a:rPr lang="el-GR" sz="1200" i="1" smtClean="0">
+                                  <a:latin typeface="Cambria Math" panose="02040503050406030204" pitchFamily="18" charset="0"/>
+                                  <a:cs typeface="Arial" panose="020B0604020202020204" pitchFamily="34" charset="0"/>
+                                </a:rPr>
+                              </m:ctrlPr>
+                            </m:sSupPr>
+                            <m:e>
+                              <m:r>
+                                <a:rPr lang="el-GR" sz="1200" i="1">
+                                  <a:latin typeface="Cambria Math" panose="02040503050406030204" pitchFamily="18" charset="0"/>
+                                  <a:cs typeface="Arial" panose="020B0604020202020204" pitchFamily="34" charset="0"/>
+                                </a:rPr>
+                                <m:t>𝜆</m:t>
+                              </m:r>
+                            </m:e>
+                            <m:sup>
+                              <m:r>
+                                <a:rPr lang="es-ES" sz="1200" b="0" i="1" smtClean="0">
+                                  <a:latin typeface="Cambria Math" panose="02040503050406030204" pitchFamily="18" charset="0"/>
+                                  <a:cs typeface="Arial" panose="020B0604020202020204" pitchFamily="34" charset="0"/>
+                                </a:rPr>
+                                <m:t>2</m:t>
+                              </m:r>
+                            </m:sup>
+                          </m:sSup>
+                        </m:num>
+                        <m:den>
+                          <m:r>
+                            <a:rPr lang="es-ES" sz="1200" b="0" i="1" smtClean="0">
+                              <a:latin typeface="Cambria Math" panose="02040503050406030204" pitchFamily="18" charset="0"/>
+                              <a:cs typeface="Arial" panose="020B0604020202020204" pitchFamily="34" charset="0"/>
+                            </a:rPr>
+                            <m:t>𝑛𝑔</m:t>
+                          </m:r>
+                          <m:r>
+                            <a:rPr lang="es-ES" sz="1200" b="0" i="1" smtClean="0">
+                              <a:latin typeface="Cambria Math" panose="02040503050406030204" pitchFamily="18" charset="0"/>
+                              <a:cs typeface="Arial" panose="020B0604020202020204" pitchFamily="34" charset="0"/>
+                            </a:rPr>
+                            <m:t>∗</m:t>
+                          </m:r>
+                          <m:r>
+                            <a:rPr lang="es-ES" sz="1200" b="0" i="1" smtClean="0">
+                              <a:latin typeface="Cambria Math" panose="02040503050406030204" pitchFamily="18" charset="0"/>
+                              <a:cs typeface="Arial" panose="020B0604020202020204" pitchFamily="34" charset="0"/>
+                            </a:rPr>
+                            <m:t>𝐿</m:t>
+                          </m:r>
+                        </m:den>
+                      </m:f>
+                    </m:oMath>
+                  </m:oMathPara>
+                </a14:m>
+                <a:endParaRPr lang="en-US" sz="1200" dirty="0">
+                  <a:latin typeface="Arial" panose="020B0604020202020204" pitchFamily="34" charset="0"/>
+                  <a:cs typeface="Arial" panose="020B0604020202020204" pitchFamily="34" charset="0"/>
+                </a:endParaRPr>
+              </a:p>
+            </p:txBody>
+          </p:sp>
+        </mc:Choice>
+        <mc:Fallback>
+          <p:sp>
+            <p:nvSpPr>
+              <p:cNvPr id="7" name="CuadroTexto 6">
+                <a:extLst>
+                  <a:ext uri="{FF2B5EF4-FFF2-40B4-BE49-F238E27FC236}">
+                    <a16:creationId xmlns:a16="http://schemas.microsoft.com/office/drawing/2014/main" id="{B2F36F08-6F75-2335-9F24-9B180FD04EB9}"/>
+                  </a:ext>
+                </a:extLst>
+              </p:cNvPr>
+              <p:cNvSpPr txBox="1">
+                <a:spLocks noRot="1" noChangeAspect="1" noMove="1" noResize="1" noEditPoints="1" noAdjustHandles="1" noChangeArrowheads="1" noChangeShapeType="1" noTextEdit="1"/>
+              </p:cNvSpPr>
+              <p:nvPr/>
+            </p:nvSpPr>
+            <p:spPr>
+              <a:xfrm>
+                <a:off x="2885440" y="5441126"/>
+                <a:ext cx="6126480" cy="495264"/>
+              </a:xfrm>
+              <a:prstGeom prst="rect">
+                <a:avLst/>
+              </a:prstGeom>
+              <a:blipFill>
+                <a:blip r:embed="rId4"/>
+                <a:stretch>
+                  <a:fillRect/>
+                </a:stretch>
+              </a:blipFill>
+            </p:spPr>
+            <p:txBody>
+              <a:bodyPr/>
+              <a:lstStyle/>
+              <a:p>
+                <a:r>
+                  <a:rPr lang="es-ES">
+                    <a:noFill/>
+                  </a:rPr>
+                  <a:t> </a:t>
+                </a:r>
+              </a:p>
+            </p:txBody>
+          </p:sp>
+        </mc:Fallback>
+      </mc:AlternateContent>
+      <p:pic>
+        <p:nvPicPr>
+          <p:cNvPr id="4" name="Imagen 3">
+            <a:extLst>
+              <a:ext uri="{FF2B5EF4-FFF2-40B4-BE49-F238E27FC236}">
+                <a16:creationId xmlns:a16="http://schemas.microsoft.com/office/drawing/2014/main" id="{7A4979E6-5F82-653A-0EC8-19D7D845A338}"/>
+              </a:ext>
+            </a:extLst>
+          </p:cNvPr>
+          <p:cNvPicPr>
+            <a:picLocks noChangeAspect="1"/>
+          </p:cNvPicPr>
+          <p:nvPr/>
+        </p:nvPicPr>
+        <p:blipFill>
+          <a:blip r:embed="rId5"/>
+          <a:stretch>
+            <a:fillRect/>
+          </a:stretch>
+        </p:blipFill>
+        <p:spPr>
+          <a:xfrm>
+            <a:off x="3031385" y="945982"/>
+            <a:ext cx="6129230" cy="3516523"/>
+          </a:xfrm>
+          <a:prstGeom prst="rect">
+            <a:avLst/>
+          </a:prstGeom>
+        </p:spPr>
+      </p:pic>
+    </p:spTree>
+    <p:extLst>
+      <p:ext uri="{BB962C8B-B14F-4D97-AF65-F5344CB8AC3E}">
+        <p14:creationId xmlns:p14="http://schemas.microsoft.com/office/powerpoint/2010/main" val="2218667834"/>
+      </p:ext>
+    </p:extLst>
+  </p:cSld>
+  <p:clrMapOvr>
+    <a:masterClrMapping/>
+  </p:clrMapOvr>
+</p:sld>
+</file>
+
+<file path=ppt/slides/slide13.xml><?xml version="1.0" encoding="utf-8"?>
+<p:sld xmlns:a="http://schemas.openxmlformats.org/drawingml/2006/main" xmlns:r="http://schemas.openxmlformats.org/officeDocument/2006/relationships" xmlns:p="http://schemas.openxmlformats.org/presentationml/2006/main">
+  <p:cSld>
+    <p:spTree>
+      <p:nvGrpSpPr>
+        <p:cNvPr id="1" name="">
+          <a:extLst>
+            <a:ext uri="{FF2B5EF4-FFF2-40B4-BE49-F238E27FC236}">
+              <a16:creationId xmlns:a16="http://schemas.microsoft.com/office/drawing/2014/main" id="{960CA2DF-810F-7BDA-CFF3-0CFEE760301A}"/>
+            </a:ext>
+          </a:extLst>
+        </p:cNvPr>
+        <p:cNvGrpSpPr/>
+        <p:nvPr/>
+      </p:nvGrpSpPr>
+      <p:grpSpPr>
+        <a:xfrm>
+          <a:off x="0" y="0"/>
+          <a:ext cx="0" cy="0"/>
+          <a:chOff x="0" y="0"/>
+          <a:chExt cx="0" cy="0"/>
+        </a:xfrm>
+      </p:grpSpPr>
+      <p:sp>
+        <p:nvSpPr>
+          <p:cNvPr id="5" name="Marcador de pie de página 4">
+            <a:extLst>
+              <a:ext uri="{FF2B5EF4-FFF2-40B4-BE49-F238E27FC236}">
+                <a16:creationId xmlns:a16="http://schemas.microsoft.com/office/drawing/2014/main" id="{4915C280-A84A-95DA-94D2-FE062C8ED61F}"/>
+              </a:ext>
+            </a:extLst>
+          </p:cNvPr>
+          <p:cNvSpPr>
+            <a:spLocks noGrp="1"/>
+          </p:cNvSpPr>
+          <p:nvPr>
+            <p:ph type="ftr" sz="quarter" idx="5"/>
+          </p:nvPr>
+        </p:nvSpPr>
+        <p:spPr/>
+        <p:txBody>
+          <a:bodyPr/>
+          <a:lstStyle/>
+          <a:p>
+            <a:r>
+              <a:rPr lang="en-US"/>
+              <a:t>LAB 3.0. CIRCUITS &amp; COMPACT MODELS</a:t>
+            </a:r>
+          </a:p>
+        </p:txBody>
+      </p:sp>
+      <p:sp>
+        <p:nvSpPr>
+          <p:cNvPr id="6" name="Marcador de número de diapositiva 5">
+            <a:extLst>
+              <a:ext uri="{FF2B5EF4-FFF2-40B4-BE49-F238E27FC236}">
+                <a16:creationId xmlns:a16="http://schemas.microsoft.com/office/drawing/2014/main" id="{E919F9EF-02D5-71FC-C2BC-F8EC5B26723E}"/>
+              </a:ext>
+            </a:extLst>
+          </p:cNvPr>
+          <p:cNvSpPr>
+            <a:spLocks noGrp="1"/>
+          </p:cNvSpPr>
+          <p:nvPr>
+            <p:ph type="sldNum" sz="quarter" idx="7"/>
+          </p:nvPr>
+        </p:nvSpPr>
+        <p:spPr/>
+        <p:txBody>
+          <a:bodyPr/>
+          <a:lstStyle/>
+          <a:p>
+            <a:fld id="{C2F52289-4012-4053-9770-FE82CEB9514F}" type="slidenum">
+              <a:rPr lang="en-US" smtClean="0"/>
+              <a:pPr/>
+              <a:t>13</a:t>
+            </a:fld>
+            <a:endParaRPr lang="en-US" dirty="0"/>
+          </a:p>
+        </p:txBody>
+      </p:sp>
+      <p:sp>
+        <p:nvSpPr>
+          <p:cNvPr id="8" name="CuadroTexto 7">
+            <a:extLst>
+              <a:ext uri="{FF2B5EF4-FFF2-40B4-BE49-F238E27FC236}">
+                <a16:creationId xmlns:a16="http://schemas.microsoft.com/office/drawing/2014/main" id="{3BC6D2B9-07F5-E2FA-C9AD-029B63B098DA}"/>
+              </a:ext>
+            </a:extLst>
+          </p:cNvPr>
+          <p:cNvSpPr txBox="1"/>
+          <p:nvPr/>
+        </p:nvSpPr>
+        <p:spPr>
+          <a:xfrm>
+            <a:off x="611029" y="4860335"/>
+            <a:ext cx="11199530" cy="1200329"/>
+          </a:xfrm>
+          <a:prstGeom prst="rect">
+            <a:avLst/>
+          </a:prstGeom>
+          <a:solidFill>
+            <a:schemeClr val="bg1">
+              <a:lumMod val="95000"/>
+            </a:schemeClr>
+          </a:solidFill>
+          <a:ln w="28575">
+            <a:solidFill>
+              <a:srgbClr val="E0700D"/>
+            </a:solidFill>
+          </a:ln>
+        </p:spPr>
+        <p:txBody>
+          <a:bodyPr wrap="square" rtlCol="0">
+            <a:spAutoFit/>
+          </a:bodyPr>
+          <a:lstStyle/>
+          <a:p>
+            <a:pPr algn="just"/>
+            <a:r>
+              <a:rPr lang="en-US" sz="1200" dirty="0">
+                <a:latin typeface="Arial" panose="020B0604020202020204" pitchFamily="34" charset="0"/>
+                <a:cs typeface="Arial" panose="020B0604020202020204" pitchFamily="34" charset="0"/>
+              </a:rPr>
+              <a:t>Comment results: describer the transfer function. How’s the dependence on the coupler coefficient? Calculate the Extinction Ratio. How would you achieve critical coupling for the latter design? Justify your answers.</a:t>
+            </a:r>
+          </a:p>
+          <a:p>
+            <a:pPr algn="just"/>
+            <a:endParaRPr lang="en-US" sz="1200" dirty="0">
+              <a:latin typeface="Arial" panose="020B0604020202020204" pitchFamily="34" charset="0"/>
+              <a:cs typeface="Arial" panose="020B0604020202020204" pitchFamily="34" charset="0"/>
+            </a:endParaRPr>
+          </a:p>
+          <a:p>
+            <a:pPr algn="just"/>
+            <a:endParaRPr lang="en-US" sz="1200" dirty="0">
+              <a:latin typeface="Arial" panose="020B0604020202020204" pitchFamily="34" charset="0"/>
+              <a:cs typeface="Arial" panose="020B0604020202020204" pitchFamily="34" charset="0"/>
+            </a:endParaRPr>
+          </a:p>
+          <a:p>
+            <a:pPr algn="just"/>
+            <a:endParaRPr lang="en-US" sz="1200" dirty="0">
+              <a:latin typeface="Arial" panose="020B0604020202020204" pitchFamily="34" charset="0"/>
+              <a:cs typeface="Arial" panose="020B0604020202020204" pitchFamily="34" charset="0"/>
+            </a:endParaRPr>
+          </a:p>
+          <a:p>
+            <a:pPr algn="just"/>
+            <a:r>
+              <a:rPr lang="en-US" sz="1200" dirty="0">
+                <a:latin typeface="Arial" panose="020B0604020202020204" pitchFamily="34" charset="0"/>
+                <a:cs typeface="Arial" panose="020B0604020202020204" pitchFamily="34" charset="0"/>
+              </a:rPr>
+              <a:t> </a:t>
+            </a:r>
+          </a:p>
+        </p:txBody>
+      </p:sp>
+      <p:sp>
+        <p:nvSpPr>
+          <p:cNvPr id="3" name="Rectángulo 2">
+            <a:extLst>
+              <a:ext uri="{FF2B5EF4-FFF2-40B4-BE49-F238E27FC236}">
+                <a16:creationId xmlns:a16="http://schemas.microsoft.com/office/drawing/2014/main" id="{E54DA3AC-DFE0-BB51-7C71-7CD9087359D0}"/>
+              </a:ext>
+            </a:extLst>
+          </p:cNvPr>
+          <p:cNvSpPr/>
+          <p:nvPr/>
+        </p:nvSpPr>
+        <p:spPr>
+          <a:xfrm>
+            <a:off x="8610601" y="1418373"/>
+            <a:ext cx="3199959" cy="3306028"/>
+          </a:xfrm>
+          <a:prstGeom prst="rect">
+            <a:avLst/>
+          </a:prstGeom>
+          <a:solidFill>
+            <a:schemeClr val="bg1">
+              <a:lumMod val="95000"/>
+            </a:schemeClr>
+          </a:solidFill>
+          <a:ln w="28575">
+            <a:solidFill>
+              <a:srgbClr val="E0700D"/>
+            </a:solidFill>
+          </a:ln>
+        </p:spPr>
+        <p:style>
+          <a:lnRef idx="2">
+            <a:schemeClr val="accent1">
+              <a:shade val="15000"/>
+            </a:schemeClr>
+          </a:lnRef>
+          <a:fillRef idx="1">
+            <a:schemeClr val="accent1"/>
+          </a:fillRef>
+          <a:effectRef idx="0">
+            <a:schemeClr val="accent1"/>
+          </a:effectRef>
+          <a:fontRef idx="minor">
+            <a:schemeClr val="lt1"/>
+          </a:fontRef>
+        </p:style>
+        <p:txBody>
+          <a:bodyPr rtlCol="0" anchor="t" anchorCtr="0"/>
+          <a:lstStyle/>
+          <a:p>
+            <a:pPr algn="just"/>
+            <a:r>
+              <a:rPr lang="en-US" sz="1200" b="1" dirty="0">
+                <a:solidFill>
+                  <a:schemeClr val="tx1"/>
+                </a:solidFill>
+                <a:latin typeface="Arial" panose="020B0604020202020204" pitchFamily="34" charset="0"/>
+                <a:cs typeface="Arial" panose="020B0604020202020204" pitchFamily="34" charset="0"/>
+              </a:rPr>
+              <a:t>Hints:</a:t>
+            </a:r>
+            <a:endParaRPr lang="en-US" sz="1200" dirty="0">
+              <a:solidFill>
+                <a:schemeClr val="tx1"/>
+              </a:solidFill>
+              <a:latin typeface="Arial" panose="020B0604020202020204" pitchFamily="34" charset="0"/>
+              <a:cs typeface="Arial" panose="020B0604020202020204" pitchFamily="34" charset="0"/>
+            </a:endParaRPr>
+          </a:p>
+          <a:p>
+            <a:pPr algn="just"/>
+            <a:endParaRPr lang="en-US" sz="1200" dirty="0">
+              <a:solidFill>
+                <a:schemeClr val="tx1"/>
+              </a:solidFill>
+              <a:latin typeface="Arial" panose="020B0604020202020204" pitchFamily="34" charset="0"/>
+              <a:cs typeface="Arial" panose="020B0604020202020204" pitchFamily="34" charset="0"/>
+            </a:endParaRPr>
+          </a:p>
+          <a:p>
+            <a:pPr algn="just"/>
+            <a:r>
+              <a:rPr lang="en-US" sz="1200" dirty="0">
+                <a:solidFill>
+                  <a:schemeClr val="tx1"/>
+                </a:solidFill>
+                <a:latin typeface="Arial" panose="020B0604020202020204" pitchFamily="34" charset="0"/>
+                <a:cs typeface="Arial" panose="020B0604020202020204" pitchFamily="34" charset="0"/>
+              </a:rPr>
+              <a:t>Design the perimeter for a FSR = 15 nm. </a:t>
+            </a:r>
+          </a:p>
+          <a:p>
+            <a:pPr algn="just"/>
+            <a:endParaRPr lang="en-US" sz="1200" dirty="0">
+              <a:solidFill>
+                <a:schemeClr val="tx1"/>
+              </a:solidFill>
+              <a:latin typeface="Arial" panose="020B0604020202020204" pitchFamily="34" charset="0"/>
+              <a:cs typeface="Arial" panose="020B0604020202020204" pitchFamily="34" charset="0"/>
+            </a:endParaRPr>
+          </a:p>
+          <a:p>
+            <a:pPr algn="just"/>
+            <a:r>
+              <a:rPr lang="en-US" sz="1200" dirty="0">
+                <a:solidFill>
+                  <a:schemeClr val="tx1"/>
+                </a:solidFill>
+                <a:latin typeface="Arial" panose="020B0604020202020204" pitchFamily="34" charset="0"/>
+                <a:cs typeface="Arial" panose="020B0604020202020204" pitchFamily="34" charset="0"/>
+              </a:rPr>
+              <a:t>Use equations given in class that relate FSR and perimeter.</a:t>
+            </a:r>
+          </a:p>
+          <a:p>
+            <a:pPr algn="just"/>
+            <a:endParaRPr lang="en-US" sz="1200" dirty="0">
+              <a:solidFill>
+                <a:schemeClr val="tx1"/>
+              </a:solidFill>
+              <a:latin typeface="Arial" panose="020B0604020202020204" pitchFamily="34" charset="0"/>
+              <a:cs typeface="Arial" panose="020B0604020202020204" pitchFamily="34" charset="0"/>
+            </a:endParaRPr>
+          </a:p>
+          <a:p>
+            <a:pPr algn="just"/>
+            <a:endParaRPr lang="en-US" sz="1200" dirty="0">
+              <a:solidFill>
+                <a:schemeClr val="tx1"/>
+              </a:solidFill>
+              <a:latin typeface="Arial" panose="020B0604020202020204" pitchFamily="34" charset="0"/>
+              <a:cs typeface="Arial" panose="020B0604020202020204" pitchFamily="34" charset="0"/>
+            </a:endParaRPr>
+          </a:p>
+          <a:p>
+            <a:pPr algn="just"/>
+            <a:endParaRPr lang="en-US" sz="1200" dirty="0">
+              <a:solidFill>
+                <a:schemeClr val="tx1"/>
+              </a:solidFill>
+              <a:latin typeface="Arial" panose="020B0604020202020204" pitchFamily="34" charset="0"/>
+              <a:cs typeface="Arial" panose="020B0604020202020204" pitchFamily="34" charset="0"/>
+            </a:endParaRPr>
+          </a:p>
+        </p:txBody>
+      </p:sp>
+      <p:sp>
+        <p:nvSpPr>
+          <p:cNvPr id="10" name="Rectángulo 9">
+            <a:extLst>
+              <a:ext uri="{FF2B5EF4-FFF2-40B4-BE49-F238E27FC236}">
+                <a16:creationId xmlns:a16="http://schemas.microsoft.com/office/drawing/2014/main" id="{82011495-88D4-8787-6CB7-704897D84CF9}"/>
+              </a:ext>
+            </a:extLst>
+          </p:cNvPr>
+          <p:cNvSpPr/>
+          <p:nvPr/>
+        </p:nvSpPr>
+        <p:spPr>
+          <a:xfrm>
+            <a:off x="611030" y="1418373"/>
+            <a:ext cx="3810000" cy="3306028"/>
+          </a:xfrm>
+          <a:prstGeom prst="rect">
+            <a:avLst/>
+          </a:prstGeom>
+          <a:noFill/>
+          <a:ln w="28575">
+            <a:solidFill>
+              <a:srgbClr val="E0700D"/>
+            </a:solidFill>
+          </a:ln>
+        </p:spPr>
+        <p:style>
+          <a:lnRef idx="2">
+            <a:schemeClr val="accent1">
+              <a:shade val="15000"/>
+            </a:schemeClr>
+          </a:lnRef>
+          <a:fillRef idx="1">
+            <a:schemeClr val="accent1"/>
+          </a:fillRef>
+          <a:effectRef idx="0">
+            <a:schemeClr val="accent1"/>
+          </a:effectRef>
+          <a:fontRef idx="minor">
+            <a:schemeClr val="lt1"/>
+          </a:fontRef>
+        </p:style>
+        <p:txBody>
+          <a:bodyPr rtlCol="0" anchor="ctr"/>
+          <a:lstStyle/>
+          <a:p>
+            <a:pPr algn="ctr"/>
+            <a:endParaRPr lang="en-US"/>
+          </a:p>
+        </p:txBody>
+      </p:sp>
+      <p:sp>
+        <p:nvSpPr>
+          <p:cNvPr id="12" name="CuadroTexto 11">
+            <a:extLst>
+              <a:ext uri="{FF2B5EF4-FFF2-40B4-BE49-F238E27FC236}">
+                <a16:creationId xmlns:a16="http://schemas.microsoft.com/office/drawing/2014/main" id="{3BD35A6E-6540-9761-4128-0E43122290D4}"/>
+              </a:ext>
+            </a:extLst>
+          </p:cNvPr>
+          <p:cNvSpPr txBox="1"/>
+          <p:nvPr/>
+        </p:nvSpPr>
+        <p:spPr>
+          <a:xfrm>
+            <a:off x="5536543" y="2494307"/>
+            <a:ext cx="2033313" cy="1323439"/>
+          </a:xfrm>
+          <a:prstGeom prst="rect">
+            <a:avLst/>
+          </a:prstGeom>
+          <a:noFill/>
+        </p:spPr>
+        <p:txBody>
+          <a:bodyPr wrap="none" rtlCol="0">
+            <a:spAutoFit/>
+          </a:bodyPr>
+          <a:lstStyle/>
+          <a:p>
+            <a:pPr algn="ctr"/>
+            <a:r>
+              <a:rPr lang="es-ES" sz="2000" dirty="0"/>
+              <a:t>Single ring</a:t>
+            </a:r>
+          </a:p>
+          <a:p>
+            <a:pPr algn="ctr"/>
+            <a:r>
+              <a:rPr lang="es-ES" sz="2000" dirty="0"/>
+              <a:t>transfer </a:t>
+            </a:r>
+            <a:r>
+              <a:rPr lang="es-ES" sz="2000" dirty="0" err="1"/>
+              <a:t>functions</a:t>
+            </a:r>
+            <a:endParaRPr lang="es-ES" sz="2000" dirty="0"/>
+          </a:p>
+          <a:p>
+            <a:pPr algn="ctr"/>
+            <a:endParaRPr lang="es-ES" sz="2000" dirty="0"/>
+          </a:p>
+          <a:p>
+            <a:pPr algn="ctr"/>
+            <a:r>
+              <a:rPr lang="es-ES" sz="2000" dirty="0" err="1"/>
+              <a:t>Logaritmic</a:t>
+            </a:r>
+            <a:r>
+              <a:rPr lang="es-ES" sz="2000" dirty="0"/>
+              <a:t> </a:t>
+            </a:r>
+            <a:r>
+              <a:rPr lang="es-ES" sz="2000" dirty="0" err="1"/>
+              <a:t>units</a:t>
+            </a:r>
+            <a:endParaRPr lang="en-US" sz="2000" dirty="0"/>
+          </a:p>
+        </p:txBody>
+      </p:sp>
+      <p:sp>
+        <p:nvSpPr>
+          <p:cNvPr id="13" name="Rectángulo 12">
+            <a:extLst>
+              <a:ext uri="{FF2B5EF4-FFF2-40B4-BE49-F238E27FC236}">
+                <a16:creationId xmlns:a16="http://schemas.microsoft.com/office/drawing/2014/main" id="{03798D61-1E16-8473-BDCE-1D97F95EF7BE}"/>
+              </a:ext>
+            </a:extLst>
+          </p:cNvPr>
+          <p:cNvSpPr/>
+          <p:nvPr/>
+        </p:nvSpPr>
+        <p:spPr>
+          <a:xfrm>
+            <a:off x="4648200" y="1418373"/>
+            <a:ext cx="3810000" cy="3306028"/>
+          </a:xfrm>
+          <a:prstGeom prst="rect">
+            <a:avLst/>
+          </a:prstGeom>
+          <a:noFill/>
+          <a:ln w="28575">
+            <a:solidFill>
+              <a:srgbClr val="E0700D"/>
+            </a:solidFill>
+          </a:ln>
+        </p:spPr>
+        <p:style>
+          <a:lnRef idx="2">
+            <a:schemeClr val="accent1">
+              <a:shade val="15000"/>
+            </a:schemeClr>
+          </a:lnRef>
+          <a:fillRef idx="1">
+            <a:schemeClr val="accent1"/>
+          </a:fillRef>
+          <a:effectRef idx="0">
+            <a:schemeClr val="accent1"/>
+          </a:effectRef>
+          <a:fontRef idx="minor">
+            <a:schemeClr val="lt1"/>
+          </a:fontRef>
+        </p:style>
+        <p:txBody>
+          <a:bodyPr rtlCol="0" anchor="ctr"/>
+          <a:lstStyle/>
+          <a:p>
+            <a:pPr algn="ctr"/>
+            <a:endParaRPr lang="en-US"/>
+          </a:p>
+        </p:txBody>
+      </p:sp>
+      <p:sp>
+        <p:nvSpPr>
+          <p:cNvPr id="16" name="CuadroTexto 15">
+            <a:extLst>
+              <a:ext uri="{FF2B5EF4-FFF2-40B4-BE49-F238E27FC236}">
+                <a16:creationId xmlns:a16="http://schemas.microsoft.com/office/drawing/2014/main" id="{B49B3613-E785-3FCB-DA8D-2B43EB104C5D}"/>
+              </a:ext>
+            </a:extLst>
+          </p:cNvPr>
+          <p:cNvSpPr txBox="1"/>
+          <p:nvPr/>
+        </p:nvSpPr>
+        <p:spPr>
+          <a:xfrm>
+            <a:off x="1499379" y="2478160"/>
+            <a:ext cx="2033313" cy="1323439"/>
+          </a:xfrm>
+          <a:prstGeom prst="rect">
+            <a:avLst/>
+          </a:prstGeom>
+          <a:noFill/>
+        </p:spPr>
+        <p:txBody>
+          <a:bodyPr wrap="none" rtlCol="0">
+            <a:spAutoFit/>
+          </a:bodyPr>
+          <a:lstStyle/>
+          <a:p>
+            <a:pPr algn="ctr"/>
+            <a:r>
+              <a:rPr lang="es-ES" sz="2000" dirty="0"/>
+              <a:t>Single ring</a:t>
+            </a:r>
+          </a:p>
+          <a:p>
+            <a:pPr algn="ctr"/>
+            <a:r>
+              <a:rPr lang="es-ES" sz="2000" dirty="0"/>
+              <a:t>transfer </a:t>
+            </a:r>
+            <a:r>
+              <a:rPr lang="es-ES" sz="2000" dirty="0" err="1"/>
+              <a:t>functions</a:t>
+            </a:r>
+            <a:endParaRPr lang="es-ES" sz="2000" dirty="0"/>
+          </a:p>
+          <a:p>
+            <a:pPr algn="ctr"/>
+            <a:endParaRPr lang="es-ES" sz="2000" dirty="0"/>
+          </a:p>
+          <a:p>
+            <a:pPr algn="ctr"/>
+            <a:r>
+              <a:rPr lang="es-ES" sz="2000" dirty="0"/>
+              <a:t>Linear </a:t>
+            </a:r>
+            <a:r>
+              <a:rPr lang="es-ES" sz="2000" dirty="0" err="1"/>
+              <a:t>units</a:t>
+            </a:r>
+            <a:endParaRPr lang="en-US" sz="2000" dirty="0"/>
+          </a:p>
+        </p:txBody>
+      </p:sp>
+      <p:pic>
+        <p:nvPicPr>
+          <p:cNvPr id="11" name="Gráfico 10">
+            <a:extLst>
+              <a:ext uri="{FF2B5EF4-FFF2-40B4-BE49-F238E27FC236}">
+                <a16:creationId xmlns:a16="http://schemas.microsoft.com/office/drawing/2014/main" id="{64B3EEA8-5B6A-F628-0B9C-42450CEE9BE1}"/>
+              </a:ext>
+            </a:extLst>
+          </p:cNvPr>
+          <p:cNvPicPr>
+            <a:picLocks noChangeAspect="1"/>
+          </p:cNvPicPr>
+          <p:nvPr/>
+        </p:nvPicPr>
+        <p:blipFill>
+          <a:blip>
+            <a:extLst>
+              <a:ext uri="{96DAC541-7B7A-43D3-8B79-37D633B846F1}">
+                <asvg:svgBlip xmlns:asvg="http://schemas.microsoft.com/office/drawing/2016/SVG/main" r:embed="rId2"/>
+              </a:ext>
+            </a:extLst>
+          </a:blip>
+          <a:stretch>
+            <a:fillRect/>
+          </a:stretch>
+        </p:blipFill>
+        <p:spPr>
+          <a:xfrm>
+            <a:off x="5045006" y="6356057"/>
+            <a:ext cx="6409575" cy="363174"/>
+          </a:xfrm>
+          <a:prstGeom prst="rect">
+            <a:avLst/>
+          </a:prstGeom>
+        </p:spPr>
+      </p:pic>
+      <p:sp>
+        <p:nvSpPr>
+          <p:cNvPr id="14" name="object 16">
+            <a:extLst>
+              <a:ext uri="{FF2B5EF4-FFF2-40B4-BE49-F238E27FC236}">
+                <a16:creationId xmlns:a16="http://schemas.microsoft.com/office/drawing/2014/main" id="{4E9E05B5-9445-DD50-60E9-03B04ED264D4}"/>
+              </a:ext>
+            </a:extLst>
+          </p:cNvPr>
+          <p:cNvSpPr txBox="1">
+            <a:spLocks/>
+          </p:cNvSpPr>
+          <p:nvPr/>
+        </p:nvSpPr>
+        <p:spPr>
+          <a:xfrm>
+            <a:off x="685800" y="408883"/>
+            <a:ext cx="10994410" cy="718145"/>
+          </a:xfrm>
+          <a:prstGeom prst="rect">
+            <a:avLst/>
+          </a:prstGeom>
+        </p:spPr>
+        <p:txBody>
+          <a:bodyPr vert="horz" wrap="square" lIns="0" tIns="12700" rIns="0" bIns="0" rtlCol="0">
+            <a:spAutoFit/>
+          </a:bodyPr>
+          <a:lstStyle>
+            <a:lvl1pPr>
+              <a:defRPr sz="2000" b="1" i="0">
+                <a:solidFill>
+                  <a:schemeClr val="tx1"/>
+                </a:solidFill>
+                <a:latin typeface="Calibri"/>
+                <a:ea typeface="+mj-ea"/>
+                <a:cs typeface="Calibri"/>
+              </a:defRPr>
+            </a:lvl1pPr>
+          </a:lstStyle>
+          <a:p>
+            <a:pPr marL="12700">
+              <a:spcBef>
+                <a:spcPts val="100"/>
+              </a:spcBef>
+            </a:pPr>
+            <a:r>
+              <a:rPr lang="en-US" sz="2500" kern="0" dirty="0"/>
+              <a:t>Learning outcome #5 – Ring resonator design</a:t>
+            </a:r>
+          </a:p>
+          <a:p>
+            <a:pPr marL="12700">
+              <a:spcBef>
+                <a:spcPts val="100"/>
+              </a:spcBef>
+            </a:pPr>
+            <a:r>
+              <a:rPr lang="en-US" b="0" kern="0" spc="-5" dirty="0">
+                <a:latin typeface="+mj-lt"/>
+                <a:cs typeface="Lucida Sans"/>
+              </a:rPr>
+              <a:t>Design the perimeter for a FSR = 15 nm. </a:t>
+            </a:r>
+          </a:p>
+        </p:txBody>
+      </p:sp>
+    </p:spTree>
+    <p:extLst>
+      <p:ext uri="{BB962C8B-B14F-4D97-AF65-F5344CB8AC3E}">
+        <p14:creationId xmlns:p14="http://schemas.microsoft.com/office/powerpoint/2010/main" val="2915989261"/>
+      </p:ext>
+    </p:extLst>
+  </p:cSld>
+  <p:clrMapOvr>
+    <a:masterClrMapping/>
+  </p:clrMapOvr>
+</p:sld>
+</file>
+
+<file path=ppt/slides/slide14.xml><?xml version="1.0" encoding="utf-8"?>
+<p:sld xmlns:a="http://schemas.openxmlformats.org/drawingml/2006/main" xmlns:r="http://schemas.openxmlformats.org/officeDocument/2006/relationships" xmlns:p="http://schemas.openxmlformats.org/presentationml/2006/main">
+  <p:cSld>
+    <p:spTree>
+      <p:nvGrpSpPr>
+        <p:cNvPr id="1" name="">
+          <a:extLst>
+            <a:ext uri="{FF2B5EF4-FFF2-40B4-BE49-F238E27FC236}">
+              <a16:creationId xmlns:a16="http://schemas.microsoft.com/office/drawing/2014/main" id="{7CE6BFFD-C38C-C65C-F6DF-F428C9F8A16B}"/>
+            </a:ext>
+          </a:extLst>
+        </p:cNvPr>
+        <p:cNvGrpSpPr/>
+        <p:nvPr/>
+      </p:nvGrpSpPr>
+      <p:grpSpPr>
+        <a:xfrm>
+          <a:off x="0" y="0"/>
+          <a:ext cx="0" cy="0"/>
+          <a:chOff x="0" y="0"/>
+          <a:chExt cx="0" cy="0"/>
+        </a:xfrm>
+      </p:grpSpPr>
+      <p:sp>
+        <p:nvSpPr>
+          <p:cNvPr id="16" name="object 16">
+            <a:extLst>
+              <a:ext uri="{FF2B5EF4-FFF2-40B4-BE49-F238E27FC236}">
+                <a16:creationId xmlns:a16="http://schemas.microsoft.com/office/drawing/2014/main" id="{C75753EA-9947-25B0-DBF9-5CE0DF5D718D}"/>
+              </a:ext>
+            </a:extLst>
+          </p:cNvPr>
+          <p:cNvSpPr txBox="1">
+            <a:spLocks noGrp="1"/>
+          </p:cNvSpPr>
+          <p:nvPr>
+            <p:ph type="title"/>
+          </p:nvPr>
+        </p:nvSpPr>
+        <p:spPr>
+          <a:xfrm>
+            <a:off x="685800" y="408883"/>
+            <a:ext cx="10994410" cy="397545"/>
+          </a:xfrm>
+          <a:prstGeom prst="rect">
+            <a:avLst/>
+          </a:prstGeom>
+        </p:spPr>
+        <p:txBody>
+          <a:bodyPr vert="horz" wrap="square" lIns="0" tIns="12700" rIns="0" bIns="0" rtlCol="0">
+            <a:spAutoFit/>
+          </a:bodyPr>
+          <a:lstStyle/>
+          <a:p>
+            <a:pPr marL="12700">
+              <a:spcBef>
+                <a:spcPts val="100"/>
+              </a:spcBef>
+            </a:pPr>
+            <a:r>
+              <a:rPr lang="en-US" sz="2500" dirty="0"/>
+              <a:t>Learning outcome #5 – Ring resonator design</a:t>
+            </a:r>
+          </a:p>
+        </p:txBody>
+      </p:sp>
+      <p:pic>
+        <p:nvPicPr>
+          <p:cNvPr id="83" name="Gráfico 82">
+            <a:extLst>
+              <a:ext uri="{FF2B5EF4-FFF2-40B4-BE49-F238E27FC236}">
+                <a16:creationId xmlns:a16="http://schemas.microsoft.com/office/drawing/2014/main" id="{5A78D6E7-1EA1-BD86-5486-EF95566CF788}"/>
+              </a:ext>
+            </a:extLst>
+          </p:cNvPr>
+          <p:cNvPicPr>
+            <a:picLocks noChangeAspect="1"/>
+          </p:cNvPicPr>
+          <p:nvPr/>
+        </p:nvPicPr>
+        <p:blipFill>
+          <a:blip>
+            <a:extLst>
+              <a:ext uri="{96DAC541-7B7A-43D3-8B79-37D633B846F1}">
+                <asvg:svgBlip xmlns:asvg="http://schemas.microsoft.com/office/drawing/2016/SVG/main" r:embed="rId3"/>
+              </a:ext>
+            </a:extLst>
+          </a:blip>
+          <a:stretch>
+            <a:fillRect/>
+          </a:stretch>
+        </p:blipFill>
+        <p:spPr>
+          <a:xfrm>
+            <a:off x="5045006" y="6356057"/>
+            <a:ext cx="6409575" cy="363174"/>
+          </a:xfrm>
+          <a:prstGeom prst="rect">
+            <a:avLst/>
+          </a:prstGeom>
+        </p:spPr>
+      </p:pic>
+      <p:sp>
+        <p:nvSpPr>
+          <p:cNvPr id="84" name="Marcador de número de diapositiva 83">
+            <a:extLst>
+              <a:ext uri="{FF2B5EF4-FFF2-40B4-BE49-F238E27FC236}">
+                <a16:creationId xmlns:a16="http://schemas.microsoft.com/office/drawing/2014/main" id="{A82543BE-32D9-1FF6-AD49-DE70B17AB20B}"/>
+              </a:ext>
+            </a:extLst>
+          </p:cNvPr>
+          <p:cNvSpPr>
+            <a:spLocks noGrp="1"/>
+          </p:cNvSpPr>
+          <p:nvPr>
+            <p:ph type="sldNum" sz="quarter" idx="7"/>
+          </p:nvPr>
+        </p:nvSpPr>
+        <p:spPr/>
+        <p:txBody>
+          <a:bodyPr/>
+          <a:lstStyle/>
+          <a:p>
+            <a:fld id="{B6F15528-21DE-4FAA-801E-634DDDAF4B2B}" type="slidenum">
+              <a:rPr lang="es-ES" smtClean="0"/>
+              <a:t>14</a:t>
+            </a:fld>
+            <a:endParaRPr lang="es-ES"/>
+          </a:p>
+        </p:txBody>
+      </p:sp>
+      <p:sp>
+        <p:nvSpPr>
+          <p:cNvPr id="3" name="Marcador de pie de página 2">
+            <a:extLst>
+              <a:ext uri="{FF2B5EF4-FFF2-40B4-BE49-F238E27FC236}">
+                <a16:creationId xmlns:a16="http://schemas.microsoft.com/office/drawing/2014/main" id="{96643153-8B94-89A2-70E4-7C93EBC97027}"/>
+              </a:ext>
+            </a:extLst>
+          </p:cNvPr>
+          <p:cNvSpPr>
+            <a:spLocks noGrp="1"/>
+          </p:cNvSpPr>
+          <p:nvPr>
+            <p:ph type="ftr" sz="quarter" idx="5"/>
+          </p:nvPr>
+        </p:nvSpPr>
+        <p:spPr/>
+        <p:txBody>
+          <a:bodyPr/>
+          <a:lstStyle/>
+          <a:p>
+            <a:pPr marL="12700">
+              <a:spcBef>
+                <a:spcPts val="15"/>
+              </a:spcBef>
+            </a:pPr>
+            <a:r>
+              <a:rPr lang="es-ES" spc="-5"/>
+              <a:t>LAB 3.0. CIRCUITS &amp; COMPACT MODELS</a:t>
+            </a:r>
+            <a:endParaRPr lang="es-ES" spc="-5" dirty="0"/>
+          </a:p>
+        </p:txBody>
+      </p:sp>
+      <p:sp>
+        <p:nvSpPr>
+          <p:cNvPr id="5" name="CuadroTexto 4">
+            <a:extLst>
+              <a:ext uri="{FF2B5EF4-FFF2-40B4-BE49-F238E27FC236}">
+                <a16:creationId xmlns:a16="http://schemas.microsoft.com/office/drawing/2014/main" id="{62DBF7B0-A3CA-60DC-47F0-0009D114EBFF}"/>
+              </a:ext>
+            </a:extLst>
+          </p:cNvPr>
+          <p:cNvSpPr txBox="1"/>
+          <p:nvPr/>
+        </p:nvSpPr>
+        <p:spPr>
+          <a:xfrm>
+            <a:off x="1402080" y="4602060"/>
+            <a:ext cx="9281160" cy="646331"/>
+          </a:xfrm>
+          <a:prstGeom prst="rect">
+            <a:avLst/>
+          </a:prstGeom>
+          <a:noFill/>
+        </p:spPr>
+        <p:txBody>
+          <a:bodyPr wrap="square">
+            <a:spAutoFit/>
+          </a:bodyPr>
+          <a:lstStyle/>
+          <a:p>
+            <a:pPr algn="just"/>
+            <a:r>
+              <a:rPr lang="es-ES" sz="1200" dirty="0">
+                <a:latin typeface="Arial" panose="020B0604020202020204" pitchFamily="34" charset="0"/>
+                <a:cs typeface="Arial" panose="020B0604020202020204" pitchFamily="34" charset="0"/>
+              </a:rPr>
+              <a:t>En este caso obtenemos la misma gráfica que en el caso anterior a diferencia de que la distancia entre valles ha cambiado. Se ha fijado una FSR de 15 nm, por lo que se puede observar que la distancia entre valles es aproximadamente de 15 nm. Esa FSR provoca una </a:t>
+            </a:r>
+            <a:r>
+              <a:rPr lang="es-ES" sz="1200" dirty="0" err="1">
+                <a:latin typeface="Arial" panose="020B0604020202020204" pitchFamily="34" charset="0"/>
+                <a:cs typeface="Arial" panose="020B0604020202020204" pitchFamily="34" charset="0"/>
+              </a:rPr>
+              <a:t>dL</a:t>
+            </a:r>
+            <a:r>
+              <a:rPr lang="es-ES" sz="1200" dirty="0">
+                <a:latin typeface="Arial" panose="020B0604020202020204" pitchFamily="34" charset="0"/>
+                <a:cs typeface="Arial" panose="020B0604020202020204" pitchFamily="34" charset="0"/>
+              </a:rPr>
+              <a:t> de aproximadamente 80 </a:t>
+            </a:r>
+            <a:r>
+              <a:rPr lang="es-ES" sz="1200" dirty="0" err="1">
+                <a:latin typeface="Arial" panose="020B0604020202020204" pitchFamily="34" charset="0"/>
+                <a:cs typeface="Arial" panose="020B0604020202020204" pitchFamily="34" charset="0"/>
+              </a:rPr>
+              <a:t>um</a:t>
+            </a:r>
+            <a:r>
+              <a:rPr lang="es-ES" sz="1200" dirty="0">
+                <a:latin typeface="Arial" panose="020B0604020202020204" pitchFamily="34" charset="0"/>
+                <a:cs typeface="Arial" panose="020B0604020202020204" pitchFamily="34" charset="0"/>
+              </a:rPr>
+              <a:t> para los valores de n= =2 y </a:t>
+            </a:r>
+            <a:r>
+              <a:rPr lang="el-GR" sz="1200" dirty="0">
+                <a:latin typeface="Arial" panose="020B0604020202020204" pitchFamily="34" charset="0"/>
+                <a:cs typeface="Arial" panose="020B0604020202020204" pitchFamily="34" charset="0"/>
+              </a:rPr>
+              <a:t>λ</a:t>
+            </a:r>
+            <a:r>
+              <a:rPr lang="es-ES" sz="1200" dirty="0">
+                <a:latin typeface="Arial" panose="020B0604020202020204" pitchFamily="34" charset="0"/>
+                <a:cs typeface="Arial" panose="020B0604020202020204" pitchFamily="34" charset="0"/>
+              </a:rPr>
+              <a:t> = 1.55 </a:t>
+            </a:r>
+            <a:r>
+              <a:rPr lang="es-ES" sz="1200" dirty="0" err="1">
+                <a:latin typeface="Arial" panose="020B0604020202020204" pitchFamily="34" charset="0"/>
+                <a:cs typeface="Arial" panose="020B0604020202020204" pitchFamily="34" charset="0"/>
+              </a:rPr>
+              <a:t>um</a:t>
+            </a:r>
+            <a:endParaRPr lang="es-ES" sz="1200" dirty="0">
+              <a:latin typeface="Arial" panose="020B0604020202020204" pitchFamily="34" charset="0"/>
+              <a:cs typeface="Arial" panose="020B0604020202020204" pitchFamily="34" charset="0"/>
+            </a:endParaRPr>
+          </a:p>
+        </p:txBody>
+      </p:sp>
+      <mc:AlternateContent xmlns:mc="http://schemas.openxmlformats.org/markup-compatibility/2006">
+        <mc:Choice xmlns:a14="http://schemas.microsoft.com/office/drawing/2010/main" Requires="a14">
+          <p:sp>
+            <p:nvSpPr>
+              <p:cNvPr id="7" name="CuadroTexto 6">
+                <a:extLst>
+                  <a:ext uri="{FF2B5EF4-FFF2-40B4-BE49-F238E27FC236}">
+                    <a16:creationId xmlns:a16="http://schemas.microsoft.com/office/drawing/2014/main" id="{061EC9B2-2054-C326-0EE6-24C7C40A755A}"/>
+                  </a:ext>
+                </a:extLst>
+              </p:cNvPr>
+              <p:cNvSpPr txBox="1"/>
+              <p:nvPr/>
+            </p:nvSpPr>
+            <p:spPr>
+              <a:xfrm>
+                <a:off x="2885440" y="5441126"/>
+                <a:ext cx="6126480" cy="495264"/>
+              </a:xfrm>
+              <a:prstGeom prst="rect">
+                <a:avLst/>
+              </a:prstGeom>
+              <a:noFill/>
+            </p:spPr>
+            <p:txBody>
+              <a:bodyPr wrap="square">
+                <a:spAutoFit/>
+              </a:bodyPr>
+              <a:lstStyle/>
+              <a:p>
+                <a:pPr algn="just"/>
+                <a14:m>
+                  <m:oMathPara xmlns:m="http://schemas.openxmlformats.org/officeDocument/2006/math">
+                    <m:oMathParaPr>
+                      <m:jc m:val="centerGroup"/>
+                    </m:oMathParaPr>
+                    <m:oMath xmlns:m="http://schemas.openxmlformats.org/officeDocument/2006/math">
+                      <m:r>
+                        <a:rPr lang="es-ES" sz="1200" b="0" i="1" smtClean="0">
+                          <a:latin typeface="Cambria Math" panose="02040503050406030204" pitchFamily="18" charset="0"/>
+                          <a:cs typeface="Arial" panose="020B0604020202020204" pitchFamily="34" charset="0"/>
+                        </a:rPr>
+                        <m:t>𝐹𝑆𝑅</m:t>
+                      </m:r>
+                      <m:r>
+                        <a:rPr lang="es-ES" sz="1200" b="0" i="1" smtClean="0">
+                          <a:latin typeface="Cambria Math" panose="02040503050406030204" pitchFamily="18" charset="0"/>
+                          <a:cs typeface="Arial" panose="020B0604020202020204" pitchFamily="34" charset="0"/>
+                        </a:rPr>
+                        <m:t>=</m:t>
+                      </m:r>
+                      <m:f>
+                        <m:fPr>
+                          <m:ctrlPr>
+                            <a:rPr lang="es-ES" sz="1200" b="0" i="1" smtClean="0">
+                              <a:latin typeface="Cambria Math" panose="02040503050406030204" pitchFamily="18" charset="0"/>
+                              <a:cs typeface="Arial" panose="020B0604020202020204" pitchFamily="34" charset="0"/>
+                            </a:rPr>
+                          </m:ctrlPr>
+                        </m:fPr>
+                        <m:num>
+                          <m:sSup>
+                            <m:sSupPr>
+                              <m:ctrlPr>
+                                <a:rPr lang="el-GR" sz="1200" i="1" smtClean="0">
+                                  <a:latin typeface="Cambria Math" panose="02040503050406030204" pitchFamily="18" charset="0"/>
+                                  <a:cs typeface="Arial" panose="020B0604020202020204" pitchFamily="34" charset="0"/>
+                                </a:rPr>
+                              </m:ctrlPr>
+                            </m:sSupPr>
+                            <m:e>
+                              <m:r>
+                                <a:rPr lang="el-GR" sz="1200" i="1">
+                                  <a:latin typeface="Cambria Math" panose="02040503050406030204" pitchFamily="18" charset="0"/>
+                                  <a:cs typeface="Arial" panose="020B0604020202020204" pitchFamily="34" charset="0"/>
+                                </a:rPr>
+                                <m:t>𝜆</m:t>
+                              </m:r>
+                            </m:e>
+                            <m:sup>
+                              <m:r>
+                                <a:rPr lang="es-ES" sz="1200" b="0" i="1" smtClean="0">
+                                  <a:latin typeface="Cambria Math" panose="02040503050406030204" pitchFamily="18" charset="0"/>
+                                  <a:cs typeface="Arial" panose="020B0604020202020204" pitchFamily="34" charset="0"/>
+                                </a:rPr>
+                                <m:t>2</m:t>
+                              </m:r>
+                            </m:sup>
+                          </m:sSup>
+                        </m:num>
+                        <m:den>
+                          <m:r>
+                            <a:rPr lang="es-ES" sz="1200" b="0" i="1" smtClean="0">
+                              <a:latin typeface="Cambria Math" panose="02040503050406030204" pitchFamily="18" charset="0"/>
+                              <a:cs typeface="Arial" panose="020B0604020202020204" pitchFamily="34" charset="0"/>
+                            </a:rPr>
+                            <m:t>𝑛𝑔</m:t>
+                          </m:r>
+                          <m:r>
+                            <a:rPr lang="es-ES" sz="1200" b="0" i="1" smtClean="0">
+                              <a:latin typeface="Cambria Math" panose="02040503050406030204" pitchFamily="18" charset="0"/>
+                              <a:cs typeface="Arial" panose="020B0604020202020204" pitchFamily="34" charset="0"/>
+                            </a:rPr>
+                            <m:t>∗</m:t>
+                          </m:r>
+                          <m:r>
+                            <a:rPr lang="es-ES" sz="1200" b="0" i="1" smtClean="0">
+                              <a:latin typeface="Cambria Math" panose="02040503050406030204" pitchFamily="18" charset="0"/>
+                              <a:cs typeface="Arial" panose="020B0604020202020204" pitchFamily="34" charset="0"/>
+                            </a:rPr>
+                            <m:t>𝐿</m:t>
+                          </m:r>
+                        </m:den>
+                      </m:f>
+                    </m:oMath>
+                  </m:oMathPara>
+                </a14:m>
+                <a:endParaRPr lang="en-US" sz="1200" dirty="0">
+                  <a:latin typeface="Arial" panose="020B0604020202020204" pitchFamily="34" charset="0"/>
+                  <a:cs typeface="Arial" panose="020B0604020202020204" pitchFamily="34" charset="0"/>
+                </a:endParaRPr>
+              </a:p>
+            </p:txBody>
+          </p:sp>
+        </mc:Choice>
+        <mc:Fallback>
+          <p:sp>
+            <p:nvSpPr>
+              <p:cNvPr id="7" name="CuadroTexto 6">
+                <a:extLst>
+                  <a:ext uri="{FF2B5EF4-FFF2-40B4-BE49-F238E27FC236}">
+                    <a16:creationId xmlns:a16="http://schemas.microsoft.com/office/drawing/2014/main" id="{061EC9B2-2054-C326-0EE6-24C7C40A755A}"/>
+                  </a:ext>
+                </a:extLst>
+              </p:cNvPr>
+              <p:cNvSpPr txBox="1">
+                <a:spLocks noRot="1" noChangeAspect="1" noMove="1" noResize="1" noEditPoints="1" noAdjustHandles="1" noChangeArrowheads="1" noChangeShapeType="1" noTextEdit="1"/>
+              </p:cNvSpPr>
+              <p:nvPr/>
+            </p:nvSpPr>
+            <p:spPr>
+              <a:xfrm>
+                <a:off x="2885440" y="5441126"/>
+                <a:ext cx="6126480" cy="495264"/>
+              </a:xfrm>
+              <a:prstGeom prst="rect">
+                <a:avLst/>
+              </a:prstGeom>
+              <a:blipFill>
+                <a:blip r:embed="rId4"/>
+                <a:stretch>
+                  <a:fillRect/>
+                </a:stretch>
+              </a:blipFill>
+            </p:spPr>
+            <p:txBody>
+              <a:bodyPr/>
+              <a:lstStyle/>
+              <a:p>
+                <a:r>
+                  <a:rPr lang="es-ES">
+                    <a:noFill/>
+                  </a:rPr>
+                  <a:t> </a:t>
+                </a:r>
+              </a:p>
+            </p:txBody>
+          </p:sp>
+        </mc:Fallback>
+      </mc:AlternateContent>
+      <p:pic>
+        <p:nvPicPr>
+          <p:cNvPr id="2" name="Imagen 1">
+            <a:extLst>
+              <a:ext uri="{FF2B5EF4-FFF2-40B4-BE49-F238E27FC236}">
+                <a16:creationId xmlns:a16="http://schemas.microsoft.com/office/drawing/2014/main" id="{C9C97059-F431-1C84-A642-88353364A68D}"/>
+              </a:ext>
+            </a:extLst>
+          </p:cNvPr>
+          <p:cNvPicPr>
+            <a:picLocks noChangeAspect="1"/>
+          </p:cNvPicPr>
+          <p:nvPr/>
+        </p:nvPicPr>
+        <p:blipFill>
+          <a:blip r:embed="rId5"/>
+          <a:stretch>
+            <a:fillRect/>
+          </a:stretch>
+        </p:blipFill>
+        <p:spPr>
+          <a:xfrm>
+            <a:off x="3095537" y="1143000"/>
+            <a:ext cx="5856094" cy="3359817"/>
+          </a:xfrm>
+          <a:prstGeom prst="rect">
+            <a:avLst/>
+          </a:prstGeom>
+        </p:spPr>
+      </p:pic>
+    </p:spTree>
+    <p:extLst>
+      <p:ext uri="{BB962C8B-B14F-4D97-AF65-F5344CB8AC3E}">
+        <p14:creationId xmlns:p14="http://schemas.microsoft.com/office/powerpoint/2010/main" val="208696761"/>
+      </p:ext>
+    </p:extLst>
+  </p:cSld>
+  <p:clrMapOvr>
+    <a:masterClrMapping/>
+  </p:clrMapOvr>
+</p:sld>
+</file>
+
+<file path=ppt/slides/slide15.xml><?xml version="1.0" encoding="utf-8"?>
+<p:sld xmlns:a="http://schemas.openxmlformats.org/drawingml/2006/main" xmlns:r="http://schemas.openxmlformats.org/officeDocument/2006/relationships" xmlns:p="http://schemas.openxmlformats.org/presentationml/2006/main">
+  <p:cSld>
+    <p:spTree>
+      <p:nvGrpSpPr>
+        <p:cNvPr id="1" name=""/>
+        <p:cNvGrpSpPr/>
+        <p:nvPr/>
+      </p:nvGrpSpPr>
+      <p:grpSpPr>
+        <a:xfrm>
+          <a:off x="0" y="0"/>
+          <a:ext cx="0" cy="0"/>
+          <a:chOff x="0" y="0"/>
+          <a:chExt cx="0" cy="0"/>
+        </a:xfrm>
+      </p:grpSpPr>
+      <p:sp>
+        <p:nvSpPr>
+          <p:cNvPr id="5" name="Marcador de pie de página 4">
+            <a:extLst>
+              <a:ext uri="{FF2B5EF4-FFF2-40B4-BE49-F238E27FC236}">
+                <a16:creationId xmlns:a16="http://schemas.microsoft.com/office/drawing/2014/main" id="{F929251A-3DC4-36B2-3FB3-341378364BED}"/>
+              </a:ext>
+            </a:extLst>
+          </p:cNvPr>
+          <p:cNvSpPr>
+            <a:spLocks noGrp="1"/>
+          </p:cNvSpPr>
+          <p:nvPr>
+            <p:ph type="ftr" sz="quarter" idx="5"/>
+          </p:nvPr>
+        </p:nvSpPr>
+        <p:spPr/>
+        <p:txBody>
+          <a:bodyPr/>
+          <a:lstStyle/>
+          <a:p>
+            <a:r>
+              <a:rPr lang="en-US"/>
+              <a:t>LAB 3.0. CIRCUITS &amp; COMPACT MODELS</a:t>
+            </a:r>
+          </a:p>
+        </p:txBody>
+      </p:sp>
+      <p:sp>
+        <p:nvSpPr>
+          <p:cNvPr id="6" name="Marcador de número de diapositiva 5">
+            <a:extLst>
+              <a:ext uri="{FF2B5EF4-FFF2-40B4-BE49-F238E27FC236}">
+                <a16:creationId xmlns:a16="http://schemas.microsoft.com/office/drawing/2014/main" id="{8E91A34C-DF76-97CF-3EFD-546BC64A2184}"/>
+              </a:ext>
+            </a:extLst>
+          </p:cNvPr>
+          <p:cNvSpPr>
+            <a:spLocks noGrp="1"/>
+          </p:cNvSpPr>
+          <p:nvPr>
+            <p:ph type="sldNum" sz="quarter" idx="7"/>
+          </p:nvPr>
+        </p:nvSpPr>
+        <p:spPr/>
+        <p:txBody>
+          <a:bodyPr/>
+          <a:lstStyle/>
+          <a:p>
+            <a:fld id="{C2F52289-4012-4053-9770-FE82CEB9514F}" type="slidenum">
+              <a:rPr lang="en-US" smtClean="0"/>
+              <a:pPr/>
+              <a:t>15</a:t>
+            </a:fld>
+            <a:endParaRPr lang="en-US" dirty="0"/>
+          </a:p>
+        </p:txBody>
+      </p:sp>
+      <p:sp>
+        <p:nvSpPr>
+          <p:cNvPr id="8" name="CuadroTexto 7">
+            <a:extLst>
+              <a:ext uri="{FF2B5EF4-FFF2-40B4-BE49-F238E27FC236}">
+                <a16:creationId xmlns:a16="http://schemas.microsoft.com/office/drawing/2014/main" id="{D9601617-351E-AE1A-1F4D-693F2EA59361}"/>
+              </a:ext>
+            </a:extLst>
+          </p:cNvPr>
+          <p:cNvSpPr txBox="1"/>
+          <p:nvPr/>
+        </p:nvSpPr>
+        <p:spPr>
+          <a:xfrm>
+            <a:off x="611029" y="4860335"/>
+            <a:ext cx="11199530" cy="646331"/>
+          </a:xfrm>
+          <a:prstGeom prst="rect">
+            <a:avLst/>
+          </a:prstGeom>
+          <a:solidFill>
+            <a:schemeClr val="bg1">
+              <a:lumMod val="95000"/>
+            </a:schemeClr>
+          </a:solidFill>
+          <a:ln w="28575">
+            <a:solidFill>
+              <a:srgbClr val="E0700D"/>
+            </a:solidFill>
+          </a:ln>
+        </p:spPr>
+        <p:txBody>
+          <a:bodyPr wrap="square" rtlCol="0">
+            <a:spAutoFit/>
+          </a:bodyPr>
+          <a:lstStyle/>
+          <a:p>
+            <a:pPr algn="just"/>
+            <a:r>
+              <a:rPr lang="en-US" sz="1200" dirty="0">
+                <a:latin typeface="Arial" panose="020B0604020202020204" pitchFamily="34" charset="0"/>
+                <a:cs typeface="Arial" panose="020B0604020202020204" pitchFamily="34" charset="0"/>
+              </a:rPr>
+              <a:t>Comment results: Try to classify the resonances, in which case are you close to critical coupling? Why?</a:t>
+            </a:r>
           </a:p>
           <a:p>
             <a:pPr algn="just"/>
@@ -3163,12 +6694,8 @@
           <a:p>
             <a:pPr algn="ctr"/>
             <a:r>
-              <a:rPr lang="es-ES" sz="2000" dirty="0" err="1"/>
-              <a:t>alpha</a:t>
-            </a:r>
-            <a:r>
               <a:rPr lang="es-ES" sz="2000" dirty="0"/>
-              <a:t>=0 dB/cm</a:t>
+              <a:t>K=</a:t>
             </a:r>
             <a:endParaRPr lang="en-US" sz="2000" dirty="0"/>
           </a:p>
@@ -3295,6 +6822,1020 @@
           <a:p>
             <a:pPr algn="ctr"/>
             <a:r>
+              <a:rPr lang="es-ES" sz="2000" dirty="0"/>
+              <a:t>K=</a:t>
+            </a:r>
+            <a:endParaRPr lang="en-US" sz="2000" dirty="0"/>
+          </a:p>
+        </p:txBody>
+      </p:sp>
+      <p:sp>
+        <p:nvSpPr>
+          <p:cNvPr id="13" name="CuadroTexto 12">
+            <a:extLst>
+              <a:ext uri="{FF2B5EF4-FFF2-40B4-BE49-F238E27FC236}">
+                <a16:creationId xmlns:a16="http://schemas.microsoft.com/office/drawing/2014/main" id="{057C499E-829F-FB11-9128-843C937CB822}"/>
+              </a:ext>
+            </a:extLst>
+          </p:cNvPr>
+          <p:cNvSpPr txBox="1"/>
+          <p:nvPr/>
+        </p:nvSpPr>
+        <p:spPr>
+          <a:xfrm>
+            <a:off x="6195187" y="2101891"/>
+            <a:ext cx="2033313" cy="1938992"/>
+          </a:xfrm>
+          <a:prstGeom prst="rect">
+            <a:avLst/>
+          </a:prstGeom>
+          <a:noFill/>
+        </p:spPr>
+        <p:txBody>
+          <a:bodyPr wrap="none" rtlCol="0">
+            <a:spAutoFit/>
+          </a:bodyPr>
+          <a:lstStyle/>
+          <a:p>
+            <a:pPr algn="ctr"/>
+            <a:r>
+              <a:rPr lang="es-ES" sz="2000" dirty="0"/>
+              <a:t>Single ring</a:t>
+            </a:r>
+          </a:p>
+          <a:p>
+            <a:pPr algn="ctr"/>
+            <a:r>
+              <a:rPr lang="es-ES" sz="2000" dirty="0"/>
+              <a:t>transfer </a:t>
+            </a:r>
+            <a:r>
+              <a:rPr lang="es-ES" sz="2000" dirty="0" err="1"/>
+              <a:t>functions</a:t>
+            </a:r>
+            <a:endParaRPr lang="es-ES" sz="2000" dirty="0"/>
+          </a:p>
+          <a:p>
+            <a:pPr algn="ctr"/>
+            <a:endParaRPr lang="es-ES" sz="2000" dirty="0"/>
+          </a:p>
+          <a:p>
+            <a:pPr algn="ctr"/>
+            <a:r>
+              <a:rPr lang="es-ES" sz="2000" dirty="0"/>
+              <a:t>Linear </a:t>
+            </a:r>
+            <a:r>
+              <a:rPr lang="es-ES" sz="2000" dirty="0" err="1"/>
+              <a:t>units</a:t>
+            </a:r>
+            <a:endParaRPr lang="es-ES" sz="2000" dirty="0"/>
+          </a:p>
+          <a:p>
+            <a:pPr algn="ctr"/>
+            <a:endParaRPr lang="es-ES" sz="2000" dirty="0"/>
+          </a:p>
+          <a:p>
+            <a:pPr algn="ctr"/>
+            <a:r>
+              <a:rPr lang="es-ES" sz="2000" dirty="0"/>
+              <a:t>K=</a:t>
+            </a:r>
+            <a:endParaRPr lang="en-US" sz="2000" dirty="0"/>
+          </a:p>
+        </p:txBody>
+      </p:sp>
+      <p:sp>
+        <p:nvSpPr>
+          <p:cNvPr id="12" name="CuadroTexto 11">
+            <a:extLst>
+              <a:ext uri="{FF2B5EF4-FFF2-40B4-BE49-F238E27FC236}">
+                <a16:creationId xmlns:a16="http://schemas.microsoft.com/office/drawing/2014/main" id="{4E78CC89-1377-28A4-024D-1B017D551FC5}"/>
+              </a:ext>
+            </a:extLst>
+          </p:cNvPr>
+          <p:cNvSpPr txBox="1"/>
+          <p:nvPr/>
+        </p:nvSpPr>
+        <p:spPr>
+          <a:xfrm>
+            <a:off x="9869875" y="2871332"/>
+            <a:ext cx="360996" cy="400110"/>
+          </a:xfrm>
+          <a:prstGeom prst="rect">
+            <a:avLst/>
+          </a:prstGeom>
+          <a:noFill/>
+        </p:spPr>
+        <p:txBody>
+          <a:bodyPr wrap="none" rtlCol="0">
+            <a:spAutoFit/>
+          </a:bodyPr>
+          <a:lstStyle/>
+          <a:p>
+            <a:pPr algn="ctr"/>
+            <a:r>
+              <a:rPr lang="es-ES" sz="2000" dirty="0"/>
+              <a:t>…</a:t>
+            </a:r>
+            <a:endParaRPr lang="en-US" sz="2000" dirty="0"/>
+          </a:p>
+        </p:txBody>
+      </p:sp>
+      <p:pic>
+        <p:nvPicPr>
+          <p:cNvPr id="3" name="Gráfico 2">
+            <a:extLst>
+              <a:ext uri="{FF2B5EF4-FFF2-40B4-BE49-F238E27FC236}">
+                <a16:creationId xmlns:a16="http://schemas.microsoft.com/office/drawing/2014/main" id="{0B245A9E-6C9A-F3A8-E4B7-661580126414}"/>
+              </a:ext>
+            </a:extLst>
+          </p:cNvPr>
+          <p:cNvPicPr>
+            <a:picLocks noChangeAspect="1"/>
+          </p:cNvPicPr>
+          <p:nvPr/>
+        </p:nvPicPr>
+        <p:blipFill>
+          <a:blip>
+            <a:extLst>
+              <a:ext uri="{96DAC541-7B7A-43D3-8B79-37D633B846F1}">
+                <asvg:svgBlip xmlns:asvg="http://schemas.microsoft.com/office/drawing/2016/SVG/main" r:embed="rId2"/>
+              </a:ext>
+            </a:extLst>
+          </a:blip>
+          <a:stretch>
+            <a:fillRect/>
+          </a:stretch>
+        </p:blipFill>
+        <p:spPr>
+          <a:xfrm>
+            <a:off x="5045006" y="6356057"/>
+            <a:ext cx="6409575" cy="363174"/>
+          </a:xfrm>
+          <a:prstGeom prst="rect">
+            <a:avLst/>
+          </a:prstGeom>
+        </p:spPr>
+      </p:pic>
+      <p:sp>
+        <p:nvSpPr>
+          <p:cNvPr id="16" name="object 16">
+            <a:extLst>
+              <a:ext uri="{FF2B5EF4-FFF2-40B4-BE49-F238E27FC236}">
+                <a16:creationId xmlns:a16="http://schemas.microsoft.com/office/drawing/2014/main" id="{8266F13B-05F1-81DE-B638-66D10EEB9FA2}"/>
+              </a:ext>
+            </a:extLst>
+          </p:cNvPr>
+          <p:cNvSpPr txBox="1">
+            <a:spLocks/>
+          </p:cNvSpPr>
+          <p:nvPr/>
+        </p:nvSpPr>
+        <p:spPr>
+          <a:xfrm>
+            <a:off x="685800" y="408883"/>
+            <a:ext cx="10994410" cy="718145"/>
+          </a:xfrm>
+          <a:prstGeom prst="rect">
+            <a:avLst/>
+          </a:prstGeom>
+        </p:spPr>
+        <p:txBody>
+          <a:bodyPr vert="horz" wrap="square" lIns="0" tIns="12700" rIns="0" bIns="0" rtlCol="0">
+            <a:spAutoFit/>
+          </a:bodyPr>
+          <a:lstStyle>
+            <a:lvl1pPr>
+              <a:defRPr sz="2000" b="1" i="0">
+                <a:solidFill>
+                  <a:schemeClr val="tx1"/>
+                </a:solidFill>
+                <a:latin typeface="Calibri"/>
+                <a:ea typeface="+mj-ea"/>
+                <a:cs typeface="Calibri"/>
+              </a:defRPr>
+            </a:lvl1pPr>
+          </a:lstStyle>
+          <a:p>
+            <a:pPr marL="12700">
+              <a:spcBef>
+                <a:spcPts val="100"/>
+              </a:spcBef>
+            </a:pPr>
+            <a:r>
+              <a:rPr lang="en-US" sz="2500" kern="0" dirty="0"/>
+              <a:t>Learning outcome #6a – Effect of K </a:t>
+            </a:r>
+          </a:p>
+          <a:p>
+            <a:pPr marL="12700">
+              <a:spcBef>
+                <a:spcPts val="100"/>
+              </a:spcBef>
+            </a:pPr>
+            <a:r>
+              <a:rPr lang="en-US" b="0" kern="0" spc="-5" dirty="0">
+                <a:latin typeface="+mj-lt"/>
+                <a:cs typeface="Lucida Sans"/>
+              </a:rPr>
+              <a:t>Change K value between 0.1 and 0.9 in steps of 0.1</a:t>
+            </a:r>
+          </a:p>
+        </p:txBody>
+      </p:sp>
+    </p:spTree>
+    <p:extLst>
+      <p:ext uri="{BB962C8B-B14F-4D97-AF65-F5344CB8AC3E}">
+        <p14:creationId xmlns:p14="http://schemas.microsoft.com/office/powerpoint/2010/main" val="1931625216"/>
+      </p:ext>
+    </p:extLst>
+  </p:cSld>
+  <p:clrMapOvr>
+    <a:masterClrMapping/>
+  </p:clrMapOvr>
+</p:sld>
+</file>
+
+<file path=ppt/slides/slide16.xml><?xml version="1.0" encoding="utf-8"?>
+<p:sld xmlns:a="http://schemas.openxmlformats.org/drawingml/2006/main" xmlns:r="http://schemas.openxmlformats.org/officeDocument/2006/relationships" xmlns:p="http://schemas.openxmlformats.org/presentationml/2006/main">
+  <p:cSld>
+    <p:spTree>
+      <p:nvGrpSpPr>
+        <p:cNvPr id="1" name="">
+          <a:extLst>
+            <a:ext uri="{FF2B5EF4-FFF2-40B4-BE49-F238E27FC236}">
+              <a16:creationId xmlns:a16="http://schemas.microsoft.com/office/drawing/2014/main" id="{83752C6E-451D-6F4C-4FA8-B4261FCAD39D}"/>
+            </a:ext>
+          </a:extLst>
+        </p:cNvPr>
+        <p:cNvGrpSpPr/>
+        <p:nvPr/>
+      </p:nvGrpSpPr>
+      <p:grpSpPr>
+        <a:xfrm>
+          <a:off x="0" y="0"/>
+          <a:ext cx="0" cy="0"/>
+          <a:chOff x="0" y="0"/>
+          <a:chExt cx="0" cy="0"/>
+        </a:xfrm>
+      </p:grpSpPr>
+      <p:sp>
+        <p:nvSpPr>
+          <p:cNvPr id="16" name="object 16">
+            <a:extLst>
+              <a:ext uri="{FF2B5EF4-FFF2-40B4-BE49-F238E27FC236}">
+                <a16:creationId xmlns:a16="http://schemas.microsoft.com/office/drawing/2014/main" id="{AEB6D3FC-53F8-D78B-42E2-2B0EBEFDB164}"/>
+              </a:ext>
+            </a:extLst>
+          </p:cNvPr>
+          <p:cNvSpPr txBox="1">
+            <a:spLocks noGrp="1"/>
+          </p:cNvSpPr>
+          <p:nvPr>
+            <p:ph type="title"/>
+          </p:nvPr>
+        </p:nvSpPr>
+        <p:spPr>
+          <a:xfrm>
+            <a:off x="685800" y="408883"/>
+            <a:ext cx="10994410" cy="397545"/>
+          </a:xfrm>
+          <a:prstGeom prst="rect">
+            <a:avLst/>
+          </a:prstGeom>
+        </p:spPr>
+        <p:txBody>
+          <a:bodyPr vert="horz" wrap="square" lIns="0" tIns="12700" rIns="0" bIns="0" rtlCol="0">
+            <a:spAutoFit/>
+          </a:bodyPr>
+          <a:lstStyle/>
+          <a:p>
+            <a:pPr marL="12700">
+              <a:spcBef>
+                <a:spcPts val="100"/>
+              </a:spcBef>
+            </a:pPr>
+            <a:r>
+              <a:rPr lang="en-US" sz="2500" dirty="0"/>
+              <a:t>Learning outcome #6a – Effect of K </a:t>
+            </a:r>
+          </a:p>
+        </p:txBody>
+      </p:sp>
+      <p:pic>
+        <p:nvPicPr>
+          <p:cNvPr id="83" name="Gráfico 82">
+            <a:extLst>
+              <a:ext uri="{FF2B5EF4-FFF2-40B4-BE49-F238E27FC236}">
+                <a16:creationId xmlns:a16="http://schemas.microsoft.com/office/drawing/2014/main" id="{2D813315-2BA3-0BB2-60FC-03D8890A76A4}"/>
+              </a:ext>
+            </a:extLst>
+          </p:cNvPr>
+          <p:cNvPicPr>
+            <a:picLocks noChangeAspect="1"/>
+          </p:cNvPicPr>
+          <p:nvPr/>
+        </p:nvPicPr>
+        <p:blipFill>
+          <a:blip>
+            <a:extLst>
+              <a:ext uri="{96DAC541-7B7A-43D3-8B79-37D633B846F1}">
+                <asvg:svgBlip xmlns:asvg="http://schemas.microsoft.com/office/drawing/2016/SVG/main" r:embed="rId3"/>
+              </a:ext>
+            </a:extLst>
+          </a:blip>
+          <a:stretch>
+            <a:fillRect/>
+          </a:stretch>
+        </p:blipFill>
+        <p:spPr>
+          <a:xfrm>
+            <a:off x="5045006" y="6356057"/>
+            <a:ext cx="6409575" cy="363174"/>
+          </a:xfrm>
+          <a:prstGeom prst="rect">
+            <a:avLst/>
+          </a:prstGeom>
+        </p:spPr>
+      </p:pic>
+      <p:sp>
+        <p:nvSpPr>
+          <p:cNvPr id="84" name="Marcador de número de diapositiva 83">
+            <a:extLst>
+              <a:ext uri="{FF2B5EF4-FFF2-40B4-BE49-F238E27FC236}">
+                <a16:creationId xmlns:a16="http://schemas.microsoft.com/office/drawing/2014/main" id="{A5835E64-327C-9298-29A5-80667CF9C034}"/>
+              </a:ext>
+            </a:extLst>
+          </p:cNvPr>
+          <p:cNvSpPr>
+            <a:spLocks noGrp="1"/>
+          </p:cNvSpPr>
+          <p:nvPr>
+            <p:ph type="sldNum" sz="quarter" idx="7"/>
+          </p:nvPr>
+        </p:nvSpPr>
+        <p:spPr/>
+        <p:txBody>
+          <a:bodyPr/>
+          <a:lstStyle/>
+          <a:p>
+            <a:fld id="{B6F15528-21DE-4FAA-801E-634DDDAF4B2B}" type="slidenum">
+              <a:rPr lang="es-ES" smtClean="0"/>
+              <a:t>16</a:t>
+            </a:fld>
+            <a:endParaRPr lang="es-ES"/>
+          </a:p>
+        </p:txBody>
+      </p:sp>
+      <p:sp>
+        <p:nvSpPr>
+          <p:cNvPr id="3" name="Marcador de pie de página 2">
+            <a:extLst>
+              <a:ext uri="{FF2B5EF4-FFF2-40B4-BE49-F238E27FC236}">
+                <a16:creationId xmlns:a16="http://schemas.microsoft.com/office/drawing/2014/main" id="{25C810F4-9FDD-D198-0AFA-EFC5C9174754}"/>
+              </a:ext>
+            </a:extLst>
+          </p:cNvPr>
+          <p:cNvSpPr>
+            <a:spLocks noGrp="1"/>
+          </p:cNvSpPr>
+          <p:nvPr>
+            <p:ph type="ftr" sz="quarter" idx="5"/>
+          </p:nvPr>
+        </p:nvSpPr>
+        <p:spPr/>
+        <p:txBody>
+          <a:bodyPr/>
+          <a:lstStyle/>
+          <a:p>
+            <a:pPr marL="12700">
+              <a:spcBef>
+                <a:spcPts val="15"/>
+              </a:spcBef>
+            </a:pPr>
+            <a:r>
+              <a:rPr lang="es-ES" spc="-5"/>
+              <a:t>LAB 3.0. CIRCUITS &amp; COMPACT MODELS</a:t>
+            </a:r>
+            <a:endParaRPr lang="es-ES" spc="-5" dirty="0"/>
+          </a:p>
+        </p:txBody>
+      </p:sp>
+      <p:sp>
+        <p:nvSpPr>
+          <p:cNvPr id="8" name="CuadroTexto 7">
+            <a:extLst>
+              <a:ext uri="{FF2B5EF4-FFF2-40B4-BE49-F238E27FC236}">
+                <a16:creationId xmlns:a16="http://schemas.microsoft.com/office/drawing/2014/main" id="{1FF87BB1-22E3-F432-2CEE-CFA950BC2AA3}"/>
+              </a:ext>
+            </a:extLst>
+          </p:cNvPr>
+          <p:cNvSpPr txBox="1"/>
+          <p:nvPr/>
+        </p:nvSpPr>
+        <p:spPr>
+          <a:xfrm>
+            <a:off x="228600" y="1371600"/>
+            <a:ext cx="5410201" cy="3970318"/>
+          </a:xfrm>
+          <a:prstGeom prst="rect">
+            <a:avLst/>
+          </a:prstGeom>
+          <a:noFill/>
+        </p:spPr>
+        <p:txBody>
+          <a:bodyPr wrap="square">
+            <a:spAutoFit/>
+          </a:bodyPr>
+          <a:lstStyle/>
+          <a:p>
+            <a:pPr algn="just"/>
+            <a:r>
+              <a:rPr lang="es-ES" sz="1200" dirty="0">
+                <a:latin typeface="Arial" panose="020B0604020202020204" pitchFamily="34" charset="0"/>
+                <a:cs typeface="Arial" panose="020B0604020202020204" pitchFamily="34" charset="0"/>
+              </a:rPr>
+              <a:t>En estas gráficas se puede observar las diferentes funciones de transferencia obtenidas haciendo un barrido de k desde 0.1 hasta 0.9.</a:t>
+            </a:r>
+          </a:p>
+          <a:p>
+            <a:pPr algn="just"/>
+            <a:r>
+              <a:rPr lang="es-ES" sz="1200" dirty="0">
+                <a:latin typeface="Arial" panose="020B0604020202020204" pitchFamily="34" charset="0"/>
+                <a:cs typeface="Arial" panose="020B0604020202020204" pitchFamily="34" charset="0"/>
+              </a:rPr>
+              <a:t>Para valores bajos de acoplamiento (0.1 o 0.2) las resonancias son valles muy estrechos y agudos con alto factor de calidad Q. Los valles caen hasta cas tocar el 0.</a:t>
+            </a:r>
+          </a:p>
+          <a:p>
+            <a:pPr algn="just"/>
+            <a:r>
+              <a:rPr lang="es-ES" sz="1200" dirty="0">
+                <a:latin typeface="Arial" panose="020B0604020202020204" pitchFamily="34" charset="0"/>
+                <a:cs typeface="Arial" panose="020B0604020202020204" pitchFamily="34" charset="0"/>
+              </a:rPr>
+              <a:t>Por otro lado, para valores altos de acoplamiento (mayores a 0.5) las resonancias se vuelven muy anchas y pocos profundas. También se observa como el techo de la transmisión empieza a caer notablemente por debajo de 1.0, ya que la luz escapa del acoplador enseguida disminuyendo el tiempo de confinamiento y haciendo que el filtro sea mucho menos selectivo.</a:t>
+            </a:r>
+          </a:p>
+          <a:p>
+            <a:pPr algn="just"/>
+            <a:r>
+              <a:rPr lang="es-ES" sz="1200" dirty="0">
+                <a:latin typeface="Arial" panose="020B0604020202020204" pitchFamily="34" charset="0"/>
+                <a:cs typeface="Arial" panose="020B0604020202020204" pitchFamily="34" charset="0"/>
+              </a:rPr>
+              <a:t>Observando la gráfica, el dispositivo se encuentra prácticamente en acoplamiento crítico en el caso de K = 0.2. En la gráfica logarítmica, se puede apreciar que la curva azul es la que llega a un valor más cercano a -∞ (-36 dB).</a:t>
+            </a:r>
+          </a:p>
+          <a:p>
+            <a:pPr algn="just"/>
+            <a:r>
+              <a:rPr lang="es-ES" sz="1200" dirty="0">
+                <a:latin typeface="Arial" panose="020B0604020202020204" pitchFamily="34" charset="0"/>
+                <a:cs typeface="Arial" panose="020B0604020202020204" pitchFamily="34" charset="0"/>
+              </a:rPr>
+              <a:t>Podemos clasificar los regímenes del anillo en tres zonas diferentes sabiendo que el punto crítico se encuentra en k = 0.2:</a:t>
+            </a:r>
+            <a:br>
+              <a:rPr lang="es-ES" sz="1200" dirty="0">
+                <a:latin typeface="Arial" panose="020B0604020202020204" pitchFamily="34" charset="0"/>
+                <a:cs typeface="Arial" panose="020B0604020202020204" pitchFamily="34" charset="0"/>
+              </a:rPr>
+            </a:br>
+            <a:r>
+              <a:rPr lang="es-ES" sz="1200" dirty="0">
+                <a:latin typeface="Arial" panose="020B0604020202020204" pitchFamily="34" charset="0"/>
+                <a:cs typeface="Arial" panose="020B0604020202020204" pitchFamily="34" charset="0"/>
+              </a:rPr>
+              <a:t>Bajo acoplamiento (K &lt; 0.2)</a:t>
+            </a:r>
+          </a:p>
+          <a:p>
+            <a:pPr algn="just"/>
+            <a:r>
+              <a:rPr lang="es-ES" sz="1200" dirty="0">
+                <a:latin typeface="Arial" panose="020B0604020202020204" pitchFamily="34" charset="0"/>
+                <a:cs typeface="Arial" panose="020B0604020202020204" pitchFamily="34" charset="0"/>
+              </a:rPr>
+              <a:t>Acoplamiento crítico (K = 0.2)</a:t>
+            </a:r>
+          </a:p>
+          <a:p>
+            <a:pPr algn="just"/>
+            <a:r>
+              <a:rPr lang="es-ES" sz="1200" dirty="0">
+                <a:latin typeface="Arial" panose="020B0604020202020204" pitchFamily="34" charset="0"/>
+                <a:cs typeface="Arial" panose="020B0604020202020204" pitchFamily="34" charset="0"/>
+              </a:rPr>
+              <a:t>Sobre acoplamiento (K &gt; 0.2)</a:t>
+            </a:r>
+          </a:p>
+          <a:p>
+            <a:pPr algn="just"/>
+            <a:r>
+              <a:rPr lang="es-ES" sz="1200" dirty="0">
+                <a:latin typeface="Arial" panose="020B0604020202020204" pitchFamily="34" charset="0"/>
+                <a:cs typeface="Arial" panose="020B0604020202020204" pitchFamily="34" charset="0"/>
+              </a:rPr>
+              <a:t>En el resto de curvas (0.3 a 0.9) los valles se vuelven chatos y el dispositivo pierde su capacidad de filtrar de forma eficiente.</a:t>
+            </a:r>
+          </a:p>
+        </p:txBody>
+      </p:sp>
+      <p:pic>
+        <p:nvPicPr>
+          <p:cNvPr id="2" name="Imagen 1">
+            <a:extLst>
+              <a:ext uri="{FF2B5EF4-FFF2-40B4-BE49-F238E27FC236}">
+                <a16:creationId xmlns:a16="http://schemas.microsoft.com/office/drawing/2014/main" id="{C1FDC4AB-3E69-B391-7FA3-00D16F766290}"/>
+              </a:ext>
+            </a:extLst>
+          </p:cNvPr>
+          <p:cNvPicPr>
+            <a:picLocks noChangeAspect="1"/>
+          </p:cNvPicPr>
+          <p:nvPr/>
+        </p:nvPicPr>
+        <p:blipFill>
+          <a:blip r:embed="rId4"/>
+          <a:stretch>
+            <a:fillRect/>
+          </a:stretch>
+        </p:blipFill>
+        <p:spPr>
+          <a:xfrm>
+            <a:off x="6065520" y="1143937"/>
+            <a:ext cx="5786939" cy="4197981"/>
+          </a:xfrm>
+          <a:prstGeom prst="rect">
+            <a:avLst/>
+          </a:prstGeom>
+        </p:spPr>
+      </p:pic>
+    </p:spTree>
+    <p:extLst>
+      <p:ext uri="{BB962C8B-B14F-4D97-AF65-F5344CB8AC3E}">
+        <p14:creationId xmlns:p14="http://schemas.microsoft.com/office/powerpoint/2010/main" val="88468198"/>
+      </p:ext>
+    </p:extLst>
+  </p:cSld>
+  <p:clrMapOvr>
+    <a:masterClrMapping/>
+  </p:clrMapOvr>
+</p:sld>
+</file>
+
+<file path=ppt/slides/slide17.xml><?xml version="1.0" encoding="utf-8"?>
+<p:sld xmlns:a="http://schemas.openxmlformats.org/drawingml/2006/main" xmlns:r="http://schemas.openxmlformats.org/officeDocument/2006/relationships" xmlns:p="http://schemas.openxmlformats.org/presentationml/2006/main">
+  <p:cSld>
+    <p:spTree>
+      <p:nvGrpSpPr>
+        <p:cNvPr id="1" name=""/>
+        <p:cNvGrpSpPr/>
+        <p:nvPr/>
+      </p:nvGrpSpPr>
+      <p:grpSpPr>
+        <a:xfrm>
+          <a:off x="0" y="0"/>
+          <a:ext cx="0" cy="0"/>
+          <a:chOff x="0" y="0"/>
+          <a:chExt cx="0" cy="0"/>
+        </a:xfrm>
+      </p:grpSpPr>
+      <p:sp>
+        <p:nvSpPr>
+          <p:cNvPr id="5" name="Marcador de pie de página 4">
+            <a:extLst>
+              <a:ext uri="{FF2B5EF4-FFF2-40B4-BE49-F238E27FC236}">
+                <a16:creationId xmlns:a16="http://schemas.microsoft.com/office/drawing/2014/main" id="{F929251A-3DC4-36B2-3FB3-341378364BED}"/>
+              </a:ext>
+            </a:extLst>
+          </p:cNvPr>
+          <p:cNvSpPr>
+            <a:spLocks noGrp="1"/>
+          </p:cNvSpPr>
+          <p:nvPr>
+            <p:ph type="ftr" sz="quarter" idx="5"/>
+          </p:nvPr>
+        </p:nvSpPr>
+        <p:spPr/>
+        <p:txBody>
+          <a:bodyPr/>
+          <a:lstStyle/>
+          <a:p>
+            <a:r>
+              <a:rPr lang="en-US"/>
+              <a:t>LAB 3.0. CIRCUITS &amp; COMPACT MODELS</a:t>
+            </a:r>
+          </a:p>
+        </p:txBody>
+      </p:sp>
+      <p:sp>
+        <p:nvSpPr>
+          <p:cNvPr id="6" name="Marcador de número de diapositiva 5">
+            <a:extLst>
+              <a:ext uri="{FF2B5EF4-FFF2-40B4-BE49-F238E27FC236}">
+                <a16:creationId xmlns:a16="http://schemas.microsoft.com/office/drawing/2014/main" id="{8E91A34C-DF76-97CF-3EFD-546BC64A2184}"/>
+              </a:ext>
+            </a:extLst>
+          </p:cNvPr>
+          <p:cNvSpPr>
+            <a:spLocks noGrp="1"/>
+          </p:cNvSpPr>
+          <p:nvPr>
+            <p:ph type="sldNum" sz="quarter" idx="7"/>
+          </p:nvPr>
+        </p:nvSpPr>
+        <p:spPr/>
+        <p:txBody>
+          <a:bodyPr/>
+          <a:lstStyle/>
+          <a:p>
+            <a:fld id="{C2F52289-4012-4053-9770-FE82CEB9514F}" type="slidenum">
+              <a:rPr lang="en-US" smtClean="0"/>
+              <a:pPr/>
+              <a:t>17</a:t>
+            </a:fld>
+            <a:endParaRPr lang="en-US" dirty="0"/>
+          </a:p>
+        </p:txBody>
+      </p:sp>
+      <p:sp>
+        <p:nvSpPr>
+          <p:cNvPr id="8" name="CuadroTexto 7">
+            <a:extLst>
+              <a:ext uri="{FF2B5EF4-FFF2-40B4-BE49-F238E27FC236}">
+                <a16:creationId xmlns:a16="http://schemas.microsoft.com/office/drawing/2014/main" id="{D9601617-351E-AE1A-1F4D-693F2EA59361}"/>
+              </a:ext>
+            </a:extLst>
+          </p:cNvPr>
+          <p:cNvSpPr txBox="1"/>
+          <p:nvPr/>
+        </p:nvSpPr>
+        <p:spPr>
+          <a:xfrm>
+            <a:off x="611029" y="4860335"/>
+            <a:ext cx="11199530" cy="830997"/>
+          </a:xfrm>
+          <a:prstGeom prst="rect">
+            <a:avLst/>
+          </a:prstGeom>
+          <a:solidFill>
+            <a:schemeClr val="bg1">
+              <a:lumMod val="95000"/>
+            </a:schemeClr>
+          </a:solidFill>
+          <a:ln w="28575">
+            <a:solidFill>
+              <a:srgbClr val="E0700D"/>
+            </a:solidFill>
+          </a:ln>
+        </p:spPr>
+        <p:txBody>
+          <a:bodyPr wrap="square" rtlCol="0">
+            <a:spAutoFit/>
+          </a:bodyPr>
+          <a:lstStyle/>
+          <a:p>
+            <a:pPr algn="just"/>
+            <a:r>
+              <a:rPr lang="en-US" sz="1200" dirty="0">
+                <a:latin typeface="Arial" panose="020B0604020202020204" pitchFamily="34" charset="0"/>
+                <a:cs typeface="Arial" panose="020B0604020202020204" pitchFamily="34" charset="0"/>
+              </a:rPr>
+              <a:t>Comment results. Try to classify the resonances, in which case are you close to critical coupling? Why?</a:t>
+            </a:r>
+          </a:p>
+          <a:p>
+            <a:pPr algn="just"/>
+            <a:endParaRPr lang="en-US" sz="1200" dirty="0">
+              <a:latin typeface="Arial" panose="020B0604020202020204" pitchFamily="34" charset="0"/>
+              <a:cs typeface="Arial" panose="020B0604020202020204" pitchFamily="34" charset="0"/>
+            </a:endParaRPr>
+          </a:p>
+          <a:p>
+            <a:pPr algn="just"/>
+            <a:endParaRPr lang="en-US" sz="1200" dirty="0">
+              <a:latin typeface="Arial" panose="020B0604020202020204" pitchFamily="34" charset="0"/>
+              <a:cs typeface="Arial" panose="020B0604020202020204" pitchFamily="34" charset="0"/>
+            </a:endParaRPr>
+          </a:p>
+          <a:p>
+            <a:pPr algn="just"/>
+            <a:endParaRPr lang="en-US" sz="1200" dirty="0">
+              <a:latin typeface="Arial" panose="020B0604020202020204" pitchFamily="34" charset="0"/>
+              <a:cs typeface="Arial" panose="020B0604020202020204" pitchFamily="34" charset="0"/>
+            </a:endParaRPr>
+          </a:p>
+        </p:txBody>
+      </p:sp>
+      <p:sp>
+        <p:nvSpPr>
+          <p:cNvPr id="11" name="Rectángulo 10">
+            <a:extLst>
+              <a:ext uri="{FF2B5EF4-FFF2-40B4-BE49-F238E27FC236}">
+                <a16:creationId xmlns:a16="http://schemas.microsoft.com/office/drawing/2014/main" id="{B811A5F9-C0B5-716C-70FB-9472E1BC2CD3}"/>
+              </a:ext>
+            </a:extLst>
+          </p:cNvPr>
+          <p:cNvSpPr/>
+          <p:nvPr/>
+        </p:nvSpPr>
+        <p:spPr>
+          <a:xfrm>
+            <a:off x="611030" y="1418373"/>
+            <a:ext cx="2538552" cy="3306028"/>
+          </a:xfrm>
+          <a:prstGeom prst="rect">
+            <a:avLst/>
+          </a:prstGeom>
+          <a:noFill/>
+          <a:ln w="28575">
+            <a:solidFill>
+              <a:srgbClr val="E0700D"/>
+            </a:solidFill>
+          </a:ln>
+        </p:spPr>
+        <p:style>
+          <a:lnRef idx="2">
+            <a:schemeClr val="accent1">
+              <a:shade val="15000"/>
+            </a:schemeClr>
+          </a:lnRef>
+          <a:fillRef idx="1">
+            <a:schemeClr val="accent1"/>
+          </a:fillRef>
+          <a:effectRef idx="0">
+            <a:schemeClr val="accent1"/>
+          </a:effectRef>
+          <a:fontRef idx="minor">
+            <a:schemeClr val="lt1"/>
+          </a:fontRef>
+        </p:style>
+        <p:txBody>
+          <a:bodyPr rtlCol="0" anchor="ctr"/>
+          <a:lstStyle/>
+          <a:p>
+            <a:pPr algn="ctr"/>
+            <a:endParaRPr lang="en-US"/>
+          </a:p>
+        </p:txBody>
+      </p:sp>
+      <p:sp>
+        <p:nvSpPr>
+          <p:cNvPr id="14" name="Rectángulo 13">
+            <a:extLst>
+              <a:ext uri="{FF2B5EF4-FFF2-40B4-BE49-F238E27FC236}">
+                <a16:creationId xmlns:a16="http://schemas.microsoft.com/office/drawing/2014/main" id="{6AA857E7-5C39-DCE1-10B5-40300FCF4B26}"/>
+              </a:ext>
+            </a:extLst>
+          </p:cNvPr>
+          <p:cNvSpPr/>
+          <p:nvPr/>
+        </p:nvSpPr>
+        <p:spPr>
+          <a:xfrm>
+            <a:off x="3277315" y="1419036"/>
+            <a:ext cx="2538552" cy="3306028"/>
+          </a:xfrm>
+          <a:prstGeom prst="rect">
+            <a:avLst/>
+          </a:prstGeom>
+          <a:noFill/>
+          <a:ln w="28575">
+            <a:solidFill>
+              <a:srgbClr val="E0700D"/>
+            </a:solidFill>
+          </a:ln>
+        </p:spPr>
+        <p:style>
+          <a:lnRef idx="2">
+            <a:schemeClr val="accent1">
+              <a:shade val="15000"/>
+            </a:schemeClr>
+          </a:lnRef>
+          <a:fillRef idx="1">
+            <a:schemeClr val="accent1"/>
+          </a:fillRef>
+          <a:effectRef idx="0">
+            <a:schemeClr val="accent1"/>
+          </a:effectRef>
+          <a:fontRef idx="minor">
+            <a:schemeClr val="lt1"/>
+          </a:fontRef>
+        </p:style>
+        <p:txBody>
+          <a:bodyPr rtlCol="0" anchor="ctr"/>
+          <a:lstStyle/>
+          <a:p>
+            <a:pPr algn="ctr"/>
+            <a:endParaRPr lang="en-US"/>
+          </a:p>
+        </p:txBody>
+      </p:sp>
+      <p:sp>
+        <p:nvSpPr>
+          <p:cNvPr id="15" name="CuadroTexto 14">
+            <a:extLst>
+              <a:ext uri="{FF2B5EF4-FFF2-40B4-BE49-F238E27FC236}">
+                <a16:creationId xmlns:a16="http://schemas.microsoft.com/office/drawing/2014/main" id="{54CF28B4-1346-F41D-2CD8-EA104ABBFB98}"/>
+              </a:ext>
+            </a:extLst>
+          </p:cNvPr>
+          <p:cNvSpPr txBox="1"/>
+          <p:nvPr/>
+        </p:nvSpPr>
+        <p:spPr>
+          <a:xfrm>
+            <a:off x="863650" y="2101891"/>
+            <a:ext cx="2033313" cy="1938992"/>
+          </a:xfrm>
+          <a:prstGeom prst="rect">
+            <a:avLst/>
+          </a:prstGeom>
+          <a:noFill/>
+        </p:spPr>
+        <p:txBody>
+          <a:bodyPr wrap="none" rtlCol="0">
+            <a:spAutoFit/>
+          </a:bodyPr>
+          <a:lstStyle/>
+          <a:p>
+            <a:pPr algn="ctr"/>
+            <a:r>
+              <a:rPr lang="es-ES" sz="2000" dirty="0"/>
+              <a:t>Single ring</a:t>
+            </a:r>
+          </a:p>
+          <a:p>
+            <a:pPr algn="ctr"/>
+            <a:r>
+              <a:rPr lang="es-ES" sz="2000" dirty="0"/>
+              <a:t>transfer </a:t>
+            </a:r>
+            <a:r>
+              <a:rPr lang="es-ES" sz="2000" dirty="0" err="1"/>
+              <a:t>functions</a:t>
+            </a:r>
+            <a:endParaRPr lang="es-ES" sz="2000" dirty="0"/>
+          </a:p>
+          <a:p>
+            <a:pPr algn="ctr"/>
+            <a:endParaRPr lang="es-ES" sz="2000" dirty="0"/>
+          </a:p>
+          <a:p>
+            <a:pPr algn="ctr"/>
+            <a:r>
+              <a:rPr lang="es-ES" sz="2000" dirty="0"/>
+              <a:t>Linear </a:t>
+            </a:r>
+            <a:r>
+              <a:rPr lang="es-ES" sz="2000" dirty="0" err="1"/>
+              <a:t>units</a:t>
+            </a:r>
+            <a:endParaRPr lang="es-ES" sz="2000" dirty="0"/>
+          </a:p>
+          <a:p>
+            <a:pPr algn="ctr"/>
+            <a:endParaRPr lang="es-ES" sz="2000" dirty="0"/>
+          </a:p>
+          <a:p>
+            <a:pPr algn="ctr"/>
+            <a:r>
+              <a:rPr lang="es-ES" sz="2000" dirty="0" err="1"/>
+              <a:t>alpha</a:t>
+            </a:r>
+            <a:r>
+              <a:rPr lang="es-ES" sz="2000" dirty="0"/>
+              <a:t>=0 dB/cm</a:t>
+            </a:r>
+            <a:endParaRPr lang="en-US" sz="2000" dirty="0"/>
+          </a:p>
+        </p:txBody>
+      </p:sp>
+      <p:sp>
+        <p:nvSpPr>
+          <p:cNvPr id="9" name="Rectángulo 8">
+            <a:extLst>
+              <a:ext uri="{FF2B5EF4-FFF2-40B4-BE49-F238E27FC236}">
+                <a16:creationId xmlns:a16="http://schemas.microsoft.com/office/drawing/2014/main" id="{11F0F5FC-B571-59FC-7890-3105A6A843BB}"/>
+              </a:ext>
+            </a:extLst>
+          </p:cNvPr>
+          <p:cNvSpPr/>
+          <p:nvPr/>
+        </p:nvSpPr>
+        <p:spPr>
+          <a:xfrm>
+            <a:off x="5943600" y="1418373"/>
+            <a:ext cx="2538552" cy="3306028"/>
+          </a:xfrm>
+          <a:prstGeom prst="rect">
+            <a:avLst/>
+          </a:prstGeom>
+          <a:noFill/>
+          <a:ln w="28575">
+            <a:solidFill>
+              <a:srgbClr val="E0700D"/>
+            </a:solidFill>
+          </a:ln>
+        </p:spPr>
+        <p:style>
+          <a:lnRef idx="2">
+            <a:schemeClr val="accent1">
+              <a:shade val="15000"/>
+            </a:schemeClr>
+          </a:lnRef>
+          <a:fillRef idx="1">
+            <a:schemeClr val="accent1"/>
+          </a:fillRef>
+          <a:effectRef idx="0">
+            <a:schemeClr val="accent1"/>
+          </a:effectRef>
+          <a:fontRef idx="minor">
+            <a:schemeClr val="lt1"/>
+          </a:fontRef>
+        </p:style>
+        <p:txBody>
+          <a:bodyPr rtlCol="0" anchor="ctr"/>
+          <a:lstStyle/>
+          <a:p>
+            <a:pPr algn="ctr"/>
+            <a:endParaRPr lang="en-US"/>
+          </a:p>
+        </p:txBody>
+      </p:sp>
+      <p:sp>
+        <p:nvSpPr>
+          <p:cNvPr id="10" name="CuadroTexto 9">
+            <a:extLst>
+              <a:ext uri="{FF2B5EF4-FFF2-40B4-BE49-F238E27FC236}">
+                <a16:creationId xmlns:a16="http://schemas.microsoft.com/office/drawing/2014/main" id="{3146642F-220B-8F6A-59A8-2D128DDF3BEB}"/>
+              </a:ext>
+            </a:extLst>
+          </p:cNvPr>
+          <p:cNvSpPr txBox="1"/>
+          <p:nvPr/>
+        </p:nvSpPr>
+        <p:spPr>
+          <a:xfrm>
+            <a:off x="3529935" y="2104638"/>
+            <a:ext cx="2033313" cy="1938992"/>
+          </a:xfrm>
+          <a:prstGeom prst="rect">
+            <a:avLst/>
+          </a:prstGeom>
+          <a:noFill/>
+        </p:spPr>
+        <p:txBody>
+          <a:bodyPr wrap="none" rtlCol="0">
+            <a:spAutoFit/>
+          </a:bodyPr>
+          <a:lstStyle/>
+          <a:p>
+            <a:pPr algn="ctr"/>
+            <a:r>
+              <a:rPr lang="es-ES" sz="2000" dirty="0"/>
+              <a:t>Single ring</a:t>
+            </a:r>
+          </a:p>
+          <a:p>
+            <a:pPr algn="ctr"/>
+            <a:r>
+              <a:rPr lang="es-ES" sz="2000" dirty="0"/>
+              <a:t>transfer </a:t>
+            </a:r>
+            <a:r>
+              <a:rPr lang="es-ES" sz="2000" dirty="0" err="1"/>
+              <a:t>functions</a:t>
+            </a:r>
+            <a:endParaRPr lang="es-ES" sz="2000" dirty="0"/>
+          </a:p>
+          <a:p>
+            <a:pPr algn="ctr"/>
+            <a:endParaRPr lang="es-ES" sz="2000" dirty="0"/>
+          </a:p>
+          <a:p>
+            <a:pPr algn="ctr"/>
+            <a:r>
+              <a:rPr lang="es-ES" sz="2000" dirty="0"/>
+              <a:t>Linear </a:t>
+            </a:r>
+            <a:r>
+              <a:rPr lang="es-ES" sz="2000" dirty="0" err="1"/>
+              <a:t>units</a:t>
+            </a:r>
+            <a:endParaRPr lang="es-ES" sz="2000" dirty="0"/>
+          </a:p>
+          <a:p>
+            <a:pPr algn="ctr"/>
+            <a:endParaRPr lang="es-ES" sz="2000" dirty="0"/>
+          </a:p>
+          <a:p>
+            <a:pPr algn="ctr"/>
+            <a:r>
               <a:rPr lang="es-ES" sz="2000" dirty="0" err="1"/>
               <a:t>alpha</a:t>
             </a:r>
@@ -3655,7 +8196,298 @@
 </p:sld>
 </file>
 
-<file path=ppt/slides/slide11.xml><?xml version="1.0" encoding="utf-8"?>
+<file path=ppt/slides/slide18.xml><?xml version="1.0" encoding="utf-8"?>
+<p:sld xmlns:a="http://schemas.openxmlformats.org/drawingml/2006/main" xmlns:r="http://schemas.openxmlformats.org/officeDocument/2006/relationships" xmlns:p="http://schemas.openxmlformats.org/presentationml/2006/main">
+  <p:cSld>
+    <p:spTree>
+      <p:nvGrpSpPr>
+        <p:cNvPr id="1" name="">
+          <a:extLst>
+            <a:ext uri="{FF2B5EF4-FFF2-40B4-BE49-F238E27FC236}">
+              <a16:creationId xmlns:a16="http://schemas.microsoft.com/office/drawing/2014/main" id="{8A0D1013-B6DB-1CE7-2653-1B33AABC1B84}"/>
+            </a:ext>
+          </a:extLst>
+        </p:cNvPr>
+        <p:cNvGrpSpPr/>
+        <p:nvPr/>
+      </p:nvGrpSpPr>
+      <p:grpSpPr>
+        <a:xfrm>
+          <a:off x="0" y="0"/>
+          <a:ext cx="0" cy="0"/>
+          <a:chOff x="0" y="0"/>
+          <a:chExt cx="0" cy="0"/>
+        </a:xfrm>
+      </p:grpSpPr>
+      <p:sp>
+        <p:nvSpPr>
+          <p:cNvPr id="16" name="object 16">
+            <a:extLst>
+              <a:ext uri="{FF2B5EF4-FFF2-40B4-BE49-F238E27FC236}">
+                <a16:creationId xmlns:a16="http://schemas.microsoft.com/office/drawing/2014/main" id="{82DD8A11-F4F7-8E7A-F574-56750D4C5C39}"/>
+              </a:ext>
+            </a:extLst>
+          </p:cNvPr>
+          <p:cNvSpPr txBox="1">
+            <a:spLocks noGrp="1"/>
+          </p:cNvSpPr>
+          <p:nvPr>
+            <p:ph type="title"/>
+          </p:nvPr>
+        </p:nvSpPr>
+        <p:spPr>
+          <a:xfrm>
+            <a:off x="685800" y="408883"/>
+            <a:ext cx="10994410" cy="397545"/>
+          </a:xfrm>
+          <a:prstGeom prst="rect">
+            <a:avLst/>
+          </a:prstGeom>
+        </p:spPr>
+        <p:txBody>
+          <a:bodyPr vert="horz" wrap="square" lIns="0" tIns="12700" rIns="0" bIns="0" rtlCol="0">
+            <a:spAutoFit/>
+          </a:bodyPr>
+          <a:lstStyle/>
+          <a:p>
+            <a:pPr marL="12700">
+              <a:spcBef>
+                <a:spcPts val="100"/>
+              </a:spcBef>
+            </a:pPr>
+            <a:r>
+              <a:rPr lang="en-US" sz="2500" dirty="0"/>
+              <a:t>Learning outcome #6b – Effect of loss</a:t>
+            </a:r>
+          </a:p>
+        </p:txBody>
+      </p:sp>
+      <p:pic>
+        <p:nvPicPr>
+          <p:cNvPr id="83" name="Gráfico 82">
+            <a:extLst>
+              <a:ext uri="{FF2B5EF4-FFF2-40B4-BE49-F238E27FC236}">
+                <a16:creationId xmlns:a16="http://schemas.microsoft.com/office/drawing/2014/main" id="{2827AE4A-E060-6474-EFCE-0CA423F234BF}"/>
+              </a:ext>
+            </a:extLst>
+          </p:cNvPr>
+          <p:cNvPicPr>
+            <a:picLocks noChangeAspect="1"/>
+          </p:cNvPicPr>
+          <p:nvPr/>
+        </p:nvPicPr>
+        <p:blipFill>
+          <a:blip>
+            <a:extLst>
+              <a:ext uri="{96DAC541-7B7A-43D3-8B79-37D633B846F1}">
+                <asvg:svgBlip xmlns:asvg="http://schemas.microsoft.com/office/drawing/2016/SVG/main" r:embed="rId3"/>
+              </a:ext>
+            </a:extLst>
+          </a:blip>
+          <a:stretch>
+            <a:fillRect/>
+          </a:stretch>
+        </p:blipFill>
+        <p:spPr>
+          <a:xfrm>
+            <a:off x="5045006" y="6356057"/>
+            <a:ext cx="6409575" cy="363174"/>
+          </a:xfrm>
+          <a:prstGeom prst="rect">
+            <a:avLst/>
+          </a:prstGeom>
+        </p:spPr>
+      </p:pic>
+      <p:sp>
+        <p:nvSpPr>
+          <p:cNvPr id="84" name="Marcador de número de diapositiva 83">
+            <a:extLst>
+              <a:ext uri="{FF2B5EF4-FFF2-40B4-BE49-F238E27FC236}">
+                <a16:creationId xmlns:a16="http://schemas.microsoft.com/office/drawing/2014/main" id="{B3718A71-8723-9304-01A7-7E9E63E27D68}"/>
+              </a:ext>
+            </a:extLst>
+          </p:cNvPr>
+          <p:cNvSpPr>
+            <a:spLocks noGrp="1"/>
+          </p:cNvSpPr>
+          <p:nvPr>
+            <p:ph type="sldNum" sz="quarter" idx="7"/>
+          </p:nvPr>
+        </p:nvSpPr>
+        <p:spPr/>
+        <p:txBody>
+          <a:bodyPr/>
+          <a:lstStyle/>
+          <a:p>
+            <a:fld id="{B6F15528-21DE-4FAA-801E-634DDDAF4B2B}" type="slidenum">
+              <a:rPr lang="es-ES" smtClean="0"/>
+              <a:t>18</a:t>
+            </a:fld>
+            <a:endParaRPr lang="es-ES"/>
+          </a:p>
+        </p:txBody>
+      </p:sp>
+      <p:sp>
+        <p:nvSpPr>
+          <p:cNvPr id="3" name="Marcador de pie de página 2">
+            <a:extLst>
+              <a:ext uri="{FF2B5EF4-FFF2-40B4-BE49-F238E27FC236}">
+                <a16:creationId xmlns:a16="http://schemas.microsoft.com/office/drawing/2014/main" id="{4DF22BB6-5B12-DD9C-6483-D25D9C3BA732}"/>
+              </a:ext>
+            </a:extLst>
+          </p:cNvPr>
+          <p:cNvSpPr>
+            <a:spLocks noGrp="1"/>
+          </p:cNvSpPr>
+          <p:nvPr>
+            <p:ph type="ftr" sz="quarter" idx="5"/>
+          </p:nvPr>
+        </p:nvSpPr>
+        <p:spPr/>
+        <p:txBody>
+          <a:bodyPr/>
+          <a:lstStyle/>
+          <a:p>
+            <a:pPr marL="12700">
+              <a:spcBef>
+                <a:spcPts val="15"/>
+              </a:spcBef>
+            </a:pPr>
+            <a:r>
+              <a:rPr lang="es-ES" spc="-5"/>
+              <a:t>LAB 3.0. CIRCUITS &amp; COMPACT MODELS</a:t>
+            </a:r>
+            <a:endParaRPr lang="es-ES" spc="-5" dirty="0"/>
+          </a:p>
+        </p:txBody>
+      </p:sp>
+      <p:sp>
+        <p:nvSpPr>
+          <p:cNvPr id="8" name="CuadroTexto 7">
+            <a:extLst>
+              <a:ext uri="{FF2B5EF4-FFF2-40B4-BE49-F238E27FC236}">
+                <a16:creationId xmlns:a16="http://schemas.microsoft.com/office/drawing/2014/main" id="{E5CB8E33-C019-B047-B520-0CA6F06D6E84}"/>
+              </a:ext>
+            </a:extLst>
+          </p:cNvPr>
+          <p:cNvSpPr txBox="1"/>
+          <p:nvPr/>
+        </p:nvSpPr>
+        <p:spPr>
+          <a:xfrm>
+            <a:off x="228600" y="2262434"/>
+            <a:ext cx="5410201" cy="2677656"/>
+          </a:xfrm>
+          <a:prstGeom prst="rect">
+            <a:avLst/>
+          </a:prstGeom>
+          <a:noFill/>
+        </p:spPr>
+        <p:txBody>
+          <a:bodyPr wrap="square">
+            <a:spAutoFit/>
+          </a:bodyPr>
+          <a:lstStyle/>
+          <a:p>
+            <a:pPr algn="just"/>
+            <a:r>
+              <a:rPr lang="es-ES" sz="1200" dirty="0">
+                <a:latin typeface="Arial" panose="020B0604020202020204" pitchFamily="34" charset="0"/>
+                <a:cs typeface="Arial" panose="020B0604020202020204" pitchFamily="34" charset="0"/>
+              </a:rPr>
+              <a:t>En estas gráficas se puede observar las diferentes funciones de transferencia obtenidas haciendo un barrido de las pérdidas de la guía desde 0 hasta 8 dB/cm.</a:t>
+            </a:r>
+          </a:p>
+          <a:p>
+            <a:pPr algn="just"/>
+            <a:r>
+              <a:rPr lang="es-ES" sz="1200" dirty="0">
+                <a:latin typeface="Arial" panose="020B0604020202020204" pitchFamily="34" charset="0"/>
+                <a:cs typeface="Arial" panose="020B0604020202020204" pitchFamily="34" charset="0"/>
+              </a:rPr>
+              <a:t>El caso ideal es cuando no hay pérdidas. Se puede observar como la transmisión es una línea perfectamente recta y plana en 1.0 en lineal (0 en dB).</a:t>
+            </a:r>
+          </a:p>
+          <a:p>
+            <a:pPr algn="just"/>
+            <a:r>
+              <a:rPr lang="es-ES" sz="1200" dirty="0">
+                <a:latin typeface="Arial" panose="020B0604020202020204" pitchFamily="34" charset="0"/>
+                <a:cs typeface="Arial" panose="020B0604020202020204" pitchFamily="34" charset="0"/>
+              </a:rPr>
+              <a:t>Cuand se aumentan las pérdidas (de 1 a 8 dB/cm) los valles de resonancia comienzan a aparecer y a hacerse cada vez más profundos. Además, el techo fuera de la resonancia empieza a decaer ligeramente por debajo de 1.0.</a:t>
+            </a:r>
+          </a:p>
+          <a:p>
+            <a:pPr algn="just"/>
+            <a:r>
+              <a:rPr lang="es-ES" sz="1200" dirty="0">
+                <a:latin typeface="Arial" panose="020B0604020202020204" pitchFamily="34" charset="0"/>
+                <a:cs typeface="Arial" panose="020B0604020202020204" pitchFamily="34" charset="0"/>
+              </a:rPr>
+              <a:t>En este caso ninguna curva se encuentra en acoplamiento crítico, dado que en todas las curvas hay </a:t>
+            </a:r>
+            <a:r>
+              <a:rPr lang="es-ES" sz="1200" dirty="0" err="1">
+                <a:latin typeface="Arial" panose="020B0604020202020204" pitchFamily="34" charset="0"/>
+                <a:cs typeface="Arial" panose="020B0604020202020204" pitchFamily="34" charset="0"/>
+              </a:rPr>
+              <a:t>sobre-acoplamiento</a:t>
+            </a:r>
+            <a:r>
+              <a:rPr lang="es-ES" sz="1200" dirty="0">
+                <a:latin typeface="Arial" panose="020B0604020202020204" pitchFamily="34" charset="0"/>
+                <a:cs typeface="Arial" panose="020B0604020202020204" pitchFamily="34" charset="0"/>
+              </a:rPr>
+              <a:t>, debido a que al tener una longitud de anillo muy pequeño, hay muy pocas pérdidas en una vuelta en comparación ala luz que entra o sale del anillo</a:t>
+            </a:r>
+          </a:p>
+        </p:txBody>
+      </p:sp>
+      <p:pic>
+        <p:nvPicPr>
+          <p:cNvPr id="4" name="Imagen 3">
+            <a:extLst>
+              <a:ext uri="{FF2B5EF4-FFF2-40B4-BE49-F238E27FC236}">
+                <a16:creationId xmlns:a16="http://schemas.microsoft.com/office/drawing/2014/main" id="{80C14733-CC45-AB05-6B97-CB008DEE4753}"/>
+              </a:ext>
+            </a:extLst>
+          </p:cNvPr>
+          <p:cNvPicPr>
+            <a:picLocks noChangeAspect="1"/>
+          </p:cNvPicPr>
+          <p:nvPr/>
+        </p:nvPicPr>
+        <p:blipFill>
+          <a:blip r:embed="rId4"/>
+          <a:stretch>
+            <a:fillRect/>
+          </a:stretch>
+        </p:blipFill>
+        <p:spPr>
+          <a:xfrm>
+            <a:off x="5942370" y="1295001"/>
+            <a:ext cx="5883459" cy="4267998"/>
+          </a:xfrm>
+          <a:prstGeom prst="rect">
+            <a:avLst/>
+          </a:prstGeom>
+        </p:spPr>
+      </p:pic>
+    </p:spTree>
+    <p:extLst>
+      <p:ext uri="{BB962C8B-B14F-4D97-AF65-F5344CB8AC3E}">
+        <p14:creationId xmlns:p14="http://schemas.microsoft.com/office/powerpoint/2010/main" val="4235788184"/>
+      </p:ext>
+    </p:extLst>
+  </p:cSld>
+  <p:clrMapOvr>
+    <a:masterClrMapping/>
+  </p:clrMapOvr>
+</p:sld>
+</file>
+
+<file path=ppt/slides/slide19.xml><?xml version="1.0" encoding="utf-8"?>
 <p:sld xmlns:a="http://schemas.openxmlformats.org/drawingml/2006/main" xmlns:r="http://schemas.openxmlformats.org/officeDocument/2006/relationships" xmlns:p="http://schemas.openxmlformats.org/presentationml/2006/main">
   <p:cSld>
     <p:spTree>
@@ -3794,7 +8626,7 @@
           <a:p>
             <a:fld id="{B6F15528-21DE-4FAA-801E-634DDDAF4B2B}" type="slidenum">
               <a:rPr lang="es-ES" smtClean="0"/>
-              <a:t>11</a:t>
+              <a:t>19</a:t>
             </a:fld>
             <a:endParaRPr lang="es-ES"/>
           </a:p>
@@ -5167,6 +9999,1319 @@
         <p:cNvPr id="1" name="">
           <a:extLst>
             <a:ext uri="{FF2B5EF4-FFF2-40B4-BE49-F238E27FC236}">
+              <a16:creationId xmlns:a16="http://schemas.microsoft.com/office/drawing/2014/main" id="{AA6E2AF4-D9F3-FA81-FA87-765A6650AAAD}"/>
+            </a:ext>
+          </a:extLst>
+        </p:cNvPr>
+        <p:cNvGrpSpPr/>
+        <p:nvPr/>
+      </p:nvGrpSpPr>
+      <p:grpSpPr>
+        <a:xfrm>
+          <a:off x="0" y="0"/>
+          <a:ext cx="0" cy="0"/>
+          <a:chOff x="0" y="0"/>
+          <a:chExt cx="0" cy="0"/>
+        </a:xfrm>
+      </p:grpSpPr>
+      <p:sp>
+        <p:nvSpPr>
+          <p:cNvPr id="16" name="object 16">
+            <a:extLst>
+              <a:ext uri="{FF2B5EF4-FFF2-40B4-BE49-F238E27FC236}">
+                <a16:creationId xmlns:a16="http://schemas.microsoft.com/office/drawing/2014/main" id="{2512CD26-DF99-C2E3-7112-313B4E90B016}"/>
+              </a:ext>
+            </a:extLst>
+          </p:cNvPr>
+          <p:cNvSpPr txBox="1">
+            <a:spLocks noGrp="1"/>
+          </p:cNvSpPr>
+          <p:nvPr>
+            <p:ph type="title"/>
+          </p:nvPr>
+        </p:nvSpPr>
+        <p:spPr>
+          <a:xfrm>
+            <a:off x="685800" y="408883"/>
+            <a:ext cx="10994410" cy="782265"/>
+          </a:xfrm>
+          <a:prstGeom prst="rect">
+            <a:avLst/>
+          </a:prstGeom>
+        </p:spPr>
+        <p:txBody>
+          <a:bodyPr vert="horz" wrap="square" lIns="0" tIns="12700" rIns="0" bIns="0" rtlCol="0">
+            <a:spAutoFit/>
+          </a:bodyPr>
+          <a:lstStyle/>
+          <a:p>
+            <a:pPr marL="12700">
+              <a:lnSpc>
+                <a:spcPct val="100000"/>
+              </a:lnSpc>
+              <a:spcBef>
+                <a:spcPts val="100"/>
+              </a:spcBef>
+            </a:pPr>
+            <a:r>
+              <a:rPr lang="en-US" sz="2500" dirty="0"/>
+              <a:t>Learning outcome #1a – Perfectly balanced MZI</a:t>
+            </a:r>
+            <a:br>
+              <a:rPr lang="es-ES" sz="2500" spc="-5" dirty="0">
+                <a:latin typeface="+mj-lt"/>
+                <a:cs typeface="Lucida Sans"/>
+              </a:rPr>
+            </a:br>
+            <a:endParaRPr sz="2500" b="0" dirty="0">
+              <a:latin typeface="+mj-lt"/>
+              <a:cs typeface="Lucida Sans"/>
+            </a:endParaRPr>
+          </a:p>
+        </p:txBody>
+      </p:sp>
+      <p:pic>
+        <p:nvPicPr>
+          <p:cNvPr id="83" name="Gráfico 82">
+            <a:extLst>
+              <a:ext uri="{FF2B5EF4-FFF2-40B4-BE49-F238E27FC236}">
+                <a16:creationId xmlns:a16="http://schemas.microsoft.com/office/drawing/2014/main" id="{9DB7EB88-6ECD-E8EB-5BEA-5FD97C4B0D7E}"/>
+              </a:ext>
+            </a:extLst>
+          </p:cNvPr>
+          <p:cNvPicPr>
+            <a:picLocks noChangeAspect="1"/>
+          </p:cNvPicPr>
+          <p:nvPr/>
+        </p:nvPicPr>
+        <p:blipFill>
+          <a:blip>
+            <a:extLst>
+              <a:ext uri="{96DAC541-7B7A-43D3-8B79-37D633B846F1}">
+                <asvg:svgBlip xmlns:asvg="http://schemas.microsoft.com/office/drawing/2016/SVG/main" r:embed="rId3"/>
+              </a:ext>
+            </a:extLst>
+          </a:blip>
+          <a:stretch>
+            <a:fillRect/>
+          </a:stretch>
+        </p:blipFill>
+        <p:spPr>
+          <a:xfrm>
+            <a:off x="5045006" y="6356057"/>
+            <a:ext cx="6409575" cy="363174"/>
+          </a:xfrm>
+          <a:prstGeom prst="rect">
+            <a:avLst/>
+          </a:prstGeom>
+        </p:spPr>
+      </p:pic>
+      <p:sp>
+        <p:nvSpPr>
+          <p:cNvPr id="84" name="Marcador de número de diapositiva 83">
+            <a:extLst>
+              <a:ext uri="{FF2B5EF4-FFF2-40B4-BE49-F238E27FC236}">
+                <a16:creationId xmlns:a16="http://schemas.microsoft.com/office/drawing/2014/main" id="{0D965AEE-9787-545D-E349-402E7F0C3090}"/>
+              </a:ext>
+            </a:extLst>
+          </p:cNvPr>
+          <p:cNvSpPr>
+            <a:spLocks noGrp="1"/>
+          </p:cNvSpPr>
+          <p:nvPr>
+            <p:ph type="sldNum" sz="quarter" idx="7"/>
+          </p:nvPr>
+        </p:nvSpPr>
+        <p:spPr/>
+        <p:txBody>
+          <a:bodyPr/>
+          <a:lstStyle/>
+          <a:p>
+            <a:fld id="{B6F15528-21DE-4FAA-801E-634DDDAF4B2B}" type="slidenum">
+              <a:rPr lang="es-ES" smtClean="0"/>
+              <a:t>4</a:t>
+            </a:fld>
+            <a:endParaRPr lang="es-ES"/>
+          </a:p>
+        </p:txBody>
+      </p:sp>
+      <p:sp>
+        <p:nvSpPr>
+          <p:cNvPr id="3" name="Marcador de pie de página 2">
+            <a:extLst>
+              <a:ext uri="{FF2B5EF4-FFF2-40B4-BE49-F238E27FC236}">
+                <a16:creationId xmlns:a16="http://schemas.microsoft.com/office/drawing/2014/main" id="{C51FADE2-EF06-9D24-178A-A749242201C6}"/>
+              </a:ext>
+            </a:extLst>
+          </p:cNvPr>
+          <p:cNvSpPr>
+            <a:spLocks noGrp="1"/>
+          </p:cNvSpPr>
+          <p:nvPr>
+            <p:ph type="ftr" sz="quarter" idx="5"/>
+          </p:nvPr>
+        </p:nvSpPr>
+        <p:spPr/>
+        <p:txBody>
+          <a:bodyPr/>
+          <a:lstStyle/>
+          <a:p>
+            <a:pPr marL="12700">
+              <a:spcBef>
+                <a:spcPts val="15"/>
+              </a:spcBef>
+            </a:pPr>
+            <a:r>
+              <a:rPr lang="es-ES" spc="-5"/>
+              <a:t>LAB 3.0. CIRCUITS &amp; COMPACT MODELS</a:t>
+            </a:r>
+            <a:endParaRPr lang="es-ES" spc="-5" dirty="0"/>
+          </a:p>
+        </p:txBody>
+      </p:sp>
+      <p:pic>
+        <p:nvPicPr>
+          <p:cNvPr id="8" name="Imagen 7">
+            <a:extLst>
+              <a:ext uri="{FF2B5EF4-FFF2-40B4-BE49-F238E27FC236}">
+                <a16:creationId xmlns:a16="http://schemas.microsoft.com/office/drawing/2014/main" id="{806CD210-3C54-6D6B-D628-84848DEF2F9A}"/>
+              </a:ext>
+            </a:extLst>
+          </p:cNvPr>
+          <p:cNvPicPr>
+            <a:picLocks noChangeAspect="1"/>
+          </p:cNvPicPr>
+          <p:nvPr/>
+        </p:nvPicPr>
+        <p:blipFill>
+          <a:blip r:embed="rId4"/>
+          <a:stretch>
+            <a:fillRect/>
+          </a:stretch>
+        </p:blipFill>
+        <p:spPr>
+          <a:xfrm>
+            <a:off x="2997095" y="969365"/>
+            <a:ext cx="6371820" cy="3570287"/>
+          </a:xfrm>
+          <a:prstGeom prst="rect">
+            <a:avLst/>
+          </a:prstGeom>
+        </p:spPr>
+      </p:pic>
+      <p:sp>
+        <p:nvSpPr>
+          <p:cNvPr id="12" name="CuadroTexto 11">
+            <a:extLst>
+              <a:ext uri="{FF2B5EF4-FFF2-40B4-BE49-F238E27FC236}">
+                <a16:creationId xmlns:a16="http://schemas.microsoft.com/office/drawing/2014/main" id="{5600B2A0-4FEE-19A9-EB4D-F941239B61CC}"/>
+              </a:ext>
+            </a:extLst>
+          </p:cNvPr>
+          <p:cNvSpPr txBox="1"/>
+          <p:nvPr/>
+        </p:nvSpPr>
+        <p:spPr>
+          <a:xfrm>
+            <a:off x="1402080" y="4602060"/>
+            <a:ext cx="9281160" cy="1569660"/>
+          </a:xfrm>
+          <a:prstGeom prst="rect">
+            <a:avLst/>
+          </a:prstGeom>
+          <a:noFill/>
+        </p:spPr>
+        <p:txBody>
+          <a:bodyPr wrap="square">
+            <a:spAutoFit/>
+          </a:bodyPr>
+          <a:lstStyle/>
+          <a:p>
+            <a:pPr algn="just"/>
+            <a:r>
+              <a:rPr lang="en-US" sz="1200" dirty="0">
+                <a:latin typeface="Arial" panose="020B0604020202020204" pitchFamily="34" charset="0"/>
+                <a:cs typeface="Arial" panose="020B0604020202020204" pitchFamily="34" charset="0"/>
+              </a:rPr>
+              <a:t>Las </a:t>
+            </a:r>
+            <a:r>
+              <a:rPr lang="en-US" sz="1200" dirty="0" err="1">
+                <a:latin typeface="Arial" panose="020B0604020202020204" pitchFamily="34" charset="0"/>
+                <a:cs typeface="Arial" panose="020B0604020202020204" pitchFamily="34" charset="0"/>
+              </a:rPr>
+              <a:t>herramientas</a:t>
+            </a:r>
+            <a:r>
+              <a:rPr lang="en-US" sz="1200" dirty="0">
+                <a:latin typeface="Arial" panose="020B0604020202020204" pitchFamily="34" charset="0"/>
+                <a:cs typeface="Arial" panose="020B0604020202020204" pitchFamily="34" charset="0"/>
+              </a:rPr>
+              <a:t> </a:t>
+            </a:r>
+            <a:r>
+              <a:rPr lang="en-US" sz="1200" dirty="0" err="1">
+                <a:latin typeface="Arial" panose="020B0604020202020204" pitchFamily="34" charset="0"/>
+                <a:cs typeface="Arial" panose="020B0604020202020204" pitchFamily="34" charset="0"/>
+              </a:rPr>
+              <a:t>usadas</a:t>
+            </a:r>
+            <a:r>
+              <a:rPr lang="en-US" sz="1200" dirty="0">
+                <a:latin typeface="Arial" panose="020B0604020202020204" pitchFamily="34" charset="0"/>
+                <a:cs typeface="Arial" panose="020B0604020202020204" pitchFamily="34" charset="0"/>
+              </a:rPr>
+              <a:t> </a:t>
+            </a:r>
+            <a:r>
+              <a:rPr lang="en-US" sz="1200" dirty="0" err="1">
+                <a:latin typeface="Arial" panose="020B0604020202020204" pitchFamily="34" charset="0"/>
+                <a:cs typeface="Arial" panose="020B0604020202020204" pitchFamily="34" charset="0"/>
+              </a:rPr>
+              <a:t>han</a:t>
+            </a:r>
+            <a:r>
+              <a:rPr lang="en-US" sz="1200" dirty="0">
+                <a:latin typeface="Arial" panose="020B0604020202020204" pitchFamily="34" charset="0"/>
+                <a:cs typeface="Arial" panose="020B0604020202020204" pitchFamily="34" charset="0"/>
+              </a:rPr>
+              <a:t> </a:t>
+            </a:r>
+            <a:r>
+              <a:rPr lang="en-US" sz="1200" dirty="0" err="1">
+                <a:latin typeface="Arial" panose="020B0604020202020204" pitchFamily="34" charset="0"/>
+                <a:cs typeface="Arial" panose="020B0604020202020204" pitchFamily="34" charset="0"/>
+              </a:rPr>
+              <a:t>sido</a:t>
+            </a:r>
+            <a:r>
+              <a:rPr lang="en-US" sz="1200" dirty="0">
+                <a:latin typeface="Arial" panose="020B0604020202020204" pitchFamily="34" charset="0"/>
+                <a:cs typeface="Arial" panose="020B0604020202020204" pitchFamily="34" charset="0"/>
+              </a:rPr>
+              <a:t> </a:t>
+            </a:r>
+            <a:r>
+              <a:rPr lang="en-US" sz="1200" dirty="0" err="1">
+                <a:latin typeface="Arial" panose="020B0604020202020204" pitchFamily="34" charset="0"/>
+                <a:cs typeface="Arial" panose="020B0604020202020204" pitchFamily="34" charset="0"/>
+              </a:rPr>
+              <a:t>los</a:t>
+            </a:r>
+            <a:r>
+              <a:rPr lang="en-US" sz="1200" dirty="0">
+                <a:latin typeface="Arial" panose="020B0604020202020204" pitchFamily="34" charset="0"/>
+                <a:cs typeface="Arial" panose="020B0604020202020204" pitchFamily="34" charset="0"/>
+              </a:rPr>
+              <a:t> Compact Models del coupler y de la </a:t>
+            </a:r>
+            <a:r>
+              <a:rPr lang="en-US" sz="1200" dirty="0" err="1">
+                <a:latin typeface="Arial" panose="020B0604020202020204" pitchFamily="34" charset="0"/>
+                <a:cs typeface="Arial" panose="020B0604020202020204" pitchFamily="34" charset="0"/>
+              </a:rPr>
+              <a:t>silicon_waveguide</a:t>
+            </a:r>
+            <a:r>
+              <a:rPr lang="en-US" sz="1200" dirty="0">
+                <a:latin typeface="Arial" panose="020B0604020202020204" pitchFamily="34" charset="0"/>
+                <a:cs typeface="Arial" panose="020B0604020202020204" pitchFamily="34" charset="0"/>
+              </a:rPr>
+              <a:t>, y </a:t>
+            </a:r>
+            <a:r>
+              <a:rPr lang="en-US" sz="1200" dirty="0" err="1">
+                <a:latin typeface="Arial" panose="020B0604020202020204" pitchFamily="34" charset="0"/>
+                <a:cs typeface="Arial" panose="020B0604020202020204" pitchFamily="34" charset="0"/>
+              </a:rPr>
+              <a:t>el</a:t>
+            </a:r>
+            <a:r>
+              <a:rPr lang="en-US" sz="1200" dirty="0">
+                <a:latin typeface="Arial" panose="020B0604020202020204" pitchFamily="34" charset="0"/>
+                <a:cs typeface="Arial" panose="020B0604020202020204" pitchFamily="34" charset="0"/>
+              </a:rPr>
+              <a:t> Circuit Model, </a:t>
+            </a:r>
+            <a:r>
+              <a:rPr lang="en-US" sz="1200" dirty="0" err="1">
+                <a:latin typeface="Arial" panose="020B0604020202020204" pitchFamily="34" charset="0"/>
+                <a:cs typeface="Arial" panose="020B0604020202020204" pitchFamily="34" charset="0"/>
+              </a:rPr>
+              <a:t>que</a:t>
+            </a:r>
+            <a:r>
+              <a:rPr lang="en-US" sz="1200" dirty="0">
+                <a:latin typeface="Arial" panose="020B0604020202020204" pitchFamily="34" charset="0"/>
+                <a:cs typeface="Arial" panose="020B0604020202020204" pitchFamily="34" charset="0"/>
+              </a:rPr>
+              <a:t> es la </a:t>
+            </a:r>
+            <a:r>
+              <a:rPr lang="en-US" sz="1200" dirty="0" err="1">
+                <a:latin typeface="Arial" panose="020B0604020202020204" pitchFamily="34" charset="0"/>
+                <a:cs typeface="Arial" panose="020B0604020202020204" pitchFamily="34" charset="0"/>
+              </a:rPr>
+              <a:t>estructura</a:t>
+            </a:r>
+            <a:r>
+              <a:rPr lang="en-US" sz="1200" dirty="0">
+                <a:latin typeface="Arial" panose="020B0604020202020204" pitchFamily="34" charset="0"/>
+                <a:cs typeface="Arial" panose="020B0604020202020204" pitchFamily="34" charset="0"/>
+              </a:rPr>
+              <a:t> </a:t>
+            </a:r>
+            <a:r>
+              <a:rPr lang="en-US" sz="1200" dirty="0" err="1">
+                <a:latin typeface="Arial" panose="020B0604020202020204" pitchFamily="34" charset="0"/>
+                <a:cs typeface="Arial" panose="020B0604020202020204" pitchFamily="34" charset="0"/>
+              </a:rPr>
+              <a:t>que</a:t>
+            </a:r>
+            <a:r>
+              <a:rPr lang="en-US" sz="1200" dirty="0">
+                <a:latin typeface="Arial" panose="020B0604020202020204" pitchFamily="34" charset="0"/>
+                <a:cs typeface="Arial" panose="020B0604020202020204" pitchFamily="34" charset="0"/>
+              </a:rPr>
+              <a:t> define de forma modular </a:t>
+            </a:r>
+            <a:r>
+              <a:rPr lang="en-US" sz="1200" dirty="0" err="1">
+                <a:latin typeface="Arial" panose="020B0604020202020204" pitchFamily="34" charset="0"/>
+                <a:cs typeface="Arial" panose="020B0604020202020204" pitchFamily="34" charset="0"/>
+              </a:rPr>
+              <a:t>como</a:t>
+            </a:r>
+            <a:r>
+              <a:rPr lang="en-US" sz="1200" dirty="0">
+                <a:latin typeface="Arial" panose="020B0604020202020204" pitchFamily="34" charset="0"/>
+                <a:cs typeface="Arial" panose="020B0604020202020204" pitchFamily="34" charset="0"/>
+              </a:rPr>
+              <a:t> se </a:t>
+            </a:r>
+            <a:r>
+              <a:rPr lang="en-US" sz="1200" dirty="0" err="1">
+                <a:latin typeface="Arial" panose="020B0604020202020204" pitchFamily="34" charset="0"/>
+                <a:cs typeface="Arial" panose="020B0604020202020204" pitchFamily="34" charset="0"/>
+              </a:rPr>
+              <a:t>interconectan</a:t>
+            </a:r>
+            <a:r>
+              <a:rPr lang="en-US" sz="1200" dirty="0">
+                <a:latin typeface="Arial" panose="020B0604020202020204" pitchFamily="34" charset="0"/>
+                <a:cs typeface="Arial" panose="020B0604020202020204" pitchFamily="34" charset="0"/>
+              </a:rPr>
+              <a:t> </a:t>
+            </a:r>
+            <a:r>
+              <a:rPr lang="en-US" sz="1200" dirty="0" err="1">
+                <a:latin typeface="Arial" panose="020B0604020202020204" pitchFamily="34" charset="0"/>
+                <a:cs typeface="Arial" panose="020B0604020202020204" pitchFamily="34" charset="0"/>
+              </a:rPr>
+              <a:t>fisicamente</a:t>
+            </a:r>
+            <a:r>
+              <a:rPr lang="en-US" sz="1200" dirty="0">
+                <a:latin typeface="Arial" panose="020B0604020202020204" pitchFamily="34" charset="0"/>
+                <a:cs typeface="Arial" panose="020B0604020202020204" pitchFamily="34" charset="0"/>
+              </a:rPr>
+              <a:t> </a:t>
+            </a:r>
+            <a:r>
+              <a:rPr lang="en-US" sz="1200" dirty="0" err="1">
+                <a:latin typeface="Arial" panose="020B0604020202020204" pitchFamily="34" charset="0"/>
+                <a:cs typeface="Arial" panose="020B0604020202020204" pitchFamily="34" charset="0"/>
+              </a:rPr>
+              <a:t>los</a:t>
+            </a:r>
+            <a:r>
+              <a:rPr lang="en-US" sz="1200" dirty="0">
+                <a:latin typeface="Arial" panose="020B0604020202020204" pitchFamily="34" charset="0"/>
+                <a:cs typeface="Arial" panose="020B0604020202020204" pitchFamily="34" charset="0"/>
+              </a:rPr>
+              <a:t> </a:t>
+            </a:r>
+            <a:r>
+              <a:rPr lang="en-US" sz="1200" dirty="0" err="1">
+                <a:latin typeface="Arial" panose="020B0604020202020204" pitchFamily="34" charset="0"/>
+                <a:cs typeface="Arial" panose="020B0604020202020204" pitchFamily="34" charset="0"/>
+              </a:rPr>
+              <a:t>acopladores</a:t>
+            </a:r>
+            <a:r>
+              <a:rPr lang="en-US" sz="1200" dirty="0">
+                <a:latin typeface="Arial" panose="020B0604020202020204" pitchFamily="34" charset="0"/>
+                <a:cs typeface="Arial" panose="020B0604020202020204" pitchFamily="34" charset="0"/>
+              </a:rPr>
+              <a:t> y las </a:t>
+            </a:r>
+            <a:r>
+              <a:rPr lang="en-US" sz="1200" dirty="0" err="1">
+                <a:latin typeface="Arial" panose="020B0604020202020204" pitchFamily="34" charset="0"/>
+                <a:cs typeface="Arial" panose="020B0604020202020204" pitchFamily="34" charset="0"/>
+              </a:rPr>
+              <a:t>guías</a:t>
+            </a:r>
+            <a:r>
+              <a:rPr lang="en-US" sz="1200" dirty="0">
+                <a:latin typeface="Arial" panose="020B0604020202020204" pitchFamily="34" charset="0"/>
+                <a:cs typeface="Arial" panose="020B0604020202020204" pitchFamily="34" charset="0"/>
+              </a:rPr>
+              <a:t>. </a:t>
+            </a:r>
+          </a:p>
+          <a:p>
+            <a:pPr algn="just"/>
+            <a:r>
+              <a:rPr lang="en-US" sz="1200" dirty="0">
+                <a:latin typeface="Arial" panose="020B0604020202020204" pitchFamily="34" charset="0"/>
+                <a:cs typeface="Arial" panose="020B0604020202020204" pitchFamily="34" charset="0"/>
+              </a:rPr>
+              <a:t>Para </a:t>
+            </a:r>
+            <a:r>
+              <a:rPr lang="en-US" sz="1200" dirty="0" err="1">
+                <a:latin typeface="Arial" panose="020B0604020202020204" pitchFamily="34" charset="0"/>
+                <a:cs typeface="Arial" panose="020B0604020202020204" pitchFamily="34" charset="0"/>
+              </a:rPr>
+              <a:t>realizar</a:t>
+            </a:r>
+            <a:r>
+              <a:rPr lang="en-US" sz="1200" dirty="0">
+                <a:latin typeface="Arial" panose="020B0604020202020204" pitchFamily="34" charset="0"/>
+                <a:cs typeface="Arial" panose="020B0604020202020204" pitchFamily="34" charset="0"/>
+              </a:rPr>
+              <a:t> la </a:t>
+            </a:r>
+            <a:r>
+              <a:rPr lang="en-US" sz="1200" dirty="0" err="1">
+                <a:latin typeface="Arial" panose="020B0604020202020204" pitchFamily="34" charset="0"/>
+                <a:cs typeface="Arial" panose="020B0604020202020204" pitchFamily="34" charset="0"/>
+              </a:rPr>
+              <a:t>simulación</a:t>
+            </a:r>
+            <a:r>
+              <a:rPr lang="en-US" sz="1200" dirty="0">
+                <a:latin typeface="Arial" panose="020B0604020202020204" pitchFamily="34" charset="0"/>
+                <a:cs typeface="Arial" panose="020B0604020202020204" pitchFamily="34" charset="0"/>
+              </a:rPr>
+              <a:t> con Sax Library, hay </a:t>
+            </a:r>
+            <a:r>
+              <a:rPr lang="en-US" sz="1200" dirty="0" err="1">
+                <a:latin typeface="Arial" panose="020B0604020202020204" pitchFamily="34" charset="0"/>
+                <a:cs typeface="Arial" panose="020B0604020202020204" pitchFamily="34" charset="0"/>
+              </a:rPr>
+              <a:t>que</a:t>
+            </a:r>
+            <a:r>
+              <a:rPr lang="en-US" sz="1200" dirty="0">
+                <a:latin typeface="Arial" panose="020B0604020202020204" pitchFamily="34" charset="0"/>
+                <a:cs typeface="Arial" panose="020B0604020202020204" pitchFamily="34" charset="0"/>
+              </a:rPr>
+              <a:t> </a:t>
+            </a:r>
+            <a:r>
+              <a:rPr lang="en-US" sz="1200" dirty="0" err="1">
+                <a:latin typeface="Arial" panose="020B0604020202020204" pitchFamily="34" charset="0"/>
+                <a:cs typeface="Arial" panose="020B0604020202020204" pitchFamily="34" charset="0"/>
+              </a:rPr>
+              <a:t>definir</a:t>
+            </a:r>
+            <a:r>
+              <a:rPr lang="en-US" sz="1200" dirty="0">
+                <a:latin typeface="Arial" panose="020B0604020202020204" pitchFamily="34" charset="0"/>
+                <a:cs typeface="Arial" panose="020B0604020202020204" pitchFamily="34" charset="0"/>
+              </a:rPr>
+              <a:t> </a:t>
+            </a:r>
+            <a:r>
+              <a:rPr lang="en-US" sz="1200" dirty="0" err="1">
+                <a:latin typeface="Arial" panose="020B0604020202020204" pitchFamily="34" charset="0"/>
+                <a:cs typeface="Arial" panose="020B0604020202020204" pitchFamily="34" charset="0"/>
+              </a:rPr>
+              <a:t>los</a:t>
+            </a:r>
+            <a:r>
+              <a:rPr lang="en-US" sz="1200" dirty="0">
+                <a:latin typeface="Arial" panose="020B0604020202020204" pitchFamily="34" charset="0"/>
+                <a:cs typeface="Arial" panose="020B0604020202020204" pitchFamily="34" charset="0"/>
+              </a:rPr>
+              <a:t> </a:t>
+            </a:r>
+            <a:r>
+              <a:rPr lang="en-US" sz="1200" dirty="0" err="1">
+                <a:latin typeface="Arial" panose="020B0604020202020204" pitchFamily="34" charset="0"/>
+                <a:cs typeface="Arial" panose="020B0604020202020204" pitchFamily="34" charset="0"/>
+              </a:rPr>
+              <a:t>modelos</a:t>
+            </a:r>
+            <a:r>
+              <a:rPr lang="en-US" sz="1200" dirty="0">
+                <a:latin typeface="Arial" panose="020B0604020202020204" pitchFamily="34" charset="0"/>
+                <a:cs typeface="Arial" panose="020B0604020202020204" pitchFamily="34" charset="0"/>
+              </a:rPr>
+              <a:t> coupler y </a:t>
+            </a:r>
+            <a:r>
+              <a:rPr lang="en-US" sz="1200" dirty="0" err="1">
+                <a:latin typeface="Arial" panose="020B0604020202020204" pitchFamily="34" charset="0"/>
+                <a:cs typeface="Arial" panose="020B0604020202020204" pitchFamily="34" charset="0"/>
+              </a:rPr>
+              <a:t>silicon_waveguide</a:t>
+            </a:r>
+            <a:r>
+              <a:rPr lang="en-US" sz="1200" dirty="0">
+                <a:latin typeface="Arial" panose="020B0604020202020204" pitchFamily="34" charset="0"/>
+                <a:cs typeface="Arial" panose="020B0604020202020204" pitchFamily="34" charset="0"/>
+              </a:rPr>
+              <a:t>, </a:t>
+            </a:r>
+            <a:r>
+              <a:rPr lang="en-US" sz="1200" dirty="0" err="1">
+                <a:latin typeface="Arial" panose="020B0604020202020204" pitchFamily="34" charset="0"/>
+                <a:cs typeface="Arial" panose="020B0604020202020204" pitchFamily="34" charset="0"/>
+              </a:rPr>
+              <a:t>interconectarlos</a:t>
+            </a:r>
+            <a:r>
+              <a:rPr lang="en-US" sz="1200" dirty="0">
+                <a:latin typeface="Arial" panose="020B0604020202020204" pitchFamily="34" charset="0"/>
+                <a:cs typeface="Arial" panose="020B0604020202020204" pitchFamily="34" charset="0"/>
+              </a:rPr>
+              <a:t> con </a:t>
+            </a:r>
+            <a:r>
+              <a:rPr lang="en-US" sz="1200" dirty="0" err="1">
+                <a:latin typeface="Arial" panose="020B0604020202020204" pitchFamily="34" charset="0"/>
+                <a:cs typeface="Arial" panose="020B0604020202020204" pitchFamily="34" charset="0"/>
+              </a:rPr>
+              <a:t>sax.circuit</a:t>
+            </a:r>
+            <a:r>
+              <a:rPr lang="en-US" sz="1200" dirty="0">
+                <a:latin typeface="Arial" panose="020B0604020202020204" pitchFamily="34" charset="0"/>
+                <a:cs typeface="Arial" panose="020B0604020202020204" pitchFamily="34" charset="0"/>
+              </a:rPr>
+              <a:t>, definer un vector de </a:t>
+            </a:r>
+            <a:r>
+              <a:rPr lang="en-US" sz="1200" dirty="0" err="1">
+                <a:latin typeface="Arial" panose="020B0604020202020204" pitchFamily="34" charset="0"/>
+                <a:cs typeface="Arial" panose="020B0604020202020204" pitchFamily="34" charset="0"/>
+              </a:rPr>
+              <a:t>barrido</a:t>
+            </a:r>
+            <a:r>
+              <a:rPr lang="en-US" sz="1200" dirty="0">
+                <a:latin typeface="Arial" panose="020B0604020202020204" pitchFamily="34" charset="0"/>
+                <a:cs typeface="Arial" panose="020B0604020202020204" pitchFamily="34" charset="0"/>
+              </a:rPr>
+              <a:t> </a:t>
+            </a:r>
+            <a:r>
+              <a:rPr lang="en-US" sz="1200" dirty="0" err="1">
+                <a:latin typeface="Arial" panose="020B0604020202020204" pitchFamily="34" charset="0"/>
+                <a:cs typeface="Arial" panose="020B0604020202020204" pitchFamily="34" charset="0"/>
+              </a:rPr>
+              <a:t>en</a:t>
+            </a:r>
+            <a:r>
+              <a:rPr lang="en-US" sz="1200" dirty="0">
+                <a:latin typeface="Arial" panose="020B0604020202020204" pitchFamily="34" charset="0"/>
+                <a:cs typeface="Arial" panose="020B0604020202020204" pitchFamily="34" charset="0"/>
+              </a:rPr>
+              <a:t> longitude de </a:t>
+            </a:r>
+            <a:r>
+              <a:rPr lang="en-US" sz="1200" dirty="0" err="1">
+                <a:latin typeface="Arial" panose="020B0604020202020204" pitchFamily="34" charset="0"/>
+                <a:cs typeface="Arial" panose="020B0604020202020204" pitchFamily="34" charset="0"/>
+              </a:rPr>
+              <a:t>onda</a:t>
+            </a:r>
+            <a:r>
+              <a:rPr lang="en-US" sz="1200" dirty="0">
+                <a:latin typeface="Arial" panose="020B0604020202020204" pitchFamily="34" charset="0"/>
+                <a:cs typeface="Arial" panose="020B0604020202020204" pitchFamily="34" charset="0"/>
+              </a:rPr>
+              <a:t> y pasar las variables </a:t>
+            </a:r>
+            <a:r>
+              <a:rPr lang="en-US" sz="1200" dirty="0" err="1">
+                <a:latin typeface="Arial" panose="020B0604020202020204" pitchFamily="34" charset="0"/>
+                <a:cs typeface="Arial" panose="020B0604020202020204" pitchFamily="34" charset="0"/>
+              </a:rPr>
+              <a:t>globales</a:t>
+            </a:r>
+            <a:r>
+              <a:rPr lang="en-US" sz="1200" dirty="0">
+                <a:latin typeface="Arial" panose="020B0604020202020204" pitchFamily="34" charset="0"/>
+                <a:cs typeface="Arial" panose="020B0604020202020204" pitchFamily="34" charset="0"/>
+              </a:rPr>
+              <a:t> </a:t>
+            </a:r>
+            <a:r>
+              <a:rPr lang="en-US" sz="1200" dirty="0" err="1">
+                <a:latin typeface="Arial" panose="020B0604020202020204" pitchFamily="34" charset="0"/>
+                <a:cs typeface="Arial" panose="020B0604020202020204" pitchFamily="34" charset="0"/>
+              </a:rPr>
+              <a:t>que</a:t>
+            </a:r>
+            <a:r>
+              <a:rPr lang="en-US" sz="1200" dirty="0">
+                <a:latin typeface="Arial" panose="020B0604020202020204" pitchFamily="34" charset="0"/>
+                <a:cs typeface="Arial" panose="020B0604020202020204" pitchFamily="34" charset="0"/>
+              </a:rPr>
+              <a:t> se </a:t>
+            </a:r>
+            <a:r>
+              <a:rPr lang="en-US" sz="1200" dirty="0" err="1">
+                <a:latin typeface="Arial" panose="020B0604020202020204" pitchFamily="34" charset="0"/>
+                <a:cs typeface="Arial" panose="020B0604020202020204" pitchFamily="34" charset="0"/>
+              </a:rPr>
+              <a:t>especifican</a:t>
+            </a:r>
+            <a:r>
+              <a:rPr lang="en-US" sz="1200" dirty="0">
+                <a:latin typeface="Arial" panose="020B0604020202020204" pitchFamily="34" charset="0"/>
+                <a:cs typeface="Arial" panose="020B0604020202020204" pitchFamily="34" charset="0"/>
+              </a:rPr>
+              <a:t> </a:t>
+            </a:r>
+            <a:r>
+              <a:rPr lang="en-US" sz="1200" dirty="0" err="1">
+                <a:latin typeface="Arial" panose="020B0604020202020204" pitchFamily="34" charset="0"/>
+                <a:cs typeface="Arial" panose="020B0604020202020204" pitchFamily="34" charset="0"/>
+              </a:rPr>
+              <a:t>en</a:t>
+            </a:r>
+            <a:r>
+              <a:rPr lang="en-US" sz="1200" dirty="0">
+                <a:latin typeface="Arial" panose="020B0604020202020204" pitchFamily="34" charset="0"/>
+                <a:cs typeface="Arial" panose="020B0604020202020204" pitchFamily="34" charset="0"/>
+              </a:rPr>
+              <a:t> </a:t>
+            </a:r>
+            <a:r>
+              <a:rPr lang="en-US" sz="1200" dirty="0" err="1">
+                <a:latin typeface="Arial" panose="020B0604020202020204" pitchFamily="34" charset="0"/>
+                <a:cs typeface="Arial" panose="020B0604020202020204" pitchFamily="34" charset="0"/>
+              </a:rPr>
+              <a:t>el</a:t>
+            </a:r>
+            <a:r>
+              <a:rPr lang="en-US" sz="1200" dirty="0">
+                <a:latin typeface="Arial" panose="020B0604020202020204" pitchFamily="34" charset="0"/>
+                <a:cs typeface="Arial" panose="020B0604020202020204" pitchFamily="34" charset="0"/>
+              </a:rPr>
+              <a:t> </a:t>
+            </a:r>
+            <a:r>
+              <a:rPr lang="en-US" sz="1200" dirty="0" err="1">
+                <a:latin typeface="Arial" panose="020B0604020202020204" pitchFamily="34" charset="0"/>
+                <a:cs typeface="Arial" panose="020B0604020202020204" pitchFamily="34" charset="0"/>
+              </a:rPr>
+              <a:t>enunciado</a:t>
+            </a:r>
+            <a:r>
+              <a:rPr lang="en-US" sz="1200" dirty="0">
+                <a:latin typeface="Arial" panose="020B0604020202020204" pitchFamily="34" charset="0"/>
+                <a:cs typeface="Arial" panose="020B0604020202020204" pitchFamily="34" charset="0"/>
+              </a:rPr>
+              <a:t> (dL, </a:t>
+            </a:r>
+            <a:r>
+              <a:rPr lang="en-US" sz="1200" dirty="0" err="1">
+                <a:latin typeface="Arial" panose="020B0604020202020204" pitchFamily="34" charset="0"/>
+                <a:cs typeface="Arial" panose="020B0604020202020204" pitchFamily="34" charset="0"/>
+              </a:rPr>
+              <a:t>L_base</a:t>
+            </a:r>
+            <a:r>
+              <a:rPr lang="en-US" sz="1200" dirty="0">
+                <a:latin typeface="Arial" panose="020B0604020202020204" pitchFamily="34" charset="0"/>
+                <a:cs typeface="Arial" panose="020B0604020202020204" pitchFamily="34" charset="0"/>
+              </a:rPr>
+              <a:t> …) y </a:t>
+            </a:r>
+            <a:r>
+              <a:rPr lang="en-US" sz="1200" dirty="0" err="1">
+                <a:latin typeface="Arial" panose="020B0604020202020204" pitchFamily="34" charset="0"/>
+                <a:cs typeface="Arial" panose="020B0604020202020204" pitchFamily="34" charset="0"/>
+              </a:rPr>
+              <a:t>finalmente</a:t>
+            </a:r>
+            <a:r>
+              <a:rPr lang="en-US" sz="1200" dirty="0">
+                <a:latin typeface="Arial" panose="020B0604020202020204" pitchFamily="34" charset="0"/>
+                <a:cs typeface="Arial" panose="020B0604020202020204" pitchFamily="34" charset="0"/>
+              </a:rPr>
+              <a:t> se </a:t>
+            </a:r>
+            <a:r>
+              <a:rPr lang="en-US" sz="1200" dirty="0" err="1">
+                <a:latin typeface="Arial" panose="020B0604020202020204" pitchFamily="34" charset="0"/>
+                <a:cs typeface="Arial" panose="020B0604020202020204" pitchFamily="34" charset="0"/>
+              </a:rPr>
+              <a:t>ejecuta</a:t>
+            </a:r>
+            <a:r>
+              <a:rPr lang="en-US" sz="1200" dirty="0">
+                <a:latin typeface="Arial" panose="020B0604020202020204" pitchFamily="34" charset="0"/>
+                <a:cs typeface="Arial" panose="020B0604020202020204" pitchFamily="34" charset="0"/>
+              </a:rPr>
+              <a:t> </a:t>
+            </a:r>
+            <a:r>
+              <a:rPr lang="en-US" sz="1200" dirty="0" err="1">
+                <a:latin typeface="Arial" panose="020B0604020202020204" pitchFamily="34" charset="0"/>
+                <a:cs typeface="Arial" panose="020B0604020202020204" pitchFamily="34" charset="0"/>
+              </a:rPr>
+              <a:t>el</a:t>
+            </a:r>
+            <a:r>
+              <a:rPr lang="en-US" sz="1200" dirty="0">
+                <a:latin typeface="Arial" panose="020B0604020202020204" pitchFamily="34" charset="0"/>
+                <a:cs typeface="Arial" panose="020B0604020202020204" pitchFamily="34" charset="0"/>
+              </a:rPr>
+              <a:t> </a:t>
+            </a:r>
+            <a:r>
+              <a:rPr lang="en-US" sz="1200" dirty="0" err="1">
+                <a:latin typeface="Arial" panose="020B0604020202020204" pitchFamily="34" charset="0"/>
+                <a:cs typeface="Arial" panose="020B0604020202020204" pitchFamily="34" charset="0"/>
+              </a:rPr>
+              <a:t>circuito</a:t>
+            </a:r>
+            <a:r>
+              <a:rPr lang="en-US" sz="1200" dirty="0">
+                <a:latin typeface="Arial" panose="020B0604020202020204" pitchFamily="34" charset="0"/>
+                <a:cs typeface="Arial" panose="020B0604020202020204" pitchFamily="34" charset="0"/>
+              </a:rPr>
+              <a:t>.  </a:t>
+            </a:r>
+          </a:p>
+          <a:p>
+            <a:pPr algn="just"/>
+            <a:r>
+              <a:rPr lang="en-US" sz="1200" dirty="0">
+                <a:latin typeface="Arial" panose="020B0604020202020204" pitchFamily="34" charset="0"/>
+                <a:cs typeface="Arial" panose="020B0604020202020204" pitchFamily="34" charset="0"/>
+              </a:rPr>
+              <a:t>Lo </a:t>
+            </a:r>
+            <a:r>
+              <a:rPr lang="en-US" sz="1200" dirty="0" err="1">
+                <a:latin typeface="Arial" panose="020B0604020202020204" pitchFamily="34" charset="0"/>
+                <a:cs typeface="Arial" panose="020B0604020202020204" pitchFamily="34" charset="0"/>
+              </a:rPr>
+              <a:t>que</a:t>
+            </a:r>
+            <a:r>
+              <a:rPr lang="en-US" sz="1200" dirty="0">
+                <a:latin typeface="Arial" panose="020B0604020202020204" pitchFamily="34" charset="0"/>
+                <a:cs typeface="Arial" panose="020B0604020202020204" pitchFamily="34" charset="0"/>
+              </a:rPr>
+              <a:t> </a:t>
+            </a:r>
+            <a:r>
+              <a:rPr lang="en-US" sz="1200" dirty="0" err="1">
+                <a:latin typeface="Arial" panose="020B0604020202020204" pitchFamily="34" charset="0"/>
+                <a:cs typeface="Arial" panose="020B0604020202020204" pitchFamily="34" charset="0"/>
+              </a:rPr>
+              <a:t>vemos</a:t>
+            </a:r>
+            <a:r>
+              <a:rPr lang="en-US" sz="1200" dirty="0">
+                <a:latin typeface="Arial" panose="020B0604020202020204" pitchFamily="34" charset="0"/>
+                <a:cs typeface="Arial" panose="020B0604020202020204" pitchFamily="34" charset="0"/>
+              </a:rPr>
+              <a:t> </a:t>
+            </a:r>
+            <a:r>
+              <a:rPr lang="en-US" sz="1200" dirty="0" err="1">
+                <a:latin typeface="Arial" panose="020B0604020202020204" pitchFamily="34" charset="0"/>
+                <a:cs typeface="Arial" panose="020B0604020202020204" pitchFamily="34" charset="0"/>
+              </a:rPr>
+              <a:t>en</a:t>
+            </a:r>
+            <a:r>
+              <a:rPr lang="en-US" sz="1200" dirty="0">
+                <a:latin typeface="Arial" panose="020B0604020202020204" pitchFamily="34" charset="0"/>
+                <a:cs typeface="Arial" panose="020B0604020202020204" pitchFamily="34" charset="0"/>
+              </a:rPr>
+              <a:t> la </a:t>
+            </a:r>
+            <a:r>
+              <a:rPr lang="en-US" sz="1200" dirty="0" err="1">
+                <a:latin typeface="Arial" panose="020B0604020202020204" pitchFamily="34" charset="0"/>
+                <a:cs typeface="Arial" panose="020B0604020202020204" pitchFamily="34" charset="0"/>
+              </a:rPr>
+              <a:t>salida</a:t>
+            </a:r>
+            <a:r>
+              <a:rPr lang="en-US" sz="1200" dirty="0">
+                <a:latin typeface="Arial" panose="020B0604020202020204" pitchFamily="34" charset="0"/>
+                <a:cs typeface="Arial" panose="020B0604020202020204" pitchFamily="34" charset="0"/>
+              </a:rPr>
+              <a:t> es la </a:t>
+            </a:r>
+            <a:r>
+              <a:rPr lang="en-US" sz="1200" dirty="0" err="1">
+                <a:latin typeface="Arial" panose="020B0604020202020204" pitchFamily="34" charset="0"/>
+                <a:cs typeface="Arial" panose="020B0604020202020204" pitchFamily="34" charset="0"/>
+              </a:rPr>
+              <a:t>función</a:t>
+            </a:r>
+            <a:r>
+              <a:rPr lang="en-US" sz="1200" dirty="0">
+                <a:latin typeface="Arial" panose="020B0604020202020204" pitchFamily="34" charset="0"/>
+                <a:cs typeface="Arial" panose="020B0604020202020204" pitchFamily="34" charset="0"/>
+              </a:rPr>
+              <a:t> de </a:t>
+            </a:r>
+            <a:r>
+              <a:rPr lang="en-US" sz="1200" dirty="0" err="1">
+                <a:latin typeface="Arial" panose="020B0604020202020204" pitchFamily="34" charset="0"/>
+                <a:cs typeface="Arial" panose="020B0604020202020204" pitchFamily="34" charset="0"/>
+              </a:rPr>
+              <a:t>transferencia</a:t>
+            </a:r>
+            <a:r>
+              <a:rPr lang="en-US" sz="1200" dirty="0">
+                <a:latin typeface="Arial" panose="020B0604020202020204" pitchFamily="34" charset="0"/>
+                <a:cs typeface="Arial" panose="020B0604020202020204" pitchFamily="34" charset="0"/>
+              </a:rPr>
+              <a:t> del </a:t>
+            </a:r>
+            <a:r>
+              <a:rPr lang="en-US" sz="1200" dirty="0" err="1">
+                <a:latin typeface="Arial" panose="020B0604020202020204" pitchFamily="34" charset="0"/>
+                <a:cs typeface="Arial" panose="020B0604020202020204" pitchFamily="34" charset="0"/>
+              </a:rPr>
+              <a:t>circuito</a:t>
+            </a:r>
+            <a:r>
+              <a:rPr lang="en-US" sz="1200" dirty="0">
+                <a:latin typeface="Arial" panose="020B0604020202020204" pitchFamily="34" charset="0"/>
+                <a:cs typeface="Arial" panose="020B0604020202020204" pitchFamily="34" charset="0"/>
+              </a:rPr>
+              <a:t>. Como la dL = 0, La H01 se </a:t>
+            </a:r>
+            <a:r>
+              <a:rPr lang="en-US" sz="1200" dirty="0" err="1">
+                <a:latin typeface="Arial" panose="020B0604020202020204" pitchFamily="34" charset="0"/>
+                <a:cs typeface="Arial" panose="020B0604020202020204" pitchFamily="34" charset="0"/>
+              </a:rPr>
+              <a:t>mantiene</a:t>
+            </a:r>
+            <a:r>
+              <a:rPr lang="en-US" sz="1200" dirty="0">
+                <a:latin typeface="Arial" panose="020B0604020202020204" pitchFamily="34" charset="0"/>
+                <a:cs typeface="Arial" panose="020B0604020202020204" pitchFamily="34" charset="0"/>
+              </a:rPr>
+              <a:t> </a:t>
+            </a:r>
+            <a:r>
+              <a:rPr lang="en-US" sz="1200" dirty="0" err="1">
+                <a:latin typeface="Arial" panose="020B0604020202020204" pitchFamily="34" charset="0"/>
+                <a:cs typeface="Arial" panose="020B0604020202020204" pitchFamily="34" charset="0"/>
+              </a:rPr>
+              <a:t>constante</a:t>
+            </a:r>
+            <a:r>
+              <a:rPr lang="en-US" sz="1200" dirty="0">
+                <a:latin typeface="Arial" panose="020B0604020202020204" pitchFamily="34" charset="0"/>
+                <a:cs typeface="Arial" panose="020B0604020202020204" pitchFamily="34" charset="0"/>
+              </a:rPr>
+              <a:t> </a:t>
+            </a:r>
+            <a:r>
+              <a:rPr lang="en-US" sz="1200" dirty="0" err="1">
+                <a:latin typeface="Arial" panose="020B0604020202020204" pitchFamily="34" charset="0"/>
+                <a:cs typeface="Arial" panose="020B0604020202020204" pitchFamily="34" charset="0"/>
+              </a:rPr>
+              <a:t>en</a:t>
+            </a:r>
+            <a:r>
+              <a:rPr lang="en-US" sz="1200" dirty="0">
+                <a:latin typeface="Arial" panose="020B0604020202020204" pitchFamily="34" charset="0"/>
+                <a:cs typeface="Arial" panose="020B0604020202020204" pitchFamily="34" charset="0"/>
+              </a:rPr>
+              <a:t> 1 </a:t>
+            </a:r>
+            <a:r>
+              <a:rPr lang="en-US" sz="1200" dirty="0" err="1">
+                <a:latin typeface="Arial" panose="020B0604020202020204" pitchFamily="34" charset="0"/>
+                <a:cs typeface="Arial" panose="020B0604020202020204" pitchFamily="34" charset="0"/>
+              </a:rPr>
+              <a:t>en</a:t>
+            </a:r>
+            <a:r>
+              <a:rPr lang="en-US" sz="1200" dirty="0">
+                <a:latin typeface="Arial" panose="020B0604020202020204" pitchFamily="34" charset="0"/>
+                <a:cs typeface="Arial" panose="020B0604020202020204" pitchFamily="34" charset="0"/>
+              </a:rPr>
+              <a:t> </a:t>
+            </a:r>
+            <a:r>
+              <a:rPr lang="en-US" sz="1200" dirty="0" err="1">
+                <a:latin typeface="Arial" panose="020B0604020202020204" pitchFamily="34" charset="0"/>
+                <a:cs typeface="Arial" panose="020B0604020202020204" pitchFamily="34" charset="0"/>
+              </a:rPr>
+              <a:t>todas</a:t>
+            </a:r>
+            <a:r>
+              <a:rPr lang="en-US" sz="1200" dirty="0">
+                <a:latin typeface="Arial" panose="020B0604020202020204" pitchFamily="34" charset="0"/>
+                <a:cs typeface="Arial" panose="020B0604020202020204" pitchFamily="34" charset="0"/>
+              </a:rPr>
+              <a:t> las longitudes de </a:t>
+            </a:r>
+            <a:r>
+              <a:rPr lang="en-US" sz="1200" dirty="0" err="1">
+                <a:latin typeface="Arial" panose="020B0604020202020204" pitchFamily="34" charset="0"/>
+                <a:cs typeface="Arial" panose="020B0604020202020204" pitchFamily="34" charset="0"/>
+              </a:rPr>
+              <a:t>onda</a:t>
+            </a:r>
+            <a:r>
+              <a:rPr lang="en-US" sz="1200" dirty="0">
+                <a:latin typeface="Arial" panose="020B0604020202020204" pitchFamily="34" charset="0"/>
+                <a:cs typeface="Arial" panose="020B0604020202020204" pitchFamily="34" charset="0"/>
+              </a:rPr>
+              <a:t> (y 0 </a:t>
+            </a:r>
+            <a:r>
+              <a:rPr lang="en-US" sz="1200" dirty="0" err="1">
+                <a:latin typeface="Arial" panose="020B0604020202020204" pitchFamily="34" charset="0"/>
+                <a:cs typeface="Arial" panose="020B0604020202020204" pitchFamily="34" charset="0"/>
+              </a:rPr>
+              <a:t>en</a:t>
+            </a:r>
+            <a:r>
+              <a:rPr lang="en-US" sz="1200" dirty="0">
+                <a:latin typeface="Arial" panose="020B0604020202020204" pitchFamily="34" charset="0"/>
+                <a:cs typeface="Arial" panose="020B0604020202020204" pitchFamily="34" charset="0"/>
+              </a:rPr>
+              <a:t> dB), lo </a:t>
+            </a:r>
+            <a:r>
+              <a:rPr lang="en-US" sz="1200" dirty="0" err="1">
+                <a:latin typeface="Arial" panose="020B0604020202020204" pitchFamily="34" charset="0"/>
+                <a:cs typeface="Arial" panose="020B0604020202020204" pitchFamily="34" charset="0"/>
+              </a:rPr>
+              <a:t>que</a:t>
+            </a:r>
+            <a:r>
+              <a:rPr lang="en-US" sz="1200" dirty="0">
+                <a:latin typeface="Arial" panose="020B0604020202020204" pitchFamily="34" charset="0"/>
+                <a:cs typeface="Arial" panose="020B0604020202020204" pitchFamily="34" charset="0"/>
+              </a:rPr>
+              <a:t> indica </a:t>
+            </a:r>
+            <a:r>
+              <a:rPr lang="en-US" sz="1200" dirty="0" err="1">
+                <a:latin typeface="Arial" panose="020B0604020202020204" pitchFamily="34" charset="0"/>
+                <a:cs typeface="Arial" panose="020B0604020202020204" pitchFamily="34" charset="0"/>
+              </a:rPr>
+              <a:t>que</a:t>
+            </a:r>
+            <a:r>
+              <a:rPr lang="en-US" sz="1200" dirty="0">
+                <a:latin typeface="Arial" panose="020B0604020202020204" pitchFamily="34" charset="0"/>
+                <a:cs typeface="Arial" panose="020B0604020202020204" pitchFamily="34" charset="0"/>
+              </a:rPr>
+              <a:t> </a:t>
+            </a:r>
+            <a:r>
+              <a:rPr lang="en-US" sz="1200" dirty="0" err="1">
+                <a:latin typeface="Arial" panose="020B0604020202020204" pitchFamily="34" charset="0"/>
+                <a:cs typeface="Arial" panose="020B0604020202020204" pitchFamily="34" charset="0"/>
+              </a:rPr>
+              <a:t>el</a:t>
+            </a:r>
+            <a:r>
+              <a:rPr lang="en-US" sz="1200" dirty="0">
+                <a:latin typeface="Arial" panose="020B0604020202020204" pitchFamily="34" charset="0"/>
+                <a:cs typeface="Arial" panose="020B0604020202020204" pitchFamily="34" charset="0"/>
+              </a:rPr>
+              <a:t> 100% de la </a:t>
+            </a:r>
+            <a:r>
+              <a:rPr lang="en-US" sz="1200" dirty="0" err="1">
+                <a:latin typeface="Arial" panose="020B0604020202020204" pitchFamily="34" charset="0"/>
+                <a:cs typeface="Arial" panose="020B0604020202020204" pitchFamily="34" charset="0"/>
+              </a:rPr>
+              <a:t>potencia</a:t>
+            </a:r>
+            <a:r>
+              <a:rPr lang="en-US" sz="1200" dirty="0">
+                <a:latin typeface="Arial" panose="020B0604020202020204" pitchFamily="34" charset="0"/>
+                <a:cs typeface="Arial" panose="020B0604020202020204" pitchFamily="34" charset="0"/>
+              </a:rPr>
+              <a:t> </a:t>
+            </a:r>
+            <a:r>
+              <a:rPr lang="en-US" sz="1200" dirty="0" err="1">
+                <a:latin typeface="Arial" panose="020B0604020202020204" pitchFamily="34" charset="0"/>
+                <a:cs typeface="Arial" panose="020B0604020202020204" pitchFamily="34" charset="0"/>
+              </a:rPr>
+              <a:t>óptica</a:t>
+            </a:r>
+            <a:r>
+              <a:rPr lang="en-US" sz="1200" dirty="0">
+                <a:latin typeface="Arial" panose="020B0604020202020204" pitchFamily="34" charset="0"/>
+                <a:cs typeface="Arial" panose="020B0604020202020204" pitchFamily="34" charset="0"/>
+              </a:rPr>
+              <a:t> se </a:t>
+            </a:r>
+            <a:r>
+              <a:rPr lang="en-US" sz="1200" dirty="0" err="1">
+                <a:latin typeface="Arial" panose="020B0604020202020204" pitchFamily="34" charset="0"/>
+                <a:cs typeface="Arial" panose="020B0604020202020204" pitchFamily="34" charset="0"/>
+              </a:rPr>
+              <a:t>transfiere</a:t>
+            </a:r>
+            <a:r>
+              <a:rPr lang="en-US" sz="1200" dirty="0">
+                <a:latin typeface="Arial" panose="020B0604020202020204" pitchFamily="34" charset="0"/>
+                <a:cs typeface="Arial" panose="020B0604020202020204" pitchFamily="34" charset="0"/>
+              </a:rPr>
+              <a:t> </a:t>
+            </a:r>
+            <a:r>
+              <a:rPr lang="en-US" sz="1200" dirty="0" err="1">
+                <a:latin typeface="Arial" panose="020B0604020202020204" pitchFamily="34" charset="0"/>
+                <a:cs typeface="Arial" panose="020B0604020202020204" pitchFamily="34" charset="0"/>
+              </a:rPr>
+              <a:t>por</a:t>
+            </a:r>
+            <a:r>
+              <a:rPr lang="en-US" sz="1200" dirty="0">
+                <a:latin typeface="Arial" panose="020B0604020202020204" pitchFamily="34" charset="0"/>
+                <a:cs typeface="Arial" panose="020B0604020202020204" pitchFamily="34" charset="0"/>
+              </a:rPr>
+              <a:t> </a:t>
+            </a:r>
+            <a:r>
+              <a:rPr lang="en-US" sz="1200" dirty="0" err="1">
+                <a:latin typeface="Arial" panose="020B0604020202020204" pitchFamily="34" charset="0"/>
+                <a:cs typeface="Arial" panose="020B0604020202020204" pitchFamily="34" charset="0"/>
+              </a:rPr>
+              <a:t>el</a:t>
+            </a:r>
+            <a:r>
+              <a:rPr lang="en-US" sz="1200" dirty="0">
+                <a:latin typeface="Arial" panose="020B0604020202020204" pitchFamily="34" charset="0"/>
+                <a:cs typeface="Arial" panose="020B0604020202020204" pitchFamily="34" charset="0"/>
+              </a:rPr>
+              <a:t> </a:t>
+            </a:r>
+            <a:r>
+              <a:rPr lang="en-US" sz="1200" dirty="0" err="1">
+                <a:latin typeface="Arial" panose="020B0604020202020204" pitchFamily="34" charset="0"/>
+                <a:cs typeface="Arial" panose="020B0604020202020204" pitchFamily="34" charset="0"/>
+              </a:rPr>
+              <a:t>puerto</a:t>
+            </a:r>
+            <a:r>
+              <a:rPr lang="en-US" sz="1200" dirty="0">
+                <a:latin typeface="Arial" panose="020B0604020202020204" pitchFamily="34" charset="0"/>
+                <a:cs typeface="Arial" panose="020B0604020202020204" pitchFamily="34" charset="0"/>
+              </a:rPr>
+              <a:t> cruzado, </a:t>
+            </a:r>
+            <a:r>
+              <a:rPr lang="en-US" sz="1200" dirty="0" err="1">
+                <a:latin typeface="Arial" panose="020B0604020202020204" pitchFamily="34" charset="0"/>
+                <a:cs typeface="Arial" panose="020B0604020202020204" pitchFamily="34" charset="0"/>
+              </a:rPr>
+              <a:t>mientras</a:t>
+            </a:r>
+            <a:r>
+              <a:rPr lang="en-US" sz="1200" dirty="0">
+                <a:latin typeface="Arial" panose="020B0604020202020204" pitchFamily="34" charset="0"/>
+                <a:cs typeface="Arial" panose="020B0604020202020204" pitchFamily="34" charset="0"/>
+              </a:rPr>
+              <a:t> </a:t>
+            </a:r>
+            <a:r>
+              <a:rPr lang="en-US" sz="1200" dirty="0" err="1">
+                <a:latin typeface="Arial" panose="020B0604020202020204" pitchFamily="34" charset="0"/>
+                <a:cs typeface="Arial" panose="020B0604020202020204" pitchFamily="34" charset="0"/>
+              </a:rPr>
+              <a:t>que</a:t>
+            </a:r>
+            <a:r>
+              <a:rPr lang="en-US" sz="1200" dirty="0">
+                <a:latin typeface="Arial" panose="020B0604020202020204" pitchFamily="34" charset="0"/>
+                <a:cs typeface="Arial" panose="020B0604020202020204" pitchFamily="34" charset="0"/>
+              </a:rPr>
+              <a:t> </a:t>
+            </a:r>
+            <a:r>
+              <a:rPr lang="en-US" sz="1200" dirty="0" err="1">
+                <a:latin typeface="Arial" panose="020B0604020202020204" pitchFamily="34" charset="0"/>
+                <a:cs typeface="Arial" panose="020B0604020202020204" pitchFamily="34" charset="0"/>
+              </a:rPr>
+              <a:t>por</a:t>
+            </a:r>
+            <a:r>
+              <a:rPr lang="en-US" sz="1200" dirty="0">
+                <a:latin typeface="Arial" panose="020B0604020202020204" pitchFamily="34" charset="0"/>
+                <a:cs typeface="Arial" panose="020B0604020202020204" pitchFamily="34" charset="0"/>
+              </a:rPr>
+              <a:t> </a:t>
+            </a:r>
+            <a:r>
+              <a:rPr lang="en-US" sz="1200" dirty="0" err="1">
+                <a:latin typeface="Arial" panose="020B0604020202020204" pitchFamily="34" charset="0"/>
+                <a:cs typeface="Arial" panose="020B0604020202020204" pitchFamily="34" charset="0"/>
+              </a:rPr>
+              <a:t>otro</a:t>
+            </a:r>
+            <a:r>
+              <a:rPr lang="en-US" sz="1200" dirty="0">
+                <a:latin typeface="Arial" panose="020B0604020202020204" pitchFamily="34" charset="0"/>
+                <a:cs typeface="Arial" panose="020B0604020202020204" pitchFamily="34" charset="0"/>
+              </a:rPr>
+              <a:t> </a:t>
+            </a:r>
+            <a:r>
+              <a:rPr lang="en-US" sz="1200" dirty="0" err="1">
+                <a:latin typeface="Arial" panose="020B0604020202020204" pitchFamily="34" charset="0"/>
+                <a:cs typeface="Arial" panose="020B0604020202020204" pitchFamily="34" charset="0"/>
+              </a:rPr>
+              <a:t>lado</a:t>
+            </a:r>
+            <a:r>
+              <a:rPr lang="en-US" sz="1200" dirty="0">
+                <a:latin typeface="Arial" panose="020B0604020202020204" pitchFamily="34" charset="0"/>
+                <a:cs typeface="Arial" panose="020B0604020202020204" pitchFamily="34" charset="0"/>
+              </a:rPr>
+              <a:t>, la H00 es de 0, </a:t>
+            </a:r>
+            <a:r>
+              <a:rPr lang="en-US" sz="1200" dirty="0" err="1">
+                <a:latin typeface="Arial" panose="020B0604020202020204" pitchFamily="34" charset="0"/>
+                <a:cs typeface="Arial" panose="020B0604020202020204" pitchFamily="34" charset="0"/>
+              </a:rPr>
+              <a:t>indicando</a:t>
+            </a:r>
+            <a:r>
+              <a:rPr lang="en-US" sz="1200" dirty="0">
+                <a:latin typeface="Arial" panose="020B0604020202020204" pitchFamily="34" charset="0"/>
+                <a:cs typeface="Arial" panose="020B0604020202020204" pitchFamily="34" charset="0"/>
+              </a:rPr>
+              <a:t> </a:t>
+            </a:r>
+            <a:r>
+              <a:rPr lang="en-US" sz="1200" dirty="0" err="1">
+                <a:latin typeface="Arial" panose="020B0604020202020204" pitchFamily="34" charset="0"/>
+                <a:cs typeface="Arial" panose="020B0604020202020204" pitchFamily="34" charset="0"/>
+              </a:rPr>
+              <a:t>que</a:t>
+            </a:r>
+            <a:r>
+              <a:rPr lang="en-US" sz="1200" dirty="0">
+                <a:latin typeface="Arial" panose="020B0604020202020204" pitchFamily="34" charset="0"/>
+                <a:cs typeface="Arial" panose="020B0604020202020204" pitchFamily="34" charset="0"/>
+              </a:rPr>
+              <a:t> no sale </a:t>
+            </a:r>
+            <a:r>
+              <a:rPr lang="en-US" sz="1200" dirty="0" err="1">
+                <a:latin typeface="Arial" panose="020B0604020202020204" pitchFamily="34" charset="0"/>
+                <a:cs typeface="Arial" panose="020B0604020202020204" pitchFamily="34" charset="0"/>
+              </a:rPr>
+              <a:t>potencia</a:t>
+            </a:r>
+            <a:r>
+              <a:rPr lang="en-US" sz="1200" dirty="0">
+                <a:latin typeface="Arial" panose="020B0604020202020204" pitchFamily="34" charset="0"/>
+                <a:cs typeface="Arial" panose="020B0604020202020204" pitchFamily="34" charset="0"/>
+              </a:rPr>
+              <a:t> </a:t>
+            </a:r>
+            <a:r>
+              <a:rPr lang="en-US" sz="1200" dirty="0" err="1">
+                <a:latin typeface="Arial" panose="020B0604020202020204" pitchFamily="34" charset="0"/>
+                <a:cs typeface="Arial" panose="020B0604020202020204" pitchFamily="34" charset="0"/>
+              </a:rPr>
+              <a:t>por</a:t>
+            </a:r>
+            <a:r>
+              <a:rPr lang="en-US" sz="1200" dirty="0">
+                <a:latin typeface="Arial" panose="020B0604020202020204" pitchFamily="34" charset="0"/>
+                <a:cs typeface="Arial" panose="020B0604020202020204" pitchFamily="34" charset="0"/>
+              </a:rPr>
+              <a:t> </a:t>
+            </a:r>
+            <a:r>
+              <a:rPr lang="en-US" sz="1200" dirty="0" err="1">
+                <a:latin typeface="Arial" panose="020B0604020202020204" pitchFamily="34" charset="0"/>
+                <a:cs typeface="Arial" panose="020B0604020202020204" pitchFamily="34" charset="0"/>
+              </a:rPr>
+              <a:t>el</a:t>
+            </a:r>
+            <a:r>
+              <a:rPr lang="en-US" sz="1200" dirty="0">
+                <a:latin typeface="Arial" panose="020B0604020202020204" pitchFamily="34" charset="0"/>
+                <a:cs typeface="Arial" panose="020B0604020202020204" pitchFamily="34" charset="0"/>
+              </a:rPr>
+              <a:t> </a:t>
+            </a:r>
+            <a:r>
+              <a:rPr lang="en-US" sz="1200" dirty="0" err="1">
+                <a:latin typeface="Arial" panose="020B0604020202020204" pitchFamily="34" charset="0"/>
+                <a:cs typeface="Arial" panose="020B0604020202020204" pitchFamily="34" charset="0"/>
+              </a:rPr>
+              <a:t>puerto</a:t>
+            </a:r>
+            <a:r>
+              <a:rPr lang="en-US" sz="1200" dirty="0">
+                <a:latin typeface="Arial" panose="020B0604020202020204" pitchFamily="34" charset="0"/>
+                <a:cs typeface="Arial" panose="020B0604020202020204" pitchFamily="34" charset="0"/>
+              </a:rPr>
+              <a:t> </a:t>
+            </a:r>
+            <a:r>
+              <a:rPr lang="en-US" sz="1200" dirty="0" err="1">
+                <a:latin typeface="Arial" panose="020B0604020202020204" pitchFamily="34" charset="0"/>
+                <a:cs typeface="Arial" panose="020B0604020202020204" pitchFamily="34" charset="0"/>
+              </a:rPr>
+              <a:t>directo</a:t>
+            </a:r>
+            <a:endParaRPr lang="en-US" sz="1200" dirty="0">
+              <a:latin typeface="Arial" panose="020B0604020202020204" pitchFamily="34" charset="0"/>
+              <a:cs typeface="Arial" panose="020B0604020202020204" pitchFamily="34" charset="0"/>
+            </a:endParaRPr>
+          </a:p>
+        </p:txBody>
+      </p:sp>
+    </p:spTree>
+    <p:extLst>
+      <p:ext uri="{BB962C8B-B14F-4D97-AF65-F5344CB8AC3E}">
+        <p14:creationId xmlns:p14="http://schemas.microsoft.com/office/powerpoint/2010/main" val="478048404"/>
+      </p:ext>
+    </p:extLst>
+  </p:cSld>
+  <p:clrMapOvr>
+    <a:masterClrMapping/>
+  </p:clrMapOvr>
+</p:sld>
+</file>
+
+<file path=ppt/slides/slide5.xml><?xml version="1.0" encoding="utf-8"?>
+<p:sld xmlns:a="http://schemas.openxmlformats.org/drawingml/2006/main" xmlns:r="http://schemas.openxmlformats.org/officeDocument/2006/relationships" xmlns:p="http://schemas.openxmlformats.org/presentationml/2006/main">
+  <p:cSld>
+    <p:spTree>
+      <p:nvGrpSpPr>
+        <p:cNvPr id="1" name="">
+          <a:extLst>
+            <a:ext uri="{FF2B5EF4-FFF2-40B4-BE49-F238E27FC236}">
               <a16:creationId xmlns:a16="http://schemas.microsoft.com/office/drawing/2014/main" id="{04D5EA17-A19F-F6ED-E241-A2268CBA45D6}"/>
             </a:ext>
           </a:extLst>
@@ -5412,7 +11557,7 @@
           <a:p>
             <a:fld id="{B6F15528-21DE-4FAA-801E-634DDDAF4B2B}" type="slidenum">
               <a:rPr lang="es-ES" smtClean="0"/>
-              <a:t>4</a:t>
+              <a:t>5</a:t>
             </a:fld>
             <a:endParaRPr lang="es-ES"/>
           </a:p>
@@ -5817,7 +11962,848 @@
 </p:sld>
 </file>
 
-<file path=ppt/slides/slide5.xml><?xml version="1.0" encoding="utf-8"?>
+<file path=ppt/slides/slide6.xml><?xml version="1.0" encoding="utf-8"?>
+<p:sld xmlns:a="http://schemas.openxmlformats.org/drawingml/2006/main" xmlns:r="http://schemas.openxmlformats.org/officeDocument/2006/relationships" xmlns:p="http://schemas.openxmlformats.org/presentationml/2006/main">
+  <p:cSld>
+    <p:spTree>
+      <p:nvGrpSpPr>
+        <p:cNvPr id="1" name="">
+          <a:extLst>
+            <a:ext uri="{FF2B5EF4-FFF2-40B4-BE49-F238E27FC236}">
+              <a16:creationId xmlns:a16="http://schemas.microsoft.com/office/drawing/2014/main" id="{5C773F35-C175-2C62-A4B0-9EDD5E63E7C6}"/>
+            </a:ext>
+          </a:extLst>
+        </p:cNvPr>
+        <p:cNvGrpSpPr/>
+        <p:nvPr/>
+      </p:nvGrpSpPr>
+      <p:grpSpPr>
+        <a:xfrm>
+          <a:off x="0" y="0"/>
+          <a:ext cx="0" cy="0"/>
+          <a:chOff x="0" y="0"/>
+          <a:chExt cx="0" cy="0"/>
+        </a:xfrm>
+      </p:grpSpPr>
+      <p:sp>
+        <p:nvSpPr>
+          <p:cNvPr id="16" name="object 16">
+            <a:extLst>
+              <a:ext uri="{FF2B5EF4-FFF2-40B4-BE49-F238E27FC236}">
+                <a16:creationId xmlns:a16="http://schemas.microsoft.com/office/drawing/2014/main" id="{6FDF4B84-9EC6-2BB0-072B-0E39A5745CB1}"/>
+              </a:ext>
+            </a:extLst>
+          </p:cNvPr>
+          <p:cNvSpPr txBox="1">
+            <a:spLocks noGrp="1"/>
+          </p:cNvSpPr>
+          <p:nvPr>
+            <p:ph type="title"/>
+          </p:nvPr>
+        </p:nvSpPr>
+        <p:spPr>
+          <a:xfrm>
+            <a:off x="685800" y="408883"/>
+            <a:ext cx="10994410" cy="782265"/>
+          </a:xfrm>
+          <a:prstGeom prst="rect">
+            <a:avLst/>
+          </a:prstGeom>
+        </p:spPr>
+        <p:txBody>
+          <a:bodyPr vert="horz" wrap="square" lIns="0" tIns="12700" rIns="0" bIns="0" rtlCol="0">
+            <a:spAutoFit/>
+          </a:bodyPr>
+          <a:lstStyle/>
+          <a:p>
+            <a:pPr marL="12700">
+              <a:lnSpc>
+                <a:spcPct val="100000"/>
+              </a:lnSpc>
+              <a:spcBef>
+                <a:spcPts val="100"/>
+              </a:spcBef>
+            </a:pPr>
+            <a:r>
+              <a:rPr lang="en-US" sz="2500" dirty="0"/>
+              <a:t>Learning outcome #1b – Unbalanced MZI</a:t>
+            </a:r>
+            <a:br>
+              <a:rPr lang="es-ES" sz="2500" spc="-5" dirty="0">
+                <a:cs typeface="Lucida Sans"/>
+              </a:rPr>
+            </a:br>
+            <a:endParaRPr sz="2500" b="0" dirty="0">
+              <a:latin typeface="+mj-lt"/>
+              <a:cs typeface="Lucida Sans"/>
+            </a:endParaRPr>
+          </a:p>
+        </p:txBody>
+      </p:sp>
+      <p:pic>
+        <p:nvPicPr>
+          <p:cNvPr id="83" name="Gráfico 82">
+            <a:extLst>
+              <a:ext uri="{FF2B5EF4-FFF2-40B4-BE49-F238E27FC236}">
+                <a16:creationId xmlns:a16="http://schemas.microsoft.com/office/drawing/2014/main" id="{40A6EA51-A4E2-2AE0-7BDB-3EFB47F41FE9}"/>
+              </a:ext>
+            </a:extLst>
+          </p:cNvPr>
+          <p:cNvPicPr>
+            <a:picLocks noChangeAspect="1"/>
+          </p:cNvPicPr>
+          <p:nvPr/>
+        </p:nvPicPr>
+        <p:blipFill>
+          <a:blip>
+            <a:extLst>
+              <a:ext uri="{96DAC541-7B7A-43D3-8B79-37D633B846F1}">
+                <asvg:svgBlip xmlns:asvg="http://schemas.microsoft.com/office/drawing/2016/SVG/main" r:embed="rId3"/>
+              </a:ext>
+            </a:extLst>
+          </a:blip>
+          <a:stretch>
+            <a:fillRect/>
+          </a:stretch>
+        </p:blipFill>
+        <p:spPr>
+          <a:xfrm>
+            <a:off x="5045006" y="6356057"/>
+            <a:ext cx="6409575" cy="363174"/>
+          </a:xfrm>
+          <a:prstGeom prst="rect">
+            <a:avLst/>
+          </a:prstGeom>
+        </p:spPr>
+      </p:pic>
+      <p:sp>
+        <p:nvSpPr>
+          <p:cNvPr id="84" name="Marcador de número de diapositiva 83">
+            <a:extLst>
+              <a:ext uri="{FF2B5EF4-FFF2-40B4-BE49-F238E27FC236}">
+                <a16:creationId xmlns:a16="http://schemas.microsoft.com/office/drawing/2014/main" id="{C12EC47E-A705-A249-EA2F-6CAB7BAB8965}"/>
+              </a:ext>
+            </a:extLst>
+          </p:cNvPr>
+          <p:cNvSpPr>
+            <a:spLocks noGrp="1"/>
+          </p:cNvSpPr>
+          <p:nvPr>
+            <p:ph type="sldNum" sz="quarter" idx="7"/>
+          </p:nvPr>
+        </p:nvSpPr>
+        <p:spPr/>
+        <p:txBody>
+          <a:bodyPr/>
+          <a:lstStyle/>
+          <a:p>
+            <a:fld id="{B6F15528-21DE-4FAA-801E-634DDDAF4B2B}" type="slidenum">
+              <a:rPr lang="es-ES" smtClean="0"/>
+              <a:t>6</a:t>
+            </a:fld>
+            <a:endParaRPr lang="es-ES"/>
+          </a:p>
+        </p:txBody>
+      </p:sp>
+      <p:sp>
+        <p:nvSpPr>
+          <p:cNvPr id="3" name="Marcador de pie de página 2">
+            <a:extLst>
+              <a:ext uri="{FF2B5EF4-FFF2-40B4-BE49-F238E27FC236}">
+                <a16:creationId xmlns:a16="http://schemas.microsoft.com/office/drawing/2014/main" id="{360F1FE9-BE03-40A1-DA43-CEEADA97C67D}"/>
+              </a:ext>
+            </a:extLst>
+          </p:cNvPr>
+          <p:cNvSpPr>
+            <a:spLocks noGrp="1"/>
+          </p:cNvSpPr>
+          <p:nvPr>
+            <p:ph type="ftr" sz="quarter" idx="5"/>
+          </p:nvPr>
+        </p:nvSpPr>
+        <p:spPr/>
+        <p:txBody>
+          <a:bodyPr/>
+          <a:lstStyle/>
+          <a:p>
+            <a:pPr marL="12700">
+              <a:spcBef>
+                <a:spcPts val="15"/>
+              </a:spcBef>
+            </a:pPr>
+            <a:r>
+              <a:rPr lang="es-ES" spc="-5"/>
+              <a:t>LAB 3.0. CIRCUITS &amp; COMPACT MODELS</a:t>
+            </a:r>
+            <a:endParaRPr lang="es-ES" spc="-5" dirty="0"/>
+          </a:p>
+        </p:txBody>
+      </p:sp>
+      <p:pic>
+        <p:nvPicPr>
+          <p:cNvPr id="4" name="Imagen 3">
+            <a:extLst>
+              <a:ext uri="{FF2B5EF4-FFF2-40B4-BE49-F238E27FC236}">
+                <a16:creationId xmlns:a16="http://schemas.microsoft.com/office/drawing/2014/main" id="{C0DD8B6F-2550-8F2C-34B8-0C7B83B9DF1F}"/>
+              </a:ext>
+            </a:extLst>
+          </p:cNvPr>
+          <p:cNvPicPr>
+            <a:picLocks noChangeAspect="1"/>
+          </p:cNvPicPr>
+          <p:nvPr/>
+        </p:nvPicPr>
+        <p:blipFill>
+          <a:blip r:embed="rId4"/>
+          <a:stretch>
+            <a:fillRect/>
+          </a:stretch>
+        </p:blipFill>
+        <p:spPr>
+          <a:xfrm>
+            <a:off x="2936875" y="1022012"/>
+            <a:ext cx="6318250" cy="3459287"/>
+          </a:xfrm>
+          <a:prstGeom prst="rect">
+            <a:avLst/>
+          </a:prstGeom>
+        </p:spPr>
+      </p:pic>
+      <mc:AlternateContent xmlns:mc="http://schemas.openxmlformats.org/markup-compatibility/2006">
+        <mc:Choice xmlns:a14="http://schemas.microsoft.com/office/drawing/2010/main" Requires="a14">
+          <p:sp>
+            <p:nvSpPr>
+              <p:cNvPr id="5" name="CuadroTexto 4">
+                <a:extLst>
+                  <a:ext uri="{FF2B5EF4-FFF2-40B4-BE49-F238E27FC236}">
+                    <a16:creationId xmlns:a16="http://schemas.microsoft.com/office/drawing/2014/main" id="{2774CA50-A850-FEBA-BF8D-1FC3929E1E86}"/>
+                  </a:ext>
+                </a:extLst>
+              </p:cNvPr>
+              <p:cNvSpPr txBox="1"/>
+              <p:nvPr/>
+            </p:nvSpPr>
+            <p:spPr>
+              <a:xfrm>
+                <a:off x="1402080" y="4602060"/>
+                <a:ext cx="9281160" cy="1233928"/>
+              </a:xfrm>
+              <a:prstGeom prst="rect">
+                <a:avLst/>
+              </a:prstGeom>
+              <a:noFill/>
+            </p:spPr>
+            <p:txBody>
+              <a:bodyPr wrap="square">
+                <a:spAutoFit/>
+              </a:bodyPr>
+              <a:lstStyle/>
+              <a:p>
+                <a:pPr algn="just"/>
+                <a:r>
+                  <a:rPr lang="en-US" sz="1200" dirty="0">
+                    <a:latin typeface="Arial" panose="020B0604020202020204" pitchFamily="34" charset="0"/>
+                    <a:cs typeface="Arial" panose="020B0604020202020204" pitchFamily="34" charset="0"/>
+                  </a:rPr>
+                  <a:t>Ahora </a:t>
+                </a:r>
+                <a:r>
+                  <a:rPr lang="en-US" sz="1200" dirty="0" err="1">
+                    <a:latin typeface="Arial" panose="020B0604020202020204" pitchFamily="34" charset="0"/>
+                    <a:cs typeface="Arial" panose="020B0604020202020204" pitchFamily="34" charset="0"/>
+                  </a:rPr>
+                  <a:t>obervamos</a:t>
+                </a:r>
+                <a:r>
+                  <a:rPr lang="en-US" sz="1200" dirty="0">
+                    <a:latin typeface="Arial" panose="020B0604020202020204" pitchFamily="34" charset="0"/>
+                    <a:cs typeface="Arial" panose="020B0604020202020204" pitchFamily="34" charset="0"/>
+                  </a:rPr>
+                  <a:t> </a:t>
+                </a:r>
+                <a:r>
+                  <a:rPr lang="en-US" sz="1200" dirty="0" err="1">
+                    <a:latin typeface="Arial" panose="020B0604020202020204" pitchFamily="34" charset="0"/>
+                    <a:cs typeface="Arial" panose="020B0604020202020204" pitchFamily="34" charset="0"/>
+                  </a:rPr>
+                  <a:t>que</a:t>
+                </a:r>
+                <a:r>
+                  <a:rPr lang="en-US" sz="1200" dirty="0">
+                    <a:latin typeface="Arial" panose="020B0604020202020204" pitchFamily="34" charset="0"/>
+                    <a:cs typeface="Arial" panose="020B0604020202020204" pitchFamily="34" charset="0"/>
+                  </a:rPr>
+                  <a:t> las </a:t>
+                </a:r>
+                <a:r>
+                  <a:rPr lang="en-US" sz="1200" dirty="0" err="1">
+                    <a:latin typeface="Arial" panose="020B0604020202020204" pitchFamily="34" charset="0"/>
+                    <a:cs typeface="Arial" panose="020B0604020202020204" pitchFamily="34" charset="0"/>
+                  </a:rPr>
+                  <a:t>respuestas</a:t>
+                </a:r>
+                <a:r>
+                  <a:rPr lang="en-US" sz="1200" dirty="0">
+                    <a:latin typeface="Arial" panose="020B0604020202020204" pitchFamily="34" charset="0"/>
+                    <a:cs typeface="Arial" panose="020B0604020202020204" pitchFamily="34" charset="0"/>
+                  </a:rPr>
+                  <a:t> de </a:t>
+                </a:r>
+                <a:r>
+                  <a:rPr lang="en-US" sz="1200" dirty="0" err="1">
+                    <a:latin typeface="Arial" panose="020B0604020202020204" pitchFamily="34" charset="0"/>
+                    <a:cs typeface="Arial" panose="020B0604020202020204" pitchFamily="34" charset="0"/>
+                  </a:rPr>
+                  <a:t>los</a:t>
+                </a:r>
+                <a:r>
+                  <a:rPr lang="en-US" sz="1200" dirty="0">
+                    <a:latin typeface="Arial" panose="020B0604020202020204" pitchFamily="34" charset="0"/>
+                    <a:cs typeface="Arial" panose="020B0604020202020204" pitchFamily="34" charset="0"/>
+                  </a:rPr>
+                  <a:t> </a:t>
+                </a:r>
+                <a:r>
+                  <a:rPr lang="en-US" sz="1200" dirty="0" err="1">
+                    <a:latin typeface="Arial" panose="020B0604020202020204" pitchFamily="34" charset="0"/>
+                    <a:cs typeface="Arial" panose="020B0604020202020204" pitchFamily="34" charset="0"/>
+                  </a:rPr>
+                  <a:t>puertos</a:t>
+                </a:r>
+                <a:r>
+                  <a:rPr lang="en-US" sz="1200" dirty="0">
+                    <a:latin typeface="Arial" panose="020B0604020202020204" pitchFamily="34" charset="0"/>
+                    <a:cs typeface="Arial" panose="020B0604020202020204" pitchFamily="34" charset="0"/>
+                  </a:rPr>
+                  <a:t> de </a:t>
+                </a:r>
+                <a:r>
+                  <a:rPr lang="en-US" sz="1200" dirty="0" err="1">
+                    <a:latin typeface="Arial" panose="020B0604020202020204" pitchFamily="34" charset="0"/>
+                    <a:cs typeface="Arial" panose="020B0604020202020204" pitchFamily="34" charset="0"/>
+                  </a:rPr>
+                  <a:t>salida</a:t>
+                </a:r>
+                <a:r>
+                  <a:rPr lang="en-US" sz="1200" dirty="0">
+                    <a:latin typeface="Arial" panose="020B0604020202020204" pitchFamily="34" charset="0"/>
+                    <a:cs typeface="Arial" panose="020B0604020202020204" pitchFamily="34" charset="0"/>
+                  </a:rPr>
+                  <a:t> son </a:t>
+                </a:r>
+                <a:r>
+                  <a:rPr lang="en-US" sz="1200" dirty="0" err="1">
+                    <a:latin typeface="Arial" panose="020B0604020202020204" pitchFamily="34" charset="0"/>
+                    <a:cs typeface="Arial" panose="020B0604020202020204" pitchFamily="34" charset="0"/>
+                  </a:rPr>
+                  <a:t>perfectamente</a:t>
+                </a:r>
+                <a:r>
+                  <a:rPr lang="en-US" sz="1200" dirty="0">
+                    <a:latin typeface="Arial" panose="020B0604020202020204" pitchFamily="34" charset="0"/>
+                    <a:cs typeface="Arial" panose="020B0604020202020204" pitchFamily="34" charset="0"/>
+                  </a:rPr>
+                  <a:t> </a:t>
+                </a:r>
+                <a:r>
+                  <a:rPr lang="en-US" sz="1200" dirty="0" err="1">
+                    <a:latin typeface="Arial" panose="020B0604020202020204" pitchFamily="34" charset="0"/>
+                    <a:cs typeface="Arial" panose="020B0604020202020204" pitchFamily="34" charset="0"/>
+                  </a:rPr>
+                  <a:t>simétricas</a:t>
+                </a:r>
+                <a:r>
+                  <a:rPr lang="en-US" sz="1200" dirty="0">
+                    <a:latin typeface="Arial" panose="020B0604020202020204" pitchFamily="34" charset="0"/>
+                    <a:cs typeface="Arial" panose="020B0604020202020204" pitchFamily="34" charset="0"/>
+                  </a:rPr>
+                  <a:t>, es </a:t>
+                </a:r>
+                <a:r>
+                  <a:rPr lang="en-US" sz="1200" dirty="0" err="1">
+                    <a:latin typeface="Arial" panose="020B0604020202020204" pitchFamily="34" charset="0"/>
+                    <a:cs typeface="Arial" panose="020B0604020202020204" pitchFamily="34" charset="0"/>
+                  </a:rPr>
+                  <a:t>decir</a:t>
+                </a:r>
+                <a:r>
+                  <a:rPr lang="en-US" sz="1200" dirty="0">
+                    <a:latin typeface="Arial" panose="020B0604020202020204" pitchFamily="34" charset="0"/>
+                    <a:cs typeface="Arial" panose="020B0604020202020204" pitchFamily="34" charset="0"/>
+                  </a:rPr>
+                  <a:t>, </a:t>
+                </a:r>
+                <a:r>
+                  <a:rPr lang="en-US" sz="1200" dirty="0" err="1">
+                    <a:latin typeface="Arial" panose="020B0604020202020204" pitchFamily="34" charset="0"/>
+                    <a:cs typeface="Arial" panose="020B0604020202020204" pitchFamily="34" charset="0"/>
+                  </a:rPr>
+                  <a:t>cuando</a:t>
+                </a:r>
+                <a:r>
+                  <a:rPr lang="en-US" sz="1200" dirty="0">
+                    <a:latin typeface="Arial" panose="020B0604020202020204" pitchFamily="34" charset="0"/>
+                    <a:cs typeface="Arial" panose="020B0604020202020204" pitchFamily="34" charset="0"/>
+                  </a:rPr>
+                  <a:t> </a:t>
+                </a:r>
+                <a:r>
+                  <a:rPr lang="en-US" sz="1200" dirty="0" err="1">
+                    <a:latin typeface="Arial" panose="020B0604020202020204" pitchFamily="34" charset="0"/>
+                    <a:cs typeface="Arial" panose="020B0604020202020204" pitchFamily="34" charset="0"/>
+                  </a:rPr>
+                  <a:t>el</a:t>
+                </a:r>
+                <a:r>
+                  <a:rPr lang="en-US" sz="1200" dirty="0">
+                    <a:latin typeface="Arial" panose="020B0604020202020204" pitchFamily="34" charset="0"/>
+                    <a:cs typeface="Arial" panose="020B0604020202020204" pitchFamily="34" charset="0"/>
+                  </a:rPr>
+                  <a:t> H00 </a:t>
+                </a:r>
+                <a:r>
+                  <a:rPr lang="en-US" sz="1200" dirty="0" err="1">
+                    <a:latin typeface="Arial" panose="020B0604020202020204" pitchFamily="34" charset="0"/>
+                    <a:cs typeface="Arial" panose="020B0604020202020204" pitchFamily="34" charset="0"/>
+                  </a:rPr>
+                  <a:t>tiene</a:t>
+                </a:r>
+                <a:r>
+                  <a:rPr lang="en-US" sz="1200" dirty="0">
+                    <a:latin typeface="Arial" panose="020B0604020202020204" pitchFamily="34" charset="0"/>
+                    <a:cs typeface="Arial" panose="020B0604020202020204" pitchFamily="34" charset="0"/>
+                  </a:rPr>
+                  <a:t> un </a:t>
+                </a:r>
+                <a:r>
+                  <a:rPr lang="en-US" sz="1200" dirty="0" err="1">
+                    <a:latin typeface="Arial" panose="020B0604020202020204" pitchFamily="34" charset="0"/>
+                    <a:cs typeface="Arial" panose="020B0604020202020204" pitchFamily="34" charset="0"/>
+                  </a:rPr>
+                  <a:t>pico</a:t>
+                </a:r>
+                <a:r>
+                  <a:rPr lang="en-US" sz="1200" dirty="0">
+                    <a:latin typeface="Arial" panose="020B0604020202020204" pitchFamily="34" charset="0"/>
+                    <a:cs typeface="Arial" panose="020B0604020202020204" pitchFamily="34" charset="0"/>
+                  </a:rPr>
+                  <a:t>, </a:t>
+                </a:r>
+                <a:r>
+                  <a:rPr lang="en-US" sz="1200" dirty="0" err="1">
+                    <a:latin typeface="Arial" panose="020B0604020202020204" pitchFamily="34" charset="0"/>
+                    <a:cs typeface="Arial" panose="020B0604020202020204" pitchFamily="34" charset="0"/>
+                  </a:rPr>
+                  <a:t>el</a:t>
+                </a:r>
+                <a:r>
+                  <a:rPr lang="en-US" sz="1200" dirty="0">
+                    <a:latin typeface="Arial" panose="020B0604020202020204" pitchFamily="34" charset="0"/>
+                    <a:cs typeface="Arial" panose="020B0604020202020204" pitchFamily="34" charset="0"/>
+                  </a:rPr>
+                  <a:t> H01 </a:t>
+                </a:r>
+                <a:r>
+                  <a:rPr lang="en-US" sz="1200" dirty="0" err="1">
+                    <a:latin typeface="Arial" panose="020B0604020202020204" pitchFamily="34" charset="0"/>
+                    <a:cs typeface="Arial" panose="020B0604020202020204" pitchFamily="34" charset="0"/>
+                  </a:rPr>
+                  <a:t>está</a:t>
+                </a:r>
+                <a:r>
+                  <a:rPr lang="en-US" sz="1200" dirty="0">
+                    <a:latin typeface="Arial" panose="020B0604020202020204" pitchFamily="34" charset="0"/>
+                    <a:cs typeface="Arial" panose="020B0604020202020204" pitchFamily="34" charset="0"/>
+                  </a:rPr>
+                  <a:t> </a:t>
+                </a:r>
+                <a:r>
+                  <a:rPr lang="en-US" sz="1200" dirty="0" err="1">
+                    <a:latin typeface="Arial" panose="020B0604020202020204" pitchFamily="34" charset="0"/>
+                    <a:cs typeface="Arial" panose="020B0604020202020204" pitchFamily="34" charset="0"/>
+                  </a:rPr>
+                  <a:t>en</a:t>
+                </a:r>
+                <a:r>
+                  <a:rPr lang="en-US" sz="1200" dirty="0">
+                    <a:latin typeface="Arial" panose="020B0604020202020204" pitchFamily="34" charset="0"/>
+                    <a:cs typeface="Arial" panose="020B0604020202020204" pitchFamily="34" charset="0"/>
+                  </a:rPr>
+                  <a:t> un </a:t>
+                </a:r>
+                <a:r>
+                  <a:rPr lang="en-US" sz="1200" dirty="0" err="1">
+                    <a:latin typeface="Arial" panose="020B0604020202020204" pitchFamily="34" charset="0"/>
+                    <a:cs typeface="Arial" panose="020B0604020202020204" pitchFamily="34" charset="0"/>
+                  </a:rPr>
+                  <a:t>mínimo</a:t>
+                </a:r>
+                <a:r>
+                  <a:rPr lang="en-US" sz="1200" dirty="0">
+                    <a:latin typeface="Arial" panose="020B0604020202020204" pitchFamily="34" charset="0"/>
+                    <a:cs typeface="Arial" panose="020B0604020202020204" pitchFamily="34" charset="0"/>
+                  </a:rPr>
+                  <a:t> y </a:t>
+                </a:r>
+                <a:r>
+                  <a:rPr lang="en-US" sz="1200" dirty="0" err="1">
+                    <a:latin typeface="Arial" panose="020B0604020202020204" pitchFamily="34" charset="0"/>
+                    <a:cs typeface="Arial" panose="020B0604020202020204" pitchFamily="34" charset="0"/>
+                  </a:rPr>
+                  <a:t>viceversa</a:t>
+                </a:r>
+                <a:r>
+                  <a:rPr lang="en-US" sz="1200" dirty="0">
+                    <a:latin typeface="Arial" panose="020B0604020202020204" pitchFamily="34" charset="0"/>
+                    <a:cs typeface="Arial" panose="020B0604020202020204" pitchFamily="34" charset="0"/>
+                  </a:rPr>
+                  <a:t>. La </a:t>
+                </a:r>
+                <a:r>
+                  <a:rPr lang="en-US" sz="1200" dirty="0" err="1">
+                    <a:latin typeface="Arial" panose="020B0604020202020204" pitchFamily="34" charset="0"/>
+                    <a:cs typeface="Arial" panose="020B0604020202020204" pitchFamily="34" charset="0"/>
+                  </a:rPr>
+                  <a:t>separación</a:t>
+                </a:r>
+                <a:r>
+                  <a:rPr lang="en-US" sz="1200" dirty="0">
+                    <a:latin typeface="Arial" panose="020B0604020202020204" pitchFamily="34" charset="0"/>
+                    <a:cs typeface="Arial" panose="020B0604020202020204" pitchFamily="34" charset="0"/>
+                  </a:rPr>
+                  <a:t> entre </a:t>
+                </a:r>
+                <a:r>
+                  <a:rPr lang="en-US" sz="1200" dirty="0" err="1">
+                    <a:latin typeface="Arial" panose="020B0604020202020204" pitchFamily="34" charset="0"/>
+                    <a:cs typeface="Arial" panose="020B0604020202020204" pitchFamily="34" charset="0"/>
+                  </a:rPr>
+                  <a:t>picos</a:t>
+                </a:r>
+                <a:r>
+                  <a:rPr lang="en-US" sz="1200" dirty="0">
+                    <a:latin typeface="Arial" panose="020B0604020202020204" pitchFamily="34" charset="0"/>
+                    <a:cs typeface="Arial" panose="020B0604020202020204" pitchFamily="34" charset="0"/>
+                  </a:rPr>
+                  <a:t> es de </a:t>
+                </a:r>
+                <a:r>
+                  <a:rPr lang="en-US" sz="1200" dirty="0" err="1">
+                    <a:latin typeface="Arial" panose="020B0604020202020204" pitchFamily="34" charset="0"/>
+                    <a:cs typeface="Arial" panose="020B0604020202020204" pitchFamily="34" charset="0"/>
+                  </a:rPr>
+                  <a:t>aproximadamente</a:t>
+                </a:r>
+                <a:r>
+                  <a:rPr lang="en-US" sz="1200" dirty="0">
+                    <a:latin typeface="Arial" panose="020B0604020202020204" pitchFamily="34" charset="0"/>
+                    <a:cs typeface="Arial" panose="020B0604020202020204" pitchFamily="34" charset="0"/>
+                  </a:rPr>
+                  <a:t> 10 nm, </a:t>
+                </a:r>
+                <a:r>
+                  <a:rPr lang="en-US" sz="1200" dirty="0" err="1">
+                    <a:latin typeface="Arial" panose="020B0604020202020204" pitchFamily="34" charset="0"/>
+                    <a:cs typeface="Arial" panose="020B0604020202020204" pitchFamily="34" charset="0"/>
+                  </a:rPr>
+                  <a:t>correspondiendo</a:t>
+                </a:r>
+                <a:r>
+                  <a:rPr lang="en-US" sz="1200" dirty="0">
+                    <a:latin typeface="Arial" panose="020B0604020202020204" pitchFamily="34" charset="0"/>
+                    <a:cs typeface="Arial" panose="020B0604020202020204" pitchFamily="34" charset="0"/>
+                  </a:rPr>
+                  <a:t> </a:t>
+                </a:r>
+                <a:r>
+                  <a:rPr lang="en-US" sz="1200" dirty="0" err="1">
+                    <a:latin typeface="Arial" panose="020B0604020202020204" pitchFamily="34" charset="0"/>
+                    <a:cs typeface="Arial" panose="020B0604020202020204" pitchFamily="34" charset="0"/>
+                  </a:rPr>
+                  <a:t>aproximadamente</a:t>
+                </a:r>
+                <a:r>
+                  <a:rPr lang="en-US" sz="1200" dirty="0">
+                    <a:latin typeface="Arial" panose="020B0604020202020204" pitchFamily="34" charset="0"/>
+                    <a:cs typeface="Arial" panose="020B0604020202020204" pitchFamily="34" charset="0"/>
+                  </a:rPr>
+                  <a:t> al valor de ls FSR </a:t>
+                </a:r>
+                <a:r>
+                  <a:rPr lang="en-US" sz="1200" dirty="0" err="1">
+                    <a:latin typeface="Arial" panose="020B0604020202020204" pitchFamily="34" charset="0"/>
+                    <a:cs typeface="Arial" panose="020B0604020202020204" pitchFamily="34" charset="0"/>
+                  </a:rPr>
+                  <a:t>teórica</a:t>
+                </a:r>
+                <a:r>
+                  <a:rPr lang="en-US" sz="1200" dirty="0">
+                    <a:latin typeface="Arial" panose="020B0604020202020204" pitchFamily="34" charset="0"/>
+                    <a:cs typeface="Arial" panose="020B0604020202020204" pitchFamily="34" charset="0"/>
+                  </a:rPr>
+                  <a:t>, </a:t>
+                </a:r>
+                <a:r>
+                  <a:rPr lang="en-US" sz="1200" dirty="0" err="1">
+                    <a:latin typeface="Arial" panose="020B0604020202020204" pitchFamily="34" charset="0"/>
+                    <a:cs typeface="Arial" panose="020B0604020202020204" pitchFamily="34" charset="0"/>
+                  </a:rPr>
+                  <a:t>cuyo</a:t>
+                </a:r>
+                <a:r>
+                  <a:rPr lang="en-US" sz="1200" dirty="0">
+                    <a:latin typeface="Arial" panose="020B0604020202020204" pitchFamily="34" charset="0"/>
+                    <a:cs typeface="Arial" panose="020B0604020202020204" pitchFamily="34" charset="0"/>
+                  </a:rPr>
+                  <a:t> valor es de 12 nm </a:t>
+                </a:r>
+                <a:r>
+                  <a:rPr lang="en-US" sz="1200" dirty="0" err="1">
+                    <a:latin typeface="Arial" panose="020B0604020202020204" pitchFamily="34" charset="0"/>
+                    <a:cs typeface="Arial" panose="020B0604020202020204" pitchFamily="34" charset="0"/>
+                  </a:rPr>
+                  <a:t>usando</a:t>
+                </a:r>
+                <a:r>
+                  <a:rPr lang="en-US" sz="1200" dirty="0">
+                    <a:latin typeface="Arial" panose="020B0604020202020204" pitchFamily="34" charset="0"/>
+                    <a:cs typeface="Arial" panose="020B0604020202020204" pitchFamily="34" charset="0"/>
+                  </a:rPr>
+                  <a:t> la </a:t>
+                </a:r>
+                <a:r>
+                  <a:rPr lang="en-US" sz="1200" dirty="0" err="1">
+                    <a:latin typeface="Arial" panose="020B0604020202020204" pitchFamily="34" charset="0"/>
+                    <a:cs typeface="Arial" panose="020B0604020202020204" pitchFamily="34" charset="0"/>
+                  </a:rPr>
+                  <a:t>siguiente</a:t>
+                </a:r>
+                <a:r>
+                  <a:rPr lang="en-US" sz="1200" dirty="0">
+                    <a:latin typeface="Arial" panose="020B0604020202020204" pitchFamily="34" charset="0"/>
+                    <a:cs typeface="Arial" panose="020B0604020202020204" pitchFamily="34" charset="0"/>
+                  </a:rPr>
+                  <a:t> expression con ng = 2, </a:t>
+                </a:r>
+                <a:r>
+                  <a:rPr lang="el-GR" sz="1200" dirty="0">
+                    <a:latin typeface="Arial" panose="020B0604020202020204" pitchFamily="34" charset="0"/>
+                    <a:cs typeface="Arial" panose="020B0604020202020204" pitchFamily="34" charset="0"/>
+                  </a:rPr>
+                  <a:t>λ</a:t>
+                </a:r>
+                <a:r>
+                  <a:rPr lang="es-ES" sz="1200" dirty="0">
+                    <a:latin typeface="Arial" panose="020B0604020202020204" pitchFamily="34" charset="0"/>
+                    <a:cs typeface="Arial" panose="020B0604020202020204" pitchFamily="34" charset="0"/>
+                  </a:rPr>
+                  <a:t> = 1.55 </a:t>
+                </a:r>
+                <a:r>
+                  <a:rPr lang="es-ES" sz="1200" dirty="0" err="1">
+                    <a:latin typeface="Arial" panose="020B0604020202020204" pitchFamily="34" charset="0"/>
+                    <a:cs typeface="Arial" panose="020B0604020202020204" pitchFamily="34" charset="0"/>
+                  </a:rPr>
+                  <a:t>um</a:t>
+                </a:r>
+                <a:r>
+                  <a:rPr lang="es-ES" sz="1200" dirty="0">
+                    <a:latin typeface="Arial" panose="020B0604020202020204" pitchFamily="34" charset="0"/>
+                    <a:cs typeface="Arial" panose="020B0604020202020204" pitchFamily="34" charset="0"/>
+                  </a:rPr>
+                  <a:t> y </a:t>
+                </a:r>
+                <a:r>
+                  <a:rPr lang="es-ES" sz="1200" dirty="0" err="1">
+                    <a:latin typeface="Arial" panose="020B0604020202020204" pitchFamily="34" charset="0"/>
+                    <a:cs typeface="Arial" panose="020B0604020202020204" pitchFamily="34" charset="0"/>
+                  </a:rPr>
+                  <a:t>dL</a:t>
+                </a:r>
+                <a:r>
+                  <a:rPr lang="es-ES" sz="1200" dirty="0">
+                    <a:latin typeface="Arial" panose="020B0604020202020204" pitchFamily="34" charset="0"/>
+                    <a:cs typeface="Arial" panose="020B0604020202020204" pitchFamily="34" charset="0"/>
+                  </a:rPr>
+                  <a:t> = 100 </a:t>
+                </a:r>
+                <a:r>
+                  <a:rPr lang="es-ES" sz="1200" dirty="0" err="1">
+                    <a:latin typeface="Arial" panose="020B0604020202020204" pitchFamily="34" charset="0"/>
+                    <a:cs typeface="Arial" panose="020B0604020202020204" pitchFamily="34" charset="0"/>
+                  </a:rPr>
+                  <a:t>um</a:t>
+                </a:r>
+                <a:r>
+                  <a:rPr lang="es-ES" sz="1200" dirty="0">
+                    <a:latin typeface="Arial" panose="020B0604020202020204" pitchFamily="34" charset="0"/>
+                    <a:cs typeface="Arial" panose="020B0604020202020204" pitchFamily="34" charset="0"/>
+                  </a:rPr>
+                  <a:t>:</a:t>
+                </a:r>
+              </a:p>
+              <a:p>
+                <a:pPr algn="just"/>
+                <a:endParaRPr lang="es-ES" sz="1200" dirty="0">
+                  <a:latin typeface="Arial" panose="020B0604020202020204" pitchFamily="34" charset="0"/>
+                  <a:cs typeface="Arial" panose="020B0604020202020204" pitchFamily="34" charset="0"/>
+                </a:endParaRPr>
+              </a:p>
+              <a:p>
+                <a:pPr algn="just"/>
+                <a14:m>
+                  <m:oMathPara xmlns:m="http://schemas.openxmlformats.org/officeDocument/2006/math">
+                    <m:oMathParaPr>
+                      <m:jc m:val="centerGroup"/>
+                    </m:oMathParaPr>
+                    <m:oMath xmlns:m="http://schemas.openxmlformats.org/officeDocument/2006/math">
+                      <m:r>
+                        <a:rPr lang="es-ES" sz="1200" b="0" i="1" smtClean="0">
+                          <a:latin typeface="Cambria Math" panose="02040503050406030204" pitchFamily="18" charset="0"/>
+                          <a:cs typeface="Arial" panose="020B0604020202020204" pitchFamily="34" charset="0"/>
+                        </a:rPr>
+                        <m:t>𝐹𝑆𝑅</m:t>
+                      </m:r>
+                      <m:r>
+                        <a:rPr lang="es-ES" sz="1200" b="0" i="1" smtClean="0">
+                          <a:latin typeface="Cambria Math" panose="02040503050406030204" pitchFamily="18" charset="0"/>
+                          <a:cs typeface="Arial" panose="020B0604020202020204" pitchFamily="34" charset="0"/>
+                        </a:rPr>
+                        <m:t>=</m:t>
+                      </m:r>
+                      <m:f>
+                        <m:fPr>
+                          <m:ctrlPr>
+                            <a:rPr lang="es-ES" sz="1200" b="0" i="1" smtClean="0">
+                              <a:latin typeface="Cambria Math" panose="02040503050406030204" pitchFamily="18" charset="0"/>
+                              <a:cs typeface="Arial" panose="020B0604020202020204" pitchFamily="34" charset="0"/>
+                            </a:rPr>
+                          </m:ctrlPr>
+                        </m:fPr>
+                        <m:num>
+                          <m:sSup>
+                            <m:sSupPr>
+                              <m:ctrlPr>
+                                <a:rPr lang="el-GR" sz="1200" i="1" smtClean="0">
+                                  <a:latin typeface="Cambria Math" panose="02040503050406030204" pitchFamily="18" charset="0"/>
+                                  <a:cs typeface="Arial" panose="020B0604020202020204" pitchFamily="34" charset="0"/>
+                                </a:rPr>
+                              </m:ctrlPr>
+                            </m:sSupPr>
+                            <m:e>
+                              <m:r>
+                                <a:rPr lang="el-GR" sz="1200" i="1">
+                                  <a:latin typeface="Cambria Math" panose="02040503050406030204" pitchFamily="18" charset="0"/>
+                                  <a:cs typeface="Arial" panose="020B0604020202020204" pitchFamily="34" charset="0"/>
+                                </a:rPr>
+                                <m:t>𝜆</m:t>
+                              </m:r>
+                            </m:e>
+                            <m:sup>
+                              <m:r>
+                                <a:rPr lang="es-ES" sz="1200" b="0" i="1" smtClean="0">
+                                  <a:latin typeface="Cambria Math" panose="02040503050406030204" pitchFamily="18" charset="0"/>
+                                  <a:cs typeface="Arial" panose="020B0604020202020204" pitchFamily="34" charset="0"/>
+                                </a:rPr>
+                                <m:t>2</m:t>
+                              </m:r>
+                            </m:sup>
+                          </m:sSup>
+                        </m:num>
+                        <m:den>
+                          <m:r>
+                            <a:rPr lang="es-ES" sz="1200" b="0" i="1" smtClean="0">
+                              <a:latin typeface="Cambria Math" panose="02040503050406030204" pitchFamily="18" charset="0"/>
+                              <a:cs typeface="Arial" panose="020B0604020202020204" pitchFamily="34" charset="0"/>
+                            </a:rPr>
+                            <m:t>𝑛𝑔</m:t>
+                          </m:r>
+                          <m:r>
+                            <a:rPr lang="es-ES" sz="1200" b="0" i="1" smtClean="0">
+                              <a:latin typeface="Cambria Math" panose="02040503050406030204" pitchFamily="18" charset="0"/>
+                              <a:cs typeface="Arial" panose="020B0604020202020204" pitchFamily="34" charset="0"/>
+                            </a:rPr>
+                            <m:t>∗</m:t>
+                          </m:r>
+                          <m:r>
+                            <a:rPr lang="es-ES" sz="1200" b="0" i="1" smtClean="0">
+                              <a:latin typeface="Cambria Math" panose="02040503050406030204" pitchFamily="18" charset="0"/>
+                              <a:cs typeface="Arial" panose="020B0604020202020204" pitchFamily="34" charset="0"/>
+                            </a:rPr>
+                            <m:t>𝑑𝐿</m:t>
+                          </m:r>
+                        </m:den>
+                      </m:f>
+                    </m:oMath>
+                  </m:oMathPara>
+                </a14:m>
+                <a:endParaRPr lang="en-US" sz="1200" dirty="0">
+                  <a:latin typeface="Arial" panose="020B0604020202020204" pitchFamily="34" charset="0"/>
+                  <a:cs typeface="Arial" panose="020B0604020202020204" pitchFamily="34" charset="0"/>
+                </a:endParaRPr>
+              </a:p>
+            </p:txBody>
+          </p:sp>
+        </mc:Choice>
+        <mc:Fallback>
+          <p:sp>
+            <p:nvSpPr>
+              <p:cNvPr id="5" name="CuadroTexto 4">
+                <a:extLst>
+                  <a:ext uri="{FF2B5EF4-FFF2-40B4-BE49-F238E27FC236}">
+                    <a16:creationId xmlns:a16="http://schemas.microsoft.com/office/drawing/2014/main" id="{2774CA50-A850-FEBA-BF8D-1FC3929E1E86}"/>
+                  </a:ext>
+                </a:extLst>
+              </p:cNvPr>
+              <p:cNvSpPr txBox="1">
+                <a:spLocks noRot="1" noChangeAspect="1" noMove="1" noResize="1" noEditPoints="1" noAdjustHandles="1" noChangeArrowheads="1" noChangeShapeType="1" noTextEdit="1"/>
+              </p:cNvSpPr>
+              <p:nvPr/>
+            </p:nvSpPr>
+            <p:spPr>
+              <a:xfrm>
+                <a:off x="1402080" y="4602060"/>
+                <a:ext cx="9281160" cy="1233928"/>
+              </a:xfrm>
+              <a:prstGeom prst="rect">
+                <a:avLst/>
+              </a:prstGeom>
+              <a:blipFill>
+                <a:blip r:embed="rId5"/>
+                <a:stretch>
+                  <a:fillRect t="-990"/>
+                </a:stretch>
+              </a:blipFill>
+            </p:spPr>
+            <p:txBody>
+              <a:bodyPr/>
+              <a:lstStyle/>
+              <a:p>
+                <a:r>
+                  <a:rPr lang="es-ES">
+                    <a:noFill/>
+                  </a:rPr>
+                  <a:t> </a:t>
+                </a:r>
+              </a:p>
+            </p:txBody>
+          </p:sp>
+        </mc:Fallback>
+      </mc:AlternateContent>
+    </p:spTree>
+    <p:extLst>
+      <p:ext uri="{BB962C8B-B14F-4D97-AF65-F5344CB8AC3E}">
+        <p14:creationId xmlns:p14="http://schemas.microsoft.com/office/powerpoint/2010/main" val="778033656"/>
+      </p:ext>
+    </p:extLst>
+  </p:cSld>
+  <p:clrMapOvr>
+    <a:masterClrMapping/>
+  </p:clrMapOvr>
+</p:sld>
+</file>
+
+<file path=ppt/slides/slide7.xml><?xml version="1.0" encoding="utf-8"?>
 <p:sld xmlns:a="http://schemas.openxmlformats.org/drawingml/2006/main" xmlns:r="http://schemas.openxmlformats.org/officeDocument/2006/relationships" xmlns:p="http://schemas.openxmlformats.org/presentationml/2006/main">
   <p:cSld>
     <p:spTree>
@@ -5886,7 +12872,7 @@
             <a:fld id="{C2F52289-4012-4053-9770-FE82CEB9514F}" type="slidenum">
               <a:rPr lang="en-US" smtClean="0"/>
               <a:pPr/>
-              <a:t>5</a:t>
+              <a:t>7</a:t>
             </a:fld>
             <a:endParaRPr lang="en-US" dirty="0"/>
           </a:p>
@@ -6496,7 +13482,501 @@
 </p:sld>
 </file>
 
-<file path=ppt/slides/slide6.xml><?xml version="1.0" encoding="utf-8"?>
+<file path=ppt/slides/slide8.xml><?xml version="1.0" encoding="utf-8"?>
+<p:sld xmlns:a="http://schemas.openxmlformats.org/drawingml/2006/main" xmlns:r="http://schemas.openxmlformats.org/officeDocument/2006/relationships" xmlns:p="http://schemas.openxmlformats.org/presentationml/2006/main">
+  <p:cSld>
+    <p:spTree>
+      <p:nvGrpSpPr>
+        <p:cNvPr id="1" name="">
+          <a:extLst>
+            <a:ext uri="{FF2B5EF4-FFF2-40B4-BE49-F238E27FC236}">
+              <a16:creationId xmlns:a16="http://schemas.microsoft.com/office/drawing/2014/main" id="{21180D99-7DD5-C297-F43B-4E49D6D287DA}"/>
+            </a:ext>
+          </a:extLst>
+        </p:cNvPr>
+        <p:cNvGrpSpPr/>
+        <p:nvPr/>
+      </p:nvGrpSpPr>
+      <p:grpSpPr>
+        <a:xfrm>
+          <a:off x="0" y="0"/>
+          <a:ext cx="0" cy="0"/>
+          <a:chOff x="0" y="0"/>
+          <a:chExt cx="0" cy="0"/>
+        </a:xfrm>
+      </p:grpSpPr>
+      <p:sp>
+        <p:nvSpPr>
+          <p:cNvPr id="16" name="object 16">
+            <a:extLst>
+              <a:ext uri="{FF2B5EF4-FFF2-40B4-BE49-F238E27FC236}">
+                <a16:creationId xmlns:a16="http://schemas.microsoft.com/office/drawing/2014/main" id="{8C868064-BAAA-5D54-C17E-EB55B8A6B7E6}"/>
+              </a:ext>
+            </a:extLst>
+          </p:cNvPr>
+          <p:cNvSpPr txBox="1">
+            <a:spLocks noGrp="1"/>
+          </p:cNvSpPr>
+          <p:nvPr>
+            <p:ph type="title"/>
+          </p:nvPr>
+        </p:nvSpPr>
+        <p:spPr>
+          <a:xfrm>
+            <a:off x="685800" y="408883"/>
+            <a:ext cx="10994410" cy="397545"/>
+          </a:xfrm>
+          <a:prstGeom prst="rect">
+            <a:avLst/>
+          </a:prstGeom>
+        </p:spPr>
+        <p:txBody>
+          <a:bodyPr vert="horz" wrap="square" lIns="0" tIns="12700" rIns="0" bIns="0" rtlCol="0">
+            <a:spAutoFit/>
+          </a:bodyPr>
+          <a:lstStyle/>
+          <a:p>
+            <a:pPr marL="12700">
+              <a:spcBef>
+                <a:spcPts val="100"/>
+              </a:spcBef>
+            </a:pPr>
+            <a:r>
+              <a:rPr lang="en-US" sz="2500" dirty="0"/>
+              <a:t>Learning outcome #2 – MZI Design</a:t>
+            </a:r>
+          </a:p>
+        </p:txBody>
+      </p:sp>
+      <p:pic>
+        <p:nvPicPr>
+          <p:cNvPr id="83" name="Gráfico 82">
+            <a:extLst>
+              <a:ext uri="{FF2B5EF4-FFF2-40B4-BE49-F238E27FC236}">
+                <a16:creationId xmlns:a16="http://schemas.microsoft.com/office/drawing/2014/main" id="{2C8069CE-E6BE-24CF-7E95-D3FA52D0F44E}"/>
+              </a:ext>
+            </a:extLst>
+          </p:cNvPr>
+          <p:cNvPicPr>
+            <a:picLocks noChangeAspect="1"/>
+          </p:cNvPicPr>
+          <p:nvPr/>
+        </p:nvPicPr>
+        <p:blipFill>
+          <a:blip>
+            <a:extLst>
+              <a:ext uri="{96DAC541-7B7A-43D3-8B79-37D633B846F1}">
+                <asvg:svgBlip xmlns:asvg="http://schemas.microsoft.com/office/drawing/2016/SVG/main" r:embed="rId3"/>
+              </a:ext>
+            </a:extLst>
+          </a:blip>
+          <a:stretch>
+            <a:fillRect/>
+          </a:stretch>
+        </p:blipFill>
+        <p:spPr>
+          <a:xfrm>
+            <a:off x="5045006" y="6356057"/>
+            <a:ext cx="6409575" cy="363174"/>
+          </a:xfrm>
+          <a:prstGeom prst="rect">
+            <a:avLst/>
+          </a:prstGeom>
+        </p:spPr>
+      </p:pic>
+      <p:sp>
+        <p:nvSpPr>
+          <p:cNvPr id="84" name="Marcador de número de diapositiva 83">
+            <a:extLst>
+              <a:ext uri="{FF2B5EF4-FFF2-40B4-BE49-F238E27FC236}">
+                <a16:creationId xmlns:a16="http://schemas.microsoft.com/office/drawing/2014/main" id="{373B68D2-BD5C-FEB1-54B8-74C56D3C2DC8}"/>
+              </a:ext>
+            </a:extLst>
+          </p:cNvPr>
+          <p:cNvSpPr>
+            <a:spLocks noGrp="1"/>
+          </p:cNvSpPr>
+          <p:nvPr>
+            <p:ph type="sldNum" sz="quarter" idx="7"/>
+          </p:nvPr>
+        </p:nvSpPr>
+        <p:spPr/>
+        <p:txBody>
+          <a:bodyPr/>
+          <a:lstStyle/>
+          <a:p>
+            <a:fld id="{B6F15528-21DE-4FAA-801E-634DDDAF4B2B}" type="slidenum">
+              <a:rPr lang="es-ES" smtClean="0"/>
+              <a:t>8</a:t>
+            </a:fld>
+            <a:endParaRPr lang="es-ES"/>
+          </a:p>
+        </p:txBody>
+      </p:sp>
+      <p:sp>
+        <p:nvSpPr>
+          <p:cNvPr id="3" name="Marcador de pie de página 2">
+            <a:extLst>
+              <a:ext uri="{FF2B5EF4-FFF2-40B4-BE49-F238E27FC236}">
+                <a16:creationId xmlns:a16="http://schemas.microsoft.com/office/drawing/2014/main" id="{F91EF5E4-66CE-19D9-437C-424D2C176BD9}"/>
+              </a:ext>
+            </a:extLst>
+          </p:cNvPr>
+          <p:cNvSpPr>
+            <a:spLocks noGrp="1"/>
+          </p:cNvSpPr>
+          <p:nvPr>
+            <p:ph type="ftr" sz="quarter" idx="5"/>
+          </p:nvPr>
+        </p:nvSpPr>
+        <p:spPr/>
+        <p:txBody>
+          <a:bodyPr/>
+          <a:lstStyle/>
+          <a:p>
+            <a:pPr marL="12700">
+              <a:spcBef>
+                <a:spcPts val="15"/>
+              </a:spcBef>
+            </a:pPr>
+            <a:r>
+              <a:rPr lang="es-ES" spc="-5"/>
+              <a:t>LAB 3.0. CIRCUITS &amp; COMPACT MODELS</a:t>
+            </a:r>
+            <a:endParaRPr lang="es-ES" spc="-5" dirty="0"/>
+          </a:p>
+        </p:txBody>
+      </p:sp>
+      <p:sp>
+        <p:nvSpPr>
+          <p:cNvPr id="5" name="CuadroTexto 4">
+            <a:extLst>
+              <a:ext uri="{FF2B5EF4-FFF2-40B4-BE49-F238E27FC236}">
+                <a16:creationId xmlns:a16="http://schemas.microsoft.com/office/drawing/2014/main" id="{47F5CBB8-B45E-168F-9C41-D6B795C8BBCF}"/>
+              </a:ext>
+            </a:extLst>
+          </p:cNvPr>
+          <p:cNvSpPr txBox="1"/>
+          <p:nvPr/>
+        </p:nvSpPr>
+        <p:spPr>
+          <a:xfrm>
+            <a:off x="1402080" y="4602060"/>
+            <a:ext cx="9281160" cy="830997"/>
+          </a:xfrm>
+          <a:prstGeom prst="rect">
+            <a:avLst/>
+          </a:prstGeom>
+          <a:noFill/>
+        </p:spPr>
+        <p:txBody>
+          <a:bodyPr wrap="square">
+            <a:spAutoFit/>
+          </a:bodyPr>
+          <a:lstStyle/>
+          <a:p>
+            <a:pPr algn="just"/>
+            <a:r>
+              <a:rPr lang="es-ES" sz="1200" dirty="0">
+                <a:latin typeface="Arial" panose="020B0604020202020204" pitchFamily="34" charset="0"/>
+                <a:cs typeface="Arial" panose="020B0604020202020204" pitchFamily="34" charset="0"/>
+              </a:rPr>
+              <a:t>En este caso se fija la FSR a 10 nm, por lo que la distancia entre picos será esa misma distancia. Para calcular la </a:t>
+            </a:r>
+            <a:r>
+              <a:rPr lang="es-ES" sz="1200" dirty="0" err="1">
+                <a:latin typeface="Arial" panose="020B0604020202020204" pitchFamily="34" charset="0"/>
+                <a:cs typeface="Arial" panose="020B0604020202020204" pitchFamily="34" charset="0"/>
+              </a:rPr>
+              <a:t>dL</a:t>
+            </a:r>
+            <a:r>
+              <a:rPr lang="es-ES" sz="1200" dirty="0">
+                <a:latin typeface="Arial" panose="020B0604020202020204" pitchFamily="34" charset="0"/>
+                <a:cs typeface="Arial" panose="020B0604020202020204" pitchFamily="34" charset="0"/>
+              </a:rPr>
+              <a:t> necesaria para obtener esa distancia entre picos, se usa la misma expresión de la diapositiva anterior pero despejando en este caso </a:t>
+            </a:r>
+            <a:r>
+              <a:rPr lang="es-ES" sz="1200" dirty="0" err="1">
+                <a:latin typeface="Arial" panose="020B0604020202020204" pitchFamily="34" charset="0"/>
+                <a:cs typeface="Arial" panose="020B0604020202020204" pitchFamily="34" charset="0"/>
+              </a:rPr>
+              <a:t>dL</a:t>
+            </a:r>
+            <a:r>
+              <a:rPr lang="es-ES" sz="1200" dirty="0">
+                <a:latin typeface="Arial" panose="020B0604020202020204" pitchFamily="34" charset="0"/>
+                <a:cs typeface="Arial" panose="020B0604020202020204" pitchFamily="34" charset="0"/>
+              </a:rPr>
+              <a:t>, obteniendo un valor de 120 </a:t>
+            </a:r>
+            <a:r>
+              <a:rPr lang="es-ES" sz="1200" dirty="0" err="1">
+                <a:latin typeface="Arial" panose="020B0604020202020204" pitchFamily="34" charset="0"/>
+                <a:cs typeface="Arial" panose="020B0604020202020204" pitchFamily="34" charset="0"/>
+              </a:rPr>
+              <a:t>um</a:t>
+            </a:r>
+            <a:r>
+              <a:rPr lang="es-ES" sz="1200" dirty="0">
+                <a:latin typeface="Arial" panose="020B0604020202020204" pitchFamily="34" charset="0"/>
+                <a:cs typeface="Arial" panose="020B0604020202020204" pitchFamily="34" charset="0"/>
+              </a:rPr>
+              <a:t>. Los valores y la expresión usados para su cálculo se indican a continuación: </a:t>
+            </a:r>
+            <a:r>
+              <a:rPr lang="el-GR" sz="1200" dirty="0">
+                <a:latin typeface="Arial" panose="020B0604020202020204" pitchFamily="34" charset="0"/>
+                <a:cs typeface="Arial" panose="020B0604020202020204" pitchFamily="34" charset="0"/>
+              </a:rPr>
+              <a:t>λ</a:t>
+            </a:r>
+            <a:r>
+              <a:rPr lang="es-ES" sz="1200" dirty="0">
+                <a:latin typeface="Arial" panose="020B0604020202020204" pitchFamily="34" charset="0"/>
+                <a:cs typeface="Arial" panose="020B0604020202020204" pitchFamily="34" charset="0"/>
+              </a:rPr>
+              <a:t> = 1.55 </a:t>
+            </a:r>
+            <a:r>
+              <a:rPr lang="es-ES" sz="1200" dirty="0" err="1">
+                <a:latin typeface="Arial" panose="020B0604020202020204" pitchFamily="34" charset="0"/>
+                <a:cs typeface="Arial" panose="020B0604020202020204" pitchFamily="34" charset="0"/>
+              </a:rPr>
+              <a:t>um</a:t>
+            </a:r>
+            <a:r>
+              <a:rPr lang="es-ES" sz="1200" dirty="0">
+                <a:latin typeface="Arial" panose="020B0604020202020204" pitchFamily="34" charset="0"/>
+                <a:cs typeface="Arial" panose="020B0604020202020204" pitchFamily="34" charset="0"/>
+              </a:rPr>
+              <a:t>, FSR = 10 nm, ng = 2</a:t>
+            </a:r>
+          </a:p>
+          <a:p>
+            <a:pPr algn="just"/>
+            <a:endParaRPr lang="es-ES" sz="1200" dirty="0">
+              <a:latin typeface="Arial" panose="020B0604020202020204" pitchFamily="34" charset="0"/>
+              <a:cs typeface="Arial" panose="020B0604020202020204" pitchFamily="34" charset="0"/>
+            </a:endParaRPr>
+          </a:p>
+        </p:txBody>
+      </p:sp>
+      <p:pic>
+        <p:nvPicPr>
+          <p:cNvPr id="2" name="Imagen 1">
+            <a:extLst>
+              <a:ext uri="{FF2B5EF4-FFF2-40B4-BE49-F238E27FC236}">
+                <a16:creationId xmlns:a16="http://schemas.microsoft.com/office/drawing/2014/main" id="{4EAC5C74-F608-B1AA-2F69-F49ACD672B66}"/>
+              </a:ext>
+            </a:extLst>
+          </p:cNvPr>
+          <p:cNvPicPr>
+            <a:picLocks noChangeAspect="1"/>
+          </p:cNvPicPr>
+          <p:nvPr/>
+        </p:nvPicPr>
+        <p:blipFill>
+          <a:blip r:embed="rId4"/>
+          <a:stretch>
+            <a:fillRect/>
+          </a:stretch>
+        </p:blipFill>
+        <p:spPr>
+          <a:xfrm>
+            <a:off x="3038355" y="1268106"/>
+            <a:ext cx="5840969" cy="3197972"/>
+          </a:xfrm>
+          <a:prstGeom prst="rect">
+            <a:avLst/>
+          </a:prstGeom>
+        </p:spPr>
+      </p:pic>
+      <mc:AlternateContent xmlns:mc="http://schemas.openxmlformats.org/markup-compatibility/2006">
+        <mc:Choice xmlns:a14="http://schemas.microsoft.com/office/drawing/2010/main" Requires="a14">
+          <p:sp>
+            <p:nvSpPr>
+              <p:cNvPr id="7" name="CuadroTexto 6">
+                <a:extLst>
+                  <a:ext uri="{FF2B5EF4-FFF2-40B4-BE49-F238E27FC236}">
+                    <a16:creationId xmlns:a16="http://schemas.microsoft.com/office/drawing/2014/main" id="{B953C215-3A62-1899-BFC3-1B8B2ADF96BC}"/>
+                  </a:ext>
+                </a:extLst>
+              </p:cNvPr>
+              <p:cNvSpPr txBox="1"/>
+              <p:nvPr/>
+            </p:nvSpPr>
+            <p:spPr>
+              <a:xfrm>
+                <a:off x="2895600" y="5248327"/>
+                <a:ext cx="6126480" cy="495264"/>
+              </a:xfrm>
+              <a:prstGeom prst="rect">
+                <a:avLst/>
+              </a:prstGeom>
+              <a:noFill/>
+            </p:spPr>
+            <p:txBody>
+              <a:bodyPr wrap="square">
+                <a:spAutoFit/>
+              </a:bodyPr>
+              <a:lstStyle/>
+              <a:p>
+                <a:pPr algn="just"/>
+                <a14:m>
+                  <m:oMathPara xmlns:m="http://schemas.openxmlformats.org/officeDocument/2006/math">
+                    <m:oMathParaPr>
+                      <m:jc m:val="centerGroup"/>
+                    </m:oMathParaPr>
+                    <m:oMath xmlns:m="http://schemas.openxmlformats.org/officeDocument/2006/math">
+                      <m:r>
+                        <a:rPr lang="es-ES" sz="1200" b="0" i="1" smtClean="0">
+                          <a:latin typeface="Cambria Math" panose="02040503050406030204" pitchFamily="18" charset="0"/>
+                          <a:cs typeface="Arial" panose="020B0604020202020204" pitchFamily="34" charset="0"/>
+                        </a:rPr>
+                        <m:t>𝑑𝐿</m:t>
+                      </m:r>
+                      <m:r>
+                        <a:rPr lang="es-ES" sz="1200" b="0" i="1" smtClean="0">
+                          <a:latin typeface="Cambria Math" panose="02040503050406030204" pitchFamily="18" charset="0"/>
+                          <a:cs typeface="Arial" panose="020B0604020202020204" pitchFamily="34" charset="0"/>
+                        </a:rPr>
+                        <m:t>=</m:t>
+                      </m:r>
+                      <m:f>
+                        <m:fPr>
+                          <m:ctrlPr>
+                            <a:rPr lang="es-ES" sz="1200" b="0" i="1" smtClean="0">
+                              <a:latin typeface="Cambria Math" panose="02040503050406030204" pitchFamily="18" charset="0"/>
+                              <a:cs typeface="Arial" panose="020B0604020202020204" pitchFamily="34" charset="0"/>
+                            </a:rPr>
+                          </m:ctrlPr>
+                        </m:fPr>
+                        <m:num>
+                          <m:sSup>
+                            <m:sSupPr>
+                              <m:ctrlPr>
+                                <a:rPr lang="el-GR" sz="1200" i="1" smtClean="0">
+                                  <a:latin typeface="Cambria Math" panose="02040503050406030204" pitchFamily="18" charset="0"/>
+                                  <a:cs typeface="Arial" panose="020B0604020202020204" pitchFamily="34" charset="0"/>
+                                </a:rPr>
+                              </m:ctrlPr>
+                            </m:sSupPr>
+                            <m:e>
+                              <m:r>
+                                <a:rPr lang="el-GR" sz="1200" i="1">
+                                  <a:latin typeface="Cambria Math" panose="02040503050406030204" pitchFamily="18" charset="0"/>
+                                  <a:cs typeface="Arial" panose="020B0604020202020204" pitchFamily="34" charset="0"/>
+                                </a:rPr>
+                                <m:t>𝜆</m:t>
+                              </m:r>
+                            </m:e>
+                            <m:sup>
+                              <m:r>
+                                <a:rPr lang="es-ES" sz="1200" b="0" i="1" smtClean="0">
+                                  <a:latin typeface="Cambria Math" panose="02040503050406030204" pitchFamily="18" charset="0"/>
+                                  <a:cs typeface="Arial" panose="020B0604020202020204" pitchFamily="34" charset="0"/>
+                                </a:rPr>
+                                <m:t>2</m:t>
+                              </m:r>
+                            </m:sup>
+                          </m:sSup>
+                        </m:num>
+                        <m:den>
+                          <m:r>
+                            <a:rPr lang="es-ES" sz="1200" b="0" i="1" smtClean="0">
+                              <a:latin typeface="Cambria Math" panose="02040503050406030204" pitchFamily="18" charset="0"/>
+                              <a:cs typeface="Arial" panose="020B0604020202020204" pitchFamily="34" charset="0"/>
+                            </a:rPr>
+                            <m:t>𝑛𝑔</m:t>
+                          </m:r>
+                          <m:r>
+                            <a:rPr lang="es-ES" sz="1200" b="0" i="1" smtClean="0">
+                              <a:latin typeface="Cambria Math" panose="02040503050406030204" pitchFamily="18" charset="0"/>
+                              <a:cs typeface="Arial" panose="020B0604020202020204" pitchFamily="34" charset="0"/>
+                            </a:rPr>
+                            <m:t>∗</m:t>
+                          </m:r>
+                          <m:r>
+                            <a:rPr lang="es-ES" sz="1200" b="0" i="1" smtClean="0">
+                              <a:latin typeface="Cambria Math" panose="02040503050406030204" pitchFamily="18" charset="0"/>
+                              <a:cs typeface="Arial" panose="020B0604020202020204" pitchFamily="34" charset="0"/>
+                            </a:rPr>
+                            <m:t>𝐹𝑆𝑅</m:t>
+                          </m:r>
+                        </m:den>
+                      </m:f>
+                    </m:oMath>
+                  </m:oMathPara>
+                </a14:m>
+                <a:endParaRPr lang="en-US" sz="1200" dirty="0">
+                  <a:latin typeface="Arial" panose="020B0604020202020204" pitchFamily="34" charset="0"/>
+                  <a:cs typeface="Arial" panose="020B0604020202020204" pitchFamily="34" charset="0"/>
+                </a:endParaRPr>
+              </a:p>
+            </p:txBody>
+          </p:sp>
+        </mc:Choice>
+        <mc:Fallback>
+          <p:sp>
+            <p:nvSpPr>
+              <p:cNvPr id="7" name="CuadroTexto 6">
+                <a:extLst>
+                  <a:ext uri="{FF2B5EF4-FFF2-40B4-BE49-F238E27FC236}">
+                    <a16:creationId xmlns:a16="http://schemas.microsoft.com/office/drawing/2014/main" id="{B953C215-3A62-1899-BFC3-1B8B2ADF96BC}"/>
+                  </a:ext>
+                </a:extLst>
+              </p:cNvPr>
+              <p:cNvSpPr txBox="1">
+                <a:spLocks noRot="1" noChangeAspect="1" noMove="1" noResize="1" noEditPoints="1" noAdjustHandles="1" noChangeArrowheads="1" noChangeShapeType="1" noTextEdit="1"/>
+              </p:cNvSpPr>
+              <p:nvPr/>
+            </p:nvSpPr>
+            <p:spPr>
+              <a:xfrm>
+                <a:off x="2895600" y="5248327"/>
+                <a:ext cx="6126480" cy="495264"/>
+              </a:xfrm>
+              <a:prstGeom prst="rect">
+                <a:avLst/>
+              </a:prstGeom>
+              <a:blipFill>
+                <a:blip r:embed="rId5"/>
+                <a:stretch>
+                  <a:fillRect/>
+                </a:stretch>
+              </a:blipFill>
+            </p:spPr>
+            <p:txBody>
+              <a:bodyPr/>
+              <a:lstStyle/>
+              <a:p>
+                <a:r>
+                  <a:rPr lang="es-ES">
+                    <a:noFill/>
+                  </a:rPr>
+                  <a:t> </a:t>
+                </a:r>
+              </a:p>
+            </p:txBody>
+          </p:sp>
+        </mc:Fallback>
+      </mc:AlternateContent>
+    </p:spTree>
+    <p:extLst>
+      <p:ext uri="{BB962C8B-B14F-4D97-AF65-F5344CB8AC3E}">
+        <p14:creationId xmlns:p14="http://schemas.microsoft.com/office/powerpoint/2010/main" val="3414619033"/>
+      </p:ext>
+    </p:extLst>
+  </p:cSld>
+  <p:clrMapOvr>
+    <a:masterClrMapping/>
+  </p:clrMapOvr>
+</p:sld>
+</file>
+
+<file path=ppt/slides/slide9.xml><?xml version="1.0" encoding="utf-8"?>
 <p:sld xmlns:a="http://schemas.openxmlformats.org/drawingml/2006/main" xmlns:r="http://schemas.openxmlformats.org/officeDocument/2006/relationships" xmlns:p="http://schemas.openxmlformats.org/presentationml/2006/main">
   <p:cSld>
     <p:spTree>
@@ -6571,7 +14051,7 @@
             <a:fld id="{C2F52289-4012-4053-9770-FE82CEB9514F}" type="slidenum">
               <a:rPr lang="en-US" smtClean="0"/>
               <a:pPr/>
-              <a:t>6</a:t>
+              <a:t>9</a:t>
             </a:fld>
             <a:endParaRPr lang="en-US" dirty="0"/>
           </a:p>
@@ -7266,1976 +14746,6 @@
     <p:extLst>
       <p:ext uri="{BB962C8B-B14F-4D97-AF65-F5344CB8AC3E}">
         <p14:creationId xmlns:p14="http://schemas.microsoft.com/office/powerpoint/2010/main" val="1475710608"/>
-      </p:ext>
-    </p:extLst>
-  </p:cSld>
-  <p:clrMapOvr>
-    <a:masterClrMapping/>
-  </p:clrMapOvr>
-</p:sld>
-</file>
-
-<file path=ppt/slides/slide7.xml><?xml version="1.0" encoding="utf-8"?>
-<p:sld xmlns:a="http://schemas.openxmlformats.org/drawingml/2006/main" xmlns:r="http://schemas.openxmlformats.org/officeDocument/2006/relationships" xmlns:p="http://schemas.openxmlformats.org/presentationml/2006/main">
-  <p:cSld>
-    <p:spTree>
-      <p:nvGrpSpPr>
-        <p:cNvPr id="1" name=""/>
-        <p:cNvGrpSpPr/>
-        <p:nvPr/>
-      </p:nvGrpSpPr>
-      <p:grpSpPr>
-        <a:xfrm>
-          <a:off x="0" y="0"/>
-          <a:ext cx="0" cy="0"/>
-          <a:chOff x="0" y="0"/>
-          <a:chExt cx="0" cy="0"/>
-        </a:xfrm>
-      </p:grpSpPr>
-      <p:sp>
-        <p:nvSpPr>
-          <p:cNvPr id="5" name="Marcador de pie de página 4">
-            <a:extLst>
-              <a:ext uri="{FF2B5EF4-FFF2-40B4-BE49-F238E27FC236}">
-                <a16:creationId xmlns:a16="http://schemas.microsoft.com/office/drawing/2014/main" id="{F929251A-3DC4-36B2-3FB3-341378364BED}"/>
-              </a:ext>
-            </a:extLst>
-          </p:cNvPr>
-          <p:cNvSpPr>
-            <a:spLocks noGrp="1"/>
-          </p:cNvSpPr>
-          <p:nvPr>
-            <p:ph type="ftr" sz="quarter" idx="5"/>
-          </p:nvPr>
-        </p:nvSpPr>
-        <p:spPr/>
-        <p:txBody>
-          <a:bodyPr/>
-          <a:lstStyle/>
-          <a:p>
-            <a:r>
-              <a:rPr lang="en-US"/>
-              <a:t>LAB 3.0. CIRCUITS &amp; COMPACT MODELS</a:t>
-            </a:r>
-          </a:p>
-        </p:txBody>
-      </p:sp>
-      <p:sp>
-        <p:nvSpPr>
-          <p:cNvPr id="6" name="Marcador de número de diapositiva 5">
-            <a:extLst>
-              <a:ext uri="{FF2B5EF4-FFF2-40B4-BE49-F238E27FC236}">
-                <a16:creationId xmlns:a16="http://schemas.microsoft.com/office/drawing/2014/main" id="{8E91A34C-DF76-97CF-3EFD-546BC64A2184}"/>
-              </a:ext>
-            </a:extLst>
-          </p:cNvPr>
-          <p:cNvSpPr>
-            <a:spLocks noGrp="1"/>
-          </p:cNvSpPr>
-          <p:nvPr>
-            <p:ph type="sldNum" sz="quarter" idx="7"/>
-          </p:nvPr>
-        </p:nvSpPr>
-        <p:spPr/>
-        <p:txBody>
-          <a:bodyPr/>
-          <a:lstStyle/>
-          <a:p>
-            <a:fld id="{C2F52289-4012-4053-9770-FE82CEB9514F}" type="slidenum">
-              <a:rPr lang="en-US" smtClean="0"/>
-              <a:pPr/>
-              <a:t>7</a:t>
-            </a:fld>
-            <a:endParaRPr lang="en-US" dirty="0"/>
-          </a:p>
-        </p:txBody>
-      </p:sp>
-      <p:sp>
-        <p:nvSpPr>
-          <p:cNvPr id="8" name="CuadroTexto 7">
-            <a:extLst>
-              <a:ext uri="{FF2B5EF4-FFF2-40B4-BE49-F238E27FC236}">
-                <a16:creationId xmlns:a16="http://schemas.microsoft.com/office/drawing/2014/main" id="{D9601617-351E-AE1A-1F4D-693F2EA59361}"/>
-              </a:ext>
-            </a:extLst>
-          </p:cNvPr>
-          <p:cNvSpPr txBox="1"/>
-          <p:nvPr/>
-        </p:nvSpPr>
-        <p:spPr>
-          <a:xfrm>
-            <a:off x="611029" y="4860335"/>
-            <a:ext cx="11199530" cy="1200329"/>
-          </a:xfrm>
-          <a:prstGeom prst="rect">
-            <a:avLst/>
-          </a:prstGeom>
-          <a:solidFill>
-            <a:schemeClr val="bg1">
-              <a:lumMod val="95000"/>
-            </a:schemeClr>
-          </a:solidFill>
-          <a:ln w="28575">
-            <a:solidFill>
-              <a:srgbClr val="E0700D"/>
-            </a:solidFill>
-          </a:ln>
-        </p:spPr>
-        <p:txBody>
-          <a:bodyPr wrap="square" rtlCol="0">
-            <a:spAutoFit/>
-          </a:bodyPr>
-          <a:lstStyle/>
-          <a:p>
-            <a:pPr algn="just"/>
-            <a:r>
-              <a:rPr lang="en-US" sz="1200" dirty="0">
-                <a:latin typeface="Arial" panose="020B0604020202020204" pitchFamily="34" charset="0"/>
-                <a:cs typeface="Arial" panose="020B0604020202020204" pitchFamily="34" charset="0"/>
-              </a:rPr>
-              <a:t>Comment results: describer the transfer functions. which is the FSR? How is it related to the ring perimeter? </a:t>
-            </a:r>
-          </a:p>
-          <a:p>
-            <a:pPr algn="just"/>
-            <a:endParaRPr lang="en-US" sz="1200" dirty="0">
-              <a:latin typeface="Arial" panose="020B0604020202020204" pitchFamily="34" charset="0"/>
-              <a:cs typeface="Arial" panose="020B0604020202020204" pitchFamily="34" charset="0"/>
-            </a:endParaRPr>
-          </a:p>
-          <a:p>
-            <a:pPr algn="just"/>
-            <a:endParaRPr lang="en-US" sz="1200" dirty="0">
-              <a:latin typeface="Arial" panose="020B0604020202020204" pitchFamily="34" charset="0"/>
-              <a:cs typeface="Arial" panose="020B0604020202020204" pitchFamily="34" charset="0"/>
-            </a:endParaRPr>
-          </a:p>
-          <a:p>
-            <a:pPr algn="just"/>
-            <a:r>
-              <a:rPr lang="en-US" sz="1200" dirty="0">
-                <a:latin typeface="Arial" panose="020B0604020202020204" pitchFamily="34" charset="0"/>
-                <a:cs typeface="Arial" panose="020B0604020202020204" pitchFamily="34" charset="0"/>
-              </a:rPr>
-              <a:t>Show a numeric calculation of the FSR and length difference matching the results in the graph,</a:t>
-            </a:r>
-          </a:p>
-          <a:p>
-            <a:pPr algn="just"/>
-            <a:endParaRPr lang="en-US" sz="1200" dirty="0">
-              <a:latin typeface="Arial" panose="020B0604020202020204" pitchFamily="34" charset="0"/>
-              <a:cs typeface="Arial" panose="020B0604020202020204" pitchFamily="34" charset="0"/>
-            </a:endParaRPr>
-          </a:p>
-          <a:p>
-            <a:pPr algn="just"/>
-            <a:endParaRPr lang="en-US" sz="1200" dirty="0">
-              <a:latin typeface="Arial" panose="020B0604020202020204" pitchFamily="34" charset="0"/>
-              <a:cs typeface="Arial" panose="020B0604020202020204" pitchFamily="34" charset="0"/>
-            </a:endParaRPr>
-          </a:p>
-        </p:txBody>
-      </p:sp>
-      <p:sp>
-        <p:nvSpPr>
-          <p:cNvPr id="11" name="Rectángulo 10">
-            <a:extLst>
-              <a:ext uri="{FF2B5EF4-FFF2-40B4-BE49-F238E27FC236}">
-                <a16:creationId xmlns:a16="http://schemas.microsoft.com/office/drawing/2014/main" id="{B811A5F9-C0B5-716C-70FB-9472E1BC2CD3}"/>
-              </a:ext>
-            </a:extLst>
-          </p:cNvPr>
-          <p:cNvSpPr/>
-          <p:nvPr/>
-        </p:nvSpPr>
-        <p:spPr>
-          <a:xfrm>
-            <a:off x="611030" y="1418373"/>
-            <a:ext cx="3810000" cy="3306028"/>
-          </a:xfrm>
-          <a:prstGeom prst="rect">
-            <a:avLst/>
-          </a:prstGeom>
-          <a:noFill/>
-          <a:ln w="28575">
-            <a:solidFill>
-              <a:srgbClr val="E0700D"/>
-            </a:solidFill>
-          </a:ln>
-        </p:spPr>
-        <p:style>
-          <a:lnRef idx="2">
-            <a:schemeClr val="accent1">
-              <a:shade val="15000"/>
-            </a:schemeClr>
-          </a:lnRef>
-          <a:fillRef idx="1">
-            <a:schemeClr val="accent1"/>
-          </a:fillRef>
-          <a:effectRef idx="0">
-            <a:schemeClr val="accent1"/>
-          </a:effectRef>
-          <a:fontRef idx="minor">
-            <a:schemeClr val="lt1"/>
-          </a:fontRef>
-        </p:style>
-        <p:txBody>
-          <a:bodyPr rtlCol="0" anchor="ctr"/>
-          <a:lstStyle/>
-          <a:p>
-            <a:pPr algn="ctr"/>
-            <a:endParaRPr lang="en-US"/>
-          </a:p>
-        </p:txBody>
-      </p:sp>
-      <p:sp>
-        <p:nvSpPr>
-          <p:cNvPr id="12" name="CuadroTexto 11">
-            <a:extLst>
-              <a:ext uri="{FF2B5EF4-FFF2-40B4-BE49-F238E27FC236}">
-                <a16:creationId xmlns:a16="http://schemas.microsoft.com/office/drawing/2014/main" id="{1D17C364-5A66-F740-B152-8B41A2A4EF26}"/>
-              </a:ext>
-            </a:extLst>
-          </p:cNvPr>
-          <p:cNvSpPr txBox="1"/>
-          <p:nvPr/>
-        </p:nvSpPr>
-        <p:spPr>
-          <a:xfrm>
-            <a:off x="5536543" y="2494307"/>
-            <a:ext cx="2033313" cy="1323439"/>
-          </a:xfrm>
-          <a:prstGeom prst="rect">
-            <a:avLst/>
-          </a:prstGeom>
-          <a:noFill/>
-        </p:spPr>
-        <p:txBody>
-          <a:bodyPr wrap="none" rtlCol="0">
-            <a:spAutoFit/>
-          </a:bodyPr>
-          <a:lstStyle/>
-          <a:p>
-            <a:pPr algn="ctr"/>
-            <a:r>
-              <a:rPr lang="es-ES" sz="2000" dirty="0"/>
-              <a:t>Single ring</a:t>
-            </a:r>
-          </a:p>
-          <a:p>
-            <a:pPr algn="ctr"/>
-            <a:r>
-              <a:rPr lang="es-ES" sz="2000" dirty="0"/>
-              <a:t>transfer </a:t>
-            </a:r>
-            <a:r>
-              <a:rPr lang="es-ES" sz="2000" dirty="0" err="1"/>
-              <a:t>functions</a:t>
-            </a:r>
-            <a:endParaRPr lang="es-ES" sz="2000" dirty="0"/>
-          </a:p>
-          <a:p>
-            <a:pPr algn="ctr"/>
-            <a:endParaRPr lang="es-ES" sz="2000" dirty="0"/>
-          </a:p>
-          <a:p>
-            <a:pPr algn="ctr"/>
-            <a:r>
-              <a:rPr lang="es-ES" sz="2000" dirty="0" err="1"/>
-              <a:t>Logaritmic</a:t>
-            </a:r>
-            <a:r>
-              <a:rPr lang="es-ES" sz="2000" dirty="0"/>
-              <a:t> </a:t>
-            </a:r>
-            <a:r>
-              <a:rPr lang="es-ES" sz="2000" dirty="0" err="1"/>
-              <a:t>units</a:t>
-            </a:r>
-            <a:endParaRPr lang="en-US" sz="2000" dirty="0"/>
-          </a:p>
-        </p:txBody>
-      </p:sp>
-      <p:sp>
-        <p:nvSpPr>
-          <p:cNvPr id="3" name="Rectángulo 2">
-            <a:extLst>
-              <a:ext uri="{FF2B5EF4-FFF2-40B4-BE49-F238E27FC236}">
-                <a16:creationId xmlns:a16="http://schemas.microsoft.com/office/drawing/2014/main" id="{5FB43DF1-4048-35BF-BD58-4BF2A341D2EF}"/>
-              </a:ext>
-            </a:extLst>
-          </p:cNvPr>
-          <p:cNvSpPr/>
-          <p:nvPr/>
-        </p:nvSpPr>
-        <p:spPr>
-          <a:xfrm>
-            <a:off x="8610601" y="1418373"/>
-            <a:ext cx="3199959" cy="3306028"/>
-          </a:xfrm>
-          <a:prstGeom prst="rect">
-            <a:avLst/>
-          </a:prstGeom>
-          <a:solidFill>
-            <a:schemeClr val="bg1">
-              <a:lumMod val="95000"/>
-            </a:schemeClr>
-          </a:solidFill>
-          <a:ln w="28575">
-            <a:solidFill>
-              <a:srgbClr val="E0700D"/>
-            </a:solidFill>
-          </a:ln>
-        </p:spPr>
-        <p:style>
-          <a:lnRef idx="2">
-            <a:schemeClr val="accent1">
-              <a:shade val="15000"/>
-            </a:schemeClr>
-          </a:lnRef>
-          <a:fillRef idx="1">
-            <a:schemeClr val="accent1"/>
-          </a:fillRef>
-          <a:effectRef idx="0">
-            <a:schemeClr val="accent1"/>
-          </a:effectRef>
-          <a:fontRef idx="minor">
-            <a:schemeClr val="lt1"/>
-          </a:fontRef>
-        </p:style>
-        <p:txBody>
-          <a:bodyPr rtlCol="0" anchor="t" anchorCtr="0"/>
-          <a:lstStyle/>
-          <a:p>
-            <a:pPr algn="just"/>
-            <a:r>
-              <a:rPr lang="en-US" sz="1200" b="1" dirty="0">
-                <a:solidFill>
-                  <a:schemeClr val="tx1"/>
-                </a:solidFill>
-                <a:latin typeface="Arial" panose="020B0604020202020204" pitchFamily="34" charset="0"/>
-                <a:cs typeface="Arial" panose="020B0604020202020204" pitchFamily="34" charset="0"/>
-              </a:rPr>
-              <a:t>Hints:</a:t>
-            </a:r>
-          </a:p>
-          <a:p>
-            <a:pPr algn="just"/>
-            <a:endParaRPr lang="en-US" sz="1200" b="1" dirty="0">
-              <a:solidFill>
-                <a:schemeClr val="tx1"/>
-              </a:solidFill>
-              <a:latin typeface="Arial" panose="020B0604020202020204" pitchFamily="34" charset="0"/>
-              <a:cs typeface="Arial" panose="020B0604020202020204" pitchFamily="34" charset="0"/>
-            </a:endParaRPr>
-          </a:p>
-          <a:p>
-            <a:pPr algn="just"/>
-            <a:r>
-              <a:rPr lang="en-US" sz="1200" dirty="0">
-                <a:solidFill>
-                  <a:schemeClr val="tx1"/>
-                </a:solidFill>
-                <a:latin typeface="Arial" panose="020B0604020202020204" pitchFamily="34" charset="0"/>
-                <a:cs typeface="Arial" panose="020B0604020202020204" pitchFamily="34" charset="0"/>
-              </a:rPr>
-              <a:t>None </a:t>
-            </a:r>
-            <a:r>
-              <a:rPr lang="en-US" sz="1200" dirty="0">
-                <a:solidFill>
-                  <a:schemeClr val="tx1"/>
-                </a:solidFill>
-                <a:latin typeface="Arial" panose="020B0604020202020204" pitchFamily="34" charset="0"/>
-                <a:cs typeface="Arial" panose="020B0604020202020204" pitchFamily="34" charset="0"/>
-                <a:sym typeface="Wingdings" pitchFamily="2" charset="2"/>
-              </a:rPr>
-              <a:t> </a:t>
-            </a:r>
-            <a:endParaRPr lang="en-US" sz="1200" dirty="0">
-              <a:solidFill>
-                <a:schemeClr val="tx1"/>
-              </a:solidFill>
-              <a:latin typeface="Arial" panose="020B0604020202020204" pitchFamily="34" charset="0"/>
-              <a:cs typeface="Arial" panose="020B0604020202020204" pitchFamily="34" charset="0"/>
-            </a:endParaRPr>
-          </a:p>
-          <a:p>
-            <a:pPr algn="just"/>
-            <a:endParaRPr lang="en-US" sz="1200" dirty="0">
-              <a:solidFill>
-                <a:schemeClr val="tx1"/>
-              </a:solidFill>
-              <a:latin typeface="Arial" panose="020B0604020202020204" pitchFamily="34" charset="0"/>
-              <a:cs typeface="Arial" panose="020B0604020202020204" pitchFamily="34" charset="0"/>
-            </a:endParaRPr>
-          </a:p>
-          <a:p>
-            <a:pPr algn="just"/>
-            <a:endParaRPr lang="en-US" sz="1200" dirty="0">
-              <a:solidFill>
-                <a:schemeClr val="tx1"/>
-              </a:solidFill>
-              <a:latin typeface="Arial" panose="020B0604020202020204" pitchFamily="34" charset="0"/>
-              <a:cs typeface="Arial" panose="020B0604020202020204" pitchFamily="34" charset="0"/>
-            </a:endParaRPr>
-          </a:p>
-        </p:txBody>
-      </p:sp>
-      <p:sp>
-        <p:nvSpPr>
-          <p:cNvPr id="14" name="Rectángulo 13">
-            <a:extLst>
-              <a:ext uri="{FF2B5EF4-FFF2-40B4-BE49-F238E27FC236}">
-                <a16:creationId xmlns:a16="http://schemas.microsoft.com/office/drawing/2014/main" id="{6AA857E7-5C39-DCE1-10B5-40300FCF4B26}"/>
-              </a:ext>
-            </a:extLst>
-          </p:cNvPr>
-          <p:cNvSpPr/>
-          <p:nvPr/>
-        </p:nvSpPr>
-        <p:spPr>
-          <a:xfrm>
-            <a:off x="4648200" y="1418373"/>
-            <a:ext cx="3810000" cy="3306028"/>
-          </a:xfrm>
-          <a:prstGeom prst="rect">
-            <a:avLst/>
-          </a:prstGeom>
-          <a:noFill/>
-          <a:ln w="28575">
-            <a:solidFill>
-              <a:srgbClr val="E0700D"/>
-            </a:solidFill>
-          </a:ln>
-        </p:spPr>
-        <p:style>
-          <a:lnRef idx="2">
-            <a:schemeClr val="accent1">
-              <a:shade val="15000"/>
-            </a:schemeClr>
-          </a:lnRef>
-          <a:fillRef idx="1">
-            <a:schemeClr val="accent1"/>
-          </a:fillRef>
-          <a:effectRef idx="0">
-            <a:schemeClr val="accent1"/>
-          </a:effectRef>
-          <a:fontRef idx="minor">
-            <a:schemeClr val="lt1"/>
-          </a:fontRef>
-        </p:style>
-        <p:txBody>
-          <a:bodyPr rtlCol="0" anchor="ctr"/>
-          <a:lstStyle/>
-          <a:p>
-            <a:pPr algn="ctr"/>
-            <a:endParaRPr lang="en-US"/>
-          </a:p>
-        </p:txBody>
-      </p:sp>
-      <p:sp>
-        <p:nvSpPr>
-          <p:cNvPr id="15" name="CuadroTexto 14">
-            <a:extLst>
-              <a:ext uri="{FF2B5EF4-FFF2-40B4-BE49-F238E27FC236}">
-                <a16:creationId xmlns:a16="http://schemas.microsoft.com/office/drawing/2014/main" id="{54CF28B4-1346-F41D-2CD8-EA104ABBFB98}"/>
-              </a:ext>
-            </a:extLst>
-          </p:cNvPr>
-          <p:cNvSpPr txBox="1"/>
-          <p:nvPr/>
-        </p:nvSpPr>
-        <p:spPr>
-          <a:xfrm>
-            <a:off x="1499379" y="2478160"/>
-            <a:ext cx="2033313" cy="1323439"/>
-          </a:xfrm>
-          <a:prstGeom prst="rect">
-            <a:avLst/>
-          </a:prstGeom>
-          <a:noFill/>
-        </p:spPr>
-        <p:txBody>
-          <a:bodyPr wrap="none" rtlCol="0">
-            <a:spAutoFit/>
-          </a:bodyPr>
-          <a:lstStyle/>
-          <a:p>
-            <a:pPr algn="ctr"/>
-            <a:r>
-              <a:rPr lang="es-ES" sz="2000" dirty="0"/>
-              <a:t>Single ring</a:t>
-            </a:r>
-          </a:p>
-          <a:p>
-            <a:pPr algn="ctr"/>
-            <a:r>
-              <a:rPr lang="es-ES" sz="2000" dirty="0"/>
-              <a:t>transfer </a:t>
-            </a:r>
-            <a:r>
-              <a:rPr lang="es-ES" sz="2000" dirty="0" err="1"/>
-              <a:t>functions</a:t>
-            </a:r>
-            <a:endParaRPr lang="es-ES" sz="2000" dirty="0"/>
-          </a:p>
-          <a:p>
-            <a:pPr algn="ctr"/>
-            <a:endParaRPr lang="es-ES" sz="2000" dirty="0"/>
-          </a:p>
-          <a:p>
-            <a:pPr algn="ctr"/>
-            <a:r>
-              <a:rPr lang="es-ES" sz="2000" dirty="0"/>
-              <a:t>Linear </a:t>
-            </a:r>
-            <a:r>
-              <a:rPr lang="es-ES" sz="2000" dirty="0" err="1"/>
-              <a:t>units</a:t>
-            </a:r>
-            <a:endParaRPr lang="en-US" sz="2000" dirty="0"/>
-          </a:p>
-        </p:txBody>
-      </p:sp>
-      <p:pic>
-        <p:nvPicPr>
-          <p:cNvPr id="9" name="Gráfico 8">
-            <a:extLst>
-              <a:ext uri="{FF2B5EF4-FFF2-40B4-BE49-F238E27FC236}">
-                <a16:creationId xmlns:a16="http://schemas.microsoft.com/office/drawing/2014/main" id="{83C716FC-7070-6DA5-E116-195D4CD9BDB4}"/>
-              </a:ext>
-            </a:extLst>
-          </p:cNvPr>
-          <p:cNvPicPr>
-            <a:picLocks noChangeAspect="1"/>
-          </p:cNvPicPr>
-          <p:nvPr/>
-        </p:nvPicPr>
-        <p:blipFill>
-          <a:blip>
-            <a:extLst>
-              <a:ext uri="{96DAC541-7B7A-43D3-8B79-37D633B846F1}">
-                <asvg:svgBlip xmlns:asvg="http://schemas.microsoft.com/office/drawing/2016/SVG/main" r:embed="rId2"/>
-              </a:ext>
-            </a:extLst>
-          </a:blip>
-          <a:stretch>
-            <a:fillRect/>
-          </a:stretch>
-        </p:blipFill>
-        <p:spPr>
-          <a:xfrm>
-            <a:off x="5045006" y="6356057"/>
-            <a:ext cx="6409575" cy="363174"/>
-          </a:xfrm>
-          <a:prstGeom prst="rect">
-            <a:avLst/>
-          </a:prstGeom>
-        </p:spPr>
-      </p:pic>
-      <p:sp>
-        <p:nvSpPr>
-          <p:cNvPr id="10" name="object 16">
-            <a:extLst>
-              <a:ext uri="{FF2B5EF4-FFF2-40B4-BE49-F238E27FC236}">
-                <a16:creationId xmlns:a16="http://schemas.microsoft.com/office/drawing/2014/main" id="{C319E249-48A9-70AD-7ACE-23CF9ABF6137}"/>
-              </a:ext>
-            </a:extLst>
-          </p:cNvPr>
-          <p:cNvSpPr txBox="1">
-            <a:spLocks/>
-          </p:cNvSpPr>
-          <p:nvPr/>
-        </p:nvSpPr>
-        <p:spPr>
-          <a:xfrm>
-            <a:off x="685800" y="408883"/>
-            <a:ext cx="10994410" cy="718145"/>
-          </a:xfrm>
-          <a:prstGeom prst="rect">
-            <a:avLst/>
-          </a:prstGeom>
-        </p:spPr>
-        <p:txBody>
-          <a:bodyPr vert="horz" wrap="square" lIns="0" tIns="12700" rIns="0" bIns="0" rtlCol="0">
-            <a:spAutoFit/>
-          </a:bodyPr>
-          <a:lstStyle>
-            <a:lvl1pPr>
-              <a:defRPr sz="2000" b="1" i="0">
-                <a:solidFill>
-                  <a:schemeClr val="tx1"/>
-                </a:solidFill>
-                <a:latin typeface="Calibri"/>
-                <a:ea typeface="+mj-ea"/>
-                <a:cs typeface="Calibri"/>
-              </a:defRPr>
-            </a:lvl1pPr>
-          </a:lstStyle>
-          <a:p>
-            <a:pPr marL="12700">
-              <a:spcBef>
-                <a:spcPts val="100"/>
-              </a:spcBef>
-            </a:pPr>
-            <a:r>
-              <a:rPr lang="en-US" sz="2500" kern="0" dirty="0"/>
-              <a:t>Learning outcome #4 – Ring Resonator</a:t>
-            </a:r>
-          </a:p>
-          <a:p>
-            <a:pPr marL="12700">
-              <a:spcBef>
-                <a:spcPts val="100"/>
-              </a:spcBef>
-            </a:pPr>
-            <a:r>
-              <a:rPr lang="en-US" b="0" kern="0" spc="-5" dirty="0">
-                <a:latin typeface="+mj-lt"/>
-                <a:cs typeface="Lucida Sans"/>
-              </a:rPr>
-              <a:t>Single ring resonator – most simple case Constant coupler K (no wavelength variation)</a:t>
-            </a:r>
-          </a:p>
-        </p:txBody>
-      </p:sp>
-    </p:spTree>
-    <p:extLst>
-      <p:ext uri="{BB962C8B-B14F-4D97-AF65-F5344CB8AC3E}">
-        <p14:creationId xmlns:p14="http://schemas.microsoft.com/office/powerpoint/2010/main" val="543184549"/>
-      </p:ext>
-    </p:extLst>
-  </p:cSld>
-  <p:clrMapOvr>
-    <a:masterClrMapping/>
-  </p:clrMapOvr>
-</p:sld>
-</file>
-
-<file path=ppt/slides/slide8.xml><?xml version="1.0" encoding="utf-8"?>
-<p:sld xmlns:a="http://schemas.openxmlformats.org/drawingml/2006/main" xmlns:r="http://schemas.openxmlformats.org/officeDocument/2006/relationships" xmlns:p="http://schemas.openxmlformats.org/presentationml/2006/main">
-  <p:cSld>
-    <p:spTree>
-      <p:nvGrpSpPr>
-        <p:cNvPr id="1" name="">
-          <a:extLst>
-            <a:ext uri="{FF2B5EF4-FFF2-40B4-BE49-F238E27FC236}">
-              <a16:creationId xmlns:a16="http://schemas.microsoft.com/office/drawing/2014/main" id="{960CA2DF-810F-7BDA-CFF3-0CFEE760301A}"/>
-            </a:ext>
-          </a:extLst>
-        </p:cNvPr>
-        <p:cNvGrpSpPr/>
-        <p:nvPr/>
-      </p:nvGrpSpPr>
-      <p:grpSpPr>
-        <a:xfrm>
-          <a:off x="0" y="0"/>
-          <a:ext cx="0" cy="0"/>
-          <a:chOff x="0" y="0"/>
-          <a:chExt cx="0" cy="0"/>
-        </a:xfrm>
-      </p:grpSpPr>
-      <p:sp>
-        <p:nvSpPr>
-          <p:cNvPr id="5" name="Marcador de pie de página 4">
-            <a:extLst>
-              <a:ext uri="{FF2B5EF4-FFF2-40B4-BE49-F238E27FC236}">
-                <a16:creationId xmlns:a16="http://schemas.microsoft.com/office/drawing/2014/main" id="{4915C280-A84A-95DA-94D2-FE062C8ED61F}"/>
-              </a:ext>
-            </a:extLst>
-          </p:cNvPr>
-          <p:cNvSpPr>
-            <a:spLocks noGrp="1"/>
-          </p:cNvSpPr>
-          <p:nvPr>
-            <p:ph type="ftr" sz="quarter" idx="5"/>
-          </p:nvPr>
-        </p:nvSpPr>
-        <p:spPr/>
-        <p:txBody>
-          <a:bodyPr/>
-          <a:lstStyle/>
-          <a:p>
-            <a:r>
-              <a:rPr lang="en-US"/>
-              <a:t>LAB 3.0. CIRCUITS &amp; COMPACT MODELS</a:t>
-            </a:r>
-          </a:p>
-        </p:txBody>
-      </p:sp>
-      <p:sp>
-        <p:nvSpPr>
-          <p:cNvPr id="6" name="Marcador de número de diapositiva 5">
-            <a:extLst>
-              <a:ext uri="{FF2B5EF4-FFF2-40B4-BE49-F238E27FC236}">
-                <a16:creationId xmlns:a16="http://schemas.microsoft.com/office/drawing/2014/main" id="{E919F9EF-02D5-71FC-C2BC-F8EC5B26723E}"/>
-              </a:ext>
-            </a:extLst>
-          </p:cNvPr>
-          <p:cNvSpPr>
-            <a:spLocks noGrp="1"/>
-          </p:cNvSpPr>
-          <p:nvPr>
-            <p:ph type="sldNum" sz="quarter" idx="7"/>
-          </p:nvPr>
-        </p:nvSpPr>
-        <p:spPr/>
-        <p:txBody>
-          <a:bodyPr/>
-          <a:lstStyle/>
-          <a:p>
-            <a:fld id="{C2F52289-4012-4053-9770-FE82CEB9514F}" type="slidenum">
-              <a:rPr lang="en-US" smtClean="0"/>
-              <a:pPr/>
-              <a:t>8</a:t>
-            </a:fld>
-            <a:endParaRPr lang="en-US" dirty="0"/>
-          </a:p>
-        </p:txBody>
-      </p:sp>
-      <p:sp>
-        <p:nvSpPr>
-          <p:cNvPr id="8" name="CuadroTexto 7">
-            <a:extLst>
-              <a:ext uri="{FF2B5EF4-FFF2-40B4-BE49-F238E27FC236}">
-                <a16:creationId xmlns:a16="http://schemas.microsoft.com/office/drawing/2014/main" id="{3BC6D2B9-07F5-E2FA-C9AD-029B63B098DA}"/>
-              </a:ext>
-            </a:extLst>
-          </p:cNvPr>
-          <p:cNvSpPr txBox="1"/>
-          <p:nvPr/>
-        </p:nvSpPr>
-        <p:spPr>
-          <a:xfrm>
-            <a:off x="611029" y="4860335"/>
-            <a:ext cx="11199530" cy="1200329"/>
-          </a:xfrm>
-          <a:prstGeom prst="rect">
-            <a:avLst/>
-          </a:prstGeom>
-          <a:solidFill>
-            <a:schemeClr val="bg1">
-              <a:lumMod val="95000"/>
-            </a:schemeClr>
-          </a:solidFill>
-          <a:ln w="28575">
-            <a:solidFill>
-              <a:srgbClr val="E0700D"/>
-            </a:solidFill>
-          </a:ln>
-        </p:spPr>
-        <p:txBody>
-          <a:bodyPr wrap="square" rtlCol="0">
-            <a:spAutoFit/>
-          </a:bodyPr>
-          <a:lstStyle/>
-          <a:p>
-            <a:pPr algn="just"/>
-            <a:r>
-              <a:rPr lang="en-US" sz="1200" dirty="0">
-                <a:latin typeface="Arial" panose="020B0604020202020204" pitchFamily="34" charset="0"/>
-                <a:cs typeface="Arial" panose="020B0604020202020204" pitchFamily="34" charset="0"/>
-              </a:rPr>
-              <a:t>Comment results: describer the transfer function. How’s the dependence on the coupler coefficient? Calculate the Extinction Ratio. How would you achieve critical coupling for the latter design? Justify your answers.</a:t>
-            </a:r>
-          </a:p>
-          <a:p>
-            <a:pPr algn="just"/>
-            <a:endParaRPr lang="en-US" sz="1200" dirty="0">
-              <a:latin typeface="Arial" panose="020B0604020202020204" pitchFamily="34" charset="0"/>
-              <a:cs typeface="Arial" panose="020B0604020202020204" pitchFamily="34" charset="0"/>
-            </a:endParaRPr>
-          </a:p>
-          <a:p>
-            <a:pPr algn="just"/>
-            <a:endParaRPr lang="en-US" sz="1200" dirty="0">
-              <a:latin typeface="Arial" panose="020B0604020202020204" pitchFamily="34" charset="0"/>
-              <a:cs typeface="Arial" panose="020B0604020202020204" pitchFamily="34" charset="0"/>
-            </a:endParaRPr>
-          </a:p>
-          <a:p>
-            <a:pPr algn="just"/>
-            <a:endParaRPr lang="en-US" sz="1200" dirty="0">
-              <a:latin typeface="Arial" panose="020B0604020202020204" pitchFamily="34" charset="0"/>
-              <a:cs typeface="Arial" panose="020B0604020202020204" pitchFamily="34" charset="0"/>
-            </a:endParaRPr>
-          </a:p>
-          <a:p>
-            <a:pPr algn="just"/>
-            <a:r>
-              <a:rPr lang="en-US" sz="1200" dirty="0">
-                <a:latin typeface="Arial" panose="020B0604020202020204" pitchFamily="34" charset="0"/>
-                <a:cs typeface="Arial" panose="020B0604020202020204" pitchFamily="34" charset="0"/>
-              </a:rPr>
-              <a:t> </a:t>
-            </a:r>
-          </a:p>
-        </p:txBody>
-      </p:sp>
-      <p:sp>
-        <p:nvSpPr>
-          <p:cNvPr id="3" name="Rectángulo 2">
-            <a:extLst>
-              <a:ext uri="{FF2B5EF4-FFF2-40B4-BE49-F238E27FC236}">
-                <a16:creationId xmlns:a16="http://schemas.microsoft.com/office/drawing/2014/main" id="{E54DA3AC-DFE0-BB51-7C71-7CD9087359D0}"/>
-              </a:ext>
-            </a:extLst>
-          </p:cNvPr>
-          <p:cNvSpPr/>
-          <p:nvPr/>
-        </p:nvSpPr>
-        <p:spPr>
-          <a:xfrm>
-            <a:off x="8610601" y="1418373"/>
-            <a:ext cx="3199959" cy="3306028"/>
-          </a:xfrm>
-          <a:prstGeom prst="rect">
-            <a:avLst/>
-          </a:prstGeom>
-          <a:solidFill>
-            <a:schemeClr val="bg1">
-              <a:lumMod val="95000"/>
-            </a:schemeClr>
-          </a:solidFill>
-          <a:ln w="28575">
-            <a:solidFill>
-              <a:srgbClr val="E0700D"/>
-            </a:solidFill>
-          </a:ln>
-        </p:spPr>
-        <p:style>
-          <a:lnRef idx="2">
-            <a:schemeClr val="accent1">
-              <a:shade val="15000"/>
-            </a:schemeClr>
-          </a:lnRef>
-          <a:fillRef idx="1">
-            <a:schemeClr val="accent1"/>
-          </a:fillRef>
-          <a:effectRef idx="0">
-            <a:schemeClr val="accent1"/>
-          </a:effectRef>
-          <a:fontRef idx="minor">
-            <a:schemeClr val="lt1"/>
-          </a:fontRef>
-        </p:style>
-        <p:txBody>
-          <a:bodyPr rtlCol="0" anchor="t" anchorCtr="0"/>
-          <a:lstStyle/>
-          <a:p>
-            <a:pPr algn="just"/>
-            <a:r>
-              <a:rPr lang="en-US" sz="1200" b="1" dirty="0">
-                <a:solidFill>
-                  <a:schemeClr val="tx1"/>
-                </a:solidFill>
-                <a:latin typeface="Arial" panose="020B0604020202020204" pitchFamily="34" charset="0"/>
-                <a:cs typeface="Arial" panose="020B0604020202020204" pitchFamily="34" charset="0"/>
-              </a:rPr>
-              <a:t>Hints:</a:t>
-            </a:r>
-            <a:endParaRPr lang="en-US" sz="1200" dirty="0">
-              <a:solidFill>
-                <a:schemeClr val="tx1"/>
-              </a:solidFill>
-              <a:latin typeface="Arial" panose="020B0604020202020204" pitchFamily="34" charset="0"/>
-              <a:cs typeface="Arial" panose="020B0604020202020204" pitchFamily="34" charset="0"/>
-            </a:endParaRPr>
-          </a:p>
-          <a:p>
-            <a:pPr algn="just"/>
-            <a:endParaRPr lang="en-US" sz="1200" dirty="0">
-              <a:solidFill>
-                <a:schemeClr val="tx1"/>
-              </a:solidFill>
-              <a:latin typeface="Arial" panose="020B0604020202020204" pitchFamily="34" charset="0"/>
-              <a:cs typeface="Arial" panose="020B0604020202020204" pitchFamily="34" charset="0"/>
-            </a:endParaRPr>
-          </a:p>
-          <a:p>
-            <a:pPr algn="just"/>
-            <a:r>
-              <a:rPr lang="en-US" sz="1200" dirty="0">
-                <a:solidFill>
-                  <a:schemeClr val="tx1"/>
-                </a:solidFill>
-                <a:latin typeface="Arial" panose="020B0604020202020204" pitchFamily="34" charset="0"/>
-                <a:cs typeface="Arial" panose="020B0604020202020204" pitchFamily="34" charset="0"/>
-              </a:rPr>
-              <a:t>Design the perimeter for a FSR = 15 nm. </a:t>
-            </a:r>
-          </a:p>
-          <a:p>
-            <a:pPr algn="just"/>
-            <a:endParaRPr lang="en-US" sz="1200" dirty="0">
-              <a:solidFill>
-                <a:schemeClr val="tx1"/>
-              </a:solidFill>
-              <a:latin typeface="Arial" panose="020B0604020202020204" pitchFamily="34" charset="0"/>
-              <a:cs typeface="Arial" panose="020B0604020202020204" pitchFamily="34" charset="0"/>
-            </a:endParaRPr>
-          </a:p>
-          <a:p>
-            <a:pPr algn="just"/>
-            <a:r>
-              <a:rPr lang="en-US" sz="1200" dirty="0">
-                <a:solidFill>
-                  <a:schemeClr val="tx1"/>
-                </a:solidFill>
-                <a:latin typeface="Arial" panose="020B0604020202020204" pitchFamily="34" charset="0"/>
-                <a:cs typeface="Arial" panose="020B0604020202020204" pitchFamily="34" charset="0"/>
-              </a:rPr>
-              <a:t>Use equations given in class that relate FSR and perimeter.</a:t>
-            </a:r>
-          </a:p>
-          <a:p>
-            <a:pPr algn="just"/>
-            <a:endParaRPr lang="en-US" sz="1200" dirty="0">
-              <a:solidFill>
-                <a:schemeClr val="tx1"/>
-              </a:solidFill>
-              <a:latin typeface="Arial" panose="020B0604020202020204" pitchFamily="34" charset="0"/>
-              <a:cs typeface="Arial" panose="020B0604020202020204" pitchFamily="34" charset="0"/>
-            </a:endParaRPr>
-          </a:p>
-          <a:p>
-            <a:pPr algn="just"/>
-            <a:endParaRPr lang="en-US" sz="1200" dirty="0">
-              <a:solidFill>
-                <a:schemeClr val="tx1"/>
-              </a:solidFill>
-              <a:latin typeface="Arial" panose="020B0604020202020204" pitchFamily="34" charset="0"/>
-              <a:cs typeface="Arial" panose="020B0604020202020204" pitchFamily="34" charset="0"/>
-            </a:endParaRPr>
-          </a:p>
-          <a:p>
-            <a:pPr algn="just"/>
-            <a:endParaRPr lang="en-US" sz="1200" dirty="0">
-              <a:solidFill>
-                <a:schemeClr val="tx1"/>
-              </a:solidFill>
-              <a:latin typeface="Arial" panose="020B0604020202020204" pitchFamily="34" charset="0"/>
-              <a:cs typeface="Arial" panose="020B0604020202020204" pitchFamily="34" charset="0"/>
-            </a:endParaRPr>
-          </a:p>
-        </p:txBody>
-      </p:sp>
-      <p:sp>
-        <p:nvSpPr>
-          <p:cNvPr id="10" name="Rectángulo 9">
-            <a:extLst>
-              <a:ext uri="{FF2B5EF4-FFF2-40B4-BE49-F238E27FC236}">
-                <a16:creationId xmlns:a16="http://schemas.microsoft.com/office/drawing/2014/main" id="{82011495-88D4-8787-6CB7-704897D84CF9}"/>
-              </a:ext>
-            </a:extLst>
-          </p:cNvPr>
-          <p:cNvSpPr/>
-          <p:nvPr/>
-        </p:nvSpPr>
-        <p:spPr>
-          <a:xfrm>
-            <a:off x="611030" y="1418373"/>
-            <a:ext cx="3810000" cy="3306028"/>
-          </a:xfrm>
-          <a:prstGeom prst="rect">
-            <a:avLst/>
-          </a:prstGeom>
-          <a:noFill/>
-          <a:ln w="28575">
-            <a:solidFill>
-              <a:srgbClr val="E0700D"/>
-            </a:solidFill>
-          </a:ln>
-        </p:spPr>
-        <p:style>
-          <a:lnRef idx="2">
-            <a:schemeClr val="accent1">
-              <a:shade val="15000"/>
-            </a:schemeClr>
-          </a:lnRef>
-          <a:fillRef idx="1">
-            <a:schemeClr val="accent1"/>
-          </a:fillRef>
-          <a:effectRef idx="0">
-            <a:schemeClr val="accent1"/>
-          </a:effectRef>
-          <a:fontRef idx="minor">
-            <a:schemeClr val="lt1"/>
-          </a:fontRef>
-        </p:style>
-        <p:txBody>
-          <a:bodyPr rtlCol="0" anchor="ctr"/>
-          <a:lstStyle/>
-          <a:p>
-            <a:pPr algn="ctr"/>
-            <a:endParaRPr lang="en-US"/>
-          </a:p>
-        </p:txBody>
-      </p:sp>
-      <p:sp>
-        <p:nvSpPr>
-          <p:cNvPr id="12" name="CuadroTexto 11">
-            <a:extLst>
-              <a:ext uri="{FF2B5EF4-FFF2-40B4-BE49-F238E27FC236}">
-                <a16:creationId xmlns:a16="http://schemas.microsoft.com/office/drawing/2014/main" id="{3BD35A6E-6540-9761-4128-0E43122290D4}"/>
-              </a:ext>
-            </a:extLst>
-          </p:cNvPr>
-          <p:cNvSpPr txBox="1"/>
-          <p:nvPr/>
-        </p:nvSpPr>
-        <p:spPr>
-          <a:xfrm>
-            <a:off x="5536543" y="2494307"/>
-            <a:ext cx="2033313" cy="1323439"/>
-          </a:xfrm>
-          <a:prstGeom prst="rect">
-            <a:avLst/>
-          </a:prstGeom>
-          <a:noFill/>
-        </p:spPr>
-        <p:txBody>
-          <a:bodyPr wrap="none" rtlCol="0">
-            <a:spAutoFit/>
-          </a:bodyPr>
-          <a:lstStyle/>
-          <a:p>
-            <a:pPr algn="ctr"/>
-            <a:r>
-              <a:rPr lang="es-ES" sz="2000" dirty="0"/>
-              <a:t>Single ring</a:t>
-            </a:r>
-          </a:p>
-          <a:p>
-            <a:pPr algn="ctr"/>
-            <a:r>
-              <a:rPr lang="es-ES" sz="2000" dirty="0"/>
-              <a:t>transfer </a:t>
-            </a:r>
-            <a:r>
-              <a:rPr lang="es-ES" sz="2000" dirty="0" err="1"/>
-              <a:t>functions</a:t>
-            </a:r>
-            <a:endParaRPr lang="es-ES" sz="2000" dirty="0"/>
-          </a:p>
-          <a:p>
-            <a:pPr algn="ctr"/>
-            <a:endParaRPr lang="es-ES" sz="2000" dirty="0"/>
-          </a:p>
-          <a:p>
-            <a:pPr algn="ctr"/>
-            <a:r>
-              <a:rPr lang="es-ES" sz="2000" dirty="0" err="1"/>
-              <a:t>Logaritmic</a:t>
-            </a:r>
-            <a:r>
-              <a:rPr lang="es-ES" sz="2000" dirty="0"/>
-              <a:t> </a:t>
-            </a:r>
-            <a:r>
-              <a:rPr lang="es-ES" sz="2000" dirty="0" err="1"/>
-              <a:t>units</a:t>
-            </a:r>
-            <a:endParaRPr lang="en-US" sz="2000" dirty="0"/>
-          </a:p>
-        </p:txBody>
-      </p:sp>
-      <p:sp>
-        <p:nvSpPr>
-          <p:cNvPr id="13" name="Rectángulo 12">
-            <a:extLst>
-              <a:ext uri="{FF2B5EF4-FFF2-40B4-BE49-F238E27FC236}">
-                <a16:creationId xmlns:a16="http://schemas.microsoft.com/office/drawing/2014/main" id="{03798D61-1E16-8473-BDCE-1D97F95EF7BE}"/>
-              </a:ext>
-            </a:extLst>
-          </p:cNvPr>
-          <p:cNvSpPr/>
-          <p:nvPr/>
-        </p:nvSpPr>
-        <p:spPr>
-          <a:xfrm>
-            <a:off x="4648200" y="1418373"/>
-            <a:ext cx="3810000" cy="3306028"/>
-          </a:xfrm>
-          <a:prstGeom prst="rect">
-            <a:avLst/>
-          </a:prstGeom>
-          <a:noFill/>
-          <a:ln w="28575">
-            <a:solidFill>
-              <a:srgbClr val="E0700D"/>
-            </a:solidFill>
-          </a:ln>
-        </p:spPr>
-        <p:style>
-          <a:lnRef idx="2">
-            <a:schemeClr val="accent1">
-              <a:shade val="15000"/>
-            </a:schemeClr>
-          </a:lnRef>
-          <a:fillRef idx="1">
-            <a:schemeClr val="accent1"/>
-          </a:fillRef>
-          <a:effectRef idx="0">
-            <a:schemeClr val="accent1"/>
-          </a:effectRef>
-          <a:fontRef idx="minor">
-            <a:schemeClr val="lt1"/>
-          </a:fontRef>
-        </p:style>
-        <p:txBody>
-          <a:bodyPr rtlCol="0" anchor="ctr"/>
-          <a:lstStyle/>
-          <a:p>
-            <a:pPr algn="ctr"/>
-            <a:endParaRPr lang="en-US"/>
-          </a:p>
-        </p:txBody>
-      </p:sp>
-      <p:sp>
-        <p:nvSpPr>
-          <p:cNvPr id="16" name="CuadroTexto 15">
-            <a:extLst>
-              <a:ext uri="{FF2B5EF4-FFF2-40B4-BE49-F238E27FC236}">
-                <a16:creationId xmlns:a16="http://schemas.microsoft.com/office/drawing/2014/main" id="{B49B3613-E785-3FCB-DA8D-2B43EB104C5D}"/>
-              </a:ext>
-            </a:extLst>
-          </p:cNvPr>
-          <p:cNvSpPr txBox="1"/>
-          <p:nvPr/>
-        </p:nvSpPr>
-        <p:spPr>
-          <a:xfrm>
-            <a:off x="1499379" y="2478160"/>
-            <a:ext cx="2033313" cy="1323439"/>
-          </a:xfrm>
-          <a:prstGeom prst="rect">
-            <a:avLst/>
-          </a:prstGeom>
-          <a:noFill/>
-        </p:spPr>
-        <p:txBody>
-          <a:bodyPr wrap="none" rtlCol="0">
-            <a:spAutoFit/>
-          </a:bodyPr>
-          <a:lstStyle/>
-          <a:p>
-            <a:pPr algn="ctr"/>
-            <a:r>
-              <a:rPr lang="es-ES" sz="2000" dirty="0"/>
-              <a:t>Single ring</a:t>
-            </a:r>
-          </a:p>
-          <a:p>
-            <a:pPr algn="ctr"/>
-            <a:r>
-              <a:rPr lang="es-ES" sz="2000" dirty="0"/>
-              <a:t>transfer </a:t>
-            </a:r>
-            <a:r>
-              <a:rPr lang="es-ES" sz="2000" dirty="0" err="1"/>
-              <a:t>functions</a:t>
-            </a:r>
-            <a:endParaRPr lang="es-ES" sz="2000" dirty="0"/>
-          </a:p>
-          <a:p>
-            <a:pPr algn="ctr"/>
-            <a:endParaRPr lang="es-ES" sz="2000" dirty="0"/>
-          </a:p>
-          <a:p>
-            <a:pPr algn="ctr"/>
-            <a:r>
-              <a:rPr lang="es-ES" sz="2000" dirty="0"/>
-              <a:t>Linear </a:t>
-            </a:r>
-            <a:r>
-              <a:rPr lang="es-ES" sz="2000" dirty="0" err="1"/>
-              <a:t>units</a:t>
-            </a:r>
-            <a:endParaRPr lang="en-US" sz="2000" dirty="0"/>
-          </a:p>
-        </p:txBody>
-      </p:sp>
-      <p:pic>
-        <p:nvPicPr>
-          <p:cNvPr id="11" name="Gráfico 10">
-            <a:extLst>
-              <a:ext uri="{FF2B5EF4-FFF2-40B4-BE49-F238E27FC236}">
-                <a16:creationId xmlns:a16="http://schemas.microsoft.com/office/drawing/2014/main" id="{64B3EEA8-5B6A-F628-0B9C-42450CEE9BE1}"/>
-              </a:ext>
-            </a:extLst>
-          </p:cNvPr>
-          <p:cNvPicPr>
-            <a:picLocks noChangeAspect="1"/>
-          </p:cNvPicPr>
-          <p:nvPr/>
-        </p:nvPicPr>
-        <p:blipFill>
-          <a:blip>
-            <a:extLst>
-              <a:ext uri="{96DAC541-7B7A-43D3-8B79-37D633B846F1}">
-                <asvg:svgBlip xmlns:asvg="http://schemas.microsoft.com/office/drawing/2016/SVG/main" r:embed="rId2"/>
-              </a:ext>
-            </a:extLst>
-          </a:blip>
-          <a:stretch>
-            <a:fillRect/>
-          </a:stretch>
-        </p:blipFill>
-        <p:spPr>
-          <a:xfrm>
-            <a:off x="5045006" y="6356057"/>
-            <a:ext cx="6409575" cy="363174"/>
-          </a:xfrm>
-          <a:prstGeom prst="rect">
-            <a:avLst/>
-          </a:prstGeom>
-        </p:spPr>
-      </p:pic>
-      <p:sp>
-        <p:nvSpPr>
-          <p:cNvPr id="14" name="object 16">
-            <a:extLst>
-              <a:ext uri="{FF2B5EF4-FFF2-40B4-BE49-F238E27FC236}">
-                <a16:creationId xmlns:a16="http://schemas.microsoft.com/office/drawing/2014/main" id="{4E9E05B5-9445-DD50-60E9-03B04ED264D4}"/>
-              </a:ext>
-            </a:extLst>
-          </p:cNvPr>
-          <p:cNvSpPr txBox="1">
-            <a:spLocks/>
-          </p:cNvSpPr>
-          <p:nvPr/>
-        </p:nvSpPr>
-        <p:spPr>
-          <a:xfrm>
-            <a:off x="685800" y="408883"/>
-            <a:ext cx="10994410" cy="718145"/>
-          </a:xfrm>
-          <a:prstGeom prst="rect">
-            <a:avLst/>
-          </a:prstGeom>
-        </p:spPr>
-        <p:txBody>
-          <a:bodyPr vert="horz" wrap="square" lIns="0" tIns="12700" rIns="0" bIns="0" rtlCol="0">
-            <a:spAutoFit/>
-          </a:bodyPr>
-          <a:lstStyle>
-            <a:lvl1pPr>
-              <a:defRPr sz="2000" b="1" i="0">
-                <a:solidFill>
-                  <a:schemeClr val="tx1"/>
-                </a:solidFill>
-                <a:latin typeface="Calibri"/>
-                <a:ea typeface="+mj-ea"/>
-                <a:cs typeface="Calibri"/>
-              </a:defRPr>
-            </a:lvl1pPr>
-          </a:lstStyle>
-          <a:p>
-            <a:pPr marL="12700">
-              <a:spcBef>
-                <a:spcPts val="100"/>
-              </a:spcBef>
-            </a:pPr>
-            <a:r>
-              <a:rPr lang="en-US" sz="2500" kern="0" dirty="0"/>
-              <a:t>Learning outcome #5 – Ring resonator design</a:t>
-            </a:r>
-          </a:p>
-          <a:p>
-            <a:pPr marL="12700">
-              <a:spcBef>
-                <a:spcPts val="100"/>
-              </a:spcBef>
-            </a:pPr>
-            <a:r>
-              <a:rPr lang="en-US" b="0" kern="0" spc="-5" dirty="0">
-                <a:latin typeface="+mj-lt"/>
-                <a:cs typeface="Lucida Sans"/>
-              </a:rPr>
-              <a:t>Design the perimeter for a FSR = 15 nm. </a:t>
-            </a:r>
-          </a:p>
-        </p:txBody>
-      </p:sp>
-    </p:spTree>
-    <p:extLst>
-      <p:ext uri="{BB962C8B-B14F-4D97-AF65-F5344CB8AC3E}">
-        <p14:creationId xmlns:p14="http://schemas.microsoft.com/office/powerpoint/2010/main" val="2915989261"/>
-      </p:ext>
-    </p:extLst>
-  </p:cSld>
-  <p:clrMapOvr>
-    <a:masterClrMapping/>
-  </p:clrMapOvr>
-</p:sld>
-</file>
-
-<file path=ppt/slides/slide9.xml><?xml version="1.0" encoding="utf-8"?>
-<p:sld xmlns:a="http://schemas.openxmlformats.org/drawingml/2006/main" xmlns:r="http://schemas.openxmlformats.org/officeDocument/2006/relationships" xmlns:p="http://schemas.openxmlformats.org/presentationml/2006/main">
-  <p:cSld>
-    <p:spTree>
-      <p:nvGrpSpPr>
-        <p:cNvPr id="1" name=""/>
-        <p:cNvGrpSpPr/>
-        <p:nvPr/>
-      </p:nvGrpSpPr>
-      <p:grpSpPr>
-        <a:xfrm>
-          <a:off x="0" y="0"/>
-          <a:ext cx="0" cy="0"/>
-          <a:chOff x="0" y="0"/>
-          <a:chExt cx="0" cy="0"/>
-        </a:xfrm>
-      </p:grpSpPr>
-      <p:sp>
-        <p:nvSpPr>
-          <p:cNvPr id="5" name="Marcador de pie de página 4">
-            <a:extLst>
-              <a:ext uri="{FF2B5EF4-FFF2-40B4-BE49-F238E27FC236}">
-                <a16:creationId xmlns:a16="http://schemas.microsoft.com/office/drawing/2014/main" id="{F929251A-3DC4-36B2-3FB3-341378364BED}"/>
-              </a:ext>
-            </a:extLst>
-          </p:cNvPr>
-          <p:cNvSpPr>
-            <a:spLocks noGrp="1"/>
-          </p:cNvSpPr>
-          <p:nvPr>
-            <p:ph type="ftr" sz="quarter" idx="5"/>
-          </p:nvPr>
-        </p:nvSpPr>
-        <p:spPr/>
-        <p:txBody>
-          <a:bodyPr/>
-          <a:lstStyle/>
-          <a:p>
-            <a:r>
-              <a:rPr lang="en-US"/>
-              <a:t>LAB 3.0. CIRCUITS &amp; COMPACT MODELS</a:t>
-            </a:r>
-          </a:p>
-        </p:txBody>
-      </p:sp>
-      <p:sp>
-        <p:nvSpPr>
-          <p:cNvPr id="6" name="Marcador de número de diapositiva 5">
-            <a:extLst>
-              <a:ext uri="{FF2B5EF4-FFF2-40B4-BE49-F238E27FC236}">
-                <a16:creationId xmlns:a16="http://schemas.microsoft.com/office/drawing/2014/main" id="{8E91A34C-DF76-97CF-3EFD-546BC64A2184}"/>
-              </a:ext>
-            </a:extLst>
-          </p:cNvPr>
-          <p:cNvSpPr>
-            <a:spLocks noGrp="1"/>
-          </p:cNvSpPr>
-          <p:nvPr>
-            <p:ph type="sldNum" sz="quarter" idx="7"/>
-          </p:nvPr>
-        </p:nvSpPr>
-        <p:spPr/>
-        <p:txBody>
-          <a:bodyPr/>
-          <a:lstStyle/>
-          <a:p>
-            <a:fld id="{C2F52289-4012-4053-9770-FE82CEB9514F}" type="slidenum">
-              <a:rPr lang="en-US" smtClean="0"/>
-              <a:pPr/>
-              <a:t>9</a:t>
-            </a:fld>
-            <a:endParaRPr lang="en-US" dirty="0"/>
-          </a:p>
-        </p:txBody>
-      </p:sp>
-      <p:sp>
-        <p:nvSpPr>
-          <p:cNvPr id="8" name="CuadroTexto 7">
-            <a:extLst>
-              <a:ext uri="{FF2B5EF4-FFF2-40B4-BE49-F238E27FC236}">
-                <a16:creationId xmlns:a16="http://schemas.microsoft.com/office/drawing/2014/main" id="{D9601617-351E-AE1A-1F4D-693F2EA59361}"/>
-              </a:ext>
-            </a:extLst>
-          </p:cNvPr>
-          <p:cNvSpPr txBox="1"/>
-          <p:nvPr/>
-        </p:nvSpPr>
-        <p:spPr>
-          <a:xfrm>
-            <a:off x="611029" y="4860335"/>
-            <a:ext cx="11199530" cy="646331"/>
-          </a:xfrm>
-          <a:prstGeom prst="rect">
-            <a:avLst/>
-          </a:prstGeom>
-          <a:solidFill>
-            <a:schemeClr val="bg1">
-              <a:lumMod val="95000"/>
-            </a:schemeClr>
-          </a:solidFill>
-          <a:ln w="28575">
-            <a:solidFill>
-              <a:srgbClr val="E0700D"/>
-            </a:solidFill>
-          </a:ln>
-        </p:spPr>
-        <p:txBody>
-          <a:bodyPr wrap="square" rtlCol="0">
-            <a:spAutoFit/>
-          </a:bodyPr>
-          <a:lstStyle/>
-          <a:p>
-            <a:pPr algn="just"/>
-            <a:r>
-              <a:rPr lang="en-US" sz="1200" dirty="0">
-                <a:latin typeface="Arial" panose="020B0604020202020204" pitchFamily="34" charset="0"/>
-                <a:cs typeface="Arial" panose="020B0604020202020204" pitchFamily="34" charset="0"/>
-              </a:rPr>
-              <a:t>Comment results: Try to classify the resonances, in which case are you close to critical coupling? Why?</a:t>
-            </a:r>
-          </a:p>
-          <a:p>
-            <a:pPr algn="just"/>
-            <a:endParaRPr lang="en-US" sz="1200" dirty="0">
-              <a:latin typeface="Arial" panose="020B0604020202020204" pitchFamily="34" charset="0"/>
-              <a:cs typeface="Arial" panose="020B0604020202020204" pitchFamily="34" charset="0"/>
-            </a:endParaRPr>
-          </a:p>
-          <a:p>
-            <a:pPr algn="just"/>
-            <a:endParaRPr lang="en-US" sz="1200" dirty="0">
-              <a:latin typeface="Arial" panose="020B0604020202020204" pitchFamily="34" charset="0"/>
-              <a:cs typeface="Arial" panose="020B0604020202020204" pitchFamily="34" charset="0"/>
-            </a:endParaRPr>
-          </a:p>
-        </p:txBody>
-      </p:sp>
-      <p:sp>
-        <p:nvSpPr>
-          <p:cNvPr id="11" name="Rectángulo 10">
-            <a:extLst>
-              <a:ext uri="{FF2B5EF4-FFF2-40B4-BE49-F238E27FC236}">
-                <a16:creationId xmlns:a16="http://schemas.microsoft.com/office/drawing/2014/main" id="{B811A5F9-C0B5-716C-70FB-9472E1BC2CD3}"/>
-              </a:ext>
-            </a:extLst>
-          </p:cNvPr>
-          <p:cNvSpPr/>
-          <p:nvPr/>
-        </p:nvSpPr>
-        <p:spPr>
-          <a:xfrm>
-            <a:off x="611030" y="1418373"/>
-            <a:ext cx="2538552" cy="3306028"/>
-          </a:xfrm>
-          <a:prstGeom prst="rect">
-            <a:avLst/>
-          </a:prstGeom>
-          <a:noFill/>
-          <a:ln w="28575">
-            <a:solidFill>
-              <a:srgbClr val="E0700D"/>
-            </a:solidFill>
-          </a:ln>
-        </p:spPr>
-        <p:style>
-          <a:lnRef idx="2">
-            <a:schemeClr val="accent1">
-              <a:shade val="15000"/>
-            </a:schemeClr>
-          </a:lnRef>
-          <a:fillRef idx="1">
-            <a:schemeClr val="accent1"/>
-          </a:fillRef>
-          <a:effectRef idx="0">
-            <a:schemeClr val="accent1"/>
-          </a:effectRef>
-          <a:fontRef idx="minor">
-            <a:schemeClr val="lt1"/>
-          </a:fontRef>
-        </p:style>
-        <p:txBody>
-          <a:bodyPr rtlCol="0" anchor="ctr"/>
-          <a:lstStyle/>
-          <a:p>
-            <a:pPr algn="ctr"/>
-            <a:endParaRPr lang="en-US"/>
-          </a:p>
-        </p:txBody>
-      </p:sp>
-      <p:sp>
-        <p:nvSpPr>
-          <p:cNvPr id="14" name="Rectángulo 13">
-            <a:extLst>
-              <a:ext uri="{FF2B5EF4-FFF2-40B4-BE49-F238E27FC236}">
-                <a16:creationId xmlns:a16="http://schemas.microsoft.com/office/drawing/2014/main" id="{6AA857E7-5C39-DCE1-10B5-40300FCF4B26}"/>
-              </a:ext>
-            </a:extLst>
-          </p:cNvPr>
-          <p:cNvSpPr/>
-          <p:nvPr/>
-        </p:nvSpPr>
-        <p:spPr>
-          <a:xfrm>
-            <a:off x="3277315" y="1419036"/>
-            <a:ext cx="2538552" cy="3306028"/>
-          </a:xfrm>
-          <a:prstGeom prst="rect">
-            <a:avLst/>
-          </a:prstGeom>
-          <a:noFill/>
-          <a:ln w="28575">
-            <a:solidFill>
-              <a:srgbClr val="E0700D"/>
-            </a:solidFill>
-          </a:ln>
-        </p:spPr>
-        <p:style>
-          <a:lnRef idx="2">
-            <a:schemeClr val="accent1">
-              <a:shade val="15000"/>
-            </a:schemeClr>
-          </a:lnRef>
-          <a:fillRef idx="1">
-            <a:schemeClr val="accent1"/>
-          </a:fillRef>
-          <a:effectRef idx="0">
-            <a:schemeClr val="accent1"/>
-          </a:effectRef>
-          <a:fontRef idx="minor">
-            <a:schemeClr val="lt1"/>
-          </a:fontRef>
-        </p:style>
-        <p:txBody>
-          <a:bodyPr rtlCol="0" anchor="ctr"/>
-          <a:lstStyle/>
-          <a:p>
-            <a:pPr algn="ctr"/>
-            <a:endParaRPr lang="en-US"/>
-          </a:p>
-        </p:txBody>
-      </p:sp>
-      <p:sp>
-        <p:nvSpPr>
-          <p:cNvPr id="15" name="CuadroTexto 14">
-            <a:extLst>
-              <a:ext uri="{FF2B5EF4-FFF2-40B4-BE49-F238E27FC236}">
-                <a16:creationId xmlns:a16="http://schemas.microsoft.com/office/drawing/2014/main" id="{54CF28B4-1346-F41D-2CD8-EA104ABBFB98}"/>
-              </a:ext>
-            </a:extLst>
-          </p:cNvPr>
-          <p:cNvSpPr txBox="1"/>
-          <p:nvPr/>
-        </p:nvSpPr>
-        <p:spPr>
-          <a:xfrm>
-            <a:off x="863650" y="2101891"/>
-            <a:ext cx="2033313" cy="1938992"/>
-          </a:xfrm>
-          <a:prstGeom prst="rect">
-            <a:avLst/>
-          </a:prstGeom>
-          <a:noFill/>
-        </p:spPr>
-        <p:txBody>
-          <a:bodyPr wrap="none" rtlCol="0">
-            <a:spAutoFit/>
-          </a:bodyPr>
-          <a:lstStyle/>
-          <a:p>
-            <a:pPr algn="ctr"/>
-            <a:r>
-              <a:rPr lang="es-ES" sz="2000" dirty="0"/>
-              <a:t>Single ring</a:t>
-            </a:r>
-          </a:p>
-          <a:p>
-            <a:pPr algn="ctr"/>
-            <a:r>
-              <a:rPr lang="es-ES" sz="2000" dirty="0"/>
-              <a:t>transfer </a:t>
-            </a:r>
-            <a:r>
-              <a:rPr lang="es-ES" sz="2000" dirty="0" err="1"/>
-              <a:t>functions</a:t>
-            </a:r>
-            <a:endParaRPr lang="es-ES" sz="2000" dirty="0"/>
-          </a:p>
-          <a:p>
-            <a:pPr algn="ctr"/>
-            <a:endParaRPr lang="es-ES" sz="2000" dirty="0"/>
-          </a:p>
-          <a:p>
-            <a:pPr algn="ctr"/>
-            <a:r>
-              <a:rPr lang="es-ES" sz="2000" dirty="0"/>
-              <a:t>Linear </a:t>
-            </a:r>
-            <a:r>
-              <a:rPr lang="es-ES" sz="2000" dirty="0" err="1"/>
-              <a:t>units</a:t>
-            </a:r>
-            <a:endParaRPr lang="es-ES" sz="2000" dirty="0"/>
-          </a:p>
-          <a:p>
-            <a:pPr algn="ctr"/>
-            <a:endParaRPr lang="es-ES" sz="2000" dirty="0"/>
-          </a:p>
-          <a:p>
-            <a:pPr algn="ctr"/>
-            <a:r>
-              <a:rPr lang="es-ES" sz="2000" dirty="0"/>
-              <a:t>K=</a:t>
-            </a:r>
-            <a:endParaRPr lang="en-US" sz="2000" dirty="0"/>
-          </a:p>
-        </p:txBody>
-      </p:sp>
-      <p:sp>
-        <p:nvSpPr>
-          <p:cNvPr id="9" name="Rectángulo 8">
-            <a:extLst>
-              <a:ext uri="{FF2B5EF4-FFF2-40B4-BE49-F238E27FC236}">
-                <a16:creationId xmlns:a16="http://schemas.microsoft.com/office/drawing/2014/main" id="{11F0F5FC-B571-59FC-7890-3105A6A843BB}"/>
-              </a:ext>
-            </a:extLst>
-          </p:cNvPr>
-          <p:cNvSpPr/>
-          <p:nvPr/>
-        </p:nvSpPr>
-        <p:spPr>
-          <a:xfrm>
-            <a:off x="5943600" y="1418373"/>
-            <a:ext cx="2538552" cy="3306028"/>
-          </a:xfrm>
-          <a:prstGeom prst="rect">
-            <a:avLst/>
-          </a:prstGeom>
-          <a:noFill/>
-          <a:ln w="28575">
-            <a:solidFill>
-              <a:srgbClr val="E0700D"/>
-            </a:solidFill>
-          </a:ln>
-        </p:spPr>
-        <p:style>
-          <a:lnRef idx="2">
-            <a:schemeClr val="accent1">
-              <a:shade val="15000"/>
-            </a:schemeClr>
-          </a:lnRef>
-          <a:fillRef idx="1">
-            <a:schemeClr val="accent1"/>
-          </a:fillRef>
-          <a:effectRef idx="0">
-            <a:schemeClr val="accent1"/>
-          </a:effectRef>
-          <a:fontRef idx="minor">
-            <a:schemeClr val="lt1"/>
-          </a:fontRef>
-        </p:style>
-        <p:txBody>
-          <a:bodyPr rtlCol="0" anchor="ctr"/>
-          <a:lstStyle/>
-          <a:p>
-            <a:pPr algn="ctr"/>
-            <a:endParaRPr lang="en-US"/>
-          </a:p>
-        </p:txBody>
-      </p:sp>
-      <p:sp>
-        <p:nvSpPr>
-          <p:cNvPr id="10" name="CuadroTexto 9">
-            <a:extLst>
-              <a:ext uri="{FF2B5EF4-FFF2-40B4-BE49-F238E27FC236}">
-                <a16:creationId xmlns:a16="http://schemas.microsoft.com/office/drawing/2014/main" id="{3146642F-220B-8F6A-59A8-2D128DDF3BEB}"/>
-              </a:ext>
-            </a:extLst>
-          </p:cNvPr>
-          <p:cNvSpPr txBox="1"/>
-          <p:nvPr/>
-        </p:nvSpPr>
-        <p:spPr>
-          <a:xfrm>
-            <a:off x="3529935" y="2104638"/>
-            <a:ext cx="2033313" cy="1938992"/>
-          </a:xfrm>
-          <a:prstGeom prst="rect">
-            <a:avLst/>
-          </a:prstGeom>
-          <a:noFill/>
-        </p:spPr>
-        <p:txBody>
-          <a:bodyPr wrap="none" rtlCol="0">
-            <a:spAutoFit/>
-          </a:bodyPr>
-          <a:lstStyle/>
-          <a:p>
-            <a:pPr algn="ctr"/>
-            <a:r>
-              <a:rPr lang="es-ES" sz="2000" dirty="0"/>
-              <a:t>Single ring</a:t>
-            </a:r>
-          </a:p>
-          <a:p>
-            <a:pPr algn="ctr"/>
-            <a:r>
-              <a:rPr lang="es-ES" sz="2000" dirty="0"/>
-              <a:t>transfer </a:t>
-            </a:r>
-            <a:r>
-              <a:rPr lang="es-ES" sz="2000" dirty="0" err="1"/>
-              <a:t>functions</a:t>
-            </a:r>
-            <a:endParaRPr lang="es-ES" sz="2000" dirty="0"/>
-          </a:p>
-          <a:p>
-            <a:pPr algn="ctr"/>
-            <a:endParaRPr lang="es-ES" sz="2000" dirty="0"/>
-          </a:p>
-          <a:p>
-            <a:pPr algn="ctr"/>
-            <a:r>
-              <a:rPr lang="es-ES" sz="2000" dirty="0"/>
-              <a:t>Linear </a:t>
-            </a:r>
-            <a:r>
-              <a:rPr lang="es-ES" sz="2000" dirty="0" err="1"/>
-              <a:t>units</a:t>
-            </a:r>
-            <a:endParaRPr lang="es-ES" sz="2000" dirty="0"/>
-          </a:p>
-          <a:p>
-            <a:pPr algn="ctr"/>
-            <a:endParaRPr lang="es-ES" sz="2000" dirty="0"/>
-          </a:p>
-          <a:p>
-            <a:pPr algn="ctr"/>
-            <a:r>
-              <a:rPr lang="es-ES" sz="2000" dirty="0"/>
-              <a:t>K=</a:t>
-            </a:r>
-            <a:endParaRPr lang="en-US" sz="2000" dirty="0"/>
-          </a:p>
-        </p:txBody>
-      </p:sp>
-      <p:sp>
-        <p:nvSpPr>
-          <p:cNvPr id="13" name="CuadroTexto 12">
-            <a:extLst>
-              <a:ext uri="{FF2B5EF4-FFF2-40B4-BE49-F238E27FC236}">
-                <a16:creationId xmlns:a16="http://schemas.microsoft.com/office/drawing/2014/main" id="{057C499E-829F-FB11-9128-843C937CB822}"/>
-              </a:ext>
-            </a:extLst>
-          </p:cNvPr>
-          <p:cNvSpPr txBox="1"/>
-          <p:nvPr/>
-        </p:nvSpPr>
-        <p:spPr>
-          <a:xfrm>
-            <a:off x="6195187" y="2101891"/>
-            <a:ext cx="2033313" cy="1938992"/>
-          </a:xfrm>
-          <a:prstGeom prst="rect">
-            <a:avLst/>
-          </a:prstGeom>
-          <a:noFill/>
-        </p:spPr>
-        <p:txBody>
-          <a:bodyPr wrap="none" rtlCol="0">
-            <a:spAutoFit/>
-          </a:bodyPr>
-          <a:lstStyle/>
-          <a:p>
-            <a:pPr algn="ctr"/>
-            <a:r>
-              <a:rPr lang="es-ES" sz="2000" dirty="0"/>
-              <a:t>Single ring</a:t>
-            </a:r>
-          </a:p>
-          <a:p>
-            <a:pPr algn="ctr"/>
-            <a:r>
-              <a:rPr lang="es-ES" sz="2000" dirty="0"/>
-              <a:t>transfer </a:t>
-            </a:r>
-            <a:r>
-              <a:rPr lang="es-ES" sz="2000" dirty="0" err="1"/>
-              <a:t>functions</a:t>
-            </a:r>
-            <a:endParaRPr lang="es-ES" sz="2000" dirty="0"/>
-          </a:p>
-          <a:p>
-            <a:pPr algn="ctr"/>
-            <a:endParaRPr lang="es-ES" sz="2000" dirty="0"/>
-          </a:p>
-          <a:p>
-            <a:pPr algn="ctr"/>
-            <a:r>
-              <a:rPr lang="es-ES" sz="2000" dirty="0"/>
-              <a:t>Linear </a:t>
-            </a:r>
-            <a:r>
-              <a:rPr lang="es-ES" sz="2000" dirty="0" err="1"/>
-              <a:t>units</a:t>
-            </a:r>
-            <a:endParaRPr lang="es-ES" sz="2000" dirty="0"/>
-          </a:p>
-          <a:p>
-            <a:pPr algn="ctr"/>
-            <a:endParaRPr lang="es-ES" sz="2000" dirty="0"/>
-          </a:p>
-          <a:p>
-            <a:pPr algn="ctr"/>
-            <a:r>
-              <a:rPr lang="es-ES" sz="2000" dirty="0"/>
-              <a:t>K=</a:t>
-            </a:r>
-            <a:endParaRPr lang="en-US" sz="2000" dirty="0"/>
-          </a:p>
-        </p:txBody>
-      </p:sp>
-      <p:sp>
-        <p:nvSpPr>
-          <p:cNvPr id="12" name="CuadroTexto 11">
-            <a:extLst>
-              <a:ext uri="{FF2B5EF4-FFF2-40B4-BE49-F238E27FC236}">
-                <a16:creationId xmlns:a16="http://schemas.microsoft.com/office/drawing/2014/main" id="{4E78CC89-1377-28A4-024D-1B017D551FC5}"/>
-              </a:ext>
-            </a:extLst>
-          </p:cNvPr>
-          <p:cNvSpPr txBox="1"/>
-          <p:nvPr/>
-        </p:nvSpPr>
-        <p:spPr>
-          <a:xfrm>
-            <a:off x="9869875" y="2871332"/>
-            <a:ext cx="360996" cy="400110"/>
-          </a:xfrm>
-          <a:prstGeom prst="rect">
-            <a:avLst/>
-          </a:prstGeom>
-          <a:noFill/>
-        </p:spPr>
-        <p:txBody>
-          <a:bodyPr wrap="none" rtlCol="0">
-            <a:spAutoFit/>
-          </a:bodyPr>
-          <a:lstStyle/>
-          <a:p>
-            <a:pPr algn="ctr"/>
-            <a:r>
-              <a:rPr lang="es-ES" sz="2000" dirty="0"/>
-              <a:t>…</a:t>
-            </a:r>
-            <a:endParaRPr lang="en-US" sz="2000" dirty="0"/>
-          </a:p>
-        </p:txBody>
-      </p:sp>
-      <p:pic>
-        <p:nvPicPr>
-          <p:cNvPr id="3" name="Gráfico 2">
-            <a:extLst>
-              <a:ext uri="{FF2B5EF4-FFF2-40B4-BE49-F238E27FC236}">
-                <a16:creationId xmlns:a16="http://schemas.microsoft.com/office/drawing/2014/main" id="{0B245A9E-6C9A-F3A8-E4B7-661580126414}"/>
-              </a:ext>
-            </a:extLst>
-          </p:cNvPr>
-          <p:cNvPicPr>
-            <a:picLocks noChangeAspect="1"/>
-          </p:cNvPicPr>
-          <p:nvPr/>
-        </p:nvPicPr>
-        <p:blipFill>
-          <a:blip>
-            <a:extLst>
-              <a:ext uri="{96DAC541-7B7A-43D3-8B79-37D633B846F1}">
-                <asvg:svgBlip xmlns:asvg="http://schemas.microsoft.com/office/drawing/2016/SVG/main" r:embed="rId2"/>
-              </a:ext>
-            </a:extLst>
-          </a:blip>
-          <a:stretch>
-            <a:fillRect/>
-          </a:stretch>
-        </p:blipFill>
-        <p:spPr>
-          <a:xfrm>
-            <a:off x="5045006" y="6356057"/>
-            <a:ext cx="6409575" cy="363174"/>
-          </a:xfrm>
-          <a:prstGeom prst="rect">
-            <a:avLst/>
-          </a:prstGeom>
-        </p:spPr>
-      </p:pic>
-      <p:sp>
-        <p:nvSpPr>
-          <p:cNvPr id="16" name="object 16">
-            <a:extLst>
-              <a:ext uri="{FF2B5EF4-FFF2-40B4-BE49-F238E27FC236}">
-                <a16:creationId xmlns:a16="http://schemas.microsoft.com/office/drawing/2014/main" id="{8266F13B-05F1-81DE-B638-66D10EEB9FA2}"/>
-              </a:ext>
-            </a:extLst>
-          </p:cNvPr>
-          <p:cNvSpPr txBox="1">
-            <a:spLocks/>
-          </p:cNvSpPr>
-          <p:nvPr/>
-        </p:nvSpPr>
-        <p:spPr>
-          <a:xfrm>
-            <a:off x="685800" y="408883"/>
-            <a:ext cx="10994410" cy="718145"/>
-          </a:xfrm>
-          <a:prstGeom prst="rect">
-            <a:avLst/>
-          </a:prstGeom>
-        </p:spPr>
-        <p:txBody>
-          <a:bodyPr vert="horz" wrap="square" lIns="0" tIns="12700" rIns="0" bIns="0" rtlCol="0">
-            <a:spAutoFit/>
-          </a:bodyPr>
-          <a:lstStyle>
-            <a:lvl1pPr>
-              <a:defRPr sz="2000" b="1" i="0">
-                <a:solidFill>
-                  <a:schemeClr val="tx1"/>
-                </a:solidFill>
-                <a:latin typeface="Calibri"/>
-                <a:ea typeface="+mj-ea"/>
-                <a:cs typeface="Calibri"/>
-              </a:defRPr>
-            </a:lvl1pPr>
-          </a:lstStyle>
-          <a:p>
-            <a:pPr marL="12700">
-              <a:spcBef>
-                <a:spcPts val="100"/>
-              </a:spcBef>
-            </a:pPr>
-            <a:r>
-              <a:rPr lang="en-US" sz="2500" kern="0" dirty="0"/>
-              <a:t>Learning outcome #6a – Effect of K </a:t>
-            </a:r>
-          </a:p>
-          <a:p>
-            <a:pPr marL="12700">
-              <a:spcBef>
-                <a:spcPts val="100"/>
-              </a:spcBef>
-            </a:pPr>
-            <a:r>
-              <a:rPr lang="en-US" b="0" kern="0" spc="-5" dirty="0">
-                <a:latin typeface="+mj-lt"/>
-                <a:cs typeface="Lucida Sans"/>
-              </a:rPr>
-              <a:t>Change K value between 0.1 and 0.9 in steps of 0.1</a:t>
-            </a:r>
-          </a:p>
-        </p:txBody>
-      </p:sp>
-    </p:spTree>
-    <p:extLst>
-      <p:ext uri="{BB962C8B-B14F-4D97-AF65-F5344CB8AC3E}">
-        <p14:creationId xmlns:p14="http://schemas.microsoft.com/office/powerpoint/2010/main" val="1931625216"/>
       </p:ext>
     </p:extLst>
   </p:cSld>
